--- a/plugins/gradient-cio/assets/examples/gradient-odd-manager-monitor.pptx
+++ b/plugins/gradient-cio/assets/examples/gradient-odd-manager-monitor.pptx
@@ -693,7 +693,7 @@
           </a:p>
           <a:p>
             <a:r>
-              <a:t>Observation: One unavailable event-coverage item supports the fictional TEST medium finding [S3]. Why it matters: It focuses review on the principal monitoring gap. Uncertainty: The compact fixture omits some corroborating event detail. What would change the view: Refreshed governed event records resolving the unavailable item.</a:t>
+              <a:t>Observation: One unavailable event-coverage item supports the sample medium finding [S3]. Why it matters: It focuses review on the principal monitoring gap. Uncertainty: The public sample omits some corroborating event detail. What would change the view: Refreshed governed event records resolving the unavailable item.</a:t>
             </a:r>
           </a:p>
         </p:txBody>
@@ -3038,7 +3038,7 @@
         </p:nvSpPr>
         <p:spPr>
           <a:xfrm>
-            <a:off x="685800" y="1828800"/>
+            <a:off x="685800" y="1664208"/>
             <a:ext cx="9966960" cy="274320"/>
           </a:xfrm>
           <a:prstGeom prst="rect">
@@ -3056,7 +3056,7 @@
               <a:spcAft>
                 <a:spcPts val="0"/>
               </a:spcAft>
-              <a:defRPr sz="900" b="1">
+              <a:defRPr sz="850" b="1">
                 <a:solidFill>
                   <a:srgbClr val="C6F432"/>
                 </a:solidFill>
@@ -3080,7 +3080,7 @@
         </p:nvSpPr>
         <p:spPr>
           <a:xfrm>
-            <a:off x="685800" y="2176272"/>
+            <a:off x="685800" y="2011680"/>
             <a:ext cx="9966960" cy="1234440"/>
           </a:xfrm>
           <a:prstGeom prst="rect">
@@ -3098,7 +3098,7 @@
               <a:spcAft>
                 <a:spcPts val="0"/>
               </a:spcAft>
-              <a:defRPr sz="3400" b="1">
+              <a:defRPr sz="3300" b="1">
                 <a:solidFill>
                   <a:srgbClr val="FFFFFF"/>
                 </a:solidFill>
@@ -3109,7 +3109,7 @@
               <a:rPr>
                 <a:latin typeface="Inter"/>
               </a:rPr>
-              <a:t>Gradient</a:t>
+              <a:t>Northstar Investment Office</a:t>
             </a:r>
           </a:p>
         </p:txBody>
@@ -3122,8 +3122,8 @@
         </p:nvSpPr>
         <p:spPr>
           <a:xfrm>
-            <a:off x="685800" y="3456432"/>
-            <a:ext cx="9692640" cy="640080"/>
+            <a:off x="685800" y="3273552"/>
+            <a:ext cx="9692640" cy="594360"/>
           </a:xfrm>
           <a:prstGeom prst="rect">
             <a:avLst/>
@@ -3140,7 +3140,7 @@
               <a:spcAft>
                 <a:spcPts val="0"/>
               </a:spcAft>
-              <a:defRPr sz="1500" b="0">
+              <a:defRPr sz="1400" b="0">
                 <a:solidFill>
                   <a:srgbClr val="9AA5B1"/>
                 </a:solidFill>
@@ -3151,7 +3151,7 @@
               <a:rPr>
                 <a:latin typeface="Inter"/>
               </a:rPr>
-              <a:t>Week of 2026-09-28 – 2026-10-04 · Diligence Roster</a:t>
+              <a:t>Manager monitoring digest · week of 2026-09-28 to 2026-10-04</a:t>
             </a:r>
           </a:p>
         </p:txBody>
@@ -3164,8 +3164,8 @@
         </p:nvSpPr>
         <p:spPr>
           <a:xfrm>
-            <a:off x="685800" y="4251960"/>
-            <a:ext cx="1005840" cy="54864"/>
+            <a:off x="685800" y="4005072"/>
+            <a:ext cx="822960" cy="45720"/>
           </a:xfrm>
           <a:prstGeom prst="rect">
             <a:avLst/>
@@ -3213,8 +3213,8 @@
         </p:nvSpPr>
         <p:spPr>
           <a:xfrm>
-            <a:off x="685800" y="4572000"/>
-            <a:ext cx="3063240" cy="182880"/>
+            <a:off x="685800" y="4315968"/>
+            <a:ext cx="4709160" cy="182880"/>
           </a:xfrm>
           <a:prstGeom prst="rect">
             <a:avLst/>
@@ -3255,8 +3255,8 @@
         </p:nvSpPr>
         <p:spPr>
           <a:xfrm>
-            <a:off x="685800" y="4773168"/>
-            <a:ext cx="3063240" cy="320040"/>
+            <a:off x="685800" y="4507992"/>
+            <a:ext cx="4709160" cy="310896"/>
           </a:xfrm>
           <a:prstGeom prst="rect">
             <a:avLst/>
@@ -3297,8 +3297,8 @@
         </p:nvSpPr>
         <p:spPr>
           <a:xfrm>
-            <a:off x="4160520" y="4572000"/>
-            <a:ext cx="3063240" cy="182880"/>
+            <a:off x="5852160" y="4315968"/>
+            <a:ext cx="4709160" cy="182880"/>
           </a:xfrm>
           <a:prstGeom prst="rect">
             <a:avLst/>
@@ -3339,8 +3339,8 @@
         </p:nvSpPr>
         <p:spPr>
           <a:xfrm>
-            <a:off x="4160520" y="4773168"/>
-            <a:ext cx="3063240" cy="320040"/>
+            <a:off x="5852160" y="4507992"/>
+            <a:ext cx="4709160" cy="310896"/>
           </a:xfrm>
           <a:prstGeom prst="rect">
             <a:avLst/>
@@ -3381,8 +3381,8 @@
         </p:nvSpPr>
         <p:spPr>
           <a:xfrm>
-            <a:off x="7635240" y="4572000"/>
-            <a:ext cx="3063240" cy="182880"/>
+            <a:off x="685800" y="4937759"/>
+            <a:ext cx="4709160" cy="182880"/>
           </a:xfrm>
           <a:prstGeom prst="rect">
             <a:avLst/>
@@ -3423,8 +3423,8 @@
         </p:nvSpPr>
         <p:spPr>
           <a:xfrm>
-            <a:off x="7635240" y="4773168"/>
-            <a:ext cx="3063240" cy="320040"/>
+            <a:off x="685800" y="5129783"/>
+            <a:ext cx="4709160" cy="310896"/>
           </a:xfrm>
           <a:prstGeom prst="rect">
             <a:avLst/>
@@ -3465,8 +3465,8 @@
         </p:nvSpPr>
         <p:spPr>
           <a:xfrm>
-            <a:off x="685800" y="5230368"/>
-            <a:ext cx="3063240" cy="182880"/>
+            <a:off x="5852160" y="4937759"/>
+            <a:ext cx="4709160" cy="182880"/>
           </a:xfrm>
           <a:prstGeom prst="rect">
             <a:avLst/>
@@ -3507,8 +3507,8 @@
         </p:nvSpPr>
         <p:spPr>
           <a:xfrm>
-            <a:off x="685800" y="5431536"/>
-            <a:ext cx="3063240" cy="320040"/>
+            <a:off x="5852160" y="5129783"/>
+            <a:ext cx="4709160" cy="310896"/>
           </a:xfrm>
           <a:prstGeom prst="rect">
             <a:avLst/>
@@ -3543,182 +3543,14 @@
       </p:sp>
       <p:sp>
         <p:nvSpPr>
-          <p:cNvPr id="17" name="TextBox 16"/>
-          <p:cNvSpPr txBox="1"/>
-          <p:nvPr/>
-        </p:nvSpPr>
-        <p:spPr>
-          <a:xfrm>
-            <a:off x="4160520" y="5230368"/>
-            <a:ext cx="3063240" cy="182880"/>
-          </a:xfrm>
-          <a:prstGeom prst="rect">
-            <a:avLst/>
-          </a:prstGeom>
-          <a:noFill/>
-        </p:spPr>
-        <p:txBody>
-          <a:bodyPr wrap="none" lIns="9144" rIns="9144" tIns="9144" bIns="9144" anchor="t">
-            <a:spAutoFit/>
-          </a:bodyPr>
-          <a:lstStyle/>
-          <a:p>
-            <a:pPr algn="l">
-              <a:spcAft>
-                <a:spcPts val="0"/>
-              </a:spcAft>
-              <a:defRPr sz="700" b="1">
-                <a:solidFill>
-                  <a:srgbClr val="8A94A1"/>
-                </a:solidFill>
-                <a:latin typeface="Inter"/>
-              </a:defRPr>
-            </a:pPr>
-            <a:r>
-              <a:rPr>
-                <a:latin typeface="Inter"/>
-              </a:rPr>
-              <a:t>OPEN FINDINGS</a:t>
-            </a:r>
-          </a:p>
-        </p:txBody>
-      </p:sp>
-      <p:sp>
-        <p:nvSpPr>
-          <p:cNvPr id="18" name="TextBox 17"/>
-          <p:cNvSpPr txBox="1"/>
-          <p:nvPr/>
-        </p:nvSpPr>
-        <p:spPr>
-          <a:xfrm>
-            <a:off x="4160520" y="5431536"/>
-            <a:ext cx="3063240" cy="320040"/>
-          </a:xfrm>
-          <a:prstGeom prst="rect">
-            <a:avLst/>
-          </a:prstGeom>
-          <a:noFill/>
-        </p:spPr>
-        <p:txBody>
-          <a:bodyPr wrap="none" lIns="9144" rIns="9144" tIns="9144" bIns="9144" anchor="t">
-            <a:spAutoFit/>
-          </a:bodyPr>
-          <a:lstStyle/>
-          <a:p>
-            <a:pPr algn="l">
-              <a:spcAft>
-                <a:spcPts val="0"/>
-              </a:spcAft>
-              <a:defRPr sz="1000" b="1">
-                <a:solidFill>
-                  <a:srgbClr val="FFFFFF"/>
-                </a:solidFill>
-                <a:latin typeface="Inter"/>
-              </a:defRPr>
-            </a:pPr>
-            <a:r>
-              <a:rPr>
-                <a:latin typeface="Inter"/>
-              </a:rPr>
-              <a:t>0</a:t>
-            </a:r>
-          </a:p>
-        </p:txBody>
-      </p:sp>
-      <p:sp>
-        <p:nvSpPr>
-          <p:cNvPr id="19" name="TextBox 18"/>
-          <p:cNvSpPr txBox="1"/>
-          <p:nvPr/>
-        </p:nvSpPr>
-        <p:spPr>
-          <a:xfrm>
-            <a:off x="7635240" y="5230368"/>
-            <a:ext cx="3063240" cy="182880"/>
-          </a:xfrm>
-          <a:prstGeom prst="rect">
-            <a:avLst/>
-          </a:prstGeom>
-          <a:noFill/>
-        </p:spPr>
-        <p:txBody>
-          <a:bodyPr wrap="none" lIns="9144" rIns="9144" tIns="9144" bIns="9144" anchor="t">
-            <a:spAutoFit/>
-          </a:bodyPr>
-          <a:lstStyle/>
-          <a:p>
-            <a:pPr algn="l">
-              <a:spcAft>
-                <a:spcPts val="0"/>
-              </a:spcAft>
-              <a:defRPr sz="700" b="1">
-                <a:solidFill>
-                  <a:srgbClr val="8A94A1"/>
-                </a:solidFill>
-                <a:latin typeface="Inter"/>
-              </a:defRPr>
-            </a:pPr>
-            <a:r>
-              <a:rPr>
-                <a:latin typeface="Inter"/>
-              </a:rPr>
-              <a:t>ADV DATA AS OF</a:t>
-            </a:r>
-          </a:p>
-        </p:txBody>
-      </p:sp>
-      <p:sp>
-        <p:nvSpPr>
-          <p:cNvPr id="20" name="TextBox 19"/>
-          <p:cNvSpPr txBox="1"/>
-          <p:nvPr/>
-        </p:nvSpPr>
-        <p:spPr>
-          <a:xfrm>
-            <a:off x="7635240" y="5431536"/>
-            <a:ext cx="3063240" cy="320040"/>
-          </a:xfrm>
-          <a:prstGeom prst="rect">
-            <a:avLst/>
-          </a:prstGeom>
-          <a:noFill/>
-        </p:spPr>
-        <p:txBody>
-          <a:bodyPr wrap="none" lIns="9144" rIns="9144" tIns="9144" bIns="9144" anchor="t">
-            <a:spAutoFit/>
-          </a:bodyPr>
-          <a:lstStyle/>
-          <a:p>
-            <a:pPr algn="l">
-              <a:spcAft>
-                <a:spcPts val="0"/>
-              </a:spcAft>
-              <a:defRPr sz="1000" b="1">
-                <a:solidFill>
-                  <a:srgbClr val="FFFFFF"/>
-                </a:solidFill>
-                <a:latin typeface="Inter"/>
-              </a:defRPr>
-            </a:pPr>
-            <a:r>
-              <a:rPr>
-                <a:latin typeface="Inter"/>
-              </a:rPr>
-              <a:t>2026-10-01</a:t>
-            </a:r>
-          </a:p>
-        </p:txBody>
-      </p:sp>
-      <p:sp>
-        <p:nvSpPr>
-          <p:cNvPr id="21" name="Rectangle 20"/>
+          <p:cNvPr id="17" name="Rectangle 16"/>
           <p:cNvSpPr/>
           <p:nvPr/>
         </p:nvSpPr>
         <p:spPr>
           <a:xfrm>
-            <a:off x="685800" y="5833872"/>
-            <a:ext cx="3063240" cy="384048"/>
+            <a:off x="685800" y="5687568"/>
+            <a:ext cx="3337560" cy="530352"/>
           </a:xfrm>
           <a:prstGeom prst="rect">
             <a:avLst/>
@@ -3760,14 +3592,14 @@
       </p:sp>
       <p:sp>
         <p:nvSpPr>
-          <p:cNvPr id="22" name="TextBox 21"/>
+          <p:cNvPr id="18" name="TextBox 17"/>
           <p:cNvSpPr txBox="1"/>
           <p:nvPr/>
         </p:nvSpPr>
         <p:spPr>
           <a:xfrm>
-            <a:off x="822960" y="5934456"/>
-            <a:ext cx="2788920" cy="164592"/>
+            <a:off x="822960" y="5760720"/>
+            <a:ext cx="3063240" cy="128016"/>
           </a:xfrm>
           <a:prstGeom prst="rect">
             <a:avLst/>
@@ -3784,7 +3616,7 @@
               <a:spcAft>
                 <a:spcPts val="0"/>
               </a:spcAft>
-              <a:defRPr sz="800" b="1">
+              <a:defRPr sz="620" b="1">
                 <a:solidFill>
                   <a:srgbClr val="0D1117"/>
                 </a:solidFill>
@@ -3795,6 +3627,48 @@
               <a:rPr>
                 <a:latin typeface="Inter"/>
               </a:rPr>
+              <a:t>THIS WEEK</a:t>
+            </a:r>
+          </a:p>
+        </p:txBody>
+      </p:sp>
+      <p:sp>
+        <p:nvSpPr>
+          <p:cNvPr id="19" name="TextBox 18"/>
+          <p:cNvSpPr txBox="1"/>
+          <p:nvPr/>
+        </p:nvSpPr>
+        <p:spPr>
+          <a:xfrm>
+            <a:off x="822960" y="5916168"/>
+            <a:ext cx="3063240" cy="182880"/>
+          </a:xfrm>
+          <a:prstGeom prst="rect">
+            <a:avLst/>
+          </a:prstGeom>
+          <a:noFill/>
+        </p:spPr>
+        <p:txBody>
+          <a:bodyPr wrap="none" lIns="9144" rIns="9144" tIns="9144" bIns="9144" anchor="t">
+            <a:spAutoFit/>
+          </a:bodyPr>
+          <a:lstStyle/>
+          <a:p>
+            <a:pPr algn="l">
+              <a:spcAft>
+                <a:spcPts val="0"/>
+              </a:spcAft>
+              <a:defRPr sz="900" b="1">
+                <a:solidFill>
+                  <a:srgbClr val="0D1117"/>
+                </a:solidFill>
+                <a:latin typeface="Inter"/>
+              </a:defRPr>
+            </a:pPr>
+            <a:r>
+              <a:rPr>
+                <a:latin typeface="Inter"/>
+              </a:rPr>
               <a:t>1 item to review</a:t>
             </a:r>
           </a:p>
@@ -3802,13 +3676,13 @@
       </p:sp>
       <p:sp>
         <p:nvSpPr>
-          <p:cNvPr id="23" name="TextBox 22"/>
+          <p:cNvPr id="20" name="TextBox 19"/>
           <p:cNvSpPr txBox="1"/>
           <p:nvPr/>
         </p:nvSpPr>
         <p:spPr>
           <a:xfrm>
-            <a:off x="3977639" y="5824728"/>
+            <a:off x="4297680" y="5733288"/>
             <a:ext cx="3108960" cy="164592"/>
           </a:xfrm>
           <a:prstGeom prst="rect">
@@ -3837,20 +3711,20 @@
               <a:rPr>
                 <a:latin typeface="Inter"/>
               </a:rPr>
-              <a:t>SUBJECTS FULLY COVERED</a:t>
-            </a:r>
-          </a:p>
-        </p:txBody>
-      </p:sp>
-      <p:sp>
-        <p:nvSpPr>
-          <p:cNvPr id="24" name="TextBox 23"/>
+              <a:t>ROSTER REVIEWED</a:t>
+            </a:r>
+          </a:p>
+        </p:txBody>
+      </p:sp>
+      <p:sp>
+        <p:nvSpPr>
+          <p:cNvPr id="21" name="TextBox 20"/>
           <p:cNvSpPr txBox="1"/>
           <p:nvPr/>
         </p:nvSpPr>
         <p:spPr>
           <a:xfrm>
-            <a:off x="3977639" y="5998464"/>
+            <a:off x="4297680" y="5934456"/>
             <a:ext cx="3108960" cy="201168"/>
           </a:xfrm>
           <a:prstGeom prst="rect">
@@ -3886,14 +3760,14 @@
       </p:sp>
       <p:sp>
         <p:nvSpPr>
-          <p:cNvPr id="25" name="TextBox 24"/>
+          <p:cNvPr id="22" name="TextBox 21"/>
           <p:cNvSpPr txBox="1"/>
           <p:nvPr/>
         </p:nvSpPr>
         <p:spPr>
           <a:xfrm>
-            <a:off x="685800" y="6473952"/>
-            <a:ext cx="8046720" cy="182880"/>
+            <a:off x="685800" y="6400800"/>
+            <a:ext cx="8046720" cy="146304"/>
           </a:xfrm>
           <a:prstGeom prst="rect">
             <a:avLst/>
@@ -3921,14 +3795,56 @@
               <a:rPr>
                 <a:latin typeface="Inter"/>
               </a:rPr>
-              <a:t>Confidential — prepared for internal investment use</a:t>
-            </a:r>
-          </a:p>
-        </p:txBody>
-      </p:sp>
-      <p:sp>
-        <p:nvSpPr>
-          <p:cNvPr id="26" name="TextBox 25"/>
+              <a:t>Confidential — Investment Committee</a:t>
+            </a:r>
+          </a:p>
+        </p:txBody>
+      </p:sp>
+      <p:sp>
+        <p:nvSpPr>
+          <p:cNvPr id="23" name="TextBox 22"/>
+          <p:cNvSpPr txBox="1"/>
+          <p:nvPr/>
+        </p:nvSpPr>
+        <p:spPr>
+          <a:xfrm>
+            <a:off x="685800" y="6556248"/>
+            <a:ext cx="8046720" cy="128016"/>
+          </a:xfrm>
+          <a:prstGeom prst="rect">
+            <a:avLst/>
+          </a:prstGeom>
+          <a:noFill/>
+        </p:spPr>
+        <p:txBody>
+          <a:bodyPr wrap="none" lIns="9144" rIns="9144" tIns="9144" bIns="9144" anchor="t">
+            <a:spAutoFit/>
+          </a:bodyPr>
+          <a:lstStyle/>
+          <a:p>
+            <a:pPr algn="l">
+              <a:spcAft>
+                <a:spcPts val="0"/>
+              </a:spcAft>
+              <a:defRPr sz="650" b="0">
+                <a:solidFill>
+                  <a:srgbClr val="8A94A1"/>
+                </a:solidFill>
+                <a:latin typeface="Inter"/>
+              </a:defRPr>
+            </a:pPr>
+            <a:r>
+              <a:rPr>
+                <a:latin typeface="Inter"/>
+              </a:rPr>
+              <a:t>Illustrative sample · not client data</a:t>
+            </a:r>
+          </a:p>
+        </p:txBody>
+      </p:sp>
+      <p:sp>
+        <p:nvSpPr>
+          <p:cNvPr id="24" name="TextBox 23"/>
           <p:cNvSpPr txBox="1"/>
           <p:nvPr/>
         </p:nvSpPr>
@@ -4043,6 +3959,48 @@
         </p:nvSpPr>
         <p:spPr>
           <a:xfrm>
+            <a:off x="5897880" y="310896"/>
+            <a:ext cx="4800600" cy="256032"/>
+          </a:xfrm>
+          <a:prstGeom prst="rect">
+            <a:avLst/>
+          </a:prstGeom>
+          <a:noFill/>
+        </p:spPr>
+        <p:txBody>
+          <a:bodyPr wrap="none" lIns="9144" rIns="9144" tIns="9144" bIns="9144" anchor="t">
+            <a:spAutoFit/>
+          </a:bodyPr>
+          <a:lstStyle/>
+          <a:p>
+            <a:pPr algn="r">
+              <a:spcAft>
+                <a:spcPts val="0"/>
+              </a:spcAft>
+              <a:defRPr sz="680" b="1">
+                <a:solidFill>
+                  <a:srgbClr val="4F6B00"/>
+                </a:solidFill>
+                <a:latin typeface="Inter"/>
+              </a:defRPr>
+            </a:pPr>
+            <a:r>
+              <a:rPr>
+                <a:latin typeface="Inter"/>
+              </a:rPr>
+              <a:t>Illustrative, Gradient Maintained — demo data, not the client's holdings or managers</a:t>
+            </a:r>
+          </a:p>
+        </p:txBody>
+      </p:sp>
+      <p:sp>
+        <p:nvSpPr>
+          <p:cNvPr id="4" name="TextBox 3"/>
+          <p:cNvSpPr txBox="1"/>
+          <p:nvPr/>
+        </p:nvSpPr>
+        <p:spPr>
+          <a:xfrm>
             <a:off x="640080" y="566928"/>
             <a:ext cx="10058400" cy="530352"/>
           </a:xfrm>
@@ -4072,14 +4030,14 @@
               <a:rPr>
                 <a:latin typeface="Inter"/>
               </a:rPr>
-              <a:t>Appendix A — Sources and method</a:t>
-            </a:r>
-          </a:p>
-        </p:txBody>
-      </p:sp>
-      <p:sp>
-        <p:nvSpPr>
-          <p:cNvPr id="4" name="Rectangle 3"/>
+              <a:t>Appendix — Sources and methods</a:t>
+            </a:r>
+          </a:p>
+        </p:txBody>
+      </p:sp>
+      <p:sp>
+        <p:nvSpPr>
+          <p:cNvPr id="5" name="Rectangle 4"/>
           <p:cNvSpPr/>
           <p:nvPr/>
         </p:nvSpPr>
@@ -4128,7 +4086,7 @@
       </p:sp>
       <p:sp>
         <p:nvSpPr>
-          <p:cNvPr id="5" name="Rectangle 4"/>
+          <p:cNvPr id="6" name="Rectangle 5"/>
           <p:cNvSpPr/>
           <p:nvPr/>
         </p:nvSpPr>
@@ -4177,7 +4135,7 @@
       </p:sp>
       <p:sp>
         <p:nvSpPr>
-          <p:cNvPr id="6" name="TextBox 5"/>
+          <p:cNvPr id="7" name="TextBox 6"/>
           <p:cNvSpPr txBox="1"/>
           <p:nvPr/>
         </p:nvSpPr>
@@ -4219,7 +4177,7 @@
       </p:sp>
       <p:graphicFrame>
         <p:nvGraphicFramePr>
-          <p:cNvPr id="7" name="Table 6"/>
+          <p:cNvPr id="8" name="Table 7"/>
           <p:cNvGraphicFramePr>
             <a:graphicFrameLocks noGrp="1"/>
           </p:cNvGraphicFramePr>
@@ -4237,10 +4195,14 @@
               </a:tblPr>
               <a:tblGrid>
                 <a:gridCol w="2011680"/>
-                <a:gridCol w="2224278"/>
-                <a:gridCol w="2224278"/>
-                <a:gridCol w="2224278"/>
-                <a:gridCol w="2224278"/>
+                <a:gridCol w="1112139"/>
+                <a:gridCol w="1112139"/>
+                <a:gridCol w="1112139"/>
+                <a:gridCol w="1112139"/>
+                <a:gridCol w="1112139"/>
+                <a:gridCol w="1112139"/>
+                <a:gridCol w="1112139"/>
+                <a:gridCol w="1112139"/>
               </a:tblGrid>
               <a:tr h="386626">
                 <a:tc>
@@ -4314,7 +4276,61 @@
                         <a:rPr>
                           <a:latin typeface="Inter"/>
                         </a:rPr>
+                        <a:t>Basis</a:t>
+                      </a:r>
+                    </a:p>
+                  </a:txBody>
+                  <a:tcPr marL="54864" marR="54864" marT="27432" marB="27432" anchor="ctr">
+                    <a:solidFill>
+                      <a:srgbClr val="0D1117"/>
+                    </a:solidFill>
+                  </a:tcPr>
+                </a:tc>
+                <a:tc>
+                  <a:txBody>
+                    <a:bodyPr/>
+                    <a:lstStyle/>
+                    <a:p>
+                      <a:pPr>
+                        <a:defRPr sz="750" b="1">
+                          <a:solidFill>
+                            <a:srgbClr val="FFFFFF"/>
+                          </a:solidFill>
+                          <a:latin typeface="Inter"/>
+                        </a:defRPr>
+                      </a:pPr>
+                      <a:r>
+                        <a:rPr>
+                          <a:latin typeface="Inter"/>
+                        </a:rPr>
                         <a:t>Tool / view</a:t>
+                      </a:r>
+                    </a:p>
+                  </a:txBody>
+                  <a:tcPr marL="54864" marR="54864" marT="27432" marB="27432" anchor="ctr">
+                    <a:solidFill>
+                      <a:srgbClr val="0D1117"/>
+                    </a:solidFill>
+                  </a:tcPr>
+                </a:tc>
+                <a:tc>
+                  <a:txBody>
+                    <a:bodyPr/>
+                    <a:lstStyle/>
+                    <a:p>
+                      <a:pPr>
+                        <a:defRPr sz="750" b="1">
+                          <a:solidFill>
+                            <a:srgbClr val="FFFFFF"/>
+                          </a:solidFill>
+                          <a:latin typeface="Inter"/>
+                        </a:defRPr>
+                      </a:pPr>
+                      <a:r>
+                        <a:rPr>
+                          <a:latin typeface="Inter"/>
+                        </a:rPr>
+                        <a:t>Key parameters</a:t>
                       </a:r>
                     </a:p>
                   </a:txBody>
@@ -4368,7 +4384,61 @@
                         <a:rPr>
                           <a:latin typeface="Inter"/>
                         </a:rPr>
+                        <a:t>Data scope</a:t>
+                      </a:r>
+                    </a:p>
+                  </a:txBody>
+                  <a:tcPr marL="54864" marR="54864" marT="27432" marB="27432" anchor="ctr">
+                    <a:solidFill>
+                      <a:srgbClr val="0D1117"/>
+                    </a:solidFill>
+                  </a:tcPr>
+                </a:tc>
+                <a:tc>
+                  <a:txBody>
+                    <a:bodyPr/>
+                    <a:lstStyle/>
+                    <a:p>
+                      <a:pPr>
+                        <a:defRPr sz="750" b="1">
+                          <a:solidFill>
+                            <a:srgbClr val="FFFFFF"/>
+                          </a:solidFill>
+                          <a:latin typeface="Inter"/>
+                        </a:defRPr>
+                      </a:pPr>
+                      <a:r>
+                        <a:rPr>
+                          <a:latin typeface="Inter"/>
+                        </a:rPr>
                         <a:t>Validation</a:t>
+                      </a:r>
+                    </a:p>
+                  </a:txBody>
+                  <a:tcPr marL="54864" marR="54864" marT="27432" marB="27432" anchor="ctr">
+                    <a:solidFill>
+                      <a:srgbClr val="0D1117"/>
+                    </a:solidFill>
+                  </a:tcPr>
+                </a:tc>
+                <a:tc>
+                  <a:txBody>
+                    <a:bodyPr/>
+                    <a:lstStyle/>
+                    <a:p>
+                      <a:pPr>
+                        <a:defRPr sz="750" b="1">
+                          <a:solidFill>
+                            <a:srgbClr val="FFFFFF"/>
+                          </a:solidFill>
+                          <a:latin typeface="Inter"/>
+                        </a:defRPr>
+                      </a:pPr>
+                      <a:r>
+                        <a:rPr>
+                          <a:latin typeface="Inter"/>
+                        </a:rPr>
+                        <a:t>Digest</a:t>
                       </a:r>
                     </a:p>
                   </a:txBody>
@@ -4386,7 +4456,7 @@
                     <a:lstStyle/>
                     <a:p>
                       <a:pPr>
-                        <a:defRPr sz="720" b="1">
+                        <a:defRPr sz="650" b="1">
                           <a:solidFill>
                             <a:srgbClr val="0D1117"/>
                           </a:solidFill>
@@ -4413,7 +4483,7 @@
                     <a:lstStyle/>
                     <a:p>
                       <a:pPr>
-                        <a:defRPr sz="720" b="0">
+                        <a:defRPr sz="650" b="0">
                           <a:solidFill>
                             <a:srgbClr val="0D1117"/>
                           </a:solidFill>
@@ -4440,7 +4510,34 @@
                     <a:lstStyle/>
                     <a:p>
                       <a:pPr>
-                        <a:defRPr sz="720" b="0">
+                        <a:defRPr sz="650" b="0">
+                          <a:solidFill>
+                            <a:srgbClr val="0D1117"/>
+                          </a:solidFill>
+                          <a:latin typeface="Inter"/>
+                        </a:defRPr>
+                      </a:pPr>
+                      <a:r>
+                        <a:rPr>
+                          <a:latin typeface="Inter"/>
+                        </a:rPr>
+                        <a:t>gradient_tool</a:t>
+                      </a:r>
+                    </a:p>
+                  </a:txBody>
+                  <a:tcPr marL="54864" marR="54864" marT="27432" marB="27432" anchor="ctr">
+                    <a:solidFill>
+                      <a:srgbClr val="FFFFFF"/>
+                    </a:solidFill>
+                  </a:tcPr>
+                </a:tc>
+                <a:tc>
+                  <a:txBody>
+                    <a:bodyPr/>
+                    <a:lstStyle/>
+                    <a:p>
+                      <a:pPr>
+                        <a:defRPr sz="650" b="0">
                           <a:solidFill>
                             <a:srgbClr val="0D1117"/>
                           </a:solidFill>
@@ -4467,7 +4564,34 @@
                     <a:lstStyle/>
                     <a:p>
                       <a:pPr>
-                        <a:defRPr sz="720" b="0">
+                        <a:defRPr sz="650" b="0">
+                          <a:solidFill>
+                            <a:srgbClr val="0D1117"/>
+                          </a:solidFill>
+                          <a:latin typeface="Inter"/>
+                        </a:defRPr>
+                      </a:pPr>
+                      <a:r>
+                        <a:rPr>
+                          <a:latin typeface="Inter"/>
+                        </a:rPr>
+                        <a:t>illustrative sample</a:t>
+                      </a:r>
+                    </a:p>
+                  </a:txBody>
+                  <a:tcPr marL="54864" marR="54864" marT="27432" marB="27432" anchor="ctr">
+                    <a:solidFill>
+                      <a:srgbClr val="FFFFFF"/>
+                    </a:solidFill>
+                  </a:tcPr>
+                </a:tc>
+                <a:tc>
+                  <a:txBody>
+                    <a:bodyPr/>
+                    <a:lstStyle/>
+                    <a:p>
+                      <a:pPr>
+                        <a:defRPr sz="650" b="0">
                           <a:solidFill>
                             <a:srgbClr val="0D1117"/>
                           </a:solidFill>
@@ -4494,9 +4618,9 @@
                     <a:lstStyle/>
                     <a:p>
                       <a:pPr>
-                        <a:defRPr sz="720" b="1">
+                        <a:defRPr sz="650" b="0">
                           <a:solidFill>
-                            <a:srgbClr val="C6F432"/>
+                            <a:srgbClr val="0D1117"/>
                           </a:solidFill>
                           <a:latin typeface="Inter"/>
                         </a:defRPr>
@@ -4505,7 +4629,306 @@
                         <a:rPr>
                           <a:latin typeface="Inter"/>
                         </a:rPr>
-                        <a:t>● passed</a:t>
+                        <a:t>Gradient-governed review evidence</a:t>
+                      </a:r>
+                    </a:p>
+                  </a:txBody>
+                  <a:tcPr marL="54864" marR="54864" marT="27432" marB="27432" anchor="ctr">
+                    <a:solidFill>
+                      <a:srgbClr val="FFFFFF"/>
+                    </a:solidFill>
+                  </a:tcPr>
+                </a:tc>
+                <a:tc>
+                  <a:txBody>
+                    <a:bodyPr/>
+                    <a:lstStyle/>
+                    <a:p>
+                      <a:pPr>
+                        <a:defRPr sz="650" b="0">
+                          <a:solidFill>
+                            <a:srgbClr val="0D1117"/>
+                          </a:solidFill>
+                          <a:latin typeface="Inter"/>
+                        </a:defRPr>
+                      </a:pPr>
+                      <a:r>
+                        <a:rPr>
+                          <a:latin typeface="Inter"/>
+                        </a:rPr>
+                        <a:t>{'chip': 'passed', 'status': 'passed'}</a:t>
+                      </a:r>
+                    </a:p>
+                  </a:txBody>
+                  <a:tcPr marL="54864" marR="54864" marT="27432" marB="27432" anchor="ctr">
+                    <a:solidFill>
+                      <a:srgbClr val="FFFFFF"/>
+                    </a:solidFill>
+                  </a:tcPr>
+                </a:tc>
+                <a:tc>
+                  <a:txBody>
+                    <a:bodyPr/>
+                    <a:lstStyle/>
+                    <a:p>
+                      <a:pPr>
+                        <a:defRPr sz="650" b="0">
+                          <a:solidFill>
+                            <a:srgbClr val="0D1117"/>
+                          </a:solidFill>
+                          <a:latin typeface="Inter"/>
+                        </a:defRPr>
+                      </a:pPr>
+                      <a:r>
+                        <a:rPr>
+                          <a:latin typeface="Inter"/>
+                        </a:rPr>
+                        <a:t>sha256:aaaaaaaaaaaaaaaaaaaaaaaaaaaaaaaaaaaaaaaaaaaaaaaaaaaaaaaaaaaaaaaa</a:t>
+                      </a:r>
+                    </a:p>
+                  </a:txBody>
+                  <a:tcPr marL="54864" marR="54864" marT="27432" marB="27432" anchor="ctr">
+                    <a:solidFill>
+                      <a:srgbClr val="FFFFFF"/>
+                    </a:solidFill>
+                  </a:tcPr>
+                </a:tc>
+              </a:tr>
+              <a:tr h="386626">
+                <a:tc>
+                  <a:txBody>
+                    <a:bodyPr/>
+                    <a:lstStyle/>
+                    <a:p>
+                      <a:pPr>
+                        <a:defRPr sz="650" b="1">
+                          <a:solidFill>
+                            <a:srgbClr val="0D1117"/>
+                          </a:solidFill>
+                          <a:latin typeface="Inter"/>
+                        </a:defRPr>
+                      </a:pPr>
+                      <a:r>
+                        <a:rPr>
+                          <a:latin typeface="Inter"/>
+                        </a:rPr>
+                        <a:t>S2</a:t>
+                      </a:r>
+                    </a:p>
+                  </a:txBody>
+                  <a:tcPr marL="54864" marR="54864" marT="27432" marB="27432" anchor="ctr">
+                    <a:solidFill>
+                      <a:srgbClr val="F5F7F9"/>
+                    </a:solidFill>
+                  </a:tcPr>
+                </a:tc>
+                <a:tc>
+                  <a:txBody>
+                    <a:bodyPr/>
+                    <a:lstStyle/>
+                    <a:p>
+                      <a:pPr>
+                        <a:defRPr sz="650" b="0">
+                          <a:solidFill>
+                            <a:srgbClr val="0D1117"/>
+                          </a:solidFill>
+                          <a:latin typeface="Inter"/>
+                        </a:defRPr>
+                      </a:pPr>
+                      <a:r>
+                        <a:rPr>
+                          <a:latin typeface="Inter"/>
+                        </a:rPr>
+                        <a:t>Attention queue, changes since review, red flags</a:t>
+                      </a:r>
+                    </a:p>
+                  </a:txBody>
+                  <a:tcPr marL="54864" marR="54864" marT="27432" marB="27432" anchor="ctr">
+                    <a:solidFill>
+                      <a:srgbClr val="F5F7F9"/>
+                    </a:solidFill>
+                  </a:tcPr>
+                </a:tc>
+                <a:tc>
+                  <a:txBody>
+                    <a:bodyPr/>
+                    <a:lstStyle/>
+                    <a:p>
+                      <a:pPr>
+                        <a:defRPr sz="650" b="0">
+                          <a:solidFill>
+                            <a:srgbClr val="0D1117"/>
+                          </a:solidFill>
+                          <a:latin typeface="Inter"/>
+                        </a:defRPr>
+                      </a:pPr>
+                      <a:r>
+                        <a:rPr>
+                          <a:latin typeface="Inter"/>
+                        </a:rPr>
+                        <a:t>gradient_tool</a:t>
+                      </a:r>
+                    </a:p>
+                  </a:txBody>
+                  <a:tcPr marL="54864" marR="54864" marT="27432" marB="27432" anchor="ctr">
+                    <a:solidFill>
+                      <a:srgbClr val="F5F7F9"/>
+                    </a:solidFill>
+                  </a:tcPr>
+                </a:tc>
+                <a:tc>
+                  <a:txBody>
+                    <a:bodyPr/>
+                    <a:lstStyle/>
+                    <a:p>
+                      <a:pPr>
+                        <a:defRPr sz="650" b="0">
+                          <a:solidFill>
+                            <a:srgbClr val="0D1117"/>
+                          </a:solidFill>
+                          <a:latin typeface="Inter"/>
+                        </a:defRPr>
+                      </a:pPr>
+                      <a:r>
+                        <a:rPr>
+                          <a:latin typeface="Inter"/>
+                        </a:rPr>
+                        <a:t>get_manager_diligence_attention_queue</a:t>
+                      </a:r>
+                    </a:p>
+                  </a:txBody>
+                  <a:tcPr marL="54864" marR="54864" marT="27432" marB="27432" anchor="ctr">
+                    <a:solidFill>
+                      <a:srgbClr val="F5F7F9"/>
+                    </a:solidFill>
+                  </a:tcPr>
+                </a:tc>
+                <a:tc>
+                  <a:txBody>
+                    <a:bodyPr/>
+                    <a:lstStyle/>
+                    <a:p>
+                      <a:pPr>
+                        <a:defRPr sz="650" b="0">
+                          <a:solidFill>
+                            <a:srgbClr val="0D1117"/>
+                          </a:solidFill>
+                          <a:latin typeface="Inter"/>
+                        </a:defRPr>
+                      </a:pPr>
+                      <a:r>
+                        <a:rPr>
+                          <a:latin typeface="Inter"/>
+                        </a:rPr>
+                        <a:t>illustrative sample</a:t>
+                      </a:r>
+                    </a:p>
+                  </a:txBody>
+                  <a:tcPr marL="54864" marR="54864" marT="27432" marB="27432" anchor="ctr">
+                    <a:solidFill>
+                      <a:srgbClr val="F5F7F9"/>
+                    </a:solidFill>
+                  </a:tcPr>
+                </a:tc>
+                <a:tc>
+                  <a:txBody>
+                    <a:bodyPr/>
+                    <a:lstStyle/>
+                    <a:p>
+                      <a:pPr>
+                        <a:defRPr sz="650" b="0">
+                          <a:solidFill>
+                            <a:srgbClr val="0D1117"/>
+                          </a:solidFill>
+                          <a:latin typeface="Inter"/>
+                        </a:defRPr>
+                      </a:pPr>
+                      <a:r>
+                        <a:rPr>
+                          <a:latin typeface="Inter"/>
+                        </a:rPr>
+                        <a:t>2026-10-04</a:t>
+                      </a:r>
+                    </a:p>
+                  </a:txBody>
+                  <a:tcPr marL="54864" marR="54864" marT="27432" marB="27432" anchor="ctr">
+                    <a:solidFill>
+                      <a:srgbClr val="F5F7F9"/>
+                    </a:solidFill>
+                  </a:tcPr>
+                </a:tc>
+                <a:tc>
+                  <a:txBody>
+                    <a:bodyPr/>
+                    <a:lstStyle/>
+                    <a:p>
+                      <a:pPr>
+                        <a:defRPr sz="650" b="0">
+                          <a:solidFill>
+                            <a:srgbClr val="0D1117"/>
+                          </a:solidFill>
+                          <a:latin typeface="Inter"/>
+                        </a:defRPr>
+                      </a:pPr>
+                      <a:r>
+                        <a:rPr>
+                          <a:latin typeface="Inter"/>
+                        </a:rPr>
+                        <a:t>Gradient-governed review evidence</a:t>
+                      </a:r>
+                    </a:p>
+                  </a:txBody>
+                  <a:tcPr marL="54864" marR="54864" marT="27432" marB="27432" anchor="ctr">
+                    <a:solidFill>
+                      <a:srgbClr val="F5F7F9"/>
+                    </a:solidFill>
+                  </a:tcPr>
+                </a:tc>
+                <a:tc>
+                  <a:txBody>
+                    <a:bodyPr/>
+                    <a:lstStyle/>
+                    <a:p>
+                      <a:pPr>
+                        <a:defRPr sz="650" b="0">
+                          <a:solidFill>
+                            <a:srgbClr val="0D1117"/>
+                          </a:solidFill>
+                          <a:latin typeface="Inter"/>
+                        </a:defRPr>
+                      </a:pPr>
+                      <a:r>
+                        <a:rPr>
+                          <a:latin typeface="Inter"/>
+                        </a:rPr>
+                        <a:t>{'chip': 'passed', 'status': 'passed'}</a:t>
+                      </a:r>
+                    </a:p>
+                  </a:txBody>
+                  <a:tcPr marL="54864" marR="54864" marT="27432" marB="27432" anchor="ctr">
+                    <a:solidFill>
+                      <a:srgbClr val="F5F7F9"/>
+                    </a:solidFill>
+                  </a:tcPr>
+                </a:tc>
+                <a:tc>
+                  <a:txBody>
+                    <a:bodyPr/>
+                    <a:lstStyle/>
+                    <a:p>
+                      <a:pPr>
+                        <a:defRPr sz="650" b="0">
+                          <a:solidFill>
+                            <a:srgbClr val="0D1117"/>
+                          </a:solidFill>
+                          <a:latin typeface="Inter"/>
+                        </a:defRPr>
+                      </a:pPr>
+                      <a:r>
+                        <a:rPr>
+                          <a:latin typeface="Inter"/>
+                        </a:rPr>
+                        <a:t>sha256:bbbbbbbbbbbbbbbbbbbbbbbbbbbbbbbbbbbbbbbbbbbbbbbbbbbbbbbbbbbbbbbb</a:t>
                       </a:r>
                     </a:p>
                   </a:txBody>
@@ -4523,7 +4946,7 @@
                     <a:lstStyle/>
                     <a:p>
                       <a:pPr>
-                        <a:defRPr sz="720" b="1">
+                        <a:defRPr sz="650" b="1">
                           <a:solidFill>
                             <a:srgbClr val="0D1117"/>
                           </a:solidFill>
@@ -4534,7 +4957,252 @@
                         <a:rPr>
                           <a:latin typeface="Inter"/>
                         </a:rPr>
-                        <a:t>S2</a:t>
+                        <a:t>S3</a:t>
+                      </a:r>
+                    </a:p>
+                  </a:txBody>
+                  <a:tcPr marL="54864" marR="54864" marT="27432" marB="27432" anchor="ctr">
+                    <a:solidFill>
+                      <a:srgbClr val="FFFFFF"/>
+                    </a:solidFill>
+                  </a:tcPr>
+                </a:tc>
+                <a:tc>
+                  <a:txBody>
+                    <a:bodyPr/>
+                    <a:lstStyle/>
+                    <a:p>
+                      <a:pPr>
+                        <a:defRPr sz="650" b="0">
+                          <a:solidFill>
+                            <a:srgbClr val="0D1117"/>
+                          </a:solidFill>
+                          <a:latin typeface="Inter"/>
+                        </a:defRPr>
+                      </a:pPr>
+                      <a:r>
+                        <a:rPr>
+                          <a:latin typeface="Inter"/>
+                        </a:rPr>
+                        <a:t>Monitor alerts and coverage</a:t>
+                      </a:r>
+                    </a:p>
+                  </a:txBody>
+                  <a:tcPr marL="54864" marR="54864" marT="27432" marB="27432" anchor="ctr">
+                    <a:solidFill>
+                      <a:srgbClr val="FFFFFF"/>
+                    </a:solidFill>
+                  </a:tcPr>
+                </a:tc>
+                <a:tc>
+                  <a:txBody>
+                    <a:bodyPr/>
+                    <a:lstStyle/>
+                    <a:p>
+                      <a:pPr>
+                        <a:defRPr sz="650" b="0">
+                          <a:solidFill>
+                            <a:srgbClr val="0D1117"/>
+                          </a:solidFill>
+                          <a:latin typeface="Inter"/>
+                        </a:defRPr>
+                      </a:pPr>
+                      <a:r>
+                        <a:rPr>
+                          <a:latin typeface="Inter"/>
+                        </a:rPr>
+                        <a:t>gradient_tool</a:t>
+                      </a:r>
+                    </a:p>
+                  </a:txBody>
+                  <a:tcPr marL="54864" marR="54864" marT="27432" marB="27432" anchor="ctr">
+                    <a:solidFill>
+                      <a:srgbClr val="FFFFFF"/>
+                    </a:solidFill>
+                  </a:tcPr>
+                </a:tc>
+                <a:tc>
+                  <a:txBody>
+                    <a:bodyPr/>
+                    <a:lstStyle/>
+                    <a:p>
+                      <a:pPr>
+                        <a:defRPr sz="650" b="0">
+                          <a:solidFill>
+                            <a:srgbClr val="0D1117"/>
+                          </a:solidFill>
+                          <a:latin typeface="Inter"/>
+                        </a:defRPr>
+                      </a:pPr>
+                      <a:r>
+                        <a:rPr>
+                          <a:latin typeface="Inter"/>
+                        </a:rPr>
+                        <a:t>get_manager_monitor_evidence</a:t>
+                      </a:r>
+                    </a:p>
+                  </a:txBody>
+                  <a:tcPr marL="54864" marR="54864" marT="27432" marB="27432" anchor="ctr">
+                    <a:solidFill>
+                      <a:srgbClr val="FFFFFF"/>
+                    </a:solidFill>
+                  </a:tcPr>
+                </a:tc>
+                <a:tc>
+                  <a:txBody>
+                    <a:bodyPr/>
+                    <a:lstStyle/>
+                    <a:p>
+                      <a:pPr>
+                        <a:defRPr sz="650" b="0">
+                          <a:solidFill>
+                            <a:srgbClr val="0D1117"/>
+                          </a:solidFill>
+                          <a:latin typeface="Inter"/>
+                        </a:defRPr>
+                      </a:pPr>
+                      <a:r>
+                        <a:rPr>
+                          <a:latin typeface="Inter"/>
+                        </a:rPr>
+                        <a:t>illustrative sample</a:t>
+                      </a:r>
+                    </a:p>
+                  </a:txBody>
+                  <a:tcPr marL="54864" marR="54864" marT="27432" marB="27432" anchor="ctr">
+                    <a:solidFill>
+                      <a:srgbClr val="FFFFFF"/>
+                    </a:solidFill>
+                  </a:tcPr>
+                </a:tc>
+                <a:tc>
+                  <a:txBody>
+                    <a:bodyPr/>
+                    <a:lstStyle/>
+                    <a:p>
+                      <a:pPr>
+                        <a:defRPr sz="650" b="0">
+                          <a:solidFill>
+                            <a:srgbClr val="0D1117"/>
+                          </a:solidFill>
+                          <a:latin typeface="Inter"/>
+                        </a:defRPr>
+                      </a:pPr>
+                      <a:r>
+                        <a:rPr>
+                          <a:latin typeface="Inter"/>
+                        </a:rPr>
+                        <a:t>2026-10-01</a:t>
+                      </a:r>
+                    </a:p>
+                  </a:txBody>
+                  <a:tcPr marL="54864" marR="54864" marT="27432" marB="27432" anchor="ctr">
+                    <a:solidFill>
+                      <a:srgbClr val="FFFFFF"/>
+                    </a:solidFill>
+                  </a:tcPr>
+                </a:tc>
+                <a:tc>
+                  <a:txBody>
+                    <a:bodyPr/>
+                    <a:lstStyle/>
+                    <a:p>
+                      <a:pPr>
+                        <a:defRPr sz="650" b="0">
+                          <a:solidFill>
+                            <a:srgbClr val="0D1117"/>
+                          </a:solidFill>
+                          <a:latin typeface="Inter"/>
+                        </a:defRPr>
+                      </a:pPr>
+                      <a:r>
+                        <a:rPr>
+                          <a:latin typeface="Inter"/>
+                        </a:rPr>
+                        <a:t>Gradient-governed review evidence</a:t>
+                      </a:r>
+                    </a:p>
+                  </a:txBody>
+                  <a:tcPr marL="54864" marR="54864" marT="27432" marB="27432" anchor="ctr">
+                    <a:solidFill>
+                      <a:srgbClr val="FFFFFF"/>
+                    </a:solidFill>
+                  </a:tcPr>
+                </a:tc>
+                <a:tc>
+                  <a:txBody>
+                    <a:bodyPr/>
+                    <a:lstStyle/>
+                    <a:p>
+                      <a:pPr>
+                        <a:defRPr sz="650" b="0">
+                          <a:solidFill>
+                            <a:srgbClr val="0D1117"/>
+                          </a:solidFill>
+                          <a:latin typeface="Inter"/>
+                        </a:defRPr>
+                      </a:pPr>
+                      <a:r>
+                        <a:rPr>
+                          <a:latin typeface="Inter"/>
+                        </a:rPr>
+                        <a:t>{'chip': 'passed', 'status': 'passed'}</a:t>
+                      </a:r>
+                    </a:p>
+                  </a:txBody>
+                  <a:tcPr marL="54864" marR="54864" marT="27432" marB="27432" anchor="ctr">
+                    <a:solidFill>
+                      <a:srgbClr val="FFFFFF"/>
+                    </a:solidFill>
+                  </a:tcPr>
+                </a:tc>
+                <a:tc>
+                  <a:txBody>
+                    <a:bodyPr/>
+                    <a:lstStyle/>
+                    <a:p>
+                      <a:pPr>
+                        <a:defRPr sz="650" b="0">
+                          <a:solidFill>
+                            <a:srgbClr val="0D1117"/>
+                          </a:solidFill>
+                          <a:latin typeface="Inter"/>
+                        </a:defRPr>
+                      </a:pPr>
+                      <a:r>
+                        <a:rPr>
+                          <a:latin typeface="Inter"/>
+                        </a:rPr>
+                        <a:t>sha256:cccccccccccccccccccccccccccccccccccccccccccccccccccccccccccccccc</a:t>
+                      </a:r>
+                    </a:p>
+                  </a:txBody>
+                  <a:tcPr marL="54864" marR="54864" marT="27432" marB="27432" anchor="ctr">
+                    <a:solidFill>
+                      <a:srgbClr val="FFFFFF"/>
+                    </a:solidFill>
+                  </a:tcPr>
+                </a:tc>
+              </a:tr>
+              <a:tr h="386626">
+                <a:tc>
+                  <a:txBody>
+                    <a:bodyPr/>
+                    <a:lstStyle/>
+                    <a:p>
+                      <a:pPr>
+                        <a:defRPr sz="650" b="1">
+                          <a:solidFill>
+                            <a:srgbClr val="0D1117"/>
+                          </a:solidFill>
+                          <a:latin typeface="Inter"/>
+                        </a:defRPr>
+                      </a:pPr>
+                      <a:r>
+                        <a:rPr>
+                          <a:latin typeface="Inter"/>
+                        </a:rPr>
+                        <a:t>S4</a:t>
                       </a:r>
                     </a:p>
                   </a:txBody>
@@ -4550,7 +5218,7 @@
                     <a:lstStyle/>
                     <a:p>
                       <a:pPr>
-                        <a:defRPr sz="720" b="0">
+                        <a:defRPr sz="650" b="0">
                           <a:solidFill>
                             <a:srgbClr val="0D1117"/>
                           </a:solidFill>
@@ -4561,7 +5229,7 @@
                         <a:rPr>
                           <a:latin typeface="Inter"/>
                         </a:rPr>
-                        <a:t>Attention queue, changes since review, red flags</a:t>
+                        <a:t>Open findings — Ridgeview Advisors</a:t>
                       </a:r>
                     </a:p>
                   </a:txBody>
@@ -4577,7 +5245,7 @@
                     <a:lstStyle/>
                     <a:p>
                       <a:pPr>
-                        <a:defRPr sz="720" b="0">
+                        <a:defRPr sz="650" b="0">
                           <a:solidFill>
                             <a:srgbClr val="0D1117"/>
                           </a:solidFill>
@@ -4588,7 +5256,7 @@
                         <a:rPr>
                           <a:latin typeface="Inter"/>
                         </a:rPr>
-                        <a:t>get_manager_diligence_attention_queue (3 views)</a:t>
+                        <a:t>gradient_tool</a:t>
                       </a:r>
                     </a:p>
                   </a:txBody>
@@ -4604,7 +5272,61 @@
                     <a:lstStyle/>
                     <a:p>
                       <a:pPr>
-                        <a:defRPr sz="720" b="0">
+                        <a:defRPr sz="650" b="0">
+                          <a:solidFill>
+                            <a:srgbClr val="0D1117"/>
+                          </a:solidFill>
+                          <a:latin typeface="Inter"/>
+                        </a:defRPr>
+                      </a:pPr>
+                      <a:r>
+                        <a:rPr>
+                          <a:latin typeface="Inter"/>
+                        </a:rPr>
+                        <a:t>get_manager_diligence_findings</a:t>
+                      </a:r>
+                    </a:p>
+                  </a:txBody>
+                  <a:tcPr marL="54864" marR="54864" marT="27432" marB="27432" anchor="ctr">
+                    <a:solidFill>
+                      <a:srgbClr val="F5F7F9"/>
+                    </a:solidFill>
+                  </a:tcPr>
+                </a:tc>
+                <a:tc>
+                  <a:txBody>
+                    <a:bodyPr/>
+                    <a:lstStyle/>
+                    <a:p>
+                      <a:pPr>
+                        <a:defRPr sz="650" b="0">
+                          <a:solidFill>
+                            <a:srgbClr val="0D1117"/>
+                          </a:solidFill>
+                          <a:latin typeface="Inter"/>
+                        </a:defRPr>
+                      </a:pPr>
+                      <a:r>
+                        <a:rPr>
+                          <a:latin typeface="Inter"/>
+                        </a:rPr>
+                        <a:t>illustrative sample</a:t>
+                      </a:r>
+                    </a:p>
+                  </a:txBody>
+                  <a:tcPr marL="54864" marR="54864" marT="27432" marB="27432" anchor="ctr">
+                    <a:solidFill>
+                      <a:srgbClr val="F5F7F9"/>
+                    </a:solidFill>
+                  </a:tcPr>
+                </a:tc>
+                <a:tc>
+                  <a:txBody>
+                    <a:bodyPr/>
+                    <a:lstStyle/>
+                    <a:p>
+                      <a:pPr>
+                        <a:defRPr sz="650" b="0">
                           <a:solidFill>
                             <a:srgbClr val="0D1117"/>
                           </a:solidFill>
@@ -4631,9 +5353,9 @@
                     <a:lstStyle/>
                     <a:p>
                       <a:pPr>
-                        <a:defRPr sz="720" b="1">
+                        <a:defRPr sz="650" b="0">
                           <a:solidFill>
-                            <a:srgbClr val="C6F432"/>
+                            <a:srgbClr val="0D1117"/>
                           </a:solidFill>
                           <a:latin typeface="Inter"/>
                         </a:defRPr>
@@ -4642,7 +5364,61 @@
                         <a:rPr>
                           <a:latin typeface="Inter"/>
                         </a:rPr>
-                        <a:t>● passed</a:t>
+                        <a:t>Gradient-governed review evidence</a:t>
+                      </a:r>
+                    </a:p>
+                  </a:txBody>
+                  <a:tcPr marL="54864" marR="54864" marT="27432" marB="27432" anchor="ctr">
+                    <a:solidFill>
+                      <a:srgbClr val="F5F7F9"/>
+                    </a:solidFill>
+                  </a:tcPr>
+                </a:tc>
+                <a:tc>
+                  <a:txBody>
+                    <a:bodyPr/>
+                    <a:lstStyle/>
+                    <a:p>
+                      <a:pPr>
+                        <a:defRPr sz="650" b="0">
+                          <a:solidFill>
+                            <a:srgbClr val="0D1117"/>
+                          </a:solidFill>
+                          <a:latin typeface="Inter"/>
+                        </a:defRPr>
+                      </a:pPr>
+                      <a:r>
+                        <a:rPr>
+                          <a:latin typeface="Inter"/>
+                        </a:rPr>
+                        <a:t>{'chip': 'advisory', 'status': 'advisory'}</a:t>
+                      </a:r>
+                    </a:p>
+                  </a:txBody>
+                  <a:tcPr marL="54864" marR="54864" marT="27432" marB="27432" anchor="ctr">
+                    <a:solidFill>
+                      <a:srgbClr val="F5F7F9"/>
+                    </a:solidFill>
+                  </a:tcPr>
+                </a:tc>
+                <a:tc>
+                  <a:txBody>
+                    <a:bodyPr/>
+                    <a:lstStyle/>
+                    <a:p>
+                      <a:pPr>
+                        <a:defRPr sz="650" b="0">
+                          <a:solidFill>
+                            <a:srgbClr val="0D1117"/>
+                          </a:solidFill>
+                          <a:latin typeface="Inter"/>
+                        </a:defRPr>
+                      </a:pPr>
+                      <a:r>
+                        <a:rPr>
+                          <a:latin typeface="Inter"/>
+                        </a:rPr>
+                        <a:t>sha256:dddddddddddddddddddddddddddddddddddddddddddddddddddddddddddddddd</a:t>
                       </a:r>
                     </a:p>
                   </a:txBody>
@@ -4660,7 +5436,7 @@
                     <a:lstStyle/>
                     <a:p>
                       <a:pPr>
-                        <a:defRPr sz="720" b="1">
+                        <a:defRPr sz="650" b="1">
                           <a:solidFill>
                             <a:srgbClr val="0D1117"/>
                           </a:solidFill>
@@ -4671,7 +5447,7 @@
                         <a:rPr>
                           <a:latin typeface="Inter"/>
                         </a:rPr>
-                        <a:t>S3</a:t>
+                        <a:t>S5</a:t>
                       </a:r>
                     </a:p>
                   </a:txBody>
@@ -4687,7 +5463,7 @@
                     <a:lstStyle/>
                     <a:p>
                       <a:pPr>
-                        <a:defRPr sz="720" b="0">
+                        <a:defRPr sz="650" b="0">
                           <a:solidFill>
                             <a:srgbClr val="0D1117"/>
                           </a:solidFill>
@@ -4698,7 +5474,7 @@
                         <a:rPr>
                           <a:latin typeface="Inter"/>
                         </a:rPr>
-                        <a:t>Monitor alerts and coverage</a:t>
+                        <a:t>Firm and fund events — Ridgeview Advisors</a:t>
                       </a:r>
                     </a:p>
                   </a:txBody>
@@ -4714,7 +5490,7 @@
                     <a:lstStyle/>
                     <a:p>
                       <a:pPr>
-                        <a:defRPr sz="720" b="0">
+                        <a:defRPr sz="650" b="0">
                           <a:solidFill>
                             <a:srgbClr val="0D1117"/>
                           </a:solidFill>
@@ -4725,7 +5501,7 @@
                         <a:rPr>
                           <a:latin typeface="Inter"/>
                         </a:rPr>
-                        <a:t>get_manager_monitor_evidence (alerts, coverage)</a:t>
+                        <a:t>gradient_tool</a:t>
                       </a:r>
                     </a:p>
                   </a:txBody>
@@ -4741,7 +5517,7 @@
                     <a:lstStyle/>
                     <a:p>
                       <a:pPr>
-                        <a:defRPr sz="720" b="0">
+                        <a:defRPr sz="650" b="0">
                           <a:solidFill>
                             <a:srgbClr val="0D1117"/>
                           </a:solidFill>
@@ -4752,7 +5528,7 @@
                         <a:rPr>
                           <a:latin typeface="Inter"/>
                         </a:rPr>
-                        <a:t>2026-10-01</a:t>
+                        <a:t>get_firm_fund_events</a:t>
                       </a:r>
                     </a:p>
                   </a:txBody>
@@ -4768,9 +5544,9 @@
                     <a:lstStyle/>
                     <a:p>
                       <a:pPr>
-                        <a:defRPr sz="720" b="1">
+                        <a:defRPr sz="650" b="0">
                           <a:solidFill>
-                            <a:srgbClr val="C6F432"/>
+                            <a:srgbClr val="0D1117"/>
                           </a:solidFill>
                           <a:latin typeface="Inter"/>
                         </a:defRPr>
@@ -4779,25 +5555,23 @@
                         <a:rPr>
                           <a:latin typeface="Inter"/>
                         </a:rPr>
-                        <a:t>● passed</a:t>
+                        <a:t>event_date_from=2026-09-28; event_date_to=2026-10-04; illustrative sample</a:t>
                       </a:r>
                     </a:p>
                   </a:txBody>
                   <a:tcPr marL="54864" marR="54864" marT="27432" marB="27432" anchor="ctr">
                     <a:solidFill>
-                      <a:srgbClr val="F5F7F9"/>
+                      <a:srgbClr val="FFFFFF"/>
                     </a:solidFill>
                   </a:tcPr>
                 </a:tc>
-              </a:tr>
-              <a:tr h="386626">
                 <a:tc>
                   <a:txBody>
                     <a:bodyPr/>
                     <a:lstStyle/>
                     <a:p>
                       <a:pPr>
-                        <a:defRPr sz="720" b="1">
+                        <a:defRPr sz="650" b="0">
                           <a:solidFill>
                             <a:srgbClr val="0D1117"/>
                           </a:solidFill>
@@ -4808,7 +5582,117 @@
                         <a:rPr>
                           <a:latin typeface="Inter"/>
                         </a:rPr>
-                        <a:t>S4</a:t>
+                        <a:t>2026-10-04</a:t>
+                      </a:r>
+                    </a:p>
+                  </a:txBody>
+                  <a:tcPr marL="54864" marR="54864" marT="27432" marB="27432" anchor="ctr">
+                    <a:solidFill>
+                      <a:srgbClr val="FFFFFF"/>
+                    </a:solidFill>
+                  </a:tcPr>
+                </a:tc>
+                <a:tc>
+                  <a:txBody>
+                    <a:bodyPr/>
+                    <a:lstStyle/>
+                    <a:p>
+                      <a:pPr>
+                        <a:defRPr sz="650" b="0">
+                          <a:solidFill>
+                            <a:srgbClr val="0D1117"/>
+                          </a:solidFill>
+                          <a:latin typeface="Inter"/>
+                        </a:defRPr>
+                      </a:pPr>
+                      <a:r>
+                        <a:rPr>
+                          <a:latin typeface="Inter"/>
+                        </a:rPr>
+                        <a:t>Gradient-governed review evidence</a:t>
+                      </a:r>
+                    </a:p>
+                  </a:txBody>
+                  <a:tcPr marL="54864" marR="54864" marT="27432" marB="27432" anchor="ctr">
+                    <a:solidFill>
+                      <a:srgbClr val="FFFFFF"/>
+                    </a:solidFill>
+                  </a:tcPr>
+                </a:tc>
+                <a:tc>
+                  <a:txBody>
+                    <a:bodyPr/>
+                    <a:lstStyle/>
+                    <a:p>
+                      <a:pPr>
+                        <a:defRPr sz="650" b="0">
+                          <a:solidFill>
+                            <a:srgbClr val="0D1117"/>
+                          </a:solidFill>
+                          <a:latin typeface="Inter"/>
+                        </a:defRPr>
+                      </a:pPr>
+                      <a:r>
+                        <a:rPr>
+                          <a:latin typeface="Inter"/>
+                        </a:rPr>
+                        <a:t>{'chip': 'passed', 'status': 'passed'}</a:t>
+                      </a:r>
+                    </a:p>
+                  </a:txBody>
+                  <a:tcPr marL="54864" marR="54864" marT="27432" marB="27432" anchor="ctr">
+                    <a:solidFill>
+                      <a:srgbClr val="FFFFFF"/>
+                    </a:solidFill>
+                  </a:tcPr>
+                </a:tc>
+                <a:tc>
+                  <a:txBody>
+                    <a:bodyPr/>
+                    <a:lstStyle/>
+                    <a:p>
+                      <a:pPr>
+                        <a:defRPr sz="650" b="0">
+                          <a:solidFill>
+                            <a:srgbClr val="0D1117"/>
+                          </a:solidFill>
+                          <a:latin typeface="Inter"/>
+                        </a:defRPr>
+                      </a:pPr>
+                      <a:r>
+                        <a:rPr>
+                          <a:latin typeface="Inter"/>
+                        </a:rPr>
+                        <a:t>sha256:eeeeeeeeeeeeeeeeeeeeeeeeeeeeeeeeeeeeeeeeeeeeeeeeeeeeeeeeeeeeeeee</a:t>
+                      </a:r>
+                    </a:p>
+                  </a:txBody>
+                  <a:tcPr marL="54864" marR="54864" marT="27432" marB="27432" anchor="ctr">
+                    <a:solidFill>
+                      <a:srgbClr val="FFFFFF"/>
+                    </a:solidFill>
+                  </a:tcPr>
+                </a:tc>
+              </a:tr>
+              <a:tr h="386631">
+                <a:tc>
+                  <a:txBody>
+                    <a:bodyPr/>
+                    <a:lstStyle/>
+                    <a:p>
+                      <a:pPr>
+                        <a:defRPr sz="650" b="1">
+                          <a:solidFill>
+                            <a:srgbClr val="0D1117"/>
+                          </a:solidFill>
+                          <a:latin typeface="Inter"/>
+                        </a:defRPr>
+                      </a:pPr>
+                      <a:r>
+                        <a:rPr>
+                          <a:latin typeface="Inter"/>
+                        </a:rPr>
+                        <a:t>S6</a:t>
                       </a:r>
                     </a:p>
                   </a:txBody>
@@ -4824,7 +5708,7 @@
                     <a:lstStyle/>
                     <a:p>
                       <a:pPr>
-                        <a:defRPr sz="720" b="0">
+                        <a:defRPr sz="650" b="0">
                           <a:solidFill>
                             <a:srgbClr val="0D1117"/>
                           </a:solidFill>
@@ -4835,7 +5719,7 @@
                         <a:rPr>
                           <a:latin typeface="Inter"/>
                         </a:rPr>
-                        <a:t>Open findings — Ridgeview Example Advisors</a:t>
+                        <a:t>Research watchlist changes</a:t>
                       </a:r>
                     </a:p>
                   </a:txBody>
@@ -4851,7 +5735,7 @@
                     <a:lstStyle/>
                     <a:p>
                       <a:pPr>
-                        <a:defRPr sz="720" b="0">
+                        <a:defRPr sz="650" b="0">
                           <a:solidFill>
                             <a:srgbClr val="0D1117"/>
                           </a:solidFill>
@@ -4862,7 +5746,7 @@
                         <a:rPr>
                           <a:latin typeface="Inter"/>
                         </a:rPr>
-                        <a:t>get_manager_diligence_findings (open)</a:t>
+                        <a:t>gradient_tool</a:t>
                       </a:r>
                     </a:p>
                   </a:txBody>
@@ -4878,7 +5762,61 @@
                     <a:lstStyle/>
                     <a:p>
                       <a:pPr>
-                        <a:defRPr sz="720" b="0">
+                        <a:defRPr sz="650" b="0">
+                          <a:solidFill>
+                            <a:srgbClr val="0D1117"/>
+                          </a:solidFill>
+                          <a:latin typeface="Inter"/>
+                        </a:defRPr>
+                      </a:pPr>
+                      <a:r>
+                        <a:rPr>
+                          <a:latin typeface="Inter"/>
+                        </a:rPr>
+                        <a:t>get_research_watchlist_changes</a:t>
+                      </a:r>
+                    </a:p>
+                  </a:txBody>
+                  <a:tcPr marL="54864" marR="54864" marT="27432" marB="27432" anchor="ctr">
+                    <a:solidFill>
+                      <a:srgbClr val="F5F7F9"/>
+                    </a:solidFill>
+                  </a:tcPr>
+                </a:tc>
+                <a:tc>
+                  <a:txBody>
+                    <a:bodyPr/>
+                    <a:lstStyle/>
+                    <a:p>
+                      <a:pPr>
+                        <a:defRPr sz="650" b="0">
+                          <a:solidFill>
+                            <a:srgbClr val="0D1117"/>
+                          </a:solidFill>
+                          <a:latin typeface="Inter"/>
+                        </a:defRPr>
+                      </a:pPr>
+                      <a:r>
+                        <a:rPr>
+                          <a:latin typeface="Inter"/>
+                        </a:rPr>
+                        <a:t>illustrative sample</a:t>
+                      </a:r>
+                    </a:p>
+                  </a:txBody>
+                  <a:tcPr marL="54864" marR="54864" marT="27432" marB="27432" anchor="ctr">
+                    <a:solidFill>
+                      <a:srgbClr val="F5F7F9"/>
+                    </a:solidFill>
+                  </a:tcPr>
+                </a:tc>
+                <a:tc>
+                  <a:txBody>
+                    <a:bodyPr/>
+                    <a:lstStyle/>
+                    <a:p>
+                      <a:pPr>
+                        <a:defRPr sz="650" b="0">
                           <a:solidFill>
                             <a:srgbClr val="0D1117"/>
                           </a:solidFill>
@@ -4905,9 +5843,9 @@
                     <a:lstStyle/>
                     <a:p>
                       <a:pPr>
-                        <a:defRPr sz="720" b="1">
+                        <a:defRPr sz="650" b="0">
                           <a:solidFill>
-                            <a:srgbClr val="F2A93B"/>
+                            <a:srgbClr val="0D1117"/>
                           </a:solidFill>
                           <a:latin typeface="Inter"/>
                         </a:defRPr>
@@ -4916,173 +5854,7 @@
                         <a:rPr>
                           <a:latin typeface="Inter"/>
                         </a:rPr>
-                        <a:t>● advisory</a:t>
-                      </a:r>
-                    </a:p>
-                  </a:txBody>
-                  <a:tcPr marL="54864" marR="54864" marT="27432" marB="27432" anchor="ctr">
-                    <a:solidFill>
-                      <a:srgbClr val="F5F7F9"/>
-                    </a:solidFill>
-                  </a:tcPr>
-                </a:tc>
-              </a:tr>
-              <a:tr h="386626">
-                <a:tc>
-                  <a:txBody>
-                    <a:bodyPr/>
-                    <a:lstStyle/>
-                    <a:p>
-                      <a:pPr>
-                        <a:defRPr sz="720" b="1">
-                          <a:solidFill>
-                            <a:srgbClr val="0D1117"/>
-                          </a:solidFill>
-                          <a:latin typeface="Inter"/>
-                        </a:defRPr>
-                      </a:pPr>
-                      <a:r>
-                        <a:rPr>
-                          <a:latin typeface="Inter"/>
-                        </a:rPr>
-                        <a:t>S5</a:t>
-                      </a:r>
-                    </a:p>
-                  </a:txBody>
-                  <a:tcPr marL="54864" marR="54864" marT="27432" marB="27432" anchor="ctr">
-                    <a:solidFill>
-                      <a:srgbClr val="FFFFFF"/>
-                    </a:solidFill>
-                  </a:tcPr>
-                </a:tc>
-                <a:tc>
-                  <a:txBody>
-                    <a:bodyPr/>
-                    <a:lstStyle/>
-                    <a:p>
-                      <a:pPr>
-                        <a:defRPr sz="720" b="0">
-                          <a:solidFill>
-                            <a:srgbClr val="0D1117"/>
-                          </a:solidFill>
-                          <a:latin typeface="Inter"/>
-                        </a:defRPr>
-                      </a:pPr>
-                      <a:r>
-                        <a:rPr>
-                          <a:latin typeface="Inter"/>
-                        </a:rPr>
-                        <a:t>Firm and fund events — Ridgeview Example Advisors</a:t>
-                      </a:r>
-                    </a:p>
-                  </a:txBody>
-                  <a:tcPr marL="54864" marR="54864" marT="27432" marB="27432" anchor="ctr">
-                    <a:solidFill>
-                      <a:srgbClr val="FFFFFF"/>
-                    </a:solidFill>
-                  </a:tcPr>
-                </a:tc>
-                <a:tc>
-                  <a:txBody>
-                    <a:bodyPr/>
-                    <a:lstStyle/>
-                    <a:p>
-                      <a:pPr>
-                        <a:defRPr sz="720" b="0">
-                          <a:solidFill>
-                            <a:srgbClr val="0D1117"/>
-                          </a:solidFill>
-                          <a:latin typeface="Inter"/>
-                        </a:defRPr>
-                      </a:pPr>
-                      <a:r>
-                        <a:rPr>
-                          <a:latin typeface="Inter"/>
-                        </a:rPr>
-                        <a:t>get_firm_fund_events (subject)</a:t>
-                      </a:r>
-                    </a:p>
-                  </a:txBody>
-                  <a:tcPr marL="54864" marR="54864" marT="27432" marB="27432" anchor="ctr">
-                    <a:solidFill>
-                      <a:srgbClr val="FFFFFF"/>
-                    </a:solidFill>
-                  </a:tcPr>
-                </a:tc>
-                <a:tc>
-                  <a:txBody>
-                    <a:bodyPr/>
-                    <a:lstStyle/>
-                    <a:p>
-                      <a:pPr>
-                        <a:defRPr sz="720" b="0">
-                          <a:solidFill>
-                            <a:srgbClr val="0D1117"/>
-                          </a:solidFill>
-                          <a:latin typeface="Inter"/>
-                        </a:defRPr>
-                      </a:pPr>
-                      <a:r>
-                        <a:rPr>
-                          <a:latin typeface="Inter"/>
-                        </a:rPr>
-                        <a:t>2026-10-04</a:t>
-                      </a:r>
-                    </a:p>
-                  </a:txBody>
-                  <a:tcPr marL="54864" marR="54864" marT="27432" marB="27432" anchor="ctr">
-                    <a:solidFill>
-                      <a:srgbClr val="FFFFFF"/>
-                    </a:solidFill>
-                  </a:tcPr>
-                </a:tc>
-                <a:tc>
-                  <a:txBody>
-                    <a:bodyPr/>
-                    <a:lstStyle/>
-                    <a:p>
-                      <a:pPr>
-                        <a:defRPr sz="720" b="1">
-                          <a:solidFill>
-                            <a:srgbClr val="C6F432"/>
-                          </a:solidFill>
-                          <a:latin typeface="Inter"/>
-                        </a:defRPr>
-                      </a:pPr>
-                      <a:r>
-                        <a:rPr>
-                          <a:latin typeface="Inter"/>
-                        </a:rPr>
-                        <a:t>● passed</a:t>
-                      </a:r>
-                    </a:p>
-                  </a:txBody>
-                  <a:tcPr marL="54864" marR="54864" marT="27432" marB="27432" anchor="ctr">
-                    <a:solidFill>
-                      <a:srgbClr val="F5F7F9"/>
-                    </a:solidFill>
-                  </a:tcPr>
-                </a:tc>
-              </a:tr>
-              <a:tr h="386631">
-                <a:tc>
-                  <a:txBody>
-                    <a:bodyPr/>
-                    <a:lstStyle/>
-                    <a:p>
-                      <a:pPr>
-                        <a:defRPr sz="720" b="1">
-                          <a:solidFill>
-                            <a:srgbClr val="0D1117"/>
-                          </a:solidFill>
-                          <a:latin typeface="Inter"/>
-                        </a:defRPr>
-                      </a:pPr>
-                      <a:r>
-                        <a:rPr>
-                          <a:latin typeface="Inter"/>
-                        </a:rPr>
-                        <a:t>S6</a:t>
+                        <a:t>Gradient-governed review evidence</a:t>
                       </a:r>
                     </a:p>
                   </a:txBody>
@@ -5098,7 +5870,7 @@
                     <a:lstStyle/>
                     <a:p>
                       <a:pPr>
-                        <a:defRPr sz="720" b="0">
+                        <a:defRPr sz="650" b="0">
                           <a:solidFill>
                             <a:srgbClr val="0D1117"/>
                           </a:solidFill>
@@ -5109,7 +5881,7 @@
                         <a:rPr>
                           <a:latin typeface="Inter"/>
                         </a:rPr>
-                        <a:t>Research watchlist changes</a:t>
+                        <a:t>{'chip': 'passed', 'status': 'passed'}</a:t>
                       </a:r>
                     </a:p>
                   </a:txBody>
@@ -5125,7 +5897,7 @@
                     <a:lstStyle/>
                     <a:p>
                       <a:pPr>
-                        <a:defRPr sz="720" b="0">
+                        <a:defRPr sz="650" b="0">
                           <a:solidFill>
                             <a:srgbClr val="0D1117"/>
                           </a:solidFill>
@@ -5136,61 +5908,7 @@
                         <a:rPr>
                           <a:latin typeface="Inter"/>
                         </a:rPr>
-                        <a:t>get_research_watchlist_changes</a:t>
-                      </a:r>
-                    </a:p>
-                  </a:txBody>
-                  <a:tcPr marL="54864" marR="54864" marT="27432" marB="27432" anchor="ctr">
-                    <a:solidFill>
-                      <a:srgbClr val="F5F7F9"/>
-                    </a:solidFill>
-                  </a:tcPr>
-                </a:tc>
-                <a:tc>
-                  <a:txBody>
-                    <a:bodyPr/>
-                    <a:lstStyle/>
-                    <a:p>
-                      <a:pPr>
-                        <a:defRPr sz="720" b="0">
-                          <a:solidFill>
-                            <a:srgbClr val="0D1117"/>
-                          </a:solidFill>
-                          <a:latin typeface="Inter"/>
-                        </a:defRPr>
-                      </a:pPr>
-                      <a:r>
-                        <a:rPr>
-                          <a:latin typeface="Inter"/>
-                        </a:rPr>
-                        <a:t>2026-10-04</a:t>
-                      </a:r>
-                    </a:p>
-                  </a:txBody>
-                  <a:tcPr marL="54864" marR="54864" marT="27432" marB="27432" anchor="ctr">
-                    <a:solidFill>
-                      <a:srgbClr val="F5F7F9"/>
-                    </a:solidFill>
-                  </a:tcPr>
-                </a:tc>
-                <a:tc>
-                  <a:txBody>
-                    <a:bodyPr/>
-                    <a:lstStyle/>
-                    <a:p>
-                      <a:pPr>
-                        <a:defRPr sz="720" b="1">
-                          <a:solidFill>
-                            <a:srgbClr val="C6F432"/>
-                          </a:solidFill>
-                          <a:latin typeface="Inter"/>
-                        </a:defRPr>
-                      </a:pPr>
-                      <a:r>
-                        <a:rPr>
-                          <a:latin typeface="Inter"/>
-                        </a:rPr>
-                        <a:t>● passed</a:t>
+                        <a:t>sha256:ffffffffffffffffffffffffffffffffffffffffffffffffffffffffffffffff</a:t>
                       </a:r>
                     </a:p>
                   </a:txBody>
@@ -5207,7 +5925,7 @@
       </p:graphicFrame>
       <p:sp>
         <p:nvSpPr>
-          <p:cNvPr id="8" name="TextBox 7"/>
+          <p:cNvPr id="9" name="TextBox 8"/>
           <p:cNvSpPr txBox="1"/>
           <p:nvPr/>
         </p:nvSpPr>
@@ -5242,14 +5960,14 @@
               <a:rPr>
                 <a:latin typeface="Inter"/>
               </a:rPr>
-              <a:t>S4 validation: advisory 'empty primary list has no explicit reason' although the response states absence_reason no_open_findings.</a:t>
-            </a:r>
-          </a:p>
-        </p:txBody>
-      </p:sp>
-      <p:sp>
-        <p:nvSpPr>
-          <p:cNvPr id="9" name="TextBox 8"/>
+              <a:t>S4 validation: advisory 'empty primary list has no explicit reason' although the response states absence_reason no_open_findings. Illustrative, Gradient Maintained — demo data, not the client's holdings or managers. All organizations, portfolios, managers and results in this public example are illustrative.</a:t>
+            </a:r>
+          </a:p>
+        </p:txBody>
+      </p:sp>
+      <p:sp>
+        <p:nvSpPr>
+          <p:cNvPr id="10" name="TextBox 9"/>
           <p:cNvSpPr txBox="1"/>
           <p:nvPr/>
         </p:nvSpPr>
@@ -5329,7 +6047,7 @@
       </p:sp>
       <p:sp>
         <p:nvSpPr>
-          <p:cNvPr id="10" name="Rectangle 9"/>
+          <p:cNvPr id="11" name="Rectangle 10"/>
           <p:cNvSpPr/>
           <p:nvPr/>
         </p:nvSpPr>
@@ -5378,7 +6096,7 @@
       </p:sp>
       <p:sp>
         <p:nvSpPr>
-          <p:cNvPr id="11" name="TextBox 10"/>
+          <p:cNvPr id="12" name="TextBox 11"/>
           <p:cNvSpPr txBox="1"/>
           <p:nvPr/>
         </p:nvSpPr>
@@ -5420,7 +6138,7 @@
       </p:sp>
       <p:sp>
         <p:nvSpPr>
-          <p:cNvPr id="12" name="TextBox 11"/>
+          <p:cNvPr id="13" name="TextBox 12"/>
           <p:cNvSpPr txBox="1"/>
           <p:nvPr/>
         </p:nvSpPr>
@@ -5455,14 +6173,14 @@
               <a:rPr>
                 <a:latin typeface="Inter"/>
               </a:rPr>
-              <a:t>Confidential — prepared for internal investment use · Data as of 2026-10-01 (Form ADV); queue 2026-10-04</a:t>
-            </a:r>
-          </a:p>
-        </p:txBody>
-      </p:sp>
-      <p:sp>
-        <p:nvSpPr>
-          <p:cNvPr id="13" name="TextBox 12"/>
+              <a:t>Confidential — Investment Committee · Data as of 2026-10-01 (Form ADV); queue 2026-10-04</a:t>
+            </a:r>
+          </a:p>
+        </p:txBody>
+      </p:sp>
+      <p:sp>
+        <p:nvSpPr>
+          <p:cNvPr id="14" name="TextBox 13"/>
           <p:cNvSpPr txBox="1"/>
           <p:nvPr/>
         </p:nvSpPr>
@@ -5578,7 +6296,7 @@
         <p:spPr>
           <a:xfrm>
             <a:off x="640080" y="329184"/>
-            <a:ext cx="9875520" cy="182880"/>
+            <a:ext cx="5303520" cy="182880"/>
           </a:xfrm>
           <a:prstGeom prst="rect">
             <a:avLst/>
@@ -5619,6 +6337,48 @@
         </p:nvSpPr>
         <p:spPr>
           <a:xfrm>
+            <a:off x="5897880" y="310896"/>
+            <a:ext cx="4800600" cy="256032"/>
+          </a:xfrm>
+          <a:prstGeom prst="rect">
+            <a:avLst/>
+          </a:prstGeom>
+          <a:noFill/>
+        </p:spPr>
+        <p:txBody>
+          <a:bodyPr wrap="none" lIns="9144" rIns="9144" tIns="9144" bIns="9144" anchor="t">
+            <a:spAutoFit/>
+          </a:bodyPr>
+          <a:lstStyle/>
+          <a:p>
+            <a:pPr algn="r">
+              <a:spcAft>
+                <a:spcPts val="0"/>
+              </a:spcAft>
+              <a:defRPr sz="680" b="1">
+                <a:solidFill>
+                  <a:srgbClr val="4F6B00"/>
+                </a:solidFill>
+                <a:latin typeface="Inter"/>
+              </a:defRPr>
+            </a:pPr>
+            <a:r>
+              <a:rPr>
+                <a:latin typeface="Inter"/>
+              </a:rPr>
+              <a:t>Illustrative, Gradient Maintained — demo data, not the client's holdings or managers</a:t>
+            </a:r>
+          </a:p>
+        </p:txBody>
+      </p:sp>
+      <p:sp>
+        <p:nvSpPr>
+          <p:cNvPr id="5" name="TextBox 4"/>
+          <p:cNvSpPr txBox="1"/>
+          <p:nvPr/>
+        </p:nvSpPr>
+        <p:spPr>
+          <a:xfrm>
             <a:off x="640080" y="566928"/>
             <a:ext cx="10058400" cy="530352"/>
           </a:xfrm>
@@ -5655,7 +6415,7 @@
       </p:sp>
       <p:sp>
         <p:nvSpPr>
-          <p:cNvPr id="5" name="Rectangle 4"/>
+          <p:cNvPr id="6" name="Rectangle 5"/>
           <p:cNvSpPr/>
           <p:nvPr/>
         </p:nvSpPr>
@@ -5704,7 +6464,7 @@
       </p:sp>
       <p:sp>
         <p:nvSpPr>
-          <p:cNvPr id="6" name="Rectangle 5"/>
+          <p:cNvPr id="7" name="Rectangle 6"/>
           <p:cNvSpPr/>
           <p:nvPr/>
         </p:nvSpPr>
@@ -5753,7 +6513,7 @@
       </p:sp>
       <p:sp>
         <p:nvSpPr>
-          <p:cNvPr id="7" name="TextBox 6"/>
+          <p:cNvPr id="8" name="TextBox 7"/>
           <p:cNvSpPr txBox="1"/>
           <p:nvPr/>
         </p:nvSpPr>
@@ -5795,14 +6555,14 @@
       </p:sp>
       <p:sp>
         <p:nvSpPr>
-          <p:cNvPr id="8" name="Rectangle 7"/>
+          <p:cNvPr id="9" name="Rectangle 8"/>
           <p:cNvSpPr/>
           <p:nvPr/>
         </p:nvSpPr>
         <p:spPr>
           <a:xfrm>
             <a:off x="640080" y="1325880"/>
-            <a:ext cx="10908792" cy="2841923"/>
+            <a:ext cx="10908792" cy="2822348"/>
           </a:xfrm>
           <a:prstGeom prst="rect">
             <a:avLst/>
@@ -5844,14 +6604,14 @@
       </p:sp>
       <p:sp>
         <p:nvSpPr>
-          <p:cNvPr id="9" name="Rectangle 8"/>
+          <p:cNvPr id="10" name="Rectangle 9"/>
           <p:cNvSpPr/>
           <p:nvPr/>
         </p:nvSpPr>
         <p:spPr>
           <a:xfrm>
             <a:off x="640080" y="1325880"/>
-            <a:ext cx="54864" cy="2841923"/>
+            <a:ext cx="54864" cy="2822348"/>
           </a:xfrm>
           <a:prstGeom prst="rect">
             <a:avLst/>
@@ -5893,7 +6653,7 @@
       </p:sp>
       <p:sp>
         <p:nvSpPr>
-          <p:cNvPr id="10" name="TextBox 9"/>
+          <p:cNvPr id="11" name="TextBox 10"/>
           <p:cNvSpPr txBox="1"/>
           <p:nvPr/>
         </p:nvSpPr>
@@ -5935,14 +6695,14 @@
       </p:sp>
       <p:sp>
         <p:nvSpPr>
-          <p:cNvPr id="11" name="TextBox 10"/>
+          <p:cNvPr id="12" name="TextBox 11"/>
           <p:cNvSpPr txBox="1"/>
           <p:nvPr/>
         </p:nvSpPr>
         <p:spPr>
           <a:xfrm>
             <a:off x="804671" y="1719072"/>
-            <a:ext cx="10616184" cy="2357291"/>
+            <a:ext cx="10616184" cy="2337716"/>
           </a:xfrm>
           <a:prstGeom prst="rect">
             <a:avLst/>
@@ -5970,21 +6730,21 @@
               <a:rPr>
                 <a:latin typeface="Inter"/>
               </a:rPr>
-              <a:t>One item needs attention: Ridgeview Example Advisors filed a new Form ADV snapshot dated 2026-10-01, two days after its last review on 2026-09-29 [S2]. The monitor processed that filing and raised no alerts in any category [S3], and there are no open findings [S4]. Review the new filing and decide whether an ODD refresh is needed; Global Macro Fund II has no new activity. The firm and fund event feed is not yet published, so absence of events is not evidence of none [S5].</a:t>
-            </a:r>
-          </a:p>
-        </p:txBody>
-      </p:sp>
-      <p:sp>
-        <p:nvSpPr>
-          <p:cNvPr id="12" name="Rectangle 11"/>
+              <a:t>One item needs attention: Ridgeview Advisors filed a new Form ADV snapshot dated 2026-10-01, two days after its last review on 2026-09-29 [S2]. The monitor processed that filing and raised no alerts in any category [S3], and there are no open findings [S4]. Review the new filing and decide whether an ODD refresh is needed; Global Macro Fund II has no new activity. The firm and fund event feed is not yet published, so absence of events is not evidence of none [S5].</a:t>
+            </a:r>
+          </a:p>
+        </p:txBody>
+      </p:sp>
+      <p:sp>
+        <p:nvSpPr>
+          <p:cNvPr id="13" name="Rectangle 12"/>
           <p:cNvSpPr/>
           <p:nvPr/>
         </p:nvSpPr>
         <p:spPr>
           <a:xfrm>
-            <a:off x="640080" y="4277531"/>
-            <a:ext cx="2644902" cy="1940388"/>
+            <a:off x="640080" y="4257956"/>
+            <a:ext cx="2644902" cy="1959963"/>
           </a:xfrm>
           <a:prstGeom prst="rect">
             <a:avLst/>
@@ -6026,13 +6786,13 @@
       </p:sp>
       <p:sp>
         <p:nvSpPr>
-          <p:cNvPr id="13" name="Rectangle 12"/>
+          <p:cNvPr id="14" name="Rectangle 13"/>
           <p:cNvSpPr/>
           <p:nvPr/>
         </p:nvSpPr>
         <p:spPr>
           <a:xfrm>
-            <a:off x="640080" y="4277531"/>
+            <a:off x="640080" y="4257956"/>
             <a:ext cx="2644902" cy="45720"/>
           </a:xfrm>
           <a:prstGeom prst="rect">
@@ -6075,13 +6835,13 @@
       </p:sp>
       <p:sp>
         <p:nvSpPr>
-          <p:cNvPr id="14" name="TextBox 13"/>
+          <p:cNvPr id="15" name="TextBox 14"/>
           <p:cNvSpPr txBox="1"/>
           <p:nvPr/>
         </p:nvSpPr>
         <p:spPr>
           <a:xfrm>
-            <a:off x="749808" y="4405547"/>
+            <a:off x="749808" y="4385972"/>
             <a:ext cx="2425446" cy="201168"/>
           </a:xfrm>
           <a:prstGeom prst="rect">
@@ -6117,13 +6877,13 @@
       </p:sp>
       <p:sp>
         <p:nvSpPr>
-          <p:cNvPr id="15" name="TextBox 14"/>
+          <p:cNvPr id="16" name="TextBox 15"/>
           <p:cNvSpPr txBox="1"/>
           <p:nvPr/>
         </p:nvSpPr>
         <p:spPr>
           <a:xfrm>
-            <a:off x="749808" y="4661579"/>
+            <a:off x="749808" y="4642004"/>
             <a:ext cx="2425446" cy="475488"/>
           </a:xfrm>
           <a:prstGeom prst="rect">
@@ -6159,7 +6919,7 @@
       </p:sp>
       <p:sp>
         <p:nvSpPr>
-          <p:cNvPr id="16" name="TextBox 15"/>
+          <p:cNvPr id="17" name="TextBox 16"/>
           <p:cNvSpPr txBox="1"/>
           <p:nvPr/>
         </p:nvSpPr>
@@ -6201,14 +6961,14 @@
       </p:sp>
       <p:sp>
         <p:nvSpPr>
-          <p:cNvPr id="17" name="Rectangle 16"/>
+          <p:cNvPr id="18" name="Rectangle 17"/>
           <p:cNvSpPr/>
           <p:nvPr/>
         </p:nvSpPr>
         <p:spPr>
           <a:xfrm>
-            <a:off x="3394710" y="4277531"/>
-            <a:ext cx="2644902" cy="1940388"/>
+            <a:off x="3394710" y="4257956"/>
+            <a:ext cx="2644902" cy="1959963"/>
           </a:xfrm>
           <a:prstGeom prst="rect">
             <a:avLst/>
@@ -6250,13 +7010,13 @@
       </p:sp>
       <p:sp>
         <p:nvSpPr>
-          <p:cNvPr id="18" name="Rectangle 17"/>
+          <p:cNvPr id="19" name="Rectangle 18"/>
           <p:cNvSpPr/>
           <p:nvPr/>
         </p:nvSpPr>
         <p:spPr>
           <a:xfrm>
-            <a:off x="3394710" y="4277531"/>
+            <a:off x="3394710" y="4257956"/>
             <a:ext cx="2644902" cy="45720"/>
           </a:xfrm>
           <a:prstGeom prst="rect">
@@ -6299,13 +7059,13 @@
       </p:sp>
       <p:sp>
         <p:nvSpPr>
-          <p:cNvPr id="19" name="TextBox 18"/>
+          <p:cNvPr id="20" name="TextBox 19"/>
           <p:cNvSpPr txBox="1"/>
           <p:nvPr/>
         </p:nvSpPr>
         <p:spPr>
           <a:xfrm>
-            <a:off x="3504438" y="4405547"/>
+            <a:off x="3504438" y="4385972"/>
             <a:ext cx="2425446" cy="201168"/>
           </a:xfrm>
           <a:prstGeom prst="rect">
@@ -6341,13 +7101,13 @@
       </p:sp>
       <p:sp>
         <p:nvSpPr>
-          <p:cNvPr id="20" name="TextBox 19"/>
+          <p:cNvPr id="21" name="TextBox 20"/>
           <p:cNvSpPr txBox="1"/>
           <p:nvPr/>
         </p:nvSpPr>
         <p:spPr>
           <a:xfrm>
-            <a:off x="3504438" y="4661579"/>
+            <a:off x="3504438" y="4642004"/>
             <a:ext cx="2425446" cy="475488"/>
           </a:xfrm>
           <a:prstGeom prst="rect">
@@ -6383,7 +7143,7 @@
       </p:sp>
       <p:sp>
         <p:nvSpPr>
-          <p:cNvPr id="21" name="TextBox 20"/>
+          <p:cNvPr id="22" name="TextBox 21"/>
           <p:cNvSpPr txBox="1"/>
           <p:nvPr/>
         </p:nvSpPr>
@@ -6425,14 +7185,14 @@
       </p:sp>
       <p:sp>
         <p:nvSpPr>
-          <p:cNvPr id="22" name="Rectangle 21"/>
+          <p:cNvPr id="23" name="Rectangle 22"/>
           <p:cNvSpPr/>
           <p:nvPr/>
         </p:nvSpPr>
         <p:spPr>
           <a:xfrm>
-            <a:off x="6149340" y="4277531"/>
-            <a:ext cx="2644902" cy="1940388"/>
+            <a:off x="6149340" y="4257956"/>
+            <a:ext cx="2644902" cy="1959963"/>
           </a:xfrm>
           <a:prstGeom prst="rect">
             <a:avLst/>
@@ -6474,13 +7234,13 @@
       </p:sp>
       <p:sp>
         <p:nvSpPr>
-          <p:cNvPr id="23" name="Rectangle 22"/>
+          <p:cNvPr id="24" name="Rectangle 23"/>
           <p:cNvSpPr/>
           <p:nvPr/>
         </p:nvSpPr>
         <p:spPr>
           <a:xfrm>
-            <a:off x="6149340" y="4277531"/>
+            <a:off x="6149340" y="4257956"/>
             <a:ext cx="2644902" cy="45720"/>
           </a:xfrm>
           <a:prstGeom prst="rect">
@@ -6523,13 +7283,13 @@
       </p:sp>
       <p:sp>
         <p:nvSpPr>
-          <p:cNvPr id="24" name="TextBox 23"/>
+          <p:cNvPr id="25" name="TextBox 24"/>
           <p:cNvSpPr txBox="1"/>
           <p:nvPr/>
         </p:nvSpPr>
         <p:spPr>
           <a:xfrm>
-            <a:off x="6259068" y="4405547"/>
+            <a:off x="6259068" y="4385972"/>
             <a:ext cx="2425446" cy="201168"/>
           </a:xfrm>
           <a:prstGeom prst="rect">
@@ -6565,13 +7325,13 @@
       </p:sp>
       <p:sp>
         <p:nvSpPr>
-          <p:cNvPr id="25" name="TextBox 24"/>
+          <p:cNvPr id="26" name="TextBox 25"/>
           <p:cNvSpPr txBox="1"/>
           <p:nvPr/>
         </p:nvSpPr>
         <p:spPr>
           <a:xfrm>
-            <a:off x="6259068" y="4661579"/>
+            <a:off x="6259068" y="4642004"/>
             <a:ext cx="2425446" cy="475488"/>
           </a:xfrm>
           <a:prstGeom prst="rect">
@@ -6607,7 +7367,7 @@
       </p:sp>
       <p:sp>
         <p:nvSpPr>
-          <p:cNvPr id="26" name="TextBox 25"/>
+          <p:cNvPr id="27" name="TextBox 26"/>
           <p:cNvSpPr txBox="1"/>
           <p:nvPr/>
         </p:nvSpPr>
@@ -6649,14 +7409,14 @@
       </p:sp>
       <p:sp>
         <p:nvSpPr>
-          <p:cNvPr id="27" name="Rectangle 26"/>
+          <p:cNvPr id="28" name="Rectangle 27"/>
           <p:cNvSpPr/>
           <p:nvPr/>
         </p:nvSpPr>
         <p:spPr>
           <a:xfrm>
-            <a:off x="8903970" y="4277531"/>
-            <a:ext cx="2644902" cy="1940388"/>
+            <a:off x="8903970" y="4257956"/>
+            <a:ext cx="2644902" cy="1959963"/>
           </a:xfrm>
           <a:prstGeom prst="rect">
             <a:avLst/>
@@ -6698,13 +7458,13 @@
       </p:sp>
       <p:sp>
         <p:nvSpPr>
-          <p:cNvPr id="28" name="Rectangle 27"/>
+          <p:cNvPr id="29" name="Rectangle 28"/>
           <p:cNvSpPr/>
           <p:nvPr/>
         </p:nvSpPr>
         <p:spPr>
           <a:xfrm>
-            <a:off x="8903970" y="4277531"/>
+            <a:off x="8903970" y="4257956"/>
             <a:ext cx="2644902" cy="45720"/>
           </a:xfrm>
           <a:prstGeom prst="rect">
@@ -6747,13 +7507,13 @@
       </p:sp>
       <p:sp>
         <p:nvSpPr>
-          <p:cNvPr id="29" name="TextBox 28"/>
+          <p:cNvPr id="30" name="TextBox 29"/>
           <p:cNvSpPr txBox="1"/>
           <p:nvPr/>
         </p:nvSpPr>
         <p:spPr>
           <a:xfrm>
-            <a:off x="9013698" y="4405547"/>
+            <a:off x="9013698" y="4385972"/>
             <a:ext cx="2425446" cy="201168"/>
           </a:xfrm>
           <a:prstGeom prst="rect">
@@ -6789,13 +7549,13 @@
       </p:sp>
       <p:sp>
         <p:nvSpPr>
-          <p:cNvPr id="30" name="TextBox 29"/>
+          <p:cNvPr id="31" name="TextBox 30"/>
           <p:cNvSpPr txBox="1"/>
           <p:nvPr/>
         </p:nvSpPr>
         <p:spPr>
           <a:xfrm>
-            <a:off x="9013698" y="4661579"/>
+            <a:off x="9013698" y="4642004"/>
             <a:ext cx="2425446" cy="475488"/>
           </a:xfrm>
           <a:prstGeom prst="rect">
@@ -6831,7 +7591,7 @@
       </p:sp>
       <p:sp>
         <p:nvSpPr>
-          <p:cNvPr id="31" name="TextBox 30"/>
+          <p:cNvPr id="32" name="TextBox 31"/>
           <p:cNvSpPr txBox="1"/>
           <p:nvPr/>
         </p:nvSpPr>
@@ -6873,7 +7633,7 @@
       </p:sp>
       <p:sp>
         <p:nvSpPr>
-          <p:cNvPr id="32" name="Rectangle 31"/>
+          <p:cNvPr id="33" name="Rectangle 32"/>
           <p:cNvSpPr/>
           <p:nvPr/>
         </p:nvSpPr>
@@ -6922,7 +7682,7 @@
       </p:sp>
       <p:sp>
         <p:nvSpPr>
-          <p:cNvPr id="33" name="TextBox 32"/>
+          <p:cNvPr id="34" name="TextBox 33"/>
           <p:cNvSpPr txBox="1"/>
           <p:nvPr/>
         </p:nvSpPr>
@@ -6964,7 +7724,7 @@
       </p:sp>
       <p:sp>
         <p:nvSpPr>
-          <p:cNvPr id="34" name="TextBox 33"/>
+          <p:cNvPr id="35" name="TextBox 34"/>
           <p:cNvSpPr txBox="1"/>
           <p:nvPr/>
         </p:nvSpPr>
@@ -6999,14 +7759,14 @@
               <a:rPr>
                 <a:latin typeface="Inter"/>
               </a:rPr>
-              <a:t>Confidential — prepared for internal investment use · Data as of 2026-10-01 (Form ADV); queue 2026-10-04</a:t>
-            </a:r>
-          </a:p>
-        </p:txBody>
-      </p:sp>
-      <p:sp>
-        <p:nvSpPr>
-          <p:cNvPr id="35" name="TextBox 34"/>
+              <a:t>Confidential — Investment Committee · Data as of 2026-10-01 (Form ADV); queue 2026-10-04</a:t>
+            </a:r>
+          </a:p>
+        </p:txBody>
+      </p:sp>
+      <p:sp>
+        <p:nvSpPr>
+          <p:cNvPr id="36" name="TextBox 35"/>
           <p:cNvSpPr txBox="1"/>
           <p:nvPr/>
         </p:nvSpPr>
@@ -7122,7 +7882,7 @@
         <p:spPr>
           <a:xfrm>
             <a:off x="640080" y="329184"/>
-            <a:ext cx="9875520" cy="182880"/>
+            <a:ext cx="5303520" cy="182880"/>
           </a:xfrm>
           <a:prstGeom prst="rect">
             <a:avLst/>
@@ -7163,6 +7923,48 @@
         </p:nvSpPr>
         <p:spPr>
           <a:xfrm>
+            <a:off x="5897880" y="310896"/>
+            <a:ext cx="4800600" cy="256032"/>
+          </a:xfrm>
+          <a:prstGeom prst="rect">
+            <a:avLst/>
+          </a:prstGeom>
+          <a:noFill/>
+        </p:spPr>
+        <p:txBody>
+          <a:bodyPr wrap="none" lIns="9144" rIns="9144" tIns="9144" bIns="9144" anchor="t">
+            <a:spAutoFit/>
+          </a:bodyPr>
+          <a:lstStyle/>
+          <a:p>
+            <a:pPr algn="r">
+              <a:spcAft>
+                <a:spcPts val="0"/>
+              </a:spcAft>
+              <a:defRPr sz="680" b="1">
+                <a:solidFill>
+                  <a:srgbClr val="4F6B00"/>
+                </a:solidFill>
+                <a:latin typeface="Inter"/>
+              </a:defRPr>
+            </a:pPr>
+            <a:r>
+              <a:rPr>
+                <a:latin typeface="Inter"/>
+              </a:rPr>
+              <a:t>Illustrative, Gradient Maintained — demo data, not the client's holdings or managers</a:t>
+            </a:r>
+          </a:p>
+        </p:txBody>
+      </p:sp>
+      <p:sp>
+        <p:nvSpPr>
+          <p:cNvPr id="5" name="TextBox 4"/>
+          <p:cNvSpPr txBox="1"/>
+          <p:nvPr/>
+        </p:nvSpPr>
+        <p:spPr>
+          <a:xfrm>
             <a:off x="640080" y="566928"/>
             <a:ext cx="10058400" cy="530352"/>
           </a:xfrm>
@@ -7199,7 +8001,7 @@
       </p:sp>
       <p:sp>
         <p:nvSpPr>
-          <p:cNvPr id="5" name="Rectangle 4"/>
+          <p:cNvPr id="6" name="Rectangle 5"/>
           <p:cNvSpPr/>
           <p:nvPr/>
         </p:nvSpPr>
@@ -7248,7 +8050,7 @@
       </p:sp>
       <p:sp>
         <p:nvSpPr>
-          <p:cNvPr id="6" name="Rectangle 5"/>
+          <p:cNvPr id="7" name="Rectangle 6"/>
           <p:cNvSpPr/>
           <p:nvPr/>
         </p:nvSpPr>
@@ -7297,7 +8099,7 @@
       </p:sp>
       <p:sp>
         <p:nvSpPr>
-          <p:cNvPr id="7" name="TextBox 6"/>
+          <p:cNvPr id="8" name="TextBox 7"/>
           <p:cNvSpPr txBox="1"/>
           <p:nvPr/>
         </p:nvSpPr>
@@ -7339,7 +8141,7 @@
       </p:sp>
       <p:sp>
         <p:nvSpPr>
-          <p:cNvPr id="8" name="TextBox 7"/>
+          <p:cNvPr id="9" name="TextBox 8"/>
           <p:cNvSpPr txBox="1"/>
           <p:nvPr/>
         </p:nvSpPr>
@@ -7381,7 +8183,7 @@
       </p:sp>
       <p:graphicFrame>
         <p:nvGraphicFramePr>
-          <p:cNvPr id="9" name="Chart 8"/>
+          <p:cNvPr id="10" name="Chart 9"/>
           <p:cNvGraphicFramePr>
             <a:graphicFrameLocks noGrp="1"/>
           </p:cNvGraphicFramePr>
@@ -7399,7 +8201,7 @@
       </p:graphicFrame>
       <p:sp>
         <p:nvSpPr>
-          <p:cNvPr id="10" name="Rectangle 9"/>
+          <p:cNvPr id="11" name="Rectangle 10"/>
           <p:cNvSpPr/>
           <p:nvPr/>
         </p:nvSpPr>
@@ -7448,7 +8250,7 @@
       </p:sp>
       <p:sp>
         <p:nvSpPr>
-          <p:cNvPr id="11" name="TextBox 10"/>
+          <p:cNvPr id="12" name="TextBox 11"/>
           <p:cNvSpPr txBox="1"/>
           <p:nvPr/>
         </p:nvSpPr>
@@ -7490,7 +8292,7 @@
       </p:sp>
       <p:sp>
         <p:nvSpPr>
-          <p:cNvPr id="12" name="TextBox 11"/>
+          <p:cNvPr id="13" name="TextBox 12"/>
           <p:cNvSpPr txBox="1"/>
           <p:nvPr/>
         </p:nvSpPr>
@@ -7525,14 +8327,14 @@
               <a:rPr>
                 <a:latin typeface="Inter"/>
               </a:rPr>
-              <a:t>Confidential — prepared for internal investment use · Data as of 2026-10-01 (Form ADV); queue 2026-10-04</a:t>
-            </a:r>
-          </a:p>
-        </p:txBody>
-      </p:sp>
-      <p:sp>
-        <p:nvSpPr>
-          <p:cNvPr id="13" name="TextBox 12"/>
+              <a:t>Confidential — Investment Committee · Data as of 2026-10-01 (Form ADV); queue 2026-10-04</a:t>
+            </a:r>
+          </a:p>
+        </p:txBody>
+      </p:sp>
+      <p:sp>
+        <p:nvSpPr>
+          <p:cNvPr id="14" name="TextBox 13"/>
           <p:cNvSpPr txBox="1"/>
           <p:nvPr/>
         </p:nvSpPr>
@@ -7648,7 +8450,7 @@
         <p:spPr>
           <a:xfrm>
             <a:off x="640080" y="329184"/>
-            <a:ext cx="9875520" cy="182880"/>
+            <a:ext cx="5303520" cy="182880"/>
           </a:xfrm>
           <a:prstGeom prst="rect">
             <a:avLst/>
@@ -7689,6 +8491,48 @@
         </p:nvSpPr>
         <p:spPr>
           <a:xfrm>
+            <a:off x="5897880" y="310896"/>
+            <a:ext cx="4800600" cy="256032"/>
+          </a:xfrm>
+          <a:prstGeom prst="rect">
+            <a:avLst/>
+          </a:prstGeom>
+          <a:noFill/>
+        </p:spPr>
+        <p:txBody>
+          <a:bodyPr wrap="none" lIns="9144" rIns="9144" tIns="9144" bIns="9144" anchor="t">
+            <a:spAutoFit/>
+          </a:bodyPr>
+          <a:lstStyle/>
+          <a:p>
+            <a:pPr algn="r">
+              <a:spcAft>
+                <a:spcPts val="0"/>
+              </a:spcAft>
+              <a:defRPr sz="680" b="1">
+                <a:solidFill>
+                  <a:srgbClr val="4F6B00"/>
+                </a:solidFill>
+                <a:latin typeface="Inter"/>
+              </a:defRPr>
+            </a:pPr>
+            <a:r>
+              <a:rPr>
+                <a:latin typeface="Inter"/>
+              </a:rPr>
+              <a:t>Illustrative, Gradient Maintained — demo data, not the client's holdings or managers</a:t>
+            </a:r>
+          </a:p>
+        </p:txBody>
+      </p:sp>
+      <p:sp>
+        <p:nvSpPr>
+          <p:cNvPr id="5" name="TextBox 4"/>
+          <p:cNvSpPr txBox="1"/>
+          <p:nvPr/>
+        </p:nvSpPr>
+        <p:spPr>
+          <a:xfrm>
             <a:off x="640080" y="566928"/>
             <a:ext cx="10058400" cy="530352"/>
           </a:xfrm>
@@ -7725,7 +8569,7 @@
       </p:sp>
       <p:sp>
         <p:nvSpPr>
-          <p:cNvPr id="5" name="Rectangle 4"/>
+          <p:cNvPr id="6" name="Rectangle 5"/>
           <p:cNvSpPr/>
           <p:nvPr/>
         </p:nvSpPr>
@@ -7774,7 +8618,7 @@
       </p:sp>
       <p:sp>
         <p:nvSpPr>
-          <p:cNvPr id="6" name="Rectangle 5"/>
+          <p:cNvPr id="7" name="Rectangle 6"/>
           <p:cNvSpPr/>
           <p:nvPr/>
         </p:nvSpPr>
@@ -7823,7 +8667,7 @@
       </p:sp>
       <p:sp>
         <p:nvSpPr>
-          <p:cNvPr id="7" name="TextBox 6"/>
+          <p:cNvPr id="8" name="TextBox 7"/>
           <p:cNvSpPr txBox="1"/>
           <p:nvPr/>
         </p:nvSpPr>
@@ -7865,7 +8709,7 @@
       </p:sp>
       <p:sp>
         <p:nvSpPr>
-          <p:cNvPr id="8" name="TextBox 7"/>
+          <p:cNvPr id="9" name="TextBox 8"/>
           <p:cNvSpPr txBox="1"/>
           <p:nvPr/>
         </p:nvSpPr>
@@ -7907,7 +8751,7 @@
       </p:sp>
       <p:graphicFrame>
         <p:nvGraphicFramePr>
-          <p:cNvPr id="9" name="Table 8"/>
+          <p:cNvPr id="10" name="Table 9"/>
           <p:cNvGraphicFramePr>
             <a:graphicFrameLocks noGrp="1"/>
           </p:cNvGraphicFramePr>
@@ -7915,7 +8759,7 @@
         </p:nvGraphicFramePr>
         <p:xfrm>
           <a:off x="640080" y="1600200"/>
-          <a:ext cx="10908792" cy="745193"/>
+          <a:ext cx="10908792" cy="741226"/>
         </p:xfrm>
         <a:graphic>
           <a:graphicData uri="http://schemas.openxmlformats.org/drawingml/2006/table">
@@ -7928,7 +8772,7 @@
                 <a:gridCol w="4448556"/>
                 <a:gridCol w="4448556"/>
               </a:tblGrid>
-              <a:tr h="372596">
+              <a:tr h="370613">
                 <a:tc>
                   <a:txBody>
                     <a:bodyPr/>
@@ -8011,7 +8855,7 @@
                   </a:tcPr>
                 </a:tc>
               </a:tr>
-              <a:tr h="372597">
+              <a:tr h="370613">
                 <a:tc>
                   <a:txBody>
                     <a:bodyPr/>
@@ -8056,7 +8900,7 @@
                         <a:rPr>
                           <a:latin typeface="Inter"/>
                         </a:rPr>
-                        <a:t>Ridgeview Example Advisors — review new ADV filing</a:t>
+                        <a:t>Ridgeview Advisors — review new ADV filing</a:t>
                       </a:r>
                     </a:p>
                   </a:txBody>
@@ -8100,14 +8944,14 @@
       </p:graphicFrame>
       <p:sp>
         <p:nvSpPr>
-          <p:cNvPr id="10" name="Rectangle 9"/>
+          <p:cNvPr id="11" name="Rectangle 10"/>
           <p:cNvSpPr/>
           <p:nvPr/>
         </p:nvSpPr>
         <p:spPr>
           <a:xfrm>
-            <a:off x="640080" y="2455121"/>
-            <a:ext cx="10908792" cy="1251220"/>
+            <a:off x="640080" y="2451154"/>
+            <a:ext cx="10908792" cy="1217945"/>
           </a:xfrm>
           <a:prstGeom prst="rect">
             <a:avLst/>
@@ -8149,14 +8993,14 @@
       </p:sp>
       <p:sp>
         <p:nvSpPr>
-          <p:cNvPr id="11" name="Rectangle 10"/>
+          <p:cNvPr id="12" name="Rectangle 11"/>
           <p:cNvSpPr/>
           <p:nvPr/>
         </p:nvSpPr>
         <p:spPr>
           <a:xfrm>
-            <a:off x="640080" y="2455121"/>
-            <a:ext cx="54864" cy="1251220"/>
+            <a:off x="640080" y="2451154"/>
+            <a:ext cx="54864" cy="1217945"/>
           </a:xfrm>
           <a:prstGeom prst="rect">
             <a:avLst/>
@@ -8198,13 +9042,13 @@
       </p:sp>
       <p:sp>
         <p:nvSpPr>
-          <p:cNvPr id="12" name="TextBox 11"/>
+          <p:cNvPr id="13" name="TextBox 12"/>
           <p:cNvSpPr txBox="1"/>
           <p:nvPr/>
         </p:nvSpPr>
         <p:spPr>
           <a:xfrm>
-            <a:off x="804671" y="2564849"/>
+            <a:off x="804671" y="2560882"/>
             <a:ext cx="10616184" cy="228600"/>
           </a:xfrm>
           <a:prstGeom prst="rect">
@@ -8240,14 +9084,14 @@
       </p:sp>
       <p:sp>
         <p:nvSpPr>
-          <p:cNvPr id="13" name="TextBox 12"/>
+          <p:cNvPr id="14" name="TextBox 13"/>
           <p:cNvSpPr txBox="1"/>
           <p:nvPr/>
         </p:nvSpPr>
         <p:spPr>
           <a:xfrm>
-            <a:off x="804671" y="2848313"/>
-            <a:ext cx="10616184" cy="766588"/>
+            <a:off x="804671" y="2844346"/>
+            <a:ext cx="10616184" cy="733313"/>
           </a:xfrm>
           <a:prstGeom prst="rect">
             <a:avLst/>
@@ -8275,21 +9119,21 @@
               <a:rPr>
                 <a:latin typeface="Inter"/>
               </a:rPr>
-              <a:t>Observation: The fictional TEST report carries a 1 item to review signal [S1]. Why it matters: This signal focuses oversight on the report's most decision-relevant condition. Uncertainty: Evidence coverage may exclude newer or more detailed observations. What would change the view: A governed refresh showing a different signal or breached threshold.</a:t>
-            </a:r>
-          </a:p>
-        </p:txBody>
-      </p:sp>
-      <p:sp>
-        <p:nvSpPr>
-          <p:cNvPr id="14" name="Rectangle 13"/>
+              <a:t>Observation: The sample report carries a 1 item to review signal [S1]. Why it matters: This signal focuses oversight on the report's most decision-relevant condition. Uncertainty: Evidence coverage may exclude newer or more detailed observations. What would change the view: A governed refresh showing a different signal or breached threshold.</a:t>
+            </a:r>
+          </a:p>
+        </p:txBody>
+      </p:sp>
+      <p:sp>
+        <p:nvSpPr>
+          <p:cNvPr id="15" name="Rectangle 14"/>
           <p:cNvSpPr/>
           <p:nvPr/>
         </p:nvSpPr>
         <p:spPr>
           <a:xfrm>
-            <a:off x="640080" y="3816069"/>
-            <a:ext cx="10908792" cy="1097937"/>
+            <a:off x="640080" y="3778827"/>
+            <a:ext cx="10908792" cy="1132724"/>
           </a:xfrm>
           <a:prstGeom prst="rect">
             <a:avLst/>
@@ -8331,14 +9175,14 @@
       </p:sp>
       <p:sp>
         <p:nvSpPr>
-          <p:cNvPr id="15" name="Rectangle 14"/>
+          <p:cNvPr id="16" name="Rectangle 15"/>
           <p:cNvSpPr/>
           <p:nvPr/>
         </p:nvSpPr>
         <p:spPr>
           <a:xfrm>
-            <a:off x="640080" y="3816069"/>
-            <a:ext cx="54864" cy="1097937"/>
+            <a:off x="640080" y="3778827"/>
+            <a:ext cx="54864" cy="1132724"/>
           </a:xfrm>
           <a:prstGeom prst="rect">
             <a:avLst/>
@@ -8380,13 +9224,13 @@
       </p:sp>
       <p:sp>
         <p:nvSpPr>
-          <p:cNvPr id="16" name="TextBox 15"/>
+          <p:cNvPr id="17" name="TextBox 16"/>
           <p:cNvSpPr txBox="1"/>
           <p:nvPr/>
         </p:nvSpPr>
         <p:spPr>
           <a:xfrm>
-            <a:off x="804671" y="3925797"/>
+            <a:off x="804671" y="3888555"/>
             <a:ext cx="10616184" cy="228600"/>
           </a:xfrm>
           <a:prstGeom prst="rect">
@@ -8422,14 +9266,14 @@
       </p:sp>
       <p:sp>
         <p:nvSpPr>
-          <p:cNvPr id="17" name="TextBox 16"/>
+          <p:cNvPr id="18" name="TextBox 17"/>
           <p:cNvSpPr txBox="1"/>
           <p:nvPr/>
         </p:nvSpPr>
         <p:spPr>
           <a:xfrm>
-            <a:off x="804671" y="4209261"/>
-            <a:ext cx="10616184" cy="613305"/>
+            <a:off x="804671" y="4172019"/>
+            <a:ext cx="10616184" cy="648092"/>
           </a:xfrm>
           <a:prstGeom prst="rect">
             <a:avLst/>
@@ -8457,21 +9301,21 @@
               <a:rPr>
                 <a:latin typeface="Inter"/>
               </a:rPr>
-              <a:t>Observation: New alerts is 0 in the TEST evidence [S2]. Why it matters: This measure establishes the baseline for comparing later governed results. Uncertainty: The source basis may omit newer observations outside this fixture. What would change the view: A refreshed source report showing a change above 1%.</a:t>
-            </a:r>
-          </a:p>
-        </p:txBody>
-      </p:sp>
-      <p:sp>
-        <p:nvSpPr>
-          <p:cNvPr id="18" name="Rectangle 17"/>
+              <a:t>Observation: New alerts is 0 in the review evidence [S2]. Why it matters: This measure establishes the baseline for comparing later governed results. Uncertainty: The source basis may omit newer observations outside the reviewed evidence. What would change the view: A refreshed source report showing a change above 1%.</a:t>
+            </a:r>
+          </a:p>
+        </p:txBody>
+      </p:sp>
+      <p:sp>
+        <p:nvSpPr>
+          <p:cNvPr id="19" name="Rectangle 18"/>
           <p:cNvSpPr/>
           <p:nvPr/>
         </p:nvSpPr>
         <p:spPr>
           <a:xfrm>
-            <a:off x="640080" y="5023735"/>
-            <a:ext cx="10908792" cy="1194184"/>
+            <a:off x="640080" y="5021279"/>
+            <a:ext cx="10908792" cy="1196640"/>
           </a:xfrm>
           <a:prstGeom prst="rect">
             <a:avLst/>
@@ -8513,14 +9357,14 @@
       </p:sp>
       <p:sp>
         <p:nvSpPr>
-          <p:cNvPr id="19" name="Rectangle 18"/>
+          <p:cNvPr id="20" name="Rectangle 19"/>
           <p:cNvSpPr/>
           <p:nvPr/>
         </p:nvSpPr>
         <p:spPr>
           <a:xfrm>
-            <a:off x="640080" y="5023735"/>
-            <a:ext cx="54864" cy="1194184"/>
+            <a:off x="640080" y="5021279"/>
+            <a:ext cx="54864" cy="1196640"/>
           </a:xfrm>
           <a:prstGeom prst="rect">
             <a:avLst/>
@@ -8562,13 +9406,13 @@
       </p:sp>
       <p:sp>
         <p:nvSpPr>
-          <p:cNvPr id="20" name="TextBox 19"/>
+          <p:cNvPr id="21" name="TextBox 20"/>
           <p:cNvSpPr txBox="1"/>
           <p:nvPr/>
         </p:nvSpPr>
         <p:spPr>
           <a:xfrm>
-            <a:off x="804671" y="5133463"/>
+            <a:off x="804671" y="5131007"/>
             <a:ext cx="10616184" cy="228600"/>
           </a:xfrm>
           <a:prstGeom prst="rect">
@@ -8604,14 +9448,14 @@
       </p:sp>
       <p:sp>
         <p:nvSpPr>
-          <p:cNvPr id="21" name="TextBox 20"/>
+          <p:cNvPr id="22" name="TextBox 21"/>
           <p:cNvSpPr txBox="1"/>
           <p:nvPr/>
         </p:nvSpPr>
         <p:spPr>
           <a:xfrm>
-            <a:off x="804671" y="5416927"/>
-            <a:ext cx="10616184" cy="709552"/>
+            <a:off x="804671" y="5414471"/>
+            <a:ext cx="10616184" cy="712008"/>
           </a:xfrm>
           <a:prstGeom prst="rect">
             <a:avLst/>
@@ -8639,14 +9483,14 @@
               <a:rPr>
                 <a:latin typeface="Inter"/>
               </a:rPr>
-              <a:t>Observation: Reviews due ≤30d is 0 in the TEST evidence [S3]. Why it matters: This result determines which item receives priority in the next monitoring cycle. Uncertainty: Supporting coverage may omit later filings or corroborating detail. What would change the view: A new filing or report that resolves the item or changes it by 1%.</a:t>
-            </a:r>
-          </a:p>
-        </p:txBody>
-      </p:sp>
-      <p:sp>
-        <p:nvSpPr>
-          <p:cNvPr id="22" name="Rectangle 21"/>
+              <a:t>Observation: Reviews due ≤30d is 0 in the review evidence [S3]. Why it matters: This result determines which item receives priority in the next monitoring cycle. Uncertainty: Supporting coverage may omit later filings or corroborating detail. What would change the view: A new filing or report that resolves the item or changes it by 1%.</a:t>
+            </a:r>
+          </a:p>
+        </p:txBody>
+      </p:sp>
+      <p:sp>
+        <p:nvSpPr>
+          <p:cNvPr id="23" name="Rectangle 22"/>
           <p:cNvSpPr/>
           <p:nvPr/>
         </p:nvSpPr>
@@ -8695,7 +9539,7 @@
       </p:sp>
       <p:sp>
         <p:nvSpPr>
-          <p:cNvPr id="23" name="TextBox 22"/>
+          <p:cNvPr id="24" name="TextBox 23"/>
           <p:cNvSpPr txBox="1"/>
           <p:nvPr/>
         </p:nvSpPr>
@@ -8737,7 +9581,7 @@
       </p:sp>
       <p:sp>
         <p:nvSpPr>
-          <p:cNvPr id="24" name="TextBox 23"/>
+          <p:cNvPr id="25" name="TextBox 24"/>
           <p:cNvSpPr txBox="1"/>
           <p:nvPr/>
         </p:nvSpPr>
@@ -8772,14 +9616,14 @@
               <a:rPr>
                 <a:latin typeface="Inter"/>
               </a:rPr>
-              <a:t>Confidential — prepared for internal investment use · Data as of 2026-10-01 (Form ADV); queue 2026-10-04</a:t>
-            </a:r>
-          </a:p>
-        </p:txBody>
-      </p:sp>
-      <p:sp>
-        <p:nvSpPr>
-          <p:cNvPr id="25" name="TextBox 24"/>
+              <a:t>Confidential — Investment Committee · Data as of 2026-10-01 (Form ADV); queue 2026-10-04</a:t>
+            </a:r>
+          </a:p>
+        </p:txBody>
+      </p:sp>
+      <p:sp>
+        <p:nvSpPr>
+          <p:cNvPr id="26" name="TextBox 25"/>
           <p:cNvSpPr txBox="1"/>
           <p:nvPr/>
         </p:nvSpPr>
@@ -8895,7 +9739,7 @@
         <p:spPr>
           <a:xfrm>
             <a:off x="640080" y="329184"/>
-            <a:ext cx="9875520" cy="182880"/>
+            <a:ext cx="5303520" cy="182880"/>
           </a:xfrm>
           <a:prstGeom prst="rect">
             <a:avLst/>
@@ -8936,6 +9780,48 @@
         </p:nvSpPr>
         <p:spPr>
           <a:xfrm>
+            <a:off x="5897880" y="310896"/>
+            <a:ext cx="4800600" cy="256032"/>
+          </a:xfrm>
+          <a:prstGeom prst="rect">
+            <a:avLst/>
+          </a:prstGeom>
+          <a:noFill/>
+        </p:spPr>
+        <p:txBody>
+          <a:bodyPr wrap="none" lIns="9144" rIns="9144" tIns="9144" bIns="9144" anchor="t">
+            <a:spAutoFit/>
+          </a:bodyPr>
+          <a:lstStyle/>
+          <a:p>
+            <a:pPr algn="r">
+              <a:spcAft>
+                <a:spcPts val="0"/>
+              </a:spcAft>
+              <a:defRPr sz="680" b="1">
+                <a:solidFill>
+                  <a:srgbClr val="4F6B00"/>
+                </a:solidFill>
+                <a:latin typeface="Inter"/>
+              </a:defRPr>
+            </a:pPr>
+            <a:r>
+              <a:rPr>
+                <a:latin typeface="Inter"/>
+              </a:rPr>
+              <a:t>Illustrative, Gradient Maintained — demo data, not the client's holdings or managers</a:t>
+            </a:r>
+          </a:p>
+        </p:txBody>
+      </p:sp>
+      <p:sp>
+        <p:nvSpPr>
+          <p:cNvPr id="5" name="TextBox 4"/>
+          <p:cNvSpPr txBox="1"/>
+          <p:nvPr/>
+        </p:nvSpPr>
+        <p:spPr>
+          <a:xfrm>
             <a:off x="640080" y="566928"/>
             <a:ext cx="10058400" cy="530352"/>
           </a:xfrm>
@@ -8972,7 +9858,7 @@
       </p:sp>
       <p:sp>
         <p:nvSpPr>
-          <p:cNvPr id="5" name="Rectangle 4"/>
+          <p:cNvPr id="6" name="Rectangle 5"/>
           <p:cNvSpPr/>
           <p:nvPr/>
         </p:nvSpPr>
@@ -9021,7 +9907,7 @@
       </p:sp>
       <p:sp>
         <p:nvSpPr>
-          <p:cNvPr id="6" name="Rectangle 5"/>
+          <p:cNvPr id="7" name="Rectangle 6"/>
           <p:cNvSpPr/>
           <p:nvPr/>
         </p:nvSpPr>
@@ -9070,7 +9956,7 @@
       </p:sp>
       <p:sp>
         <p:nvSpPr>
-          <p:cNvPr id="7" name="TextBox 6"/>
+          <p:cNvPr id="8" name="TextBox 7"/>
           <p:cNvSpPr txBox="1"/>
           <p:nvPr/>
         </p:nvSpPr>
@@ -9112,7 +9998,7 @@
       </p:sp>
       <p:sp>
         <p:nvSpPr>
-          <p:cNvPr id="8" name="TextBox 7"/>
+          <p:cNvPr id="9" name="TextBox 8"/>
           <p:cNvSpPr txBox="1"/>
           <p:nvPr/>
         </p:nvSpPr>
@@ -9154,7 +10040,7 @@
       </p:sp>
       <p:graphicFrame>
         <p:nvGraphicFramePr>
-          <p:cNvPr id="9" name="Table 8"/>
+          <p:cNvPr id="10" name="Table 9"/>
           <p:cNvGraphicFramePr>
             <a:graphicFrameLocks noGrp="1"/>
           </p:cNvGraphicFramePr>
@@ -9347,7 +10233,7 @@
       </p:graphicFrame>
       <p:sp>
         <p:nvSpPr>
-          <p:cNvPr id="10" name="TextBox 9"/>
+          <p:cNvPr id="11" name="TextBox 10"/>
           <p:cNvSpPr txBox="1"/>
           <p:nvPr/>
         </p:nvSpPr>
@@ -9382,14 +10268,14 @@
               <a:rPr>
                 <a:latin typeface="Inter"/>
               </a:rPr>
-              <a:t>RIDGEVIEW EXAMPLE ADVISORS — CHANGE SINCE LAST REVIEW</a:t>
+              <a:t>RIDGEVIEW ADVISORS — CHANGE SINCE LAST REVIEW</a:t>
             </a:r>
           </a:p>
         </p:txBody>
       </p:sp>
       <p:graphicFrame>
         <p:nvGraphicFramePr>
-          <p:cNvPr id="11" name="Table 10"/>
+          <p:cNvPr id="12" name="Table 11"/>
           <p:cNvGraphicFramePr>
             <a:graphicFrameLocks noGrp="1"/>
           </p:cNvGraphicFramePr>
@@ -9751,7 +10637,7 @@
       </p:graphicFrame>
       <p:sp>
         <p:nvSpPr>
-          <p:cNvPr id="12" name="Rectangle 11"/>
+          <p:cNvPr id="13" name="Rectangle 12"/>
           <p:cNvSpPr/>
           <p:nvPr/>
         </p:nvSpPr>
@@ -9800,7 +10686,7 @@
       </p:sp>
       <p:sp>
         <p:nvSpPr>
-          <p:cNvPr id="13" name="Rectangle 12"/>
+          <p:cNvPr id="14" name="Rectangle 13"/>
           <p:cNvSpPr/>
           <p:nvPr/>
         </p:nvSpPr>
@@ -9849,7 +10735,7 @@
       </p:sp>
       <p:sp>
         <p:nvSpPr>
-          <p:cNvPr id="14" name="Rectangle 13"/>
+          <p:cNvPr id="15" name="Rectangle 14"/>
           <p:cNvSpPr/>
           <p:nvPr/>
         </p:nvSpPr>
@@ -9898,7 +10784,7 @@
       </p:sp>
       <p:sp>
         <p:nvSpPr>
-          <p:cNvPr id="15" name="TextBox 14"/>
+          <p:cNvPr id="16" name="TextBox 15"/>
           <p:cNvSpPr txBox="1"/>
           <p:nvPr/>
         </p:nvSpPr>
@@ -9940,7 +10826,7 @@
       </p:sp>
       <p:sp>
         <p:nvSpPr>
-          <p:cNvPr id="16" name="TextBox 15"/>
+          <p:cNvPr id="17" name="TextBox 16"/>
           <p:cNvSpPr txBox="1"/>
           <p:nvPr/>
         </p:nvSpPr>
@@ -9982,7 +10868,7 @@
       </p:sp>
       <p:sp>
         <p:nvSpPr>
-          <p:cNvPr id="17" name="Rectangle 16"/>
+          <p:cNvPr id="18" name="Rectangle 17"/>
           <p:cNvSpPr/>
           <p:nvPr/>
         </p:nvSpPr>
@@ -10031,7 +10917,7 @@
       </p:sp>
       <p:sp>
         <p:nvSpPr>
-          <p:cNvPr id="18" name="TextBox 17"/>
+          <p:cNvPr id="19" name="TextBox 18"/>
           <p:cNvSpPr txBox="1"/>
           <p:nvPr/>
         </p:nvSpPr>
@@ -10066,14 +10952,14 @@
               <a:rPr>
                 <a:latin typeface="Inter"/>
               </a:rPr>
-              <a:t>Sources: S2 · S3 · S4 · S5</a:t>
-            </a:r>
-          </a:p>
-        </p:txBody>
-      </p:sp>
-      <p:sp>
-        <p:nvSpPr>
-          <p:cNvPr id="19" name="TextBox 18"/>
+              <a:t>Sources: S1 · S2 · S3 · S4 · S5</a:t>
+            </a:r>
+          </a:p>
+        </p:txBody>
+      </p:sp>
+      <p:sp>
+        <p:nvSpPr>
+          <p:cNvPr id="20" name="TextBox 19"/>
           <p:cNvSpPr txBox="1"/>
           <p:nvPr/>
         </p:nvSpPr>
@@ -10108,14 +10994,14 @@
               <a:rPr>
                 <a:latin typeface="Inter"/>
               </a:rPr>
-              <a:t>Confidential — prepared for internal investment use · Data as of 2026-10-01 (Form ADV); queue 2026-10-04</a:t>
-            </a:r>
-          </a:p>
-        </p:txBody>
-      </p:sp>
-      <p:sp>
-        <p:nvSpPr>
-          <p:cNvPr id="20" name="TextBox 19"/>
+              <a:t>Confidential — Investment Committee · Data as of 2026-10-01 (Form ADV); queue 2026-10-04</a:t>
+            </a:r>
+          </a:p>
+        </p:txBody>
+      </p:sp>
+      <p:sp>
+        <p:nvSpPr>
+          <p:cNvPr id="21" name="TextBox 20"/>
           <p:cNvSpPr txBox="1"/>
           <p:nvPr/>
         </p:nvSpPr>
@@ -10231,7 +11117,7 @@
         <p:spPr>
           <a:xfrm>
             <a:off x="640080" y="329184"/>
-            <a:ext cx="9875520" cy="182880"/>
+            <a:ext cx="5303520" cy="182880"/>
           </a:xfrm>
           <a:prstGeom prst="rect">
             <a:avLst/>
@@ -10272,6 +11158,48 @@
         </p:nvSpPr>
         <p:spPr>
           <a:xfrm>
+            <a:off x="5897880" y="310896"/>
+            <a:ext cx="4800600" cy="256032"/>
+          </a:xfrm>
+          <a:prstGeom prst="rect">
+            <a:avLst/>
+          </a:prstGeom>
+          <a:noFill/>
+        </p:spPr>
+        <p:txBody>
+          <a:bodyPr wrap="none" lIns="9144" rIns="9144" tIns="9144" bIns="9144" anchor="t">
+            <a:spAutoFit/>
+          </a:bodyPr>
+          <a:lstStyle/>
+          <a:p>
+            <a:pPr algn="r">
+              <a:spcAft>
+                <a:spcPts val="0"/>
+              </a:spcAft>
+              <a:defRPr sz="680" b="1">
+                <a:solidFill>
+                  <a:srgbClr val="4F6B00"/>
+                </a:solidFill>
+                <a:latin typeface="Inter"/>
+              </a:defRPr>
+            </a:pPr>
+            <a:r>
+              <a:rPr>
+                <a:latin typeface="Inter"/>
+              </a:rPr>
+              <a:t>Illustrative, Gradient Maintained — demo data, not the client's holdings or managers</a:t>
+            </a:r>
+          </a:p>
+        </p:txBody>
+      </p:sp>
+      <p:sp>
+        <p:nvSpPr>
+          <p:cNvPr id="5" name="TextBox 4"/>
+          <p:cNvSpPr txBox="1"/>
+          <p:nvPr/>
+        </p:nvSpPr>
+        <p:spPr>
+          <a:xfrm>
             <a:off x="640080" y="566928"/>
             <a:ext cx="10058400" cy="530352"/>
           </a:xfrm>
@@ -10308,7 +11236,7 @@
       </p:sp>
       <p:sp>
         <p:nvSpPr>
-          <p:cNvPr id="5" name="Rectangle 4"/>
+          <p:cNvPr id="6" name="Rectangle 5"/>
           <p:cNvSpPr/>
           <p:nvPr/>
         </p:nvSpPr>
@@ -10357,7 +11285,7 @@
       </p:sp>
       <p:sp>
         <p:nvSpPr>
-          <p:cNvPr id="6" name="Rectangle 5"/>
+          <p:cNvPr id="7" name="Rectangle 6"/>
           <p:cNvSpPr/>
           <p:nvPr/>
         </p:nvSpPr>
@@ -10406,7 +11334,7 @@
       </p:sp>
       <p:sp>
         <p:nvSpPr>
-          <p:cNvPr id="7" name="TextBox 6"/>
+          <p:cNvPr id="8" name="TextBox 7"/>
           <p:cNvSpPr txBox="1"/>
           <p:nvPr/>
         </p:nvSpPr>
@@ -10448,7 +11376,7 @@
       </p:sp>
       <p:sp>
         <p:nvSpPr>
-          <p:cNvPr id="8" name="Rectangle 7"/>
+          <p:cNvPr id="9" name="Rectangle 8"/>
           <p:cNvSpPr/>
           <p:nvPr/>
         </p:nvSpPr>
@@ -10497,7 +11425,7 @@
       </p:sp>
       <p:sp>
         <p:nvSpPr>
-          <p:cNvPr id="9" name="Rectangle 8"/>
+          <p:cNvPr id="10" name="Rectangle 9"/>
           <p:cNvSpPr/>
           <p:nvPr/>
         </p:nvSpPr>
@@ -10546,7 +11474,7 @@
       </p:sp>
       <p:sp>
         <p:nvSpPr>
-          <p:cNvPr id="10" name="TextBox 9"/>
+          <p:cNvPr id="11" name="TextBox 10"/>
           <p:cNvSpPr txBox="1"/>
           <p:nvPr/>
         </p:nvSpPr>
@@ -10588,7 +11516,7 @@
       </p:sp>
       <p:sp>
         <p:nvSpPr>
-          <p:cNvPr id="11" name="TextBox 10"/>
+          <p:cNvPr id="12" name="TextBox 11"/>
           <p:cNvSpPr txBox="1"/>
           <p:nvPr/>
         </p:nvSpPr>
@@ -10623,14 +11551,14 @@
               <a:rPr>
                 <a:latin typeface="Inter"/>
               </a:rPr>
-              <a:t>Observation: One unavailable event-coverage item supports the fictional TEST medium finding [S3]. Why it matters: It focuses review on the principal monitoring gap. Uncertainty: The compact fixture omits…</a:t>
-            </a:r>
-          </a:p>
-        </p:txBody>
-      </p:sp>
-      <p:sp>
-        <p:nvSpPr>
-          <p:cNvPr id="12" name="Rectangle 11"/>
+              <a:t>Observation: One unavailable event-coverage item supports the sample medium finding [S3]. Why it matters: It focuses review on the principal monitoring gap. Uncertainty: The public sample omits some…</a:t>
+            </a:r>
+          </a:p>
+        </p:txBody>
+      </p:sp>
+      <p:sp>
+        <p:nvSpPr>
+          <p:cNvPr id="13" name="Rectangle 12"/>
           <p:cNvSpPr/>
           <p:nvPr/>
         </p:nvSpPr>
@@ -10679,7 +11607,7 @@
       </p:sp>
       <p:sp>
         <p:nvSpPr>
-          <p:cNvPr id="13" name="TextBox 12"/>
+          <p:cNvPr id="14" name="TextBox 13"/>
           <p:cNvSpPr txBox="1"/>
           <p:nvPr/>
         </p:nvSpPr>
@@ -10721,7 +11649,7 @@
       </p:sp>
       <p:sp>
         <p:nvSpPr>
-          <p:cNvPr id="14" name="TextBox 13"/>
+          <p:cNvPr id="15" name="TextBox 14"/>
           <p:cNvSpPr txBox="1"/>
           <p:nvPr/>
         </p:nvSpPr>
@@ -10756,14 +11684,14 @@
               <a:rPr>
                 <a:latin typeface="Inter"/>
               </a:rPr>
-              <a:t>Confidential — prepared for internal investment use · Data as of 2026-10-01 (Form ADV); queue 2026-10-04</a:t>
-            </a:r>
-          </a:p>
-        </p:txBody>
-      </p:sp>
-      <p:sp>
-        <p:nvSpPr>
-          <p:cNvPr id="15" name="TextBox 14"/>
+              <a:t>Confidential — Investment Committee · Data as of 2026-10-01 (Form ADV); queue 2026-10-04</a:t>
+            </a:r>
+          </a:p>
+        </p:txBody>
+      </p:sp>
+      <p:sp>
+        <p:nvSpPr>
+          <p:cNvPr id="16" name="TextBox 15"/>
           <p:cNvSpPr txBox="1"/>
           <p:nvPr/>
         </p:nvSpPr>
@@ -10879,7 +11807,7 @@
         <p:spPr>
           <a:xfrm>
             <a:off x="640080" y="329184"/>
-            <a:ext cx="9875520" cy="182880"/>
+            <a:ext cx="5303520" cy="182880"/>
           </a:xfrm>
           <a:prstGeom prst="rect">
             <a:avLst/>
@@ -10920,6 +11848,48 @@
         </p:nvSpPr>
         <p:spPr>
           <a:xfrm>
+            <a:off x="5897880" y="310896"/>
+            <a:ext cx="4800600" cy="256032"/>
+          </a:xfrm>
+          <a:prstGeom prst="rect">
+            <a:avLst/>
+          </a:prstGeom>
+          <a:noFill/>
+        </p:spPr>
+        <p:txBody>
+          <a:bodyPr wrap="none" lIns="9144" rIns="9144" tIns="9144" bIns="9144" anchor="t">
+            <a:spAutoFit/>
+          </a:bodyPr>
+          <a:lstStyle/>
+          <a:p>
+            <a:pPr algn="r">
+              <a:spcAft>
+                <a:spcPts val="0"/>
+              </a:spcAft>
+              <a:defRPr sz="680" b="1">
+                <a:solidFill>
+                  <a:srgbClr val="4F6B00"/>
+                </a:solidFill>
+                <a:latin typeface="Inter"/>
+              </a:defRPr>
+            </a:pPr>
+            <a:r>
+              <a:rPr>
+                <a:latin typeface="Inter"/>
+              </a:rPr>
+              <a:t>Illustrative, Gradient Maintained — demo data, not the client's holdings or managers</a:t>
+            </a:r>
+          </a:p>
+        </p:txBody>
+      </p:sp>
+      <p:sp>
+        <p:nvSpPr>
+          <p:cNvPr id="5" name="TextBox 4"/>
+          <p:cNvSpPr txBox="1"/>
+          <p:nvPr/>
+        </p:nvSpPr>
+        <p:spPr>
+          <a:xfrm>
             <a:off x="640080" y="566928"/>
             <a:ext cx="10058400" cy="530352"/>
           </a:xfrm>
@@ -10956,7 +11926,7 @@
       </p:sp>
       <p:sp>
         <p:nvSpPr>
-          <p:cNvPr id="5" name="Rectangle 4"/>
+          <p:cNvPr id="6" name="Rectangle 5"/>
           <p:cNvSpPr/>
           <p:nvPr/>
         </p:nvSpPr>
@@ -11005,7 +11975,7 @@
       </p:sp>
       <p:sp>
         <p:nvSpPr>
-          <p:cNvPr id="6" name="Rectangle 5"/>
+          <p:cNvPr id="7" name="Rectangle 6"/>
           <p:cNvSpPr/>
           <p:nvPr/>
         </p:nvSpPr>
@@ -11054,7 +12024,7 @@
       </p:sp>
       <p:sp>
         <p:nvSpPr>
-          <p:cNvPr id="7" name="TextBox 6"/>
+          <p:cNvPr id="8" name="TextBox 7"/>
           <p:cNvSpPr txBox="1"/>
           <p:nvPr/>
         </p:nvSpPr>
@@ -11096,7 +12066,7 @@
       </p:sp>
       <p:sp>
         <p:nvSpPr>
-          <p:cNvPr id="8" name="TextBox 7"/>
+          <p:cNvPr id="9" name="TextBox 8"/>
           <p:cNvSpPr txBox="1"/>
           <p:nvPr/>
         </p:nvSpPr>
@@ -11138,7 +12108,7 @@
       </p:sp>
       <p:sp>
         <p:nvSpPr>
-          <p:cNvPr id="9" name="Rectangle 8"/>
+          <p:cNvPr id="10" name="Rectangle 9"/>
           <p:cNvSpPr/>
           <p:nvPr/>
         </p:nvSpPr>
@@ -11187,7 +12157,7 @@
       </p:sp>
       <p:sp>
         <p:nvSpPr>
-          <p:cNvPr id="10" name="Oval 9"/>
+          <p:cNvPr id="11" name="Oval 10"/>
           <p:cNvSpPr/>
           <p:nvPr/>
         </p:nvSpPr>
@@ -11236,7 +12206,7 @@
       </p:sp>
       <p:sp>
         <p:nvSpPr>
-          <p:cNvPr id="11" name="TextBox 10"/>
+          <p:cNvPr id="12" name="TextBox 11"/>
           <p:cNvSpPr txBox="1"/>
           <p:nvPr/>
         </p:nvSpPr>
@@ -11278,7 +12248,7 @@
       </p:sp>
       <p:sp>
         <p:nvSpPr>
-          <p:cNvPr id="12" name="TextBox 11"/>
+          <p:cNvPr id="13" name="TextBox 12"/>
           <p:cNvSpPr txBox="1"/>
           <p:nvPr/>
         </p:nvSpPr>
@@ -11320,7 +12290,7 @@
       </p:sp>
       <p:sp>
         <p:nvSpPr>
-          <p:cNvPr id="13" name="TextBox 12"/>
+          <p:cNvPr id="14" name="TextBox 13"/>
           <p:cNvSpPr txBox="1"/>
           <p:nvPr/>
         </p:nvSpPr>
@@ -11362,7 +12332,7 @@
       </p:sp>
       <p:sp>
         <p:nvSpPr>
-          <p:cNvPr id="14" name="Oval 13"/>
+          <p:cNvPr id="15" name="Oval 14"/>
           <p:cNvSpPr/>
           <p:nvPr/>
         </p:nvSpPr>
@@ -11411,7 +12381,7 @@
       </p:sp>
       <p:sp>
         <p:nvSpPr>
-          <p:cNvPr id="15" name="TextBox 14"/>
+          <p:cNvPr id="16" name="TextBox 15"/>
           <p:cNvSpPr txBox="1"/>
           <p:nvPr/>
         </p:nvSpPr>
@@ -11453,7 +12423,7 @@
       </p:sp>
       <p:sp>
         <p:nvSpPr>
-          <p:cNvPr id="16" name="TextBox 15"/>
+          <p:cNvPr id="17" name="TextBox 16"/>
           <p:cNvSpPr txBox="1"/>
           <p:nvPr/>
         </p:nvSpPr>
@@ -11495,7 +12465,7 @@
       </p:sp>
       <p:sp>
         <p:nvSpPr>
-          <p:cNvPr id="17" name="TextBox 16"/>
+          <p:cNvPr id="18" name="TextBox 17"/>
           <p:cNvSpPr txBox="1"/>
           <p:nvPr/>
         </p:nvSpPr>
@@ -11537,7 +12507,7 @@
       </p:sp>
       <p:sp>
         <p:nvSpPr>
-          <p:cNvPr id="18" name="Rectangle 17"/>
+          <p:cNvPr id="19" name="Rectangle 18"/>
           <p:cNvSpPr/>
           <p:nvPr/>
         </p:nvSpPr>
@@ -11586,7 +12556,7 @@
       </p:sp>
       <p:sp>
         <p:nvSpPr>
-          <p:cNvPr id="19" name="TextBox 18"/>
+          <p:cNvPr id="20" name="TextBox 19"/>
           <p:cNvSpPr txBox="1"/>
           <p:nvPr/>
         </p:nvSpPr>
@@ -11628,7 +12598,7 @@
       </p:sp>
       <p:sp>
         <p:nvSpPr>
-          <p:cNvPr id="20" name="TextBox 19"/>
+          <p:cNvPr id="21" name="TextBox 20"/>
           <p:cNvSpPr txBox="1"/>
           <p:nvPr/>
         </p:nvSpPr>
@@ -11663,14 +12633,14 @@
               <a:rPr>
                 <a:latin typeface="Inter"/>
               </a:rPr>
-              <a:t>Confidential — prepared for internal investment use · Data as of 2026-10-01 (Form ADV); queue 2026-10-04</a:t>
-            </a:r>
-          </a:p>
-        </p:txBody>
-      </p:sp>
-      <p:sp>
-        <p:nvSpPr>
-          <p:cNvPr id="21" name="TextBox 20"/>
+              <a:t>Confidential — Investment Committee · Data as of 2026-10-01 (Form ADV); queue 2026-10-04</a:t>
+            </a:r>
+          </a:p>
+        </p:txBody>
+      </p:sp>
+      <p:sp>
+        <p:nvSpPr>
+          <p:cNvPr id="22" name="TextBox 21"/>
           <p:cNvSpPr txBox="1"/>
           <p:nvPr/>
         </p:nvSpPr>
@@ -11786,7 +12756,7 @@
         <p:spPr>
           <a:xfrm>
             <a:off x="640080" y="329184"/>
-            <a:ext cx="9875520" cy="182880"/>
+            <a:ext cx="5303520" cy="182880"/>
           </a:xfrm>
           <a:prstGeom prst="rect">
             <a:avLst/>
@@ -11827,6 +12797,48 @@
         </p:nvSpPr>
         <p:spPr>
           <a:xfrm>
+            <a:off x="5897880" y="310896"/>
+            <a:ext cx="4800600" cy="256032"/>
+          </a:xfrm>
+          <a:prstGeom prst="rect">
+            <a:avLst/>
+          </a:prstGeom>
+          <a:noFill/>
+        </p:spPr>
+        <p:txBody>
+          <a:bodyPr wrap="none" lIns="9144" rIns="9144" tIns="9144" bIns="9144" anchor="t">
+            <a:spAutoFit/>
+          </a:bodyPr>
+          <a:lstStyle/>
+          <a:p>
+            <a:pPr algn="r">
+              <a:spcAft>
+                <a:spcPts val="0"/>
+              </a:spcAft>
+              <a:defRPr sz="680" b="1">
+                <a:solidFill>
+                  <a:srgbClr val="4F6B00"/>
+                </a:solidFill>
+                <a:latin typeface="Inter"/>
+              </a:defRPr>
+            </a:pPr>
+            <a:r>
+              <a:rPr>
+                <a:latin typeface="Inter"/>
+              </a:rPr>
+              <a:t>Illustrative, Gradient Maintained — demo data, not the client's holdings or managers</a:t>
+            </a:r>
+          </a:p>
+        </p:txBody>
+      </p:sp>
+      <p:sp>
+        <p:nvSpPr>
+          <p:cNvPr id="5" name="TextBox 4"/>
+          <p:cNvSpPr txBox="1"/>
+          <p:nvPr/>
+        </p:nvSpPr>
+        <p:spPr>
+          <a:xfrm>
             <a:off x="640080" y="566928"/>
             <a:ext cx="10058400" cy="530352"/>
           </a:xfrm>
@@ -11863,7 +12875,7 @@
       </p:sp>
       <p:sp>
         <p:nvSpPr>
-          <p:cNvPr id="5" name="Rectangle 4"/>
+          <p:cNvPr id="6" name="Rectangle 5"/>
           <p:cNvSpPr/>
           <p:nvPr/>
         </p:nvSpPr>
@@ -11912,7 +12924,7 @@
       </p:sp>
       <p:sp>
         <p:nvSpPr>
-          <p:cNvPr id="6" name="Rectangle 5"/>
+          <p:cNvPr id="7" name="Rectangle 6"/>
           <p:cNvSpPr/>
           <p:nvPr/>
         </p:nvSpPr>
@@ -11961,7 +12973,7 @@
       </p:sp>
       <p:sp>
         <p:nvSpPr>
-          <p:cNvPr id="7" name="TextBox 6"/>
+          <p:cNvPr id="8" name="TextBox 7"/>
           <p:cNvSpPr txBox="1"/>
           <p:nvPr/>
         </p:nvSpPr>
@@ -12003,7 +13015,7 @@
       </p:sp>
       <p:graphicFrame>
         <p:nvGraphicFramePr>
-          <p:cNvPr id="8" name="Table 7"/>
+          <p:cNvPr id="9" name="Table 8"/>
           <p:cNvGraphicFramePr>
             <a:graphicFrameLocks noGrp="1"/>
           </p:cNvGraphicFramePr>
@@ -12263,7 +13275,7 @@
                         <a:rPr>
                           <a:latin typeface="Inter"/>
                         </a:rPr>
-                        <a:t>Ridgeview Example Advisors (parent firm)</a:t>
+                        <a:t>Ridgeview Advisors (parent firm)</a:t>
                       </a:r>
                     </a:p>
                   </a:txBody>
@@ -12361,7 +13373,7 @@
       </p:graphicFrame>
       <p:sp>
         <p:nvSpPr>
-          <p:cNvPr id="9" name="TextBox 8"/>
+          <p:cNvPr id="10" name="TextBox 9"/>
           <p:cNvSpPr txBox="1"/>
           <p:nvPr/>
         </p:nvSpPr>
@@ -12403,7 +13415,7 @@
       </p:sp>
       <p:sp>
         <p:nvSpPr>
-          <p:cNvPr id="10" name="Rectangle 9"/>
+          <p:cNvPr id="11" name="Rectangle 10"/>
           <p:cNvSpPr/>
           <p:nvPr/>
         </p:nvSpPr>
@@ -12452,7 +13464,7 @@
       </p:sp>
       <p:sp>
         <p:nvSpPr>
-          <p:cNvPr id="11" name="Rectangle 10"/>
+          <p:cNvPr id="12" name="Rectangle 11"/>
           <p:cNvSpPr/>
           <p:nvPr/>
         </p:nvSpPr>
@@ -12501,7 +13513,7 @@
       </p:sp>
       <p:sp>
         <p:nvSpPr>
-          <p:cNvPr id="12" name="TextBox 11"/>
+          <p:cNvPr id="13" name="TextBox 12"/>
           <p:cNvSpPr txBox="1"/>
           <p:nvPr/>
         </p:nvSpPr>
@@ -12543,7 +13555,7 @@
       </p:sp>
       <p:sp>
         <p:nvSpPr>
-          <p:cNvPr id="13" name="TextBox 12"/>
+          <p:cNvPr id="14" name="TextBox 13"/>
           <p:cNvSpPr txBox="1"/>
           <p:nvPr/>
         </p:nvSpPr>
@@ -12585,7 +13597,7 @@
       </p:sp>
       <p:sp>
         <p:nvSpPr>
-          <p:cNvPr id="14" name="Rectangle 13"/>
+          <p:cNvPr id="15" name="Rectangle 14"/>
           <p:cNvSpPr/>
           <p:nvPr/>
         </p:nvSpPr>
@@ -12634,7 +13646,7 @@
       </p:sp>
       <p:sp>
         <p:nvSpPr>
-          <p:cNvPr id="15" name="TextBox 14"/>
+          <p:cNvPr id="16" name="TextBox 15"/>
           <p:cNvSpPr txBox="1"/>
           <p:nvPr/>
         </p:nvSpPr>
@@ -12676,7 +13688,7 @@
       </p:sp>
       <p:sp>
         <p:nvSpPr>
-          <p:cNvPr id="16" name="TextBox 15"/>
+          <p:cNvPr id="17" name="TextBox 16"/>
           <p:cNvSpPr txBox="1"/>
           <p:nvPr/>
         </p:nvSpPr>
@@ -12711,14 +13723,14 @@
               <a:rPr>
                 <a:latin typeface="Inter"/>
               </a:rPr>
-              <a:t>Confidential — prepared for internal investment use · Data as of 2026-10-01 (Form ADV); queue 2026-10-04</a:t>
-            </a:r>
-          </a:p>
-        </p:txBody>
-      </p:sp>
-      <p:sp>
-        <p:nvSpPr>
-          <p:cNvPr id="17" name="TextBox 16"/>
+              <a:t>Confidential — Investment Committee · Data as of 2026-10-01 (Form ADV); queue 2026-10-04</a:t>
+            </a:r>
+          </a:p>
+        </p:txBody>
+      </p:sp>
+      <p:sp>
+        <p:nvSpPr>
+          <p:cNvPr id="18" name="TextBox 17"/>
           <p:cNvSpPr txBox="1"/>
           <p:nvPr/>
         </p:nvSpPr>
@@ -12834,7 +13846,7 @@
         <p:spPr>
           <a:xfrm>
             <a:off x="640080" y="329184"/>
-            <a:ext cx="9875520" cy="182880"/>
+            <a:ext cx="5303520" cy="182880"/>
           </a:xfrm>
           <a:prstGeom prst="rect">
             <a:avLst/>
@@ -12875,6 +13887,48 @@
         </p:nvSpPr>
         <p:spPr>
           <a:xfrm>
+            <a:off x="5897880" y="310896"/>
+            <a:ext cx="4800600" cy="256032"/>
+          </a:xfrm>
+          <a:prstGeom prst="rect">
+            <a:avLst/>
+          </a:prstGeom>
+          <a:noFill/>
+        </p:spPr>
+        <p:txBody>
+          <a:bodyPr wrap="none" lIns="9144" rIns="9144" tIns="9144" bIns="9144" anchor="t">
+            <a:spAutoFit/>
+          </a:bodyPr>
+          <a:lstStyle/>
+          <a:p>
+            <a:pPr algn="r">
+              <a:spcAft>
+                <a:spcPts val="0"/>
+              </a:spcAft>
+              <a:defRPr sz="680" b="1">
+                <a:solidFill>
+                  <a:srgbClr val="4F6B00"/>
+                </a:solidFill>
+                <a:latin typeface="Inter"/>
+              </a:defRPr>
+            </a:pPr>
+            <a:r>
+              <a:rPr>
+                <a:latin typeface="Inter"/>
+              </a:rPr>
+              <a:t>Illustrative, Gradient Maintained — demo data, not the client's holdings or managers</a:t>
+            </a:r>
+          </a:p>
+        </p:txBody>
+      </p:sp>
+      <p:sp>
+        <p:nvSpPr>
+          <p:cNvPr id="5" name="TextBox 4"/>
+          <p:cNvSpPr txBox="1"/>
+          <p:nvPr/>
+        </p:nvSpPr>
+        <p:spPr>
+          <a:xfrm>
             <a:off x="640080" y="566928"/>
             <a:ext cx="10058400" cy="530352"/>
           </a:xfrm>
@@ -12911,7 +13965,7 @@
       </p:sp>
       <p:sp>
         <p:nvSpPr>
-          <p:cNvPr id="5" name="Rectangle 4"/>
+          <p:cNvPr id="6" name="Rectangle 5"/>
           <p:cNvSpPr/>
           <p:nvPr/>
         </p:nvSpPr>
@@ -12960,7 +14014,7 @@
       </p:sp>
       <p:sp>
         <p:nvSpPr>
-          <p:cNvPr id="6" name="Rectangle 5"/>
+          <p:cNvPr id="7" name="Rectangle 6"/>
           <p:cNvSpPr/>
           <p:nvPr/>
         </p:nvSpPr>
@@ -13009,7 +14063,7 @@
       </p:sp>
       <p:sp>
         <p:nvSpPr>
-          <p:cNvPr id="7" name="TextBox 6"/>
+          <p:cNvPr id="8" name="TextBox 7"/>
           <p:cNvSpPr txBox="1"/>
           <p:nvPr/>
         </p:nvSpPr>
@@ -13051,7 +14105,7 @@
       </p:sp>
       <p:graphicFrame>
         <p:nvGraphicFramePr>
-          <p:cNvPr id="8" name="Table 7"/>
+          <p:cNvPr id="9" name="Table 8"/>
           <p:cNvGraphicFramePr>
             <a:graphicFrameLocks noGrp="1"/>
           </p:cNvGraphicFramePr>
@@ -13659,7 +14713,7 @@
       </p:graphicFrame>
       <p:sp>
         <p:nvSpPr>
-          <p:cNvPr id="9" name="Rectangle 8"/>
+          <p:cNvPr id="10" name="Rectangle 9"/>
           <p:cNvSpPr/>
           <p:nvPr/>
         </p:nvSpPr>
@@ -13708,7 +14762,7 @@
       </p:sp>
       <p:sp>
         <p:nvSpPr>
-          <p:cNvPr id="10" name="TextBox 9"/>
+          <p:cNvPr id="11" name="TextBox 10"/>
           <p:cNvSpPr txBox="1"/>
           <p:nvPr/>
         </p:nvSpPr>
@@ -13750,7 +14804,7 @@
       </p:sp>
       <p:sp>
         <p:nvSpPr>
-          <p:cNvPr id="11" name="TextBox 10"/>
+          <p:cNvPr id="12" name="TextBox 11"/>
           <p:cNvSpPr txBox="1"/>
           <p:nvPr/>
         </p:nvSpPr>
@@ -13785,14 +14839,14 @@
               <a:rPr>
                 <a:latin typeface="Inter"/>
               </a:rPr>
-              <a:t>Confidential — prepared for internal investment use · Data as of 2026-10-01 (Form ADV); queue 2026-10-04</a:t>
-            </a:r>
-          </a:p>
-        </p:txBody>
-      </p:sp>
-      <p:sp>
-        <p:nvSpPr>
-          <p:cNvPr id="12" name="TextBox 11"/>
+              <a:t>Confidential — Investment Committee · Data as of 2026-10-01 (Form ADV); queue 2026-10-04</a:t>
+            </a:r>
+          </a:p>
+        </p:txBody>
+      </p:sp>
+      <p:sp>
+        <p:nvSpPr>
+          <p:cNvPr id="13" name="TextBox 12"/>
           <p:cNvSpPr txBox="1"/>
           <p:nvPr/>
         </p:nvSpPr>

--- a/plugins/gradient-cio/assets/examples/gradient-odd-manager-monitor.pptx
+++ b/plugins/gradient-cio/assets/examples/gradient-odd-manager-monitor.pptx
@@ -15,6 +15,7 @@
     <ns0:sldId id="263" ns1:id="rId14"/>
     <ns0:sldId id="264" ns1:id="rId15"/>
     <ns0:sldId id="265" ns1:id="rId16"/>
+    <ns0:sldId id="266" ns1:id="rId17"/>
   </ns0:sldIdLst>
   <ns0:sldSz cx="12191695" cy="6858000" type="screen16x9"/>
   <ns0:notesSz cx="6858000" cy="9144000"/>
@@ -3242,7 +3243,7 @@
               <a:rPr>
                 <a:latin typeface="Inter"/>
               </a:rPr>
-              <a:t>ROSTER FUNDS</a:t>
+              <a:t>MANAGERS</a:t>
             </a:r>
           </a:p>
         </p:txBody>
@@ -3284,7 +3285,7 @@
               <a:rPr>
                 <a:latin typeface="Inter"/>
               </a:rPr>
-              <a:t>1 of 3 slots</a:t>
+              <a:t>1</a:t>
             </a:r>
           </a:p>
         </p:txBody>
@@ -3326,7 +3327,7 @@
               <a:rPr>
                 <a:latin typeface="Inter"/>
               </a:rPr>
-              <a:t>MANAGERS</a:t>
+              <a:t>CHANGES SINCE REVIEW</a:t>
             </a:r>
           </a:p>
         </p:txBody>
@@ -3381,391 +3382,6 @@
         </p:nvSpPr>
         <p:spPr>
           <a:xfrm>
-            <a:off x="685800" y="4937759"/>
-            <a:ext cx="4709160" cy="182880"/>
-          </a:xfrm>
-          <a:prstGeom prst="rect">
-            <a:avLst/>
-          </a:prstGeom>
-          <a:noFill/>
-        </p:spPr>
-        <p:txBody>
-          <a:bodyPr wrap="none" lIns="9144" rIns="9144" tIns="9144" bIns="9144" anchor="t">
-            <a:spAutoFit/>
-          </a:bodyPr>
-          <a:lstStyle/>
-          <a:p>
-            <a:pPr algn="l">
-              <a:spcAft>
-                <a:spcPts val="0"/>
-              </a:spcAft>
-              <a:defRPr sz="700" b="1">
-                <a:solidFill>
-                  <a:srgbClr val="8A94A1"/>
-                </a:solidFill>
-                <a:latin typeface="Inter"/>
-              </a:defRPr>
-            </a:pPr>
-            <a:r>
-              <a:rPr>
-                <a:latin typeface="Inter"/>
-              </a:rPr>
-              <a:t>NEW ALERTS</a:t>
-            </a:r>
-          </a:p>
-        </p:txBody>
-      </p:sp>
-      <p:sp>
-        <p:nvSpPr>
-          <p:cNvPr id="14" name="TextBox 13"/>
-          <p:cNvSpPr txBox="1"/>
-          <p:nvPr/>
-        </p:nvSpPr>
-        <p:spPr>
-          <a:xfrm>
-            <a:off x="685800" y="5129783"/>
-            <a:ext cx="4709160" cy="310896"/>
-          </a:xfrm>
-          <a:prstGeom prst="rect">
-            <a:avLst/>
-          </a:prstGeom>
-          <a:noFill/>
-        </p:spPr>
-        <p:txBody>
-          <a:bodyPr wrap="none" lIns="9144" rIns="9144" tIns="9144" bIns="9144" anchor="t">
-            <a:spAutoFit/>
-          </a:bodyPr>
-          <a:lstStyle/>
-          <a:p>
-            <a:pPr algn="l">
-              <a:spcAft>
-                <a:spcPts val="0"/>
-              </a:spcAft>
-              <a:defRPr sz="1000" b="1">
-                <a:solidFill>
-                  <a:srgbClr val="FFFFFF"/>
-                </a:solidFill>
-                <a:latin typeface="Inter"/>
-              </a:defRPr>
-            </a:pPr>
-            <a:r>
-              <a:rPr>
-                <a:latin typeface="Inter"/>
-              </a:rPr>
-              <a:t>0</a:t>
-            </a:r>
-          </a:p>
-        </p:txBody>
-      </p:sp>
-      <p:sp>
-        <p:nvSpPr>
-          <p:cNvPr id="15" name="TextBox 14"/>
-          <p:cNvSpPr txBox="1"/>
-          <p:nvPr/>
-        </p:nvSpPr>
-        <p:spPr>
-          <a:xfrm>
-            <a:off x="5852160" y="4937759"/>
-            <a:ext cx="4709160" cy="182880"/>
-          </a:xfrm>
-          <a:prstGeom prst="rect">
-            <a:avLst/>
-          </a:prstGeom>
-          <a:noFill/>
-        </p:spPr>
-        <p:txBody>
-          <a:bodyPr wrap="none" lIns="9144" rIns="9144" tIns="9144" bIns="9144" anchor="t">
-            <a:spAutoFit/>
-          </a:bodyPr>
-          <a:lstStyle/>
-          <a:p>
-            <a:pPr algn="l">
-              <a:spcAft>
-                <a:spcPts val="0"/>
-              </a:spcAft>
-              <a:defRPr sz="700" b="1">
-                <a:solidFill>
-                  <a:srgbClr val="8A94A1"/>
-                </a:solidFill>
-                <a:latin typeface="Inter"/>
-              </a:defRPr>
-            </a:pPr>
-            <a:r>
-              <a:rPr>
-                <a:latin typeface="Inter"/>
-              </a:rPr>
-              <a:t>CHANGES SINCE REVIEW</a:t>
-            </a:r>
-          </a:p>
-        </p:txBody>
-      </p:sp>
-      <p:sp>
-        <p:nvSpPr>
-          <p:cNvPr id="16" name="TextBox 15"/>
-          <p:cNvSpPr txBox="1"/>
-          <p:nvPr/>
-        </p:nvSpPr>
-        <p:spPr>
-          <a:xfrm>
-            <a:off x="5852160" y="5129783"/>
-            <a:ext cx="4709160" cy="310896"/>
-          </a:xfrm>
-          <a:prstGeom prst="rect">
-            <a:avLst/>
-          </a:prstGeom>
-          <a:noFill/>
-        </p:spPr>
-        <p:txBody>
-          <a:bodyPr wrap="none" lIns="9144" rIns="9144" tIns="9144" bIns="9144" anchor="t">
-            <a:spAutoFit/>
-          </a:bodyPr>
-          <a:lstStyle/>
-          <a:p>
-            <a:pPr algn="l">
-              <a:spcAft>
-                <a:spcPts val="0"/>
-              </a:spcAft>
-              <a:defRPr sz="1000" b="1">
-                <a:solidFill>
-                  <a:srgbClr val="FFFFFF"/>
-                </a:solidFill>
-                <a:latin typeface="Inter"/>
-              </a:defRPr>
-            </a:pPr>
-            <a:r>
-              <a:rPr>
-                <a:latin typeface="Inter"/>
-              </a:rPr>
-              <a:t>1</a:t>
-            </a:r>
-          </a:p>
-        </p:txBody>
-      </p:sp>
-      <p:sp>
-        <p:nvSpPr>
-          <p:cNvPr id="17" name="Rectangle 16"/>
-          <p:cNvSpPr/>
-          <p:nvPr/>
-        </p:nvSpPr>
-        <p:spPr>
-          <a:xfrm>
-            <a:off x="685800" y="5687568"/>
-            <a:ext cx="3337560" cy="530352"/>
-          </a:xfrm>
-          <a:prstGeom prst="rect">
-            <a:avLst/>
-          </a:prstGeom>
-          <a:solidFill>
-            <a:srgbClr val="F2A93B"/>
-          </a:solidFill>
-          <a:ln>
-            <a:solidFill>
-              <a:srgbClr val="F2A93B"/>
-            </a:solidFill>
-          </a:ln>
-        </p:spPr>
-        <p:style>
-          <a:lnRef idx="1">
-            <a:schemeClr val="accent1"/>
-          </a:lnRef>
-          <a:fillRef idx="3">
-            <a:schemeClr val="accent1"/>
-          </a:fillRef>
-          <a:effectRef idx="2">
-            <a:schemeClr val="accent1"/>
-          </a:effectRef>
-          <a:fontRef idx="minor">
-            <a:schemeClr val="lt1"/>
-          </a:fontRef>
-        </p:style>
-        <p:txBody>
-          <a:bodyPr rtlCol="0" anchor="ctr"/>
-          <a:lstStyle/>
-          <a:p>
-            <a:pPr algn="ctr">
-              <a:defRPr>
-                <a:latin typeface="Inter"/>
-              </a:defRPr>
-            </a:pPr>
-          </a:p>
-        </p:txBody>
-      </p:sp>
-      <p:sp>
-        <p:nvSpPr>
-          <p:cNvPr id="18" name="TextBox 17"/>
-          <p:cNvSpPr txBox="1"/>
-          <p:nvPr/>
-        </p:nvSpPr>
-        <p:spPr>
-          <a:xfrm>
-            <a:off x="822960" y="5760720"/>
-            <a:ext cx="3063240" cy="128016"/>
-          </a:xfrm>
-          <a:prstGeom prst="rect">
-            <a:avLst/>
-          </a:prstGeom>
-          <a:noFill/>
-        </p:spPr>
-        <p:txBody>
-          <a:bodyPr wrap="none" lIns="9144" rIns="9144" tIns="9144" bIns="9144" anchor="t">
-            <a:spAutoFit/>
-          </a:bodyPr>
-          <a:lstStyle/>
-          <a:p>
-            <a:pPr algn="l">
-              <a:spcAft>
-                <a:spcPts val="0"/>
-              </a:spcAft>
-              <a:defRPr sz="620" b="1">
-                <a:solidFill>
-                  <a:srgbClr val="0D1117"/>
-                </a:solidFill>
-                <a:latin typeface="Inter"/>
-              </a:defRPr>
-            </a:pPr>
-            <a:r>
-              <a:rPr>
-                <a:latin typeface="Inter"/>
-              </a:rPr>
-              <a:t>THIS WEEK</a:t>
-            </a:r>
-          </a:p>
-        </p:txBody>
-      </p:sp>
-      <p:sp>
-        <p:nvSpPr>
-          <p:cNvPr id="19" name="TextBox 18"/>
-          <p:cNvSpPr txBox="1"/>
-          <p:nvPr/>
-        </p:nvSpPr>
-        <p:spPr>
-          <a:xfrm>
-            <a:off x="822960" y="5916168"/>
-            <a:ext cx="3063240" cy="182880"/>
-          </a:xfrm>
-          <a:prstGeom prst="rect">
-            <a:avLst/>
-          </a:prstGeom>
-          <a:noFill/>
-        </p:spPr>
-        <p:txBody>
-          <a:bodyPr wrap="none" lIns="9144" rIns="9144" tIns="9144" bIns="9144" anchor="t">
-            <a:spAutoFit/>
-          </a:bodyPr>
-          <a:lstStyle/>
-          <a:p>
-            <a:pPr algn="l">
-              <a:spcAft>
-                <a:spcPts val="0"/>
-              </a:spcAft>
-              <a:defRPr sz="900" b="1">
-                <a:solidFill>
-                  <a:srgbClr val="0D1117"/>
-                </a:solidFill>
-                <a:latin typeface="Inter"/>
-              </a:defRPr>
-            </a:pPr>
-            <a:r>
-              <a:rPr>
-                <a:latin typeface="Inter"/>
-              </a:rPr>
-              <a:t>1 item to review</a:t>
-            </a:r>
-          </a:p>
-        </p:txBody>
-      </p:sp>
-      <p:sp>
-        <p:nvSpPr>
-          <p:cNvPr id="20" name="TextBox 19"/>
-          <p:cNvSpPr txBox="1"/>
-          <p:nvPr/>
-        </p:nvSpPr>
-        <p:spPr>
-          <a:xfrm>
-            <a:off x="4297680" y="5733288"/>
-            <a:ext cx="3108960" cy="164592"/>
-          </a:xfrm>
-          <a:prstGeom prst="rect">
-            <a:avLst/>
-          </a:prstGeom>
-          <a:noFill/>
-        </p:spPr>
-        <p:txBody>
-          <a:bodyPr wrap="none" lIns="9144" rIns="9144" tIns="9144" bIns="9144" anchor="t">
-            <a:spAutoFit/>
-          </a:bodyPr>
-          <a:lstStyle/>
-          <a:p>
-            <a:pPr algn="l">
-              <a:spcAft>
-                <a:spcPts val="0"/>
-              </a:spcAft>
-              <a:defRPr sz="650" b="1">
-                <a:solidFill>
-                  <a:srgbClr val="8A94A1"/>
-                </a:solidFill>
-                <a:latin typeface="Inter"/>
-              </a:defRPr>
-            </a:pPr>
-            <a:r>
-              <a:rPr>
-                <a:latin typeface="Inter"/>
-              </a:rPr>
-              <a:t>ROSTER REVIEWED</a:t>
-            </a:r>
-          </a:p>
-        </p:txBody>
-      </p:sp>
-      <p:sp>
-        <p:nvSpPr>
-          <p:cNvPr id="21" name="TextBox 20"/>
-          <p:cNvSpPr txBox="1"/>
-          <p:nvPr/>
-        </p:nvSpPr>
-        <p:spPr>
-          <a:xfrm>
-            <a:off x="4297680" y="5934456"/>
-            <a:ext cx="3108960" cy="201168"/>
-          </a:xfrm>
-          <a:prstGeom prst="rect">
-            <a:avLst/>
-          </a:prstGeom>
-          <a:noFill/>
-        </p:spPr>
-        <p:txBody>
-          <a:bodyPr wrap="none" lIns="9144" rIns="9144" tIns="9144" bIns="9144" anchor="t">
-            <a:spAutoFit/>
-          </a:bodyPr>
-          <a:lstStyle/>
-          <a:p>
-            <a:pPr algn="l">
-              <a:spcAft>
-                <a:spcPts val="0"/>
-              </a:spcAft>
-              <a:defRPr sz="800" b="1">
-                <a:solidFill>
-                  <a:srgbClr val="FFFFFF"/>
-                </a:solidFill>
-                <a:latin typeface="Inter"/>
-              </a:defRPr>
-            </a:pPr>
-            <a:r>
-              <a:rPr>
-                <a:latin typeface="Inter"/>
-              </a:rPr>
-              <a:t>2 of 2 · Complete</a:t>
-            </a:r>
-          </a:p>
-        </p:txBody>
-      </p:sp>
-      <p:sp>
-        <p:nvSpPr>
-          <p:cNvPr id="22" name="TextBox 21"/>
-          <p:cNvSpPr txBox="1"/>
-          <p:nvPr/>
-        </p:nvSpPr>
-        <p:spPr>
-          <a:xfrm>
             <a:off x="685800" y="6400800"/>
             <a:ext cx="8046720" cy="146304"/>
           </a:xfrm>
@@ -3802,7 +3418,7 @@
       </p:sp>
       <p:sp>
         <p:nvSpPr>
-          <p:cNvPr id="23" name="TextBox 22"/>
+          <p:cNvPr id="14" name="TextBox 13"/>
           <p:cNvSpPr txBox="1"/>
           <p:nvPr/>
         </p:nvSpPr>
@@ -3844,7 +3460,7 @@
       </p:sp>
       <p:sp>
         <p:nvSpPr>
-          <p:cNvPr id="24" name="TextBox 23"/>
+          <p:cNvPr id="15" name="TextBox 14"/>
           <p:cNvSpPr txBox="1"/>
           <p:nvPr/>
         </p:nvSpPr>
@@ -3959,48 +3575,6 @@
         </p:nvSpPr>
         <p:spPr>
           <a:xfrm>
-            <a:off x="5897880" y="310896"/>
-            <a:ext cx="4800600" cy="256032"/>
-          </a:xfrm>
-          <a:prstGeom prst="rect">
-            <a:avLst/>
-          </a:prstGeom>
-          <a:noFill/>
-        </p:spPr>
-        <p:txBody>
-          <a:bodyPr wrap="none" lIns="9144" rIns="9144" tIns="9144" bIns="9144" anchor="t">
-            <a:spAutoFit/>
-          </a:bodyPr>
-          <a:lstStyle/>
-          <a:p>
-            <a:pPr algn="r">
-              <a:spcAft>
-                <a:spcPts val="0"/>
-              </a:spcAft>
-              <a:defRPr sz="680" b="1">
-                <a:solidFill>
-                  <a:srgbClr val="4F6B00"/>
-                </a:solidFill>
-                <a:latin typeface="Inter"/>
-              </a:defRPr>
-            </a:pPr>
-            <a:r>
-              <a:rPr>
-                <a:latin typeface="Inter"/>
-              </a:rPr>
-              <a:t>Illustrative, Gradient Maintained — demo data, not the client's holdings or managers</a:t>
-            </a:r>
-          </a:p>
-        </p:txBody>
-      </p:sp>
-      <p:sp>
-        <p:nvSpPr>
-          <p:cNvPr id="4" name="TextBox 3"/>
-          <p:cNvSpPr txBox="1"/>
-          <p:nvPr/>
-        </p:nvSpPr>
-        <p:spPr>
-          <a:xfrm>
             <a:off x="640080" y="566928"/>
             <a:ext cx="10058400" cy="530352"/>
           </a:xfrm>
@@ -4037,7 +3611,7 @@
       </p:sp>
       <p:sp>
         <p:nvSpPr>
-          <p:cNvPr id="5" name="Rectangle 4"/>
+          <p:cNvPr id="4" name="Rectangle 3"/>
           <p:cNvSpPr/>
           <p:nvPr/>
         </p:nvSpPr>
@@ -4086,7 +3660,7 @@
       </p:sp>
       <p:sp>
         <p:nvSpPr>
-          <p:cNvPr id="6" name="Rectangle 5"/>
+          <p:cNvPr id="5" name="Rectangle 4"/>
           <p:cNvSpPr/>
           <p:nvPr/>
         </p:nvSpPr>
@@ -4135,7 +3709,7 @@
       </p:sp>
       <p:sp>
         <p:nvSpPr>
-          <p:cNvPr id="7" name="TextBox 6"/>
+          <p:cNvPr id="6" name="TextBox 5"/>
           <p:cNvSpPr txBox="1"/>
           <p:nvPr/>
         </p:nvSpPr>
@@ -4175,6 +3749,67 @@
           </a:p>
         </p:txBody>
       </p:sp>
+      <p:sp>
+        <p:nvSpPr>
+          <p:cNvPr id="7" name="TextBox 6"/>
+          <p:cNvSpPr txBox="1"/>
+          <p:nvPr/>
+        </p:nvSpPr>
+        <p:spPr>
+          <a:xfrm>
+            <a:off x="640080" y="1325880"/>
+            <a:ext cx="10908792" cy="1539854"/>
+          </a:xfrm>
+          <a:prstGeom prst="rect">
+            <a:avLst/>
+          </a:prstGeom>
+          <a:noFill/>
+        </p:spPr>
+        <p:txBody>
+          <a:bodyPr wrap="none" lIns="9144" rIns="9144" tIns="9144" bIns="9144" anchor="t">
+            <a:spAutoFit/>
+          </a:bodyPr>
+          <a:lstStyle/>
+          <a:p>
+            <a:pPr algn="l">
+              <a:spcAft>
+                <a:spcPts val="500"/>
+              </a:spcAft>
+              <a:defRPr sz="1050" b="0">
+                <a:solidFill>
+                  <a:srgbClr val="0D1117"/>
+                </a:solidFill>
+                <a:latin typeface="Inter"/>
+              </a:defRPr>
+            </a:pPr>
+            <a:r>
+              <a:rPr>
+                <a:latin typeface="Inter"/>
+              </a:rPr>
+              <a:t>•  Window: 2026-09-28 to 2026-10-04. Severity: high = tier-1 alert, new red flag, overdue high finding or overdue review; medium = material change since review, tier-2 alert, open medium finding, review due within 30 days; low = everything else.</a:t>
+            </a:r>
+          </a:p>
+          <a:p>
+            <a:pPr algn="l">
+              <a:spcAft>
+                <a:spcPts val="500"/>
+              </a:spcAft>
+              <a:defRPr sz="1050" b="0">
+                <a:solidFill>
+                  <a:srgbClr val="0D1117"/>
+                </a:solidFill>
+                <a:latin typeface="Inter"/>
+              </a:defRPr>
+            </a:pPr>
+            <a:r>
+              <a:rPr>
+                <a:latin typeface="Inter"/>
+              </a:rPr>
+              <a:t>•  Form ADV is adviser-reported and not verified by the SEC. This digest is a monitoring aid, not investment, legal or compliance advice.</a:t>
+            </a:r>
+          </a:p>
+        </p:txBody>
+      </p:sp>
       <p:graphicFrame>
         <p:nvGraphicFramePr>
           <p:cNvPr id="8" name="Table 7"/>
@@ -4184,8 +3819,8 @@
           <p:nvPr/>
         </p:nvGraphicFramePr>
         <p:xfrm>
-          <a:off x="640080" y="1325880"/>
-          <a:ext cx="10908792" cy="2706387"/>
+          <a:off x="640080" y="2975462"/>
+          <a:ext cx="10908792" cy="3041289"/>
         </p:xfrm>
         <a:graphic>
           <a:graphicData uri="http://schemas.openxmlformats.org/drawingml/2006/table">
@@ -4195,16 +3830,12 @@
               </a:tblPr>
               <a:tblGrid>
                 <a:gridCol w="2011680"/>
-                <a:gridCol w="1112139"/>
-                <a:gridCol w="1112139"/>
-                <a:gridCol w="1112139"/>
-                <a:gridCol w="1112139"/>
-                <a:gridCol w="1112139"/>
-                <a:gridCol w="1112139"/>
-                <a:gridCol w="1112139"/>
-                <a:gridCol w="1112139"/>
+                <a:gridCol w="2224278"/>
+                <a:gridCol w="2224278"/>
+                <a:gridCol w="2224278"/>
+                <a:gridCol w="2224278"/>
               </a:tblGrid>
-              <a:tr h="386626">
+              <a:tr h="434469">
                 <a:tc>
                   <a:txBody>
                     <a:bodyPr/>
@@ -4276,7 +3907,7 @@
                         <a:rPr>
                           <a:latin typeface="Inter"/>
                         </a:rPr>
-                        <a:t>Basis</a:t>
+                        <a:t>Source</a:t>
                       </a:r>
                     </a:p>
                   </a:txBody>
@@ -4303,7 +3934,1420 @@
                         <a:rPr>
                           <a:latin typeface="Inter"/>
                         </a:rPr>
-                        <a:t>Tool / view</a:t>
+                        <a:t>As of</a:t>
+                      </a:r>
+                    </a:p>
+                  </a:txBody>
+                  <a:tcPr marL="54864" marR="54864" marT="27432" marB="27432" anchor="ctr">
+                    <a:solidFill>
+                      <a:srgbClr val="0D1117"/>
+                    </a:solidFill>
+                  </a:tcPr>
+                </a:tc>
+                <a:tc>
+                  <a:txBody>
+                    <a:bodyPr/>
+                    <a:lstStyle/>
+                    <a:p>
+                      <a:pPr>
+                        <a:defRPr sz="750" b="1">
+                          <a:solidFill>
+                            <a:srgbClr val="FFFFFF"/>
+                          </a:solidFill>
+                          <a:latin typeface="Inter"/>
+                        </a:defRPr>
+                      </a:pPr>
+                      <a:r>
+                        <a:rPr>
+                          <a:latin typeface="Inter"/>
+                        </a:rPr>
+                        <a:t>Check</a:t>
+                      </a:r>
+                    </a:p>
+                  </a:txBody>
+                  <a:tcPr marL="54864" marR="54864" marT="27432" marB="27432" anchor="ctr">
+                    <a:solidFill>
+                      <a:srgbClr val="0D1117"/>
+                    </a:solidFill>
+                  </a:tcPr>
+                </a:tc>
+              </a:tr>
+              <a:tr h="434469">
+                <a:tc>
+                  <a:txBody>
+                    <a:bodyPr/>
+                    <a:lstStyle/>
+                    <a:p>
+                      <a:pPr>
+                        <a:defRPr sz="720" b="1">
+                          <a:solidFill>
+                            <a:srgbClr val="0D1117"/>
+                          </a:solidFill>
+                          <a:latin typeface="Inter"/>
+                        </a:defRPr>
+                      </a:pPr>
+                      <a:r>
+                        <a:rPr>
+                          <a:latin typeface="Inter"/>
+                        </a:rPr>
+                        <a:t>S1</a:t>
+                      </a:r>
+                    </a:p>
+                  </a:txBody>
+                  <a:tcPr marL="54864" marR="54864" marT="27432" marB="27432" anchor="ctr">
+                    <a:solidFill>
+                      <a:srgbClr val="FFFFFF"/>
+                    </a:solidFill>
+                  </a:tcPr>
+                </a:tc>
+                <a:tc>
+                  <a:txBody>
+                    <a:bodyPr/>
+                    <a:lstStyle/>
+                    <a:p>
+                      <a:pPr>
+                        <a:defRPr sz="720" b="0">
+                          <a:solidFill>
+                            <a:srgbClr val="0D1117"/>
+                          </a:solidFill>
+                          <a:latin typeface="Inter"/>
+                        </a:defRPr>
+                      </a:pPr>
+                      <a:r>
+                        <a:rPr>
+                          <a:latin typeface="Inter"/>
+                        </a:rPr>
+                        <a:t>Diligence Roster and capacity</a:t>
+                      </a:r>
+                    </a:p>
+                  </a:txBody>
+                  <a:tcPr marL="54864" marR="54864" marT="27432" marB="27432" anchor="ctr">
+                    <a:solidFill>
+                      <a:srgbClr val="FFFFFF"/>
+                    </a:solidFill>
+                  </a:tcPr>
+                </a:tc>
+                <a:tc>
+                  <a:txBody>
+                    <a:bodyPr/>
+                    <a:lstStyle/>
+                    <a:p>
+                      <a:pPr>
+                        <a:defRPr sz="720" b="0">
+                          <a:solidFill>
+                            <a:srgbClr val="0D1117"/>
+                          </a:solidFill>
+                          <a:latin typeface="Inter"/>
+                        </a:defRPr>
+                      </a:pPr>
+                      <a:r>
+                        <a:rPr>
+                          <a:latin typeface="Inter"/>
+                        </a:rPr>
+                        <a:t>get_diligence_roster_funds</a:t>
+                      </a:r>
+                    </a:p>
+                  </a:txBody>
+                  <a:tcPr marL="54864" marR="54864" marT="27432" marB="27432" anchor="ctr">
+                    <a:solidFill>
+                      <a:srgbClr val="FFFFFF"/>
+                    </a:solidFill>
+                  </a:tcPr>
+                </a:tc>
+                <a:tc>
+                  <a:txBody>
+                    <a:bodyPr/>
+                    <a:lstStyle/>
+                    <a:p>
+                      <a:pPr>
+                        <a:defRPr sz="720" b="0">
+                          <a:solidFill>
+                            <a:srgbClr val="0D1117"/>
+                          </a:solidFill>
+                          <a:latin typeface="Inter"/>
+                        </a:defRPr>
+                      </a:pPr>
+                      <a:r>
+                        <a:rPr>
+                          <a:latin typeface="Inter"/>
+                        </a:rPr>
+                        <a:t>2026-10-04</a:t>
+                      </a:r>
+                    </a:p>
+                  </a:txBody>
+                  <a:tcPr marL="54864" marR="54864" marT="27432" marB="27432" anchor="ctr">
+                    <a:solidFill>
+                      <a:srgbClr val="FFFFFF"/>
+                    </a:solidFill>
+                  </a:tcPr>
+                </a:tc>
+                <a:tc>
+                  <a:txBody>
+                    <a:bodyPr/>
+                    <a:lstStyle/>
+                    <a:p>
+                      <a:pPr>
+                        <a:defRPr sz="720" b="1">
+                          <a:solidFill>
+                            <a:srgbClr val="C6F432"/>
+                          </a:solidFill>
+                          <a:latin typeface="Inter"/>
+                        </a:defRPr>
+                      </a:pPr>
+                      <a:r>
+                        <a:rPr>
+                          <a:latin typeface="Inter"/>
+                        </a:rPr>
+                        <a:t>● Passed</a:t>
+                      </a:r>
+                    </a:p>
+                  </a:txBody>
+                  <a:tcPr marL="54864" marR="54864" marT="27432" marB="27432" anchor="ctr">
+                    <a:solidFill>
+                      <a:srgbClr val="F5F7F9"/>
+                    </a:solidFill>
+                  </a:tcPr>
+                </a:tc>
+              </a:tr>
+              <a:tr h="434469">
+                <a:tc>
+                  <a:txBody>
+                    <a:bodyPr/>
+                    <a:lstStyle/>
+                    <a:p>
+                      <a:pPr>
+                        <a:defRPr sz="720" b="1">
+                          <a:solidFill>
+                            <a:srgbClr val="0D1117"/>
+                          </a:solidFill>
+                          <a:latin typeface="Inter"/>
+                        </a:defRPr>
+                      </a:pPr>
+                      <a:r>
+                        <a:rPr>
+                          <a:latin typeface="Inter"/>
+                        </a:rPr>
+                        <a:t>S2</a:t>
+                      </a:r>
+                    </a:p>
+                  </a:txBody>
+                  <a:tcPr marL="54864" marR="54864" marT="27432" marB="27432" anchor="ctr">
+                    <a:solidFill>
+                      <a:srgbClr val="F5F7F9"/>
+                    </a:solidFill>
+                  </a:tcPr>
+                </a:tc>
+                <a:tc>
+                  <a:txBody>
+                    <a:bodyPr/>
+                    <a:lstStyle/>
+                    <a:p>
+                      <a:pPr>
+                        <a:defRPr sz="720" b="0">
+                          <a:solidFill>
+                            <a:srgbClr val="0D1117"/>
+                          </a:solidFill>
+                          <a:latin typeface="Inter"/>
+                        </a:defRPr>
+                      </a:pPr>
+                      <a:r>
+                        <a:rPr>
+                          <a:latin typeface="Inter"/>
+                        </a:rPr>
+                        <a:t>Attention queue, changes since review, red flags</a:t>
+                      </a:r>
+                    </a:p>
+                  </a:txBody>
+                  <a:tcPr marL="54864" marR="54864" marT="27432" marB="27432" anchor="ctr">
+                    <a:solidFill>
+                      <a:srgbClr val="F5F7F9"/>
+                    </a:solidFill>
+                  </a:tcPr>
+                </a:tc>
+                <a:tc>
+                  <a:txBody>
+                    <a:bodyPr/>
+                    <a:lstStyle/>
+                    <a:p>
+                      <a:pPr>
+                        <a:defRPr sz="720" b="0">
+                          <a:solidFill>
+                            <a:srgbClr val="0D1117"/>
+                          </a:solidFill>
+                          <a:latin typeface="Inter"/>
+                        </a:defRPr>
+                      </a:pPr>
+                      <a:r>
+                        <a:rPr>
+                          <a:latin typeface="Inter"/>
+                        </a:rPr>
+                        <a:t>get_manager_diligence_attention_queue</a:t>
+                      </a:r>
+                    </a:p>
+                  </a:txBody>
+                  <a:tcPr marL="54864" marR="54864" marT="27432" marB="27432" anchor="ctr">
+                    <a:solidFill>
+                      <a:srgbClr val="F5F7F9"/>
+                    </a:solidFill>
+                  </a:tcPr>
+                </a:tc>
+                <a:tc>
+                  <a:txBody>
+                    <a:bodyPr/>
+                    <a:lstStyle/>
+                    <a:p>
+                      <a:pPr>
+                        <a:defRPr sz="720" b="0">
+                          <a:solidFill>
+                            <a:srgbClr val="0D1117"/>
+                          </a:solidFill>
+                          <a:latin typeface="Inter"/>
+                        </a:defRPr>
+                      </a:pPr>
+                      <a:r>
+                        <a:rPr>
+                          <a:latin typeface="Inter"/>
+                        </a:rPr>
+                        <a:t>2026-10-04</a:t>
+                      </a:r>
+                    </a:p>
+                  </a:txBody>
+                  <a:tcPr marL="54864" marR="54864" marT="27432" marB="27432" anchor="ctr">
+                    <a:solidFill>
+                      <a:srgbClr val="F5F7F9"/>
+                    </a:solidFill>
+                  </a:tcPr>
+                </a:tc>
+                <a:tc>
+                  <a:txBody>
+                    <a:bodyPr/>
+                    <a:lstStyle/>
+                    <a:p>
+                      <a:pPr>
+                        <a:defRPr sz="720" b="1">
+                          <a:solidFill>
+                            <a:srgbClr val="C6F432"/>
+                          </a:solidFill>
+                          <a:latin typeface="Inter"/>
+                        </a:defRPr>
+                      </a:pPr>
+                      <a:r>
+                        <a:rPr>
+                          <a:latin typeface="Inter"/>
+                        </a:rPr>
+                        <a:t>● Passed</a:t>
+                      </a:r>
+                    </a:p>
+                  </a:txBody>
+                  <a:tcPr marL="54864" marR="54864" marT="27432" marB="27432" anchor="ctr">
+                    <a:solidFill>
+                      <a:srgbClr val="F5F7F9"/>
+                    </a:solidFill>
+                  </a:tcPr>
+                </a:tc>
+              </a:tr>
+              <a:tr h="434469">
+                <a:tc>
+                  <a:txBody>
+                    <a:bodyPr/>
+                    <a:lstStyle/>
+                    <a:p>
+                      <a:pPr>
+                        <a:defRPr sz="720" b="1">
+                          <a:solidFill>
+                            <a:srgbClr val="0D1117"/>
+                          </a:solidFill>
+                          <a:latin typeface="Inter"/>
+                        </a:defRPr>
+                      </a:pPr>
+                      <a:r>
+                        <a:rPr>
+                          <a:latin typeface="Inter"/>
+                        </a:rPr>
+                        <a:t>S3</a:t>
+                      </a:r>
+                    </a:p>
+                  </a:txBody>
+                  <a:tcPr marL="54864" marR="54864" marT="27432" marB="27432" anchor="ctr">
+                    <a:solidFill>
+                      <a:srgbClr val="FFFFFF"/>
+                    </a:solidFill>
+                  </a:tcPr>
+                </a:tc>
+                <a:tc>
+                  <a:txBody>
+                    <a:bodyPr/>
+                    <a:lstStyle/>
+                    <a:p>
+                      <a:pPr>
+                        <a:defRPr sz="720" b="0">
+                          <a:solidFill>
+                            <a:srgbClr val="0D1117"/>
+                          </a:solidFill>
+                          <a:latin typeface="Inter"/>
+                        </a:defRPr>
+                      </a:pPr>
+                      <a:r>
+                        <a:rPr>
+                          <a:latin typeface="Inter"/>
+                        </a:rPr>
+                        <a:t>Monitor alerts and coverage</a:t>
+                      </a:r>
+                    </a:p>
+                  </a:txBody>
+                  <a:tcPr marL="54864" marR="54864" marT="27432" marB="27432" anchor="ctr">
+                    <a:solidFill>
+                      <a:srgbClr val="FFFFFF"/>
+                    </a:solidFill>
+                  </a:tcPr>
+                </a:tc>
+                <a:tc>
+                  <a:txBody>
+                    <a:bodyPr/>
+                    <a:lstStyle/>
+                    <a:p>
+                      <a:pPr>
+                        <a:defRPr sz="720" b="0">
+                          <a:solidFill>
+                            <a:srgbClr val="0D1117"/>
+                          </a:solidFill>
+                          <a:latin typeface="Inter"/>
+                        </a:defRPr>
+                      </a:pPr>
+                      <a:r>
+                        <a:rPr>
+                          <a:latin typeface="Inter"/>
+                        </a:rPr>
+                        <a:t>get_manager_monitor_evidence</a:t>
+                      </a:r>
+                    </a:p>
+                  </a:txBody>
+                  <a:tcPr marL="54864" marR="54864" marT="27432" marB="27432" anchor="ctr">
+                    <a:solidFill>
+                      <a:srgbClr val="FFFFFF"/>
+                    </a:solidFill>
+                  </a:tcPr>
+                </a:tc>
+                <a:tc>
+                  <a:txBody>
+                    <a:bodyPr/>
+                    <a:lstStyle/>
+                    <a:p>
+                      <a:pPr>
+                        <a:defRPr sz="720" b="0">
+                          <a:solidFill>
+                            <a:srgbClr val="0D1117"/>
+                          </a:solidFill>
+                          <a:latin typeface="Inter"/>
+                        </a:defRPr>
+                      </a:pPr>
+                      <a:r>
+                        <a:rPr>
+                          <a:latin typeface="Inter"/>
+                        </a:rPr>
+                        <a:t>2026-10-01</a:t>
+                      </a:r>
+                    </a:p>
+                  </a:txBody>
+                  <a:tcPr marL="54864" marR="54864" marT="27432" marB="27432" anchor="ctr">
+                    <a:solidFill>
+                      <a:srgbClr val="FFFFFF"/>
+                    </a:solidFill>
+                  </a:tcPr>
+                </a:tc>
+                <a:tc>
+                  <a:txBody>
+                    <a:bodyPr/>
+                    <a:lstStyle/>
+                    <a:p>
+                      <a:pPr>
+                        <a:defRPr sz="720" b="1">
+                          <a:solidFill>
+                            <a:srgbClr val="C6F432"/>
+                          </a:solidFill>
+                          <a:latin typeface="Inter"/>
+                        </a:defRPr>
+                      </a:pPr>
+                      <a:r>
+                        <a:rPr>
+                          <a:latin typeface="Inter"/>
+                        </a:rPr>
+                        <a:t>● Passed</a:t>
+                      </a:r>
+                    </a:p>
+                  </a:txBody>
+                  <a:tcPr marL="54864" marR="54864" marT="27432" marB="27432" anchor="ctr">
+                    <a:solidFill>
+                      <a:srgbClr val="F5F7F9"/>
+                    </a:solidFill>
+                  </a:tcPr>
+                </a:tc>
+              </a:tr>
+              <a:tr h="434469">
+                <a:tc>
+                  <a:txBody>
+                    <a:bodyPr/>
+                    <a:lstStyle/>
+                    <a:p>
+                      <a:pPr>
+                        <a:defRPr sz="720" b="1">
+                          <a:solidFill>
+                            <a:srgbClr val="0D1117"/>
+                          </a:solidFill>
+                          <a:latin typeface="Inter"/>
+                        </a:defRPr>
+                      </a:pPr>
+                      <a:r>
+                        <a:rPr>
+                          <a:latin typeface="Inter"/>
+                        </a:rPr>
+                        <a:t>S4</a:t>
+                      </a:r>
+                    </a:p>
+                  </a:txBody>
+                  <a:tcPr marL="54864" marR="54864" marT="27432" marB="27432" anchor="ctr">
+                    <a:solidFill>
+                      <a:srgbClr val="F5F7F9"/>
+                    </a:solidFill>
+                  </a:tcPr>
+                </a:tc>
+                <a:tc>
+                  <a:txBody>
+                    <a:bodyPr/>
+                    <a:lstStyle/>
+                    <a:p>
+                      <a:pPr>
+                        <a:defRPr sz="720" b="0">
+                          <a:solidFill>
+                            <a:srgbClr val="0D1117"/>
+                          </a:solidFill>
+                          <a:latin typeface="Inter"/>
+                        </a:defRPr>
+                      </a:pPr>
+                      <a:r>
+                        <a:rPr>
+                          <a:latin typeface="Inter"/>
+                        </a:rPr>
+                        <a:t>Open findings — Ridgeview Advisors</a:t>
+                      </a:r>
+                    </a:p>
+                  </a:txBody>
+                  <a:tcPr marL="54864" marR="54864" marT="27432" marB="27432" anchor="ctr">
+                    <a:solidFill>
+                      <a:srgbClr val="F5F7F9"/>
+                    </a:solidFill>
+                  </a:tcPr>
+                </a:tc>
+                <a:tc>
+                  <a:txBody>
+                    <a:bodyPr/>
+                    <a:lstStyle/>
+                    <a:p>
+                      <a:pPr>
+                        <a:defRPr sz="720" b="0">
+                          <a:solidFill>
+                            <a:srgbClr val="0D1117"/>
+                          </a:solidFill>
+                          <a:latin typeface="Inter"/>
+                        </a:defRPr>
+                      </a:pPr>
+                      <a:r>
+                        <a:rPr>
+                          <a:latin typeface="Inter"/>
+                        </a:rPr>
+                        <a:t>get_manager_diligence_findings</a:t>
+                      </a:r>
+                    </a:p>
+                  </a:txBody>
+                  <a:tcPr marL="54864" marR="54864" marT="27432" marB="27432" anchor="ctr">
+                    <a:solidFill>
+                      <a:srgbClr val="F5F7F9"/>
+                    </a:solidFill>
+                  </a:tcPr>
+                </a:tc>
+                <a:tc>
+                  <a:txBody>
+                    <a:bodyPr/>
+                    <a:lstStyle/>
+                    <a:p>
+                      <a:pPr>
+                        <a:defRPr sz="720" b="0">
+                          <a:solidFill>
+                            <a:srgbClr val="0D1117"/>
+                          </a:solidFill>
+                          <a:latin typeface="Inter"/>
+                        </a:defRPr>
+                      </a:pPr>
+                      <a:r>
+                        <a:rPr>
+                          <a:latin typeface="Inter"/>
+                        </a:rPr>
+                        <a:t>2026-10-04</a:t>
+                      </a:r>
+                    </a:p>
+                  </a:txBody>
+                  <a:tcPr marL="54864" marR="54864" marT="27432" marB="27432" anchor="ctr">
+                    <a:solidFill>
+                      <a:srgbClr val="F5F7F9"/>
+                    </a:solidFill>
+                  </a:tcPr>
+                </a:tc>
+                <a:tc>
+                  <a:txBody>
+                    <a:bodyPr/>
+                    <a:lstStyle/>
+                    <a:p>
+                      <a:pPr>
+                        <a:defRPr sz="720" b="1">
+                          <a:solidFill>
+                            <a:srgbClr val="F2A93B"/>
+                          </a:solidFill>
+                          <a:latin typeface="Inter"/>
+                        </a:defRPr>
+                      </a:pPr>
+                      <a:r>
+                        <a:rPr>
+                          <a:latin typeface="Inter"/>
+                        </a:rPr>
+                        <a:t>● Advisory</a:t>
+                      </a:r>
+                    </a:p>
+                  </a:txBody>
+                  <a:tcPr marL="54864" marR="54864" marT="27432" marB="27432" anchor="ctr">
+                    <a:solidFill>
+                      <a:srgbClr val="F5F7F9"/>
+                    </a:solidFill>
+                  </a:tcPr>
+                </a:tc>
+              </a:tr>
+              <a:tr h="434469">
+                <a:tc>
+                  <a:txBody>
+                    <a:bodyPr/>
+                    <a:lstStyle/>
+                    <a:p>
+                      <a:pPr>
+                        <a:defRPr sz="720" b="1">
+                          <a:solidFill>
+                            <a:srgbClr val="0D1117"/>
+                          </a:solidFill>
+                          <a:latin typeface="Inter"/>
+                        </a:defRPr>
+                      </a:pPr>
+                      <a:r>
+                        <a:rPr>
+                          <a:latin typeface="Inter"/>
+                        </a:rPr>
+                        <a:t>S5</a:t>
+                      </a:r>
+                    </a:p>
+                  </a:txBody>
+                  <a:tcPr marL="54864" marR="54864" marT="27432" marB="27432" anchor="ctr">
+                    <a:solidFill>
+                      <a:srgbClr val="FFFFFF"/>
+                    </a:solidFill>
+                  </a:tcPr>
+                </a:tc>
+                <a:tc>
+                  <a:txBody>
+                    <a:bodyPr/>
+                    <a:lstStyle/>
+                    <a:p>
+                      <a:pPr>
+                        <a:defRPr sz="720" b="0">
+                          <a:solidFill>
+                            <a:srgbClr val="0D1117"/>
+                          </a:solidFill>
+                          <a:latin typeface="Inter"/>
+                        </a:defRPr>
+                      </a:pPr>
+                      <a:r>
+                        <a:rPr>
+                          <a:latin typeface="Inter"/>
+                        </a:rPr>
+                        <a:t>Firm and fund events — Ridgeview Advisors</a:t>
+                      </a:r>
+                    </a:p>
+                  </a:txBody>
+                  <a:tcPr marL="54864" marR="54864" marT="27432" marB="27432" anchor="ctr">
+                    <a:solidFill>
+                      <a:srgbClr val="FFFFFF"/>
+                    </a:solidFill>
+                  </a:tcPr>
+                </a:tc>
+                <a:tc>
+                  <a:txBody>
+                    <a:bodyPr/>
+                    <a:lstStyle/>
+                    <a:p>
+                      <a:pPr>
+                        <a:defRPr sz="720" b="0">
+                          <a:solidFill>
+                            <a:srgbClr val="0D1117"/>
+                          </a:solidFill>
+                          <a:latin typeface="Inter"/>
+                        </a:defRPr>
+                      </a:pPr>
+                      <a:r>
+                        <a:rPr>
+                          <a:latin typeface="Inter"/>
+                        </a:rPr>
+                        <a:t>get_firm_fund_events</a:t>
+                      </a:r>
+                    </a:p>
+                  </a:txBody>
+                  <a:tcPr marL="54864" marR="54864" marT="27432" marB="27432" anchor="ctr">
+                    <a:solidFill>
+                      <a:srgbClr val="FFFFFF"/>
+                    </a:solidFill>
+                  </a:tcPr>
+                </a:tc>
+                <a:tc>
+                  <a:txBody>
+                    <a:bodyPr/>
+                    <a:lstStyle/>
+                    <a:p>
+                      <a:pPr>
+                        <a:defRPr sz="720" b="0">
+                          <a:solidFill>
+                            <a:srgbClr val="0D1117"/>
+                          </a:solidFill>
+                          <a:latin typeface="Inter"/>
+                        </a:defRPr>
+                      </a:pPr>
+                      <a:r>
+                        <a:rPr>
+                          <a:latin typeface="Inter"/>
+                        </a:rPr>
+                        <a:t>2026-10-04</a:t>
+                      </a:r>
+                    </a:p>
+                  </a:txBody>
+                  <a:tcPr marL="54864" marR="54864" marT="27432" marB="27432" anchor="ctr">
+                    <a:solidFill>
+                      <a:srgbClr val="FFFFFF"/>
+                    </a:solidFill>
+                  </a:tcPr>
+                </a:tc>
+                <a:tc>
+                  <a:txBody>
+                    <a:bodyPr/>
+                    <a:lstStyle/>
+                    <a:p>
+                      <a:pPr>
+                        <a:defRPr sz="720" b="1">
+                          <a:solidFill>
+                            <a:srgbClr val="C6F432"/>
+                          </a:solidFill>
+                          <a:latin typeface="Inter"/>
+                        </a:defRPr>
+                      </a:pPr>
+                      <a:r>
+                        <a:rPr>
+                          <a:latin typeface="Inter"/>
+                        </a:rPr>
+                        <a:t>● Passed</a:t>
+                      </a:r>
+                    </a:p>
+                  </a:txBody>
+                  <a:tcPr marL="54864" marR="54864" marT="27432" marB="27432" anchor="ctr">
+                    <a:solidFill>
+                      <a:srgbClr val="F5F7F9"/>
+                    </a:solidFill>
+                  </a:tcPr>
+                </a:tc>
+              </a:tr>
+              <a:tr h="434475">
+                <a:tc>
+                  <a:txBody>
+                    <a:bodyPr/>
+                    <a:lstStyle/>
+                    <a:p>
+                      <a:pPr>
+                        <a:defRPr sz="720" b="1">
+                          <a:solidFill>
+                            <a:srgbClr val="0D1117"/>
+                          </a:solidFill>
+                          <a:latin typeface="Inter"/>
+                        </a:defRPr>
+                      </a:pPr>
+                      <a:r>
+                        <a:rPr>
+                          <a:latin typeface="Inter"/>
+                        </a:rPr>
+                        <a:t>S6</a:t>
+                      </a:r>
+                    </a:p>
+                  </a:txBody>
+                  <a:tcPr marL="54864" marR="54864" marT="27432" marB="27432" anchor="ctr">
+                    <a:solidFill>
+                      <a:srgbClr val="F5F7F9"/>
+                    </a:solidFill>
+                  </a:tcPr>
+                </a:tc>
+                <a:tc>
+                  <a:txBody>
+                    <a:bodyPr/>
+                    <a:lstStyle/>
+                    <a:p>
+                      <a:pPr>
+                        <a:defRPr sz="720" b="0">
+                          <a:solidFill>
+                            <a:srgbClr val="0D1117"/>
+                          </a:solidFill>
+                          <a:latin typeface="Inter"/>
+                        </a:defRPr>
+                      </a:pPr>
+                      <a:r>
+                        <a:rPr>
+                          <a:latin typeface="Inter"/>
+                        </a:rPr>
+                        <a:t>Research watchlist changes</a:t>
+                      </a:r>
+                    </a:p>
+                  </a:txBody>
+                  <a:tcPr marL="54864" marR="54864" marT="27432" marB="27432" anchor="ctr">
+                    <a:solidFill>
+                      <a:srgbClr val="F5F7F9"/>
+                    </a:solidFill>
+                  </a:tcPr>
+                </a:tc>
+                <a:tc>
+                  <a:txBody>
+                    <a:bodyPr/>
+                    <a:lstStyle/>
+                    <a:p>
+                      <a:pPr>
+                        <a:defRPr sz="720" b="0">
+                          <a:solidFill>
+                            <a:srgbClr val="0D1117"/>
+                          </a:solidFill>
+                          <a:latin typeface="Inter"/>
+                        </a:defRPr>
+                      </a:pPr>
+                      <a:r>
+                        <a:rPr>
+                          <a:latin typeface="Inter"/>
+                        </a:rPr>
+                        <a:t>get_research_watchlist_changes</a:t>
+                      </a:r>
+                    </a:p>
+                  </a:txBody>
+                  <a:tcPr marL="54864" marR="54864" marT="27432" marB="27432" anchor="ctr">
+                    <a:solidFill>
+                      <a:srgbClr val="F5F7F9"/>
+                    </a:solidFill>
+                  </a:tcPr>
+                </a:tc>
+                <a:tc>
+                  <a:txBody>
+                    <a:bodyPr/>
+                    <a:lstStyle/>
+                    <a:p>
+                      <a:pPr>
+                        <a:defRPr sz="720" b="0">
+                          <a:solidFill>
+                            <a:srgbClr val="0D1117"/>
+                          </a:solidFill>
+                          <a:latin typeface="Inter"/>
+                        </a:defRPr>
+                      </a:pPr>
+                      <a:r>
+                        <a:rPr>
+                          <a:latin typeface="Inter"/>
+                        </a:rPr>
+                        <a:t>2026-10-04</a:t>
+                      </a:r>
+                    </a:p>
+                  </a:txBody>
+                  <a:tcPr marL="54864" marR="54864" marT="27432" marB="27432" anchor="ctr">
+                    <a:solidFill>
+                      <a:srgbClr val="F5F7F9"/>
+                    </a:solidFill>
+                  </a:tcPr>
+                </a:tc>
+                <a:tc>
+                  <a:txBody>
+                    <a:bodyPr/>
+                    <a:lstStyle/>
+                    <a:p>
+                      <a:pPr>
+                        <a:defRPr sz="720" b="1">
+                          <a:solidFill>
+                            <a:srgbClr val="C6F432"/>
+                          </a:solidFill>
+                          <a:latin typeface="Inter"/>
+                        </a:defRPr>
+                      </a:pPr>
+                      <a:r>
+                        <a:rPr>
+                          <a:latin typeface="Inter"/>
+                        </a:rPr>
+                        <a:t>● Passed</a:t>
+                      </a:r>
+                    </a:p>
+                  </a:txBody>
+                  <a:tcPr marL="54864" marR="54864" marT="27432" marB="27432" anchor="ctr">
+                    <a:solidFill>
+                      <a:srgbClr val="F5F7F9"/>
+                    </a:solidFill>
+                  </a:tcPr>
+                </a:tc>
+              </a:tr>
+            </a:tbl>
+          </a:graphicData>
+        </a:graphic>
+      </p:graphicFrame>
+      <p:sp>
+        <p:nvSpPr>
+          <p:cNvPr id="9" name="TextBox 8"/>
+          <p:cNvSpPr txBox="1"/>
+          <p:nvPr/>
+        </p:nvSpPr>
+        <p:spPr>
+          <a:xfrm>
+            <a:off x="640080" y="6035039"/>
+            <a:ext cx="10908792" cy="164592"/>
+          </a:xfrm>
+          <a:prstGeom prst="rect">
+            <a:avLst/>
+          </a:prstGeom>
+          <a:noFill/>
+        </p:spPr>
+        <p:txBody>
+          <a:bodyPr wrap="none" lIns="9144" rIns="9144" tIns="9144" bIns="9144" anchor="t">
+            <a:spAutoFit/>
+          </a:bodyPr>
+          <a:lstStyle/>
+          <a:p>
+            <a:pPr algn="l">
+              <a:spcAft>
+                <a:spcPts val="0"/>
+              </a:spcAft>
+              <a:defRPr sz="680" b="0">
+                <a:solidFill>
+                  <a:srgbClr val="8A94A1"/>
+                </a:solidFill>
+                <a:latin typeface="Inter"/>
+              </a:defRPr>
+            </a:pPr>
+            <a:r>
+              <a:rPr>
+                <a:latin typeface="Inter"/>
+              </a:rPr>
+              <a:t>S4 check: the findings list came back empty without a stated reason, although the response reports no open findings. Illustrative, Gradient Maintained — demo data, not the client's holdings or managers. All organizations, portfolios, managers and results in this public example are illustrative.</a:t>
+            </a:r>
+          </a:p>
+        </p:txBody>
+      </p:sp>
+      <p:sp>
+        <p:nvSpPr>
+          <p:cNvPr id="10" name="Rectangle 9"/>
+          <p:cNvSpPr/>
+          <p:nvPr/>
+        </p:nvSpPr>
+        <p:spPr>
+          <a:xfrm>
+            <a:off x="640080" y="6446520"/>
+            <a:ext cx="10908792" cy="9144"/>
+          </a:xfrm>
+          <a:prstGeom prst="rect">
+            <a:avLst/>
+          </a:prstGeom>
+          <a:solidFill>
+            <a:srgbClr val="E3E7EC"/>
+          </a:solidFill>
+          <a:ln>
+            <a:solidFill>
+              <a:srgbClr val="E3E7EC"/>
+            </a:solidFill>
+          </a:ln>
+        </p:spPr>
+        <p:style>
+          <a:lnRef idx="1">
+            <a:schemeClr val="accent1"/>
+          </a:lnRef>
+          <a:fillRef idx="3">
+            <a:schemeClr val="accent1"/>
+          </a:fillRef>
+          <a:effectRef idx="2">
+            <a:schemeClr val="accent1"/>
+          </a:effectRef>
+          <a:fontRef idx="minor">
+            <a:schemeClr val="lt1"/>
+          </a:fontRef>
+        </p:style>
+        <p:txBody>
+          <a:bodyPr rtlCol="0" anchor="ctr"/>
+          <a:lstStyle/>
+          <a:p>
+            <a:pPr algn="ctr">
+              <a:defRPr>
+                <a:latin typeface="Inter"/>
+              </a:defRPr>
+            </a:pPr>
+          </a:p>
+        </p:txBody>
+      </p:sp>
+      <p:sp>
+        <p:nvSpPr>
+          <p:cNvPr id="11" name="TextBox 10"/>
+          <p:cNvSpPr txBox="1"/>
+          <p:nvPr/>
+        </p:nvSpPr>
+        <p:spPr>
+          <a:xfrm>
+            <a:off x="640080" y="6501384"/>
+            <a:ext cx="4297680" cy="146304"/>
+          </a:xfrm>
+          <a:prstGeom prst="rect">
+            <a:avLst/>
+          </a:prstGeom>
+          <a:noFill/>
+        </p:spPr>
+        <p:txBody>
+          <a:bodyPr wrap="none" lIns="9144" rIns="9144" tIns="9144" bIns="9144" anchor="t">
+            <a:spAutoFit/>
+          </a:bodyPr>
+          <a:lstStyle/>
+          <a:p>
+            <a:pPr algn="l">
+              <a:spcAft>
+                <a:spcPts val="0"/>
+              </a:spcAft>
+              <a:defRPr sz="650" b="0">
+                <a:solidFill>
+                  <a:srgbClr val="8A94A1"/>
+                </a:solidFill>
+                <a:latin typeface="Inter"/>
+              </a:defRPr>
+            </a:pPr>
+            <a:r>
+              <a:rPr>
+                <a:latin typeface="Inter"/>
+              </a:rPr>
+              <a:t>Sources: S1 · S2 · S3 · S4 · S5 · S6</a:t>
+            </a:r>
+          </a:p>
+        </p:txBody>
+      </p:sp>
+      <p:sp>
+        <p:nvSpPr>
+          <p:cNvPr id="12" name="TextBox 11"/>
+          <p:cNvSpPr txBox="1"/>
+          <p:nvPr/>
+        </p:nvSpPr>
+        <p:spPr>
+          <a:xfrm>
+            <a:off x="4480560" y="6501384"/>
+            <a:ext cx="5303520" cy="146304"/>
+          </a:xfrm>
+          <a:prstGeom prst="rect">
+            <a:avLst/>
+          </a:prstGeom>
+          <a:noFill/>
+        </p:spPr>
+        <p:txBody>
+          <a:bodyPr wrap="none" lIns="9144" rIns="9144" tIns="9144" bIns="9144" anchor="t">
+            <a:spAutoFit/>
+          </a:bodyPr>
+          <a:lstStyle/>
+          <a:p>
+            <a:pPr algn="ctr">
+              <a:spcAft>
+                <a:spcPts val="0"/>
+              </a:spcAft>
+              <a:defRPr sz="650" b="0">
+                <a:solidFill>
+                  <a:srgbClr val="8A94A1"/>
+                </a:solidFill>
+                <a:latin typeface="Inter"/>
+              </a:defRPr>
+            </a:pPr>
+            <a:r>
+              <a:rPr>
+                <a:latin typeface="Inter"/>
+              </a:rPr>
+              <a:t>Confidential — Investment Committee · Data as of 2026-10-01 (Form ADV); queue 2026-10-04</a:t>
+            </a:r>
+          </a:p>
+        </p:txBody>
+      </p:sp>
+      <p:sp>
+        <p:nvSpPr>
+          <p:cNvPr id="13" name="TextBox 12"/>
+          <p:cNvSpPr txBox="1"/>
+          <p:nvPr/>
+        </p:nvSpPr>
+        <p:spPr>
+          <a:xfrm>
+            <a:off x="10287000" y="6501384"/>
+            <a:ext cx="1261872" cy="146304"/>
+          </a:xfrm>
+          <a:prstGeom prst="rect">
+            <a:avLst/>
+          </a:prstGeom>
+          <a:noFill/>
+        </p:spPr>
+        <p:txBody>
+          <a:bodyPr wrap="none" lIns="9144" rIns="9144" tIns="9144" bIns="9144" anchor="t">
+            <a:spAutoFit/>
+          </a:bodyPr>
+          <a:lstStyle/>
+          <a:p>
+            <a:pPr algn="r">
+              <a:spcAft>
+                <a:spcPts val="0"/>
+              </a:spcAft>
+              <a:defRPr sz="650" b="0">
+                <a:solidFill>
+                  <a:srgbClr val="8A94A1"/>
+                </a:solidFill>
+                <a:latin typeface="Inter"/>
+              </a:defRPr>
+            </a:pPr>
+            <a:r>
+              <a:rPr>
+                <a:latin typeface="Inter"/>
+              </a:rPr>
+              <a:t>10</a:t>
+            </a:r>
+          </a:p>
+        </p:txBody>
+      </p:sp>
+    </p:spTree>
+  </p:cSld>
+  <p:clrMapOvr>
+    <a:masterClrMapping/>
+  </p:clrMapOvr>
+</p:sld>
+</file>
+
+<file path=ppt/slides/slide11.xml><?xml version="1.0" encoding="utf-8"?>
+<p:sld xmlns:a="http://schemas.openxmlformats.org/drawingml/2006/main" xmlns:p="http://schemas.openxmlformats.org/presentationml/2006/main" xmlns:r="http://schemas.openxmlformats.org/officeDocument/2006/relationships">
+  <p:cSld>
+    <p:spTree>
+      <p:nvGrpSpPr>
+        <p:cNvPr id="1" name=""/>
+        <p:cNvGrpSpPr/>
+        <p:nvPr/>
+      </p:nvGrpSpPr>
+      <p:grpSpPr/>
+      <p:sp>
+        <p:nvSpPr>
+          <p:cNvPr id="2" name="Rectangle 1"/>
+          <p:cNvSpPr/>
+          <p:nvPr/>
+        </p:nvSpPr>
+        <p:spPr>
+          <a:xfrm>
+            <a:off x="0" y="0"/>
+            <a:ext cx="12191695" cy="6858000"/>
+          </a:xfrm>
+          <a:prstGeom prst="rect">
+            <a:avLst/>
+          </a:prstGeom>
+          <a:solidFill>
+            <a:srgbClr val="FFFFFF"/>
+          </a:solidFill>
+          <a:ln>
+            <a:solidFill>
+              <a:srgbClr val="FFFFFF"/>
+            </a:solidFill>
+          </a:ln>
+        </p:spPr>
+        <p:style>
+          <a:lnRef idx="1">
+            <a:schemeClr val="accent1"/>
+          </a:lnRef>
+          <a:fillRef idx="3">
+            <a:schemeClr val="accent1"/>
+          </a:fillRef>
+          <a:effectRef idx="2">
+            <a:schemeClr val="accent1"/>
+          </a:effectRef>
+          <a:fontRef idx="minor">
+            <a:schemeClr val="lt1"/>
+          </a:fontRef>
+        </p:style>
+        <p:txBody>
+          <a:bodyPr rtlCol="0" anchor="ctr"/>
+          <a:lstStyle/>
+          <a:p>
+            <a:pPr algn="ctr">
+              <a:defRPr>
+                <a:latin typeface="Inter"/>
+              </a:defRPr>
+            </a:pPr>
+          </a:p>
+        </p:txBody>
+      </p:sp>
+      <p:sp>
+        <p:nvSpPr>
+          <p:cNvPr id="3" name="TextBox 2"/>
+          <p:cNvSpPr txBox="1"/>
+          <p:nvPr/>
+        </p:nvSpPr>
+        <p:spPr>
+          <a:xfrm>
+            <a:off x="640080" y="566928"/>
+            <a:ext cx="10058400" cy="530352"/>
+          </a:xfrm>
+          <a:prstGeom prst="rect">
+            <a:avLst/>
+          </a:prstGeom>
+          <a:noFill/>
+        </p:spPr>
+        <p:txBody>
+          <a:bodyPr wrap="none" lIns="9144" rIns="9144" tIns="9144" bIns="9144" anchor="t">
+            <a:spAutoFit/>
+          </a:bodyPr>
+          <a:lstStyle/>
+          <a:p>
+            <a:pPr algn="l">
+              <a:spcAft>
+                <a:spcPts val="0"/>
+              </a:spcAft>
+              <a:defRPr sz="2300" b="1">
+                <a:solidFill>
+                  <a:srgbClr val="0D1117"/>
+                </a:solidFill>
+                <a:latin typeface="Inter"/>
+              </a:defRPr>
+            </a:pPr>
+            <a:r>
+              <a:rPr>
+                <a:latin typeface="Inter"/>
+              </a:rPr>
+              <a:t>Appendix — Sources and methods — continued</a:t>
+            </a:r>
+          </a:p>
+        </p:txBody>
+      </p:sp>
+      <p:sp>
+        <p:nvSpPr>
+          <p:cNvPr id="4" name="Rectangle 3"/>
+          <p:cNvSpPr/>
+          <p:nvPr/>
+        </p:nvSpPr>
+        <p:spPr>
+          <a:xfrm>
+            <a:off x="640080" y="1115568"/>
+            <a:ext cx="10908792" cy="18288"/>
+          </a:xfrm>
+          <a:prstGeom prst="rect">
+            <a:avLst/>
+          </a:prstGeom>
+          <a:solidFill>
+            <a:srgbClr val="0D1117"/>
+          </a:solidFill>
+          <a:ln>
+            <a:solidFill>
+              <a:srgbClr val="0D1117"/>
+            </a:solidFill>
+          </a:ln>
+        </p:spPr>
+        <p:style>
+          <a:lnRef idx="1">
+            <a:schemeClr val="accent1"/>
+          </a:lnRef>
+          <a:fillRef idx="3">
+            <a:schemeClr val="accent1"/>
+          </a:fillRef>
+          <a:effectRef idx="2">
+            <a:schemeClr val="accent1"/>
+          </a:effectRef>
+          <a:fontRef idx="minor">
+            <a:schemeClr val="lt1"/>
+          </a:fontRef>
+        </p:style>
+        <p:txBody>
+          <a:bodyPr rtlCol="0" anchor="ctr"/>
+          <a:lstStyle/>
+          <a:p>
+            <a:pPr algn="ctr">
+              <a:defRPr>
+                <a:latin typeface="Inter"/>
+              </a:defRPr>
+            </a:pPr>
+          </a:p>
+        </p:txBody>
+      </p:sp>
+      <p:sp>
+        <p:nvSpPr>
+          <p:cNvPr id="5" name="Rectangle 4"/>
+          <p:cNvSpPr/>
+          <p:nvPr/>
+        </p:nvSpPr>
+        <p:spPr>
+          <a:xfrm>
+            <a:off x="11018520" y="502920"/>
+            <a:ext cx="530352" cy="393192"/>
+          </a:xfrm>
+          <a:prstGeom prst="rect">
+            <a:avLst/>
+          </a:prstGeom>
+          <a:solidFill>
+            <a:srgbClr val="9AA5B1"/>
+          </a:solidFill>
+          <a:ln>
+            <a:solidFill>
+              <a:srgbClr val="9AA5B1"/>
+            </a:solidFill>
+          </a:ln>
+        </p:spPr>
+        <p:style>
+          <a:lnRef idx="1">
+            <a:schemeClr val="accent1"/>
+          </a:lnRef>
+          <a:fillRef idx="3">
+            <a:schemeClr val="accent1"/>
+          </a:fillRef>
+          <a:effectRef idx="2">
+            <a:schemeClr val="accent1"/>
+          </a:effectRef>
+          <a:fontRef idx="minor">
+            <a:schemeClr val="lt1"/>
+          </a:fontRef>
+        </p:style>
+        <p:txBody>
+          <a:bodyPr rtlCol="0" anchor="ctr"/>
+          <a:lstStyle/>
+          <a:p>
+            <a:pPr algn="ctr">
+              <a:defRPr>
+                <a:latin typeface="Inter"/>
+              </a:defRPr>
+            </a:pPr>
+          </a:p>
+        </p:txBody>
+      </p:sp>
+      <p:sp>
+        <p:nvSpPr>
+          <p:cNvPr id="6" name="TextBox 5"/>
+          <p:cNvSpPr txBox="1"/>
+          <p:nvPr/>
+        </p:nvSpPr>
+        <p:spPr>
+          <a:xfrm>
+            <a:off x="11045952" y="557784"/>
+            <a:ext cx="475488" cy="182880"/>
+          </a:xfrm>
+          <a:prstGeom prst="rect">
+            <a:avLst/>
+          </a:prstGeom>
+          <a:noFill/>
+        </p:spPr>
+        <p:txBody>
+          <a:bodyPr wrap="none" lIns="9144" rIns="9144" tIns="9144" bIns="9144" anchor="t">
+            <a:spAutoFit/>
+          </a:bodyPr>
+          <a:lstStyle/>
+          <a:p>
+            <a:pPr algn="ctr">
+              <a:spcAft>
+                <a:spcPts val="0"/>
+              </a:spcAft>
+              <a:defRPr sz="1000" b="1">
+                <a:solidFill>
+                  <a:srgbClr val="0D1117"/>
+                </a:solidFill>
+                <a:latin typeface="Inter"/>
+              </a:defRPr>
+            </a:pPr>
+            <a:r>
+              <a:rPr>
+                <a:latin typeface="Inter"/>
+              </a:rPr>
+              <a:t>A</a:t>
+            </a:r>
+          </a:p>
+        </p:txBody>
+      </p:sp>
+      <p:sp>
+        <p:nvSpPr>
+          <p:cNvPr id="7" name="TextBox 6"/>
+          <p:cNvSpPr txBox="1"/>
+          <p:nvPr/>
+        </p:nvSpPr>
+        <p:spPr>
+          <a:xfrm>
+            <a:off x="640080" y="1325880"/>
+            <a:ext cx="10908792" cy="201168"/>
+          </a:xfrm>
+          <a:prstGeom prst="rect">
+            <a:avLst/>
+          </a:prstGeom>
+          <a:noFill/>
+        </p:spPr>
+        <p:txBody>
+          <a:bodyPr wrap="none" lIns="9144" rIns="9144" tIns="9144" bIns="9144" anchor="t">
+            <a:spAutoFit/>
+          </a:bodyPr>
+          <a:lstStyle/>
+          <a:p>
+            <a:pPr algn="l">
+              <a:spcAft>
+                <a:spcPts val="0"/>
+              </a:spcAft>
+              <a:defRPr sz="720" b="1">
+                <a:solidFill>
+                  <a:srgbClr val="4A5563"/>
+                </a:solidFill>
+                <a:latin typeface="Inter"/>
+              </a:defRPr>
+            </a:pPr>
+            <a:r>
+              <a:rPr>
+                <a:latin typeface="Inter"/>
+              </a:rPr>
+              <a:t>SOURCE AUDIT TRAIL</a:t>
+            </a:r>
+          </a:p>
+        </p:txBody>
+      </p:sp>
+      <p:graphicFrame>
+        <p:nvGraphicFramePr>
+          <p:cNvPr id="8" name="Table 7"/>
+          <p:cNvGraphicFramePr>
+            <a:graphicFrameLocks noGrp="1"/>
+          </p:cNvGraphicFramePr>
+          <p:nvPr/>
+        </p:nvGraphicFramePr>
+        <p:xfrm>
+          <a:off x="640080" y="1600200"/>
+          <a:ext cx="10908792" cy="4416552"/>
+        </p:xfrm>
+        <a:graphic>
+          <a:graphicData uri="http://schemas.openxmlformats.org/drawingml/2006/table">
+            <a:tbl>
+              <a:tblPr firstRow="1" bandRow="1">
+                <a:tableStyleId>{5C22544A-7EE6-4342-B048-85BDC9FD1C3A}</a:tableStyleId>
+              </a:tblPr>
+              <a:tblGrid>
+                <a:gridCol w="2011680"/>
+                <a:gridCol w="4448556"/>
+                <a:gridCol w="4448556"/>
+              </a:tblGrid>
+              <a:tr h="630936">
+                <a:tc>
+                  <a:txBody>
+                    <a:bodyPr/>
+                    <a:lstStyle/>
+                    <a:p>
+                      <a:pPr>
+                        <a:defRPr sz="750" b="1">
+                          <a:solidFill>
+                            <a:srgbClr val="FFFFFF"/>
+                          </a:solidFill>
+                          <a:latin typeface="Inter"/>
+                        </a:defRPr>
+                      </a:pPr>
+                      <a:r>
+                        <a:rPr>
+                          <a:latin typeface="Inter"/>
+                        </a:rPr>
+                        <a:t>Tag</a:t>
                       </a:r>
                     </a:p>
                   </a:txBody>
@@ -4357,87 +5401,6 @@
                         <a:rPr>
                           <a:latin typeface="Inter"/>
                         </a:rPr>
-                        <a:t>As of</a:t>
-                      </a:r>
-                    </a:p>
-                  </a:txBody>
-                  <a:tcPr marL="54864" marR="54864" marT="27432" marB="27432" anchor="ctr">
-                    <a:solidFill>
-                      <a:srgbClr val="0D1117"/>
-                    </a:solidFill>
-                  </a:tcPr>
-                </a:tc>
-                <a:tc>
-                  <a:txBody>
-                    <a:bodyPr/>
-                    <a:lstStyle/>
-                    <a:p>
-                      <a:pPr>
-                        <a:defRPr sz="750" b="1">
-                          <a:solidFill>
-                            <a:srgbClr val="FFFFFF"/>
-                          </a:solidFill>
-                          <a:latin typeface="Inter"/>
-                        </a:defRPr>
-                      </a:pPr>
-                      <a:r>
-                        <a:rPr>
-                          <a:latin typeface="Inter"/>
-                        </a:rPr>
-                        <a:t>Data scope</a:t>
-                      </a:r>
-                    </a:p>
-                  </a:txBody>
-                  <a:tcPr marL="54864" marR="54864" marT="27432" marB="27432" anchor="ctr">
-                    <a:solidFill>
-                      <a:srgbClr val="0D1117"/>
-                    </a:solidFill>
-                  </a:tcPr>
-                </a:tc>
-                <a:tc>
-                  <a:txBody>
-                    <a:bodyPr/>
-                    <a:lstStyle/>
-                    <a:p>
-                      <a:pPr>
-                        <a:defRPr sz="750" b="1">
-                          <a:solidFill>
-                            <a:srgbClr val="FFFFFF"/>
-                          </a:solidFill>
-                          <a:latin typeface="Inter"/>
-                        </a:defRPr>
-                      </a:pPr>
-                      <a:r>
-                        <a:rPr>
-                          <a:latin typeface="Inter"/>
-                        </a:rPr>
-                        <a:t>Validation</a:t>
-                      </a:r>
-                    </a:p>
-                  </a:txBody>
-                  <a:tcPr marL="54864" marR="54864" marT="27432" marB="27432" anchor="ctr">
-                    <a:solidFill>
-                      <a:srgbClr val="0D1117"/>
-                    </a:solidFill>
-                  </a:tcPr>
-                </a:tc>
-                <a:tc>
-                  <a:txBody>
-                    <a:bodyPr/>
-                    <a:lstStyle/>
-                    <a:p>
-                      <a:pPr>
-                        <a:defRPr sz="750" b="1">
-                          <a:solidFill>
-                            <a:srgbClr val="FFFFFF"/>
-                          </a:solidFill>
-                          <a:latin typeface="Inter"/>
-                        </a:defRPr>
-                      </a:pPr>
-                      <a:r>
-                        <a:rPr>
-                          <a:latin typeface="Inter"/>
-                        </a:rPr>
                         <a:t>Digest</a:t>
                       </a:r>
                     </a:p>
@@ -4449,14 +5412,14 @@
                   </a:tcPr>
                 </a:tc>
               </a:tr>
-              <a:tr h="386626">
+              <a:tr h="630936">
                 <a:tc>
                   <a:txBody>
                     <a:bodyPr/>
                     <a:lstStyle/>
                     <a:p>
                       <a:pPr>
-                        <a:defRPr sz="650" b="1">
+                        <a:defRPr sz="800" b="1">
                           <a:solidFill>
                             <a:srgbClr val="0D1117"/>
                           </a:solidFill>
@@ -4483,88 +5446,7 @@
                     <a:lstStyle/>
                     <a:p>
                       <a:pPr>
-                        <a:defRPr sz="650" b="0">
-                          <a:solidFill>
-                            <a:srgbClr val="0D1117"/>
-                          </a:solidFill>
-                          <a:latin typeface="Inter"/>
-                        </a:defRPr>
-                      </a:pPr>
-                      <a:r>
-                        <a:rPr>
-                          <a:latin typeface="Inter"/>
-                        </a:rPr>
-                        <a:t>Diligence Roster and capacity</a:t>
-                      </a:r>
-                    </a:p>
-                  </a:txBody>
-                  <a:tcPr marL="54864" marR="54864" marT="27432" marB="27432" anchor="ctr">
-                    <a:solidFill>
-                      <a:srgbClr val="FFFFFF"/>
-                    </a:solidFill>
-                  </a:tcPr>
-                </a:tc>
-                <a:tc>
-                  <a:txBody>
-                    <a:bodyPr/>
-                    <a:lstStyle/>
-                    <a:p>
-                      <a:pPr>
-                        <a:defRPr sz="650" b="0">
-                          <a:solidFill>
-                            <a:srgbClr val="0D1117"/>
-                          </a:solidFill>
-                          <a:latin typeface="Inter"/>
-                        </a:defRPr>
-                      </a:pPr>
-                      <a:r>
-                        <a:rPr>
-                          <a:latin typeface="Inter"/>
-                        </a:rPr>
-                        <a:t>gradient_tool</a:t>
-                      </a:r>
-                    </a:p>
-                  </a:txBody>
-                  <a:tcPr marL="54864" marR="54864" marT="27432" marB="27432" anchor="ctr">
-                    <a:solidFill>
-                      <a:srgbClr val="FFFFFF"/>
-                    </a:solidFill>
-                  </a:tcPr>
-                </a:tc>
-                <a:tc>
-                  <a:txBody>
-                    <a:bodyPr/>
-                    <a:lstStyle/>
-                    <a:p>
-                      <a:pPr>
-                        <a:defRPr sz="650" b="0">
-                          <a:solidFill>
-                            <a:srgbClr val="0D1117"/>
-                          </a:solidFill>
-                          <a:latin typeface="Inter"/>
-                        </a:defRPr>
-                      </a:pPr>
-                      <a:r>
-                        <a:rPr>
-                          <a:latin typeface="Inter"/>
-                        </a:rPr>
-                        <a:t>get_diligence_roster_funds</a:t>
-                      </a:r>
-                    </a:p>
-                  </a:txBody>
-                  <a:tcPr marL="54864" marR="54864" marT="27432" marB="27432" anchor="ctr">
-                    <a:solidFill>
-                      <a:srgbClr val="FFFFFF"/>
-                    </a:solidFill>
-                  </a:tcPr>
-                </a:tc>
-                <a:tc>
-                  <a:txBody>
-                    <a:bodyPr/>
-                    <a:lstStyle/>
-                    <a:p>
-                      <a:pPr>
-                        <a:defRPr sz="650" b="0">
+                        <a:defRPr sz="800" b="0">
                           <a:solidFill>
                             <a:srgbClr val="0D1117"/>
                           </a:solidFill>
@@ -4591,88 +5473,7 @@
                     <a:lstStyle/>
                     <a:p>
                       <a:pPr>
-                        <a:defRPr sz="650" b="0">
-                          <a:solidFill>
-                            <a:srgbClr val="0D1117"/>
-                          </a:solidFill>
-                          <a:latin typeface="Inter"/>
-                        </a:defRPr>
-                      </a:pPr>
-                      <a:r>
-                        <a:rPr>
-                          <a:latin typeface="Inter"/>
-                        </a:rPr>
-                        <a:t>2026-10-04</a:t>
-                      </a:r>
-                    </a:p>
-                  </a:txBody>
-                  <a:tcPr marL="54864" marR="54864" marT="27432" marB="27432" anchor="ctr">
-                    <a:solidFill>
-                      <a:srgbClr val="FFFFFF"/>
-                    </a:solidFill>
-                  </a:tcPr>
-                </a:tc>
-                <a:tc>
-                  <a:txBody>
-                    <a:bodyPr/>
-                    <a:lstStyle/>
-                    <a:p>
-                      <a:pPr>
-                        <a:defRPr sz="650" b="0">
-                          <a:solidFill>
-                            <a:srgbClr val="0D1117"/>
-                          </a:solidFill>
-                          <a:latin typeface="Inter"/>
-                        </a:defRPr>
-                      </a:pPr>
-                      <a:r>
-                        <a:rPr>
-                          <a:latin typeface="Inter"/>
-                        </a:rPr>
-                        <a:t>Gradient-governed review evidence</a:t>
-                      </a:r>
-                    </a:p>
-                  </a:txBody>
-                  <a:tcPr marL="54864" marR="54864" marT="27432" marB="27432" anchor="ctr">
-                    <a:solidFill>
-                      <a:srgbClr val="FFFFFF"/>
-                    </a:solidFill>
-                  </a:tcPr>
-                </a:tc>
-                <a:tc>
-                  <a:txBody>
-                    <a:bodyPr/>
-                    <a:lstStyle/>
-                    <a:p>
-                      <a:pPr>
-                        <a:defRPr sz="650" b="0">
-                          <a:solidFill>
-                            <a:srgbClr val="0D1117"/>
-                          </a:solidFill>
-                          <a:latin typeface="Inter"/>
-                        </a:defRPr>
-                      </a:pPr>
-                      <a:r>
-                        <a:rPr>
-                          <a:latin typeface="Inter"/>
-                        </a:rPr>
-                        <a:t>{'chip': 'passed', 'status': 'passed'}</a:t>
-                      </a:r>
-                    </a:p>
-                  </a:txBody>
-                  <a:tcPr marL="54864" marR="54864" marT="27432" marB="27432" anchor="ctr">
-                    <a:solidFill>
-                      <a:srgbClr val="FFFFFF"/>
-                    </a:solidFill>
-                  </a:tcPr>
-                </a:tc>
-                <a:tc>
-                  <a:txBody>
-                    <a:bodyPr/>
-                    <a:lstStyle/>
-                    <a:p>
-                      <a:pPr>
-                        <a:defRPr sz="650" b="0">
+                        <a:defRPr sz="800" b="0">
                           <a:solidFill>
                             <a:srgbClr val="0D1117"/>
                           </a:solidFill>
@@ -4694,14 +5495,14 @@
                   </a:tcPr>
                 </a:tc>
               </a:tr>
-              <a:tr h="386626">
+              <a:tr h="630936">
                 <a:tc>
                   <a:txBody>
                     <a:bodyPr/>
                     <a:lstStyle/>
                     <a:p>
                       <a:pPr>
-                        <a:defRPr sz="650" b="1">
+                        <a:defRPr sz="800" b="1">
                           <a:solidFill>
                             <a:srgbClr val="0D1117"/>
                           </a:solidFill>
@@ -4728,88 +5529,7 @@
                     <a:lstStyle/>
                     <a:p>
                       <a:pPr>
-                        <a:defRPr sz="650" b="0">
-                          <a:solidFill>
-                            <a:srgbClr val="0D1117"/>
-                          </a:solidFill>
-                          <a:latin typeface="Inter"/>
-                        </a:defRPr>
-                      </a:pPr>
-                      <a:r>
-                        <a:rPr>
-                          <a:latin typeface="Inter"/>
-                        </a:rPr>
-                        <a:t>Attention queue, changes since review, red flags</a:t>
-                      </a:r>
-                    </a:p>
-                  </a:txBody>
-                  <a:tcPr marL="54864" marR="54864" marT="27432" marB="27432" anchor="ctr">
-                    <a:solidFill>
-                      <a:srgbClr val="F5F7F9"/>
-                    </a:solidFill>
-                  </a:tcPr>
-                </a:tc>
-                <a:tc>
-                  <a:txBody>
-                    <a:bodyPr/>
-                    <a:lstStyle/>
-                    <a:p>
-                      <a:pPr>
-                        <a:defRPr sz="650" b="0">
-                          <a:solidFill>
-                            <a:srgbClr val="0D1117"/>
-                          </a:solidFill>
-                          <a:latin typeface="Inter"/>
-                        </a:defRPr>
-                      </a:pPr>
-                      <a:r>
-                        <a:rPr>
-                          <a:latin typeface="Inter"/>
-                        </a:rPr>
-                        <a:t>gradient_tool</a:t>
-                      </a:r>
-                    </a:p>
-                  </a:txBody>
-                  <a:tcPr marL="54864" marR="54864" marT="27432" marB="27432" anchor="ctr">
-                    <a:solidFill>
-                      <a:srgbClr val="F5F7F9"/>
-                    </a:solidFill>
-                  </a:tcPr>
-                </a:tc>
-                <a:tc>
-                  <a:txBody>
-                    <a:bodyPr/>
-                    <a:lstStyle/>
-                    <a:p>
-                      <a:pPr>
-                        <a:defRPr sz="650" b="0">
-                          <a:solidFill>
-                            <a:srgbClr val="0D1117"/>
-                          </a:solidFill>
-                          <a:latin typeface="Inter"/>
-                        </a:defRPr>
-                      </a:pPr>
-                      <a:r>
-                        <a:rPr>
-                          <a:latin typeface="Inter"/>
-                        </a:rPr>
-                        <a:t>get_manager_diligence_attention_queue</a:t>
-                      </a:r>
-                    </a:p>
-                  </a:txBody>
-                  <a:tcPr marL="54864" marR="54864" marT="27432" marB="27432" anchor="ctr">
-                    <a:solidFill>
-                      <a:srgbClr val="F5F7F9"/>
-                    </a:solidFill>
-                  </a:tcPr>
-                </a:tc>
-                <a:tc>
-                  <a:txBody>
-                    <a:bodyPr/>
-                    <a:lstStyle/>
-                    <a:p>
-                      <a:pPr>
-                        <a:defRPr sz="650" b="0">
+                        <a:defRPr sz="800" b="0">
                           <a:solidFill>
                             <a:srgbClr val="0D1117"/>
                           </a:solidFill>
@@ -4836,88 +5556,7 @@
                     <a:lstStyle/>
                     <a:p>
                       <a:pPr>
-                        <a:defRPr sz="650" b="0">
-                          <a:solidFill>
-                            <a:srgbClr val="0D1117"/>
-                          </a:solidFill>
-                          <a:latin typeface="Inter"/>
-                        </a:defRPr>
-                      </a:pPr>
-                      <a:r>
-                        <a:rPr>
-                          <a:latin typeface="Inter"/>
-                        </a:rPr>
-                        <a:t>2026-10-04</a:t>
-                      </a:r>
-                    </a:p>
-                  </a:txBody>
-                  <a:tcPr marL="54864" marR="54864" marT="27432" marB="27432" anchor="ctr">
-                    <a:solidFill>
-                      <a:srgbClr val="F5F7F9"/>
-                    </a:solidFill>
-                  </a:tcPr>
-                </a:tc>
-                <a:tc>
-                  <a:txBody>
-                    <a:bodyPr/>
-                    <a:lstStyle/>
-                    <a:p>
-                      <a:pPr>
-                        <a:defRPr sz="650" b="0">
-                          <a:solidFill>
-                            <a:srgbClr val="0D1117"/>
-                          </a:solidFill>
-                          <a:latin typeface="Inter"/>
-                        </a:defRPr>
-                      </a:pPr>
-                      <a:r>
-                        <a:rPr>
-                          <a:latin typeface="Inter"/>
-                        </a:rPr>
-                        <a:t>Gradient-governed review evidence</a:t>
-                      </a:r>
-                    </a:p>
-                  </a:txBody>
-                  <a:tcPr marL="54864" marR="54864" marT="27432" marB="27432" anchor="ctr">
-                    <a:solidFill>
-                      <a:srgbClr val="F5F7F9"/>
-                    </a:solidFill>
-                  </a:tcPr>
-                </a:tc>
-                <a:tc>
-                  <a:txBody>
-                    <a:bodyPr/>
-                    <a:lstStyle/>
-                    <a:p>
-                      <a:pPr>
-                        <a:defRPr sz="650" b="0">
-                          <a:solidFill>
-                            <a:srgbClr val="0D1117"/>
-                          </a:solidFill>
-                          <a:latin typeface="Inter"/>
-                        </a:defRPr>
-                      </a:pPr>
-                      <a:r>
-                        <a:rPr>
-                          <a:latin typeface="Inter"/>
-                        </a:rPr>
-                        <a:t>{'chip': 'passed', 'status': 'passed'}</a:t>
-                      </a:r>
-                    </a:p>
-                  </a:txBody>
-                  <a:tcPr marL="54864" marR="54864" marT="27432" marB="27432" anchor="ctr">
-                    <a:solidFill>
-                      <a:srgbClr val="F5F7F9"/>
-                    </a:solidFill>
-                  </a:tcPr>
-                </a:tc>
-                <a:tc>
-                  <a:txBody>
-                    <a:bodyPr/>
-                    <a:lstStyle/>
-                    <a:p>
-                      <a:pPr>
-                        <a:defRPr sz="650" b="0">
+                        <a:defRPr sz="800" b="0">
                           <a:solidFill>
                             <a:srgbClr val="0D1117"/>
                           </a:solidFill>
@@ -4939,14 +5578,14 @@
                   </a:tcPr>
                 </a:tc>
               </a:tr>
-              <a:tr h="386626">
+              <a:tr h="630936">
                 <a:tc>
                   <a:txBody>
                     <a:bodyPr/>
                     <a:lstStyle/>
                     <a:p>
                       <a:pPr>
-                        <a:defRPr sz="650" b="1">
+                        <a:defRPr sz="800" b="1">
                           <a:solidFill>
                             <a:srgbClr val="0D1117"/>
                           </a:solidFill>
@@ -4973,88 +5612,7 @@
                     <a:lstStyle/>
                     <a:p>
                       <a:pPr>
-                        <a:defRPr sz="650" b="0">
-                          <a:solidFill>
-                            <a:srgbClr val="0D1117"/>
-                          </a:solidFill>
-                          <a:latin typeface="Inter"/>
-                        </a:defRPr>
-                      </a:pPr>
-                      <a:r>
-                        <a:rPr>
-                          <a:latin typeface="Inter"/>
-                        </a:rPr>
-                        <a:t>Monitor alerts and coverage</a:t>
-                      </a:r>
-                    </a:p>
-                  </a:txBody>
-                  <a:tcPr marL="54864" marR="54864" marT="27432" marB="27432" anchor="ctr">
-                    <a:solidFill>
-                      <a:srgbClr val="FFFFFF"/>
-                    </a:solidFill>
-                  </a:tcPr>
-                </a:tc>
-                <a:tc>
-                  <a:txBody>
-                    <a:bodyPr/>
-                    <a:lstStyle/>
-                    <a:p>
-                      <a:pPr>
-                        <a:defRPr sz="650" b="0">
-                          <a:solidFill>
-                            <a:srgbClr val="0D1117"/>
-                          </a:solidFill>
-                          <a:latin typeface="Inter"/>
-                        </a:defRPr>
-                      </a:pPr>
-                      <a:r>
-                        <a:rPr>
-                          <a:latin typeface="Inter"/>
-                        </a:rPr>
-                        <a:t>gradient_tool</a:t>
-                      </a:r>
-                    </a:p>
-                  </a:txBody>
-                  <a:tcPr marL="54864" marR="54864" marT="27432" marB="27432" anchor="ctr">
-                    <a:solidFill>
-                      <a:srgbClr val="FFFFFF"/>
-                    </a:solidFill>
-                  </a:tcPr>
-                </a:tc>
-                <a:tc>
-                  <a:txBody>
-                    <a:bodyPr/>
-                    <a:lstStyle/>
-                    <a:p>
-                      <a:pPr>
-                        <a:defRPr sz="650" b="0">
-                          <a:solidFill>
-                            <a:srgbClr val="0D1117"/>
-                          </a:solidFill>
-                          <a:latin typeface="Inter"/>
-                        </a:defRPr>
-                      </a:pPr>
-                      <a:r>
-                        <a:rPr>
-                          <a:latin typeface="Inter"/>
-                        </a:rPr>
-                        <a:t>get_manager_monitor_evidence</a:t>
-                      </a:r>
-                    </a:p>
-                  </a:txBody>
-                  <a:tcPr marL="54864" marR="54864" marT="27432" marB="27432" anchor="ctr">
-                    <a:solidFill>
-                      <a:srgbClr val="FFFFFF"/>
-                    </a:solidFill>
-                  </a:tcPr>
-                </a:tc>
-                <a:tc>
-                  <a:txBody>
-                    <a:bodyPr/>
-                    <a:lstStyle/>
-                    <a:p>
-                      <a:pPr>
-                        <a:defRPr sz="650" b="0">
+                        <a:defRPr sz="800" b="0">
                           <a:solidFill>
                             <a:srgbClr val="0D1117"/>
                           </a:solidFill>
@@ -5081,88 +5639,7 @@
                     <a:lstStyle/>
                     <a:p>
                       <a:pPr>
-                        <a:defRPr sz="650" b="0">
-                          <a:solidFill>
-                            <a:srgbClr val="0D1117"/>
-                          </a:solidFill>
-                          <a:latin typeface="Inter"/>
-                        </a:defRPr>
-                      </a:pPr>
-                      <a:r>
-                        <a:rPr>
-                          <a:latin typeface="Inter"/>
-                        </a:rPr>
-                        <a:t>2026-10-01</a:t>
-                      </a:r>
-                    </a:p>
-                  </a:txBody>
-                  <a:tcPr marL="54864" marR="54864" marT="27432" marB="27432" anchor="ctr">
-                    <a:solidFill>
-                      <a:srgbClr val="FFFFFF"/>
-                    </a:solidFill>
-                  </a:tcPr>
-                </a:tc>
-                <a:tc>
-                  <a:txBody>
-                    <a:bodyPr/>
-                    <a:lstStyle/>
-                    <a:p>
-                      <a:pPr>
-                        <a:defRPr sz="650" b="0">
-                          <a:solidFill>
-                            <a:srgbClr val="0D1117"/>
-                          </a:solidFill>
-                          <a:latin typeface="Inter"/>
-                        </a:defRPr>
-                      </a:pPr>
-                      <a:r>
-                        <a:rPr>
-                          <a:latin typeface="Inter"/>
-                        </a:rPr>
-                        <a:t>Gradient-governed review evidence</a:t>
-                      </a:r>
-                    </a:p>
-                  </a:txBody>
-                  <a:tcPr marL="54864" marR="54864" marT="27432" marB="27432" anchor="ctr">
-                    <a:solidFill>
-                      <a:srgbClr val="FFFFFF"/>
-                    </a:solidFill>
-                  </a:tcPr>
-                </a:tc>
-                <a:tc>
-                  <a:txBody>
-                    <a:bodyPr/>
-                    <a:lstStyle/>
-                    <a:p>
-                      <a:pPr>
-                        <a:defRPr sz="650" b="0">
-                          <a:solidFill>
-                            <a:srgbClr val="0D1117"/>
-                          </a:solidFill>
-                          <a:latin typeface="Inter"/>
-                        </a:defRPr>
-                      </a:pPr>
-                      <a:r>
-                        <a:rPr>
-                          <a:latin typeface="Inter"/>
-                        </a:rPr>
-                        <a:t>{'chip': 'passed', 'status': 'passed'}</a:t>
-                      </a:r>
-                    </a:p>
-                  </a:txBody>
-                  <a:tcPr marL="54864" marR="54864" marT="27432" marB="27432" anchor="ctr">
-                    <a:solidFill>
-                      <a:srgbClr val="FFFFFF"/>
-                    </a:solidFill>
-                  </a:tcPr>
-                </a:tc>
-                <a:tc>
-                  <a:txBody>
-                    <a:bodyPr/>
-                    <a:lstStyle/>
-                    <a:p>
-                      <a:pPr>
-                        <a:defRPr sz="650" b="0">
+                        <a:defRPr sz="800" b="0">
                           <a:solidFill>
                             <a:srgbClr val="0D1117"/>
                           </a:solidFill>
@@ -5184,14 +5661,14 @@
                   </a:tcPr>
                 </a:tc>
               </a:tr>
-              <a:tr h="386626">
+              <a:tr h="630936">
                 <a:tc>
                   <a:txBody>
                     <a:bodyPr/>
                     <a:lstStyle/>
                     <a:p>
                       <a:pPr>
-                        <a:defRPr sz="650" b="1">
+                        <a:defRPr sz="800" b="1">
                           <a:solidFill>
                             <a:srgbClr val="0D1117"/>
                           </a:solidFill>
@@ -5218,88 +5695,7 @@
                     <a:lstStyle/>
                     <a:p>
                       <a:pPr>
-                        <a:defRPr sz="650" b="0">
-                          <a:solidFill>
-                            <a:srgbClr val="0D1117"/>
-                          </a:solidFill>
-                          <a:latin typeface="Inter"/>
-                        </a:defRPr>
-                      </a:pPr>
-                      <a:r>
-                        <a:rPr>
-                          <a:latin typeface="Inter"/>
-                        </a:rPr>
-                        <a:t>Open findings — Ridgeview Advisors</a:t>
-                      </a:r>
-                    </a:p>
-                  </a:txBody>
-                  <a:tcPr marL="54864" marR="54864" marT="27432" marB="27432" anchor="ctr">
-                    <a:solidFill>
-                      <a:srgbClr val="F5F7F9"/>
-                    </a:solidFill>
-                  </a:tcPr>
-                </a:tc>
-                <a:tc>
-                  <a:txBody>
-                    <a:bodyPr/>
-                    <a:lstStyle/>
-                    <a:p>
-                      <a:pPr>
-                        <a:defRPr sz="650" b="0">
-                          <a:solidFill>
-                            <a:srgbClr val="0D1117"/>
-                          </a:solidFill>
-                          <a:latin typeface="Inter"/>
-                        </a:defRPr>
-                      </a:pPr>
-                      <a:r>
-                        <a:rPr>
-                          <a:latin typeface="Inter"/>
-                        </a:rPr>
-                        <a:t>gradient_tool</a:t>
-                      </a:r>
-                    </a:p>
-                  </a:txBody>
-                  <a:tcPr marL="54864" marR="54864" marT="27432" marB="27432" anchor="ctr">
-                    <a:solidFill>
-                      <a:srgbClr val="F5F7F9"/>
-                    </a:solidFill>
-                  </a:tcPr>
-                </a:tc>
-                <a:tc>
-                  <a:txBody>
-                    <a:bodyPr/>
-                    <a:lstStyle/>
-                    <a:p>
-                      <a:pPr>
-                        <a:defRPr sz="650" b="0">
-                          <a:solidFill>
-                            <a:srgbClr val="0D1117"/>
-                          </a:solidFill>
-                          <a:latin typeface="Inter"/>
-                        </a:defRPr>
-                      </a:pPr>
-                      <a:r>
-                        <a:rPr>
-                          <a:latin typeface="Inter"/>
-                        </a:rPr>
-                        <a:t>get_manager_diligence_findings</a:t>
-                      </a:r>
-                    </a:p>
-                  </a:txBody>
-                  <a:tcPr marL="54864" marR="54864" marT="27432" marB="27432" anchor="ctr">
-                    <a:solidFill>
-                      <a:srgbClr val="F5F7F9"/>
-                    </a:solidFill>
-                  </a:tcPr>
-                </a:tc>
-                <a:tc>
-                  <a:txBody>
-                    <a:bodyPr/>
-                    <a:lstStyle/>
-                    <a:p>
-                      <a:pPr>
-                        <a:defRPr sz="650" b="0">
+                        <a:defRPr sz="800" b="0">
                           <a:solidFill>
                             <a:srgbClr val="0D1117"/>
                           </a:solidFill>
@@ -5326,88 +5722,7 @@
                     <a:lstStyle/>
                     <a:p>
                       <a:pPr>
-                        <a:defRPr sz="650" b="0">
-                          <a:solidFill>
-                            <a:srgbClr val="0D1117"/>
-                          </a:solidFill>
-                          <a:latin typeface="Inter"/>
-                        </a:defRPr>
-                      </a:pPr>
-                      <a:r>
-                        <a:rPr>
-                          <a:latin typeface="Inter"/>
-                        </a:rPr>
-                        <a:t>2026-10-04</a:t>
-                      </a:r>
-                    </a:p>
-                  </a:txBody>
-                  <a:tcPr marL="54864" marR="54864" marT="27432" marB="27432" anchor="ctr">
-                    <a:solidFill>
-                      <a:srgbClr val="F5F7F9"/>
-                    </a:solidFill>
-                  </a:tcPr>
-                </a:tc>
-                <a:tc>
-                  <a:txBody>
-                    <a:bodyPr/>
-                    <a:lstStyle/>
-                    <a:p>
-                      <a:pPr>
-                        <a:defRPr sz="650" b="0">
-                          <a:solidFill>
-                            <a:srgbClr val="0D1117"/>
-                          </a:solidFill>
-                          <a:latin typeface="Inter"/>
-                        </a:defRPr>
-                      </a:pPr>
-                      <a:r>
-                        <a:rPr>
-                          <a:latin typeface="Inter"/>
-                        </a:rPr>
-                        <a:t>Gradient-governed review evidence</a:t>
-                      </a:r>
-                    </a:p>
-                  </a:txBody>
-                  <a:tcPr marL="54864" marR="54864" marT="27432" marB="27432" anchor="ctr">
-                    <a:solidFill>
-                      <a:srgbClr val="F5F7F9"/>
-                    </a:solidFill>
-                  </a:tcPr>
-                </a:tc>
-                <a:tc>
-                  <a:txBody>
-                    <a:bodyPr/>
-                    <a:lstStyle/>
-                    <a:p>
-                      <a:pPr>
-                        <a:defRPr sz="650" b="0">
-                          <a:solidFill>
-                            <a:srgbClr val="0D1117"/>
-                          </a:solidFill>
-                          <a:latin typeface="Inter"/>
-                        </a:defRPr>
-                      </a:pPr>
-                      <a:r>
-                        <a:rPr>
-                          <a:latin typeface="Inter"/>
-                        </a:rPr>
-                        <a:t>{'chip': 'advisory', 'status': 'advisory'}</a:t>
-                      </a:r>
-                    </a:p>
-                  </a:txBody>
-                  <a:tcPr marL="54864" marR="54864" marT="27432" marB="27432" anchor="ctr">
-                    <a:solidFill>
-                      <a:srgbClr val="F5F7F9"/>
-                    </a:solidFill>
-                  </a:tcPr>
-                </a:tc>
-                <a:tc>
-                  <a:txBody>
-                    <a:bodyPr/>
-                    <a:lstStyle/>
-                    <a:p>
-                      <a:pPr>
-                        <a:defRPr sz="650" b="0">
+                        <a:defRPr sz="800" b="0">
                           <a:solidFill>
                             <a:srgbClr val="0D1117"/>
                           </a:solidFill>
@@ -5429,14 +5744,14 @@
                   </a:tcPr>
                 </a:tc>
               </a:tr>
-              <a:tr h="386626">
+              <a:tr h="630936">
                 <a:tc>
                   <a:txBody>
                     <a:bodyPr/>
                     <a:lstStyle/>
                     <a:p>
                       <a:pPr>
-                        <a:defRPr sz="650" b="1">
+                        <a:defRPr sz="800" b="1">
                           <a:solidFill>
                             <a:srgbClr val="0D1117"/>
                           </a:solidFill>
@@ -5463,88 +5778,7 @@
                     <a:lstStyle/>
                     <a:p>
                       <a:pPr>
-                        <a:defRPr sz="650" b="0">
-                          <a:solidFill>
-                            <a:srgbClr val="0D1117"/>
-                          </a:solidFill>
-                          <a:latin typeface="Inter"/>
-                        </a:defRPr>
-                      </a:pPr>
-                      <a:r>
-                        <a:rPr>
-                          <a:latin typeface="Inter"/>
-                        </a:rPr>
-                        <a:t>Firm and fund events — Ridgeview Advisors</a:t>
-                      </a:r>
-                    </a:p>
-                  </a:txBody>
-                  <a:tcPr marL="54864" marR="54864" marT="27432" marB="27432" anchor="ctr">
-                    <a:solidFill>
-                      <a:srgbClr val="FFFFFF"/>
-                    </a:solidFill>
-                  </a:tcPr>
-                </a:tc>
-                <a:tc>
-                  <a:txBody>
-                    <a:bodyPr/>
-                    <a:lstStyle/>
-                    <a:p>
-                      <a:pPr>
-                        <a:defRPr sz="650" b="0">
-                          <a:solidFill>
-                            <a:srgbClr val="0D1117"/>
-                          </a:solidFill>
-                          <a:latin typeface="Inter"/>
-                        </a:defRPr>
-                      </a:pPr>
-                      <a:r>
-                        <a:rPr>
-                          <a:latin typeface="Inter"/>
-                        </a:rPr>
-                        <a:t>gradient_tool</a:t>
-                      </a:r>
-                    </a:p>
-                  </a:txBody>
-                  <a:tcPr marL="54864" marR="54864" marT="27432" marB="27432" anchor="ctr">
-                    <a:solidFill>
-                      <a:srgbClr val="FFFFFF"/>
-                    </a:solidFill>
-                  </a:tcPr>
-                </a:tc>
-                <a:tc>
-                  <a:txBody>
-                    <a:bodyPr/>
-                    <a:lstStyle/>
-                    <a:p>
-                      <a:pPr>
-                        <a:defRPr sz="650" b="0">
-                          <a:solidFill>
-                            <a:srgbClr val="0D1117"/>
-                          </a:solidFill>
-                          <a:latin typeface="Inter"/>
-                        </a:defRPr>
-                      </a:pPr>
-                      <a:r>
-                        <a:rPr>
-                          <a:latin typeface="Inter"/>
-                        </a:rPr>
-                        <a:t>get_firm_fund_events</a:t>
-                      </a:r>
-                    </a:p>
-                  </a:txBody>
-                  <a:tcPr marL="54864" marR="54864" marT="27432" marB="27432" anchor="ctr">
-                    <a:solidFill>
-                      <a:srgbClr val="FFFFFF"/>
-                    </a:solidFill>
-                  </a:tcPr>
-                </a:tc>
-                <a:tc>
-                  <a:txBody>
-                    <a:bodyPr/>
-                    <a:lstStyle/>
-                    <a:p>
-                      <a:pPr>
-                        <a:defRPr sz="650" b="0">
+                        <a:defRPr sz="800" b="0">
                           <a:solidFill>
                             <a:srgbClr val="0D1117"/>
                           </a:solidFill>
@@ -5571,88 +5805,7 @@
                     <a:lstStyle/>
                     <a:p>
                       <a:pPr>
-                        <a:defRPr sz="650" b="0">
-                          <a:solidFill>
-                            <a:srgbClr val="0D1117"/>
-                          </a:solidFill>
-                          <a:latin typeface="Inter"/>
-                        </a:defRPr>
-                      </a:pPr>
-                      <a:r>
-                        <a:rPr>
-                          <a:latin typeface="Inter"/>
-                        </a:rPr>
-                        <a:t>2026-10-04</a:t>
-                      </a:r>
-                    </a:p>
-                  </a:txBody>
-                  <a:tcPr marL="54864" marR="54864" marT="27432" marB="27432" anchor="ctr">
-                    <a:solidFill>
-                      <a:srgbClr val="FFFFFF"/>
-                    </a:solidFill>
-                  </a:tcPr>
-                </a:tc>
-                <a:tc>
-                  <a:txBody>
-                    <a:bodyPr/>
-                    <a:lstStyle/>
-                    <a:p>
-                      <a:pPr>
-                        <a:defRPr sz="650" b="0">
-                          <a:solidFill>
-                            <a:srgbClr val="0D1117"/>
-                          </a:solidFill>
-                          <a:latin typeface="Inter"/>
-                        </a:defRPr>
-                      </a:pPr>
-                      <a:r>
-                        <a:rPr>
-                          <a:latin typeface="Inter"/>
-                        </a:rPr>
-                        <a:t>Gradient-governed review evidence</a:t>
-                      </a:r>
-                    </a:p>
-                  </a:txBody>
-                  <a:tcPr marL="54864" marR="54864" marT="27432" marB="27432" anchor="ctr">
-                    <a:solidFill>
-                      <a:srgbClr val="FFFFFF"/>
-                    </a:solidFill>
-                  </a:tcPr>
-                </a:tc>
-                <a:tc>
-                  <a:txBody>
-                    <a:bodyPr/>
-                    <a:lstStyle/>
-                    <a:p>
-                      <a:pPr>
-                        <a:defRPr sz="650" b="0">
-                          <a:solidFill>
-                            <a:srgbClr val="0D1117"/>
-                          </a:solidFill>
-                          <a:latin typeface="Inter"/>
-                        </a:defRPr>
-                      </a:pPr>
-                      <a:r>
-                        <a:rPr>
-                          <a:latin typeface="Inter"/>
-                        </a:rPr>
-                        <a:t>{'chip': 'passed', 'status': 'passed'}</a:t>
-                      </a:r>
-                    </a:p>
-                  </a:txBody>
-                  <a:tcPr marL="54864" marR="54864" marT="27432" marB="27432" anchor="ctr">
-                    <a:solidFill>
-                      <a:srgbClr val="FFFFFF"/>
-                    </a:solidFill>
-                  </a:tcPr>
-                </a:tc>
-                <a:tc>
-                  <a:txBody>
-                    <a:bodyPr/>
-                    <a:lstStyle/>
-                    <a:p>
-                      <a:pPr>
-                        <a:defRPr sz="650" b="0">
+                        <a:defRPr sz="800" b="0">
                           <a:solidFill>
                             <a:srgbClr val="0D1117"/>
                           </a:solidFill>
@@ -5674,14 +5827,14 @@
                   </a:tcPr>
                 </a:tc>
               </a:tr>
-              <a:tr h="386631">
+              <a:tr h="630936">
                 <a:tc>
                   <a:txBody>
                     <a:bodyPr/>
                     <a:lstStyle/>
                     <a:p>
                       <a:pPr>
-                        <a:defRPr sz="650" b="1">
+                        <a:defRPr sz="800" b="1">
                           <a:solidFill>
                             <a:srgbClr val="0D1117"/>
                           </a:solidFill>
@@ -5708,88 +5861,7 @@
                     <a:lstStyle/>
                     <a:p>
                       <a:pPr>
-                        <a:defRPr sz="650" b="0">
-                          <a:solidFill>
-                            <a:srgbClr val="0D1117"/>
-                          </a:solidFill>
-                          <a:latin typeface="Inter"/>
-                        </a:defRPr>
-                      </a:pPr>
-                      <a:r>
-                        <a:rPr>
-                          <a:latin typeface="Inter"/>
-                        </a:rPr>
-                        <a:t>Research watchlist changes</a:t>
-                      </a:r>
-                    </a:p>
-                  </a:txBody>
-                  <a:tcPr marL="54864" marR="54864" marT="27432" marB="27432" anchor="ctr">
-                    <a:solidFill>
-                      <a:srgbClr val="F5F7F9"/>
-                    </a:solidFill>
-                  </a:tcPr>
-                </a:tc>
-                <a:tc>
-                  <a:txBody>
-                    <a:bodyPr/>
-                    <a:lstStyle/>
-                    <a:p>
-                      <a:pPr>
-                        <a:defRPr sz="650" b="0">
-                          <a:solidFill>
-                            <a:srgbClr val="0D1117"/>
-                          </a:solidFill>
-                          <a:latin typeface="Inter"/>
-                        </a:defRPr>
-                      </a:pPr>
-                      <a:r>
-                        <a:rPr>
-                          <a:latin typeface="Inter"/>
-                        </a:rPr>
-                        <a:t>gradient_tool</a:t>
-                      </a:r>
-                    </a:p>
-                  </a:txBody>
-                  <a:tcPr marL="54864" marR="54864" marT="27432" marB="27432" anchor="ctr">
-                    <a:solidFill>
-                      <a:srgbClr val="F5F7F9"/>
-                    </a:solidFill>
-                  </a:tcPr>
-                </a:tc>
-                <a:tc>
-                  <a:txBody>
-                    <a:bodyPr/>
-                    <a:lstStyle/>
-                    <a:p>
-                      <a:pPr>
-                        <a:defRPr sz="650" b="0">
-                          <a:solidFill>
-                            <a:srgbClr val="0D1117"/>
-                          </a:solidFill>
-                          <a:latin typeface="Inter"/>
-                        </a:defRPr>
-                      </a:pPr>
-                      <a:r>
-                        <a:rPr>
-                          <a:latin typeface="Inter"/>
-                        </a:rPr>
-                        <a:t>get_research_watchlist_changes</a:t>
-                      </a:r>
-                    </a:p>
-                  </a:txBody>
-                  <a:tcPr marL="54864" marR="54864" marT="27432" marB="27432" anchor="ctr">
-                    <a:solidFill>
-                      <a:srgbClr val="F5F7F9"/>
-                    </a:solidFill>
-                  </a:tcPr>
-                </a:tc>
-                <a:tc>
-                  <a:txBody>
-                    <a:bodyPr/>
-                    <a:lstStyle/>
-                    <a:p>
-                      <a:pPr>
-                        <a:defRPr sz="650" b="0">
+                        <a:defRPr sz="800" b="0">
                           <a:solidFill>
                             <a:srgbClr val="0D1117"/>
                           </a:solidFill>
@@ -5816,88 +5888,7 @@
                     <a:lstStyle/>
                     <a:p>
                       <a:pPr>
-                        <a:defRPr sz="650" b="0">
-                          <a:solidFill>
-                            <a:srgbClr val="0D1117"/>
-                          </a:solidFill>
-                          <a:latin typeface="Inter"/>
-                        </a:defRPr>
-                      </a:pPr>
-                      <a:r>
-                        <a:rPr>
-                          <a:latin typeface="Inter"/>
-                        </a:rPr>
-                        <a:t>2026-10-04</a:t>
-                      </a:r>
-                    </a:p>
-                  </a:txBody>
-                  <a:tcPr marL="54864" marR="54864" marT="27432" marB="27432" anchor="ctr">
-                    <a:solidFill>
-                      <a:srgbClr val="F5F7F9"/>
-                    </a:solidFill>
-                  </a:tcPr>
-                </a:tc>
-                <a:tc>
-                  <a:txBody>
-                    <a:bodyPr/>
-                    <a:lstStyle/>
-                    <a:p>
-                      <a:pPr>
-                        <a:defRPr sz="650" b="0">
-                          <a:solidFill>
-                            <a:srgbClr val="0D1117"/>
-                          </a:solidFill>
-                          <a:latin typeface="Inter"/>
-                        </a:defRPr>
-                      </a:pPr>
-                      <a:r>
-                        <a:rPr>
-                          <a:latin typeface="Inter"/>
-                        </a:rPr>
-                        <a:t>Gradient-governed review evidence</a:t>
-                      </a:r>
-                    </a:p>
-                  </a:txBody>
-                  <a:tcPr marL="54864" marR="54864" marT="27432" marB="27432" anchor="ctr">
-                    <a:solidFill>
-                      <a:srgbClr val="F5F7F9"/>
-                    </a:solidFill>
-                  </a:tcPr>
-                </a:tc>
-                <a:tc>
-                  <a:txBody>
-                    <a:bodyPr/>
-                    <a:lstStyle/>
-                    <a:p>
-                      <a:pPr>
-                        <a:defRPr sz="650" b="0">
-                          <a:solidFill>
-                            <a:srgbClr val="0D1117"/>
-                          </a:solidFill>
-                          <a:latin typeface="Inter"/>
-                        </a:defRPr>
-                      </a:pPr>
-                      <a:r>
-                        <a:rPr>
-                          <a:latin typeface="Inter"/>
-                        </a:rPr>
-                        <a:t>{'chip': 'passed', 'status': 'passed'}</a:t>
-                      </a:r>
-                    </a:p>
-                  </a:txBody>
-                  <a:tcPr marL="54864" marR="54864" marT="27432" marB="27432" anchor="ctr">
-                    <a:solidFill>
-                      <a:srgbClr val="F5F7F9"/>
-                    </a:solidFill>
-                  </a:tcPr>
-                </a:tc>
-                <a:tc>
-                  <a:txBody>
-                    <a:bodyPr/>
-                    <a:lstStyle/>
-                    <a:p>
-                      <a:pPr>
-                        <a:defRPr sz="650" b="0">
+                        <a:defRPr sz="800" b="0">
                           <a:solidFill>
                             <a:srgbClr val="0D1117"/>
                           </a:solidFill>
@@ -5931,7 +5922,7 @@
         </p:nvSpPr>
         <p:spPr>
           <a:xfrm>
-            <a:off x="640080" y="4050555"/>
+            <a:off x="640080" y="6035040"/>
             <a:ext cx="10908792" cy="164592"/>
           </a:xfrm>
           <a:prstGeom prst="rect">
@@ -5960,94 +5951,14 @@
               <a:rPr>
                 <a:latin typeface="Inter"/>
               </a:rPr>
-              <a:t>S4 validation: advisory 'empty primary list has no explicit reason' although the response states absence_reason no_open_findings. Illustrative, Gradient Maintained — demo data, not the client's holdings or managers. All organizations, portfolios, managers and results in this public example are illustrative.</a:t>
-            </a:r>
-          </a:p>
-        </p:txBody>
-      </p:sp>
-      <p:sp>
-        <p:nvSpPr>
-          <p:cNvPr id="10" name="TextBox 9"/>
-          <p:cNvSpPr txBox="1"/>
-          <p:nvPr/>
-        </p:nvSpPr>
-        <p:spPr>
-          <a:xfrm>
-            <a:off x="640080" y="4343163"/>
-            <a:ext cx="10908792" cy="1874756"/>
-          </a:xfrm>
-          <a:prstGeom prst="rect">
-            <a:avLst/>
-          </a:prstGeom>
-          <a:noFill/>
-        </p:spPr>
-        <p:txBody>
-          <a:bodyPr wrap="none" lIns="9144" rIns="9144" tIns="9144" bIns="9144" anchor="t">
-            <a:spAutoFit/>
-          </a:bodyPr>
-          <a:lstStyle/>
-          <a:p>
-            <a:pPr algn="l">
-              <a:spcAft>
-                <a:spcPts val="500"/>
-              </a:spcAft>
-              <a:defRPr sz="1050" b="0">
-                <a:solidFill>
-                  <a:srgbClr val="0D1117"/>
-                </a:solidFill>
-                <a:latin typeface="Inter"/>
-              </a:defRPr>
-            </a:pPr>
-            <a:r>
-              <a:rPr>
-                <a:latin typeface="Inter"/>
-              </a:rPr>
-              <a:t>•  Window: 2026-09-28 to 2026-10-04. Severity: high = tier-1 alert, new red flag, overdue high finding or overdue review; medium = material change since review, tier-2 alert, open medium finding, review due within 30 days; low = everything else.</a:t>
-            </a:r>
-          </a:p>
-          <a:p>
-            <a:pPr algn="l">
-              <a:spcAft>
-                <a:spcPts val="500"/>
-              </a:spcAft>
-              <a:defRPr sz="1050" b="0">
-                <a:solidFill>
-                  <a:srgbClr val="0D1117"/>
-                </a:solidFill>
-                <a:latin typeface="Inter"/>
-              </a:defRPr>
-            </a:pPr>
-            <a:r>
-              <a:rPr>
-                <a:latin typeface="Inter"/>
-              </a:rPr>
-              <a:t>•  Organization: Gradient (org_TEST000000000000000000000). Data scope: user-authorized live.</a:t>
-            </a:r>
-          </a:p>
-          <a:p>
-            <a:pPr algn="l">
-              <a:spcAft>
-                <a:spcPts val="500"/>
-              </a:spcAft>
-              <a:defRPr sz="1050" b="0">
-                <a:solidFill>
-                  <a:srgbClr val="0D1117"/>
-                </a:solidFill>
-                <a:latin typeface="Inter"/>
-              </a:defRPr>
-            </a:pPr>
-            <a:r>
-              <a:rPr>
-                <a:latin typeface="Inter"/>
-              </a:rPr>
-              <a:t>•  Form ADV is adviser-reported and not verified by the SEC. This digest is a monitoring aid, not investment, legal or compliance advice.</a:t>
-            </a:r>
-          </a:p>
-        </p:txBody>
-      </p:sp>
-      <p:sp>
-        <p:nvSpPr>
-          <p:cNvPr id="11" name="Rectangle 10"/>
+              <a:t>Data scope for every source: Illustrative sample data. Each digest is the SHA-256 fingerprint of the exact data the report used.</a:t>
+            </a:r>
+          </a:p>
+        </p:txBody>
+      </p:sp>
+      <p:sp>
+        <p:nvSpPr>
+          <p:cNvPr id="10" name="Rectangle 9"/>
           <p:cNvSpPr/>
           <p:nvPr/>
         </p:nvSpPr>
@@ -6096,7 +6007,7 @@
       </p:sp>
       <p:sp>
         <p:nvSpPr>
-          <p:cNvPr id="12" name="TextBox 11"/>
+          <p:cNvPr id="11" name="TextBox 10"/>
           <p:cNvSpPr txBox="1"/>
           <p:nvPr/>
         </p:nvSpPr>
@@ -6138,7 +6049,7 @@
       </p:sp>
       <p:sp>
         <p:nvSpPr>
-          <p:cNvPr id="13" name="TextBox 12"/>
+          <p:cNvPr id="12" name="TextBox 11"/>
           <p:cNvSpPr txBox="1"/>
           <p:nvPr/>
         </p:nvSpPr>
@@ -6180,7 +6091,7 @@
       </p:sp>
       <p:sp>
         <p:nvSpPr>
-          <p:cNvPr id="14" name="TextBox 13"/>
+          <p:cNvPr id="13" name="TextBox 12"/>
           <p:cNvSpPr txBox="1"/>
           <p:nvPr/>
         </p:nvSpPr>
@@ -6215,7 +6126,7 @@
               <a:rPr>
                 <a:latin typeface="Inter"/>
               </a:rPr>
-              <a:t>10</a:t>
+              <a:t>11</a:t>
             </a:r>
           </a:p>
         </p:txBody>
@@ -6296,7 +6207,7 @@
         <p:spPr>
           <a:xfrm>
             <a:off x="640080" y="329184"/>
-            <a:ext cx="5303520" cy="182880"/>
+            <a:ext cx="9875520" cy="182880"/>
           </a:xfrm>
           <a:prstGeom prst="rect">
             <a:avLst/>
@@ -6337,48 +6248,6 @@
         </p:nvSpPr>
         <p:spPr>
           <a:xfrm>
-            <a:off x="5897880" y="310896"/>
-            <a:ext cx="4800600" cy="256032"/>
-          </a:xfrm>
-          <a:prstGeom prst="rect">
-            <a:avLst/>
-          </a:prstGeom>
-          <a:noFill/>
-        </p:spPr>
-        <p:txBody>
-          <a:bodyPr wrap="none" lIns="9144" rIns="9144" tIns="9144" bIns="9144" anchor="t">
-            <a:spAutoFit/>
-          </a:bodyPr>
-          <a:lstStyle/>
-          <a:p>
-            <a:pPr algn="r">
-              <a:spcAft>
-                <a:spcPts val="0"/>
-              </a:spcAft>
-              <a:defRPr sz="680" b="1">
-                <a:solidFill>
-                  <a:srgbClr val="4F6B00"/>
-                </a:solidFill>
-                <a:latin typeface="Inter"/>
-              </a:defRPr>
-            </a:pPr>
-            <a:r>
-              <a:rPr>
-                <a:latin typeface="Inter"/>
-              </a:rPr>
-              <a:t>Illustrative, Gradient Maintained — demo data, not the client's holdings or managers</a:t>
-            </a:r>
-          </a:p>
-        </p:txBody>
-      </p:sp>
-      <p:sp>
-        <p:nvSpPr>
-          <p:cNvPr id="5" name="TextBox 4"/>
-          <p:cNvSpPr txBox="1"/>
-          <p:nvPr/>
-        </p:nvSpPr>
-        <p:spPr>
-          <a:xfrm>
             <a:off x="640080" y="566928"/>
             <a:ext cx="10058400" cy="530352"/>
           </a:xfrm>
@@ -6415,7 +6284,7 @@
       </p:sp>
       <p:sp>
         <p:nvSpPr>
-          <p:cNvPr id="6" name="Rectangle 5"/>
+          <p:cNvPr id="5" name="Rectangle 4"/>
           <p:cNvSpPr/>
           <p:nvPr/>
         </p:nvSpPr>
@@ -6464,7 +6333,7 @@
       </p:sp>
       <p:sp>
         <p:nvSpPr>
-          <p:cNvPr id="7" name="Rectangle 6"/>
+          <p:cNvPr id="6" name="Rectangle 5"/>
           <p:cNvSpPr/>
           <p:nvPr/>
         </p:nvSpPr>
@@ -6513,7 +6382,7 @@
       </p:sp>
       <p:sp>
         <p:nvSpPr>
-          <p:cNvPr id="8" name="TextBox 7"/>
+          <p:cNvPr id="7" name="TextBox 6"/>
           <p:cNvSpPr txBox="1"/>
           <p:nvPr/>
         </p:nvSpPr>
@@ -6555,14 +6424,105 @@
       </p:sp>
       <p:sp>
         <p:nvSpPr>
-          <p:cNvPr id="9" name="Rectangle 8"/>
+          <p:cNvPr id="8" name="Rectangle 7"/>
           <p:cNvSpPr/>
           <p:nvPr/>
         </p:nvSpPr>
         <p:spPr>
           <a:xfrm>
-            <a:off x="640080" y="1325880"/>
-            <a:ext cx="10908792" cy="2822348"/>
+            <a:off x="640080" y="1399032"/>
+            <a:ext cx="73152" cy="824622"/>
+          </a:xfrm>
+          <a:prstGeom prst="rect">
+            <a:avLst/>
+          </a:prstGeom>
+          <a:solidFill>
+            <a:srgbClr val="F2A93B"/>
+          </a:solidFill>
+          <a:ln>
+            <a:solidFill>
+              <a:srgbClr val="F2A93B"/>
+            </a:solidFill>
+          </a:ln>
+        </p:spPr>
+        <p:style>
+          <a:lnRef idx="1">
+            <a:schemeClr val="accent1"/>
+          </a:lnRef>
+          <a:fillRef idx="3">
+            <a:schemeClr val="accent1"/>
+          </a:fillRef>
+          <a:effectRef idx="2">
+            <a:schemeClr val="accent1"/>
+          </a:effectRef>
+          <a:fontRef idx="minor">
+            <a:schemeClr val="lt1"/>
+          </a:fontRef>
+        </p:style>
+        <p:txBody>
+          <a:bodyPr rtlCol="0" anchor="ctr"/>
+          <a:lstStyle/>
+          <a:p>
+            <a:pPr algn="ctr">
+              <a:defRPr>
+                <a:latin typeface="Inter"/>
+              </a:defRPr>
+            </a:pPr>
+          </a:p>
+        </p:txBody>
+      </p:sp>
+      <p:sp>
+        <p:nvSpPr>
+          <p:cNvPr id="9" name="TextBox 8"/>
+          <p:cNvSpPr txBox="1"/>
+          <p:nvPr/>
+        </p:nvSpPr>
+        <p:spPr>
+          <a:xfrm>
+            <a:off x="896112" y="1371600"/>
+            <a:ext cx="10588752" cy="563137"/>
+          </a:xfrm>
+          <a:prstGeom prst="rect">
+            <a:avLst/>
+          </a:prstGeom>
+          <a:noFill/>
+        </p:spPr>
+        <p:txBody>
+          <a:bodyPr wrap="none" lIns="9144" rIns="9144" tIns="9144" bIns="9144" anchor="t">
+            <a:spAutoFit/>
+          </a:bodyPr>
+          <a:lstStyle/>
+          <a:p>
+            <a:pPr algn="l">
+              <a:spcAft>
+                <a:spcPts val="0"/>
+              </a:spcAft>
+              <a:defRPr sz="1800" b="1">
+                <a:solidFill>
+                  <a:srgbClr val="0D1117"/>
+                </a:solidFill>
+                <a:latin typeface="Inter"/>
+              </a:defRPr>
+            </a:pPr>
+            <a:r>
+              <a:rPr>
+                <a:latin typeface="Inter"/>
+              </a:rPr>
+              <a:t>One manager change to review this week</a:t>
+            </a:r>
+          </a:p>
+        </p:txBody>
+      </p:sp>
+      <p:sp>
+        <p:nvSpPr>
+          <p:cNvPr id="10" name="Rectangle 9"/>
+          <p:cNvSpPr/>
+          <p:nvPr/>
+        </p:nvSpPr>
+        <p:spPr>
+          <a:xfrm>
+            <a:off x="640080" y="2406534"/>
+            <a:ext cx="10908792" cy="2184584"/>
           </a:xfrm>
           <a:prstGeom prst="rect">
             <a:avLst/>
@@ -6604,14 +6564,14 @@
       </p:sp>
       <p:sp>
         <p:nvSpPr>
-          <p:cNvPr id="10" name="Rectangle 9"/>
+          <p:cNvPr id="11" name="Rectangle 10"/>
           <p:cNvSpPr/>
           <p:nvPr/>
         </p:nvSpPr>
         <p:spPr>
           <a:xfrm>
-            <a:off x="640080" y="1325880"/>
-            <a:ext cx="54864" cy="2822348"/>
+            <a:off x="640080" y="2406534"/>
+            <a:ext cx="54864" cy="2184584"/>
           </a:xfrm>
           <a:prstGeom prst="rect">
             <a:avLst/>
@@ -6653,13 +6613,13 @@
       </p:sp>
       <p:sp>
         <p:nvSpPr>
-          <p:cNvPr id="11" name="TextBox 10"/>
+          <p:cNvPr id="12" name="TextBox 11"/>
           <p:cNvSpPr txBox="1"/>
           <p:nvPr/>
         </p:nvSpPr>
         <p:spPr>
           <a:xfrm>
-            <a:off x="804671" y="1435607"/>
+            <a:off x="804671" y="2516262"/>
             <a:ext cx="10616184" cy="228600"/>
           </a:xfrm>
           <a:prstGeom prst="rect">
@@ -6695,14 +6655,14 @@
       </p:sp>
       <p:sp>
         <p:nvSpPr>
-          <p:cNvPr id="12" name="TextBox 11"/>
+          <p:cNvPr id="13" name="TextBox 12"/>
           <p:cNvSpPr txBox="1"/>
           <p:nvPr/>
         </p:nvSpPr>
         <p:spPr>
           <a:xfrm>
-            <a:off x="804671" y="1719072"/>
-            <a:ext cx="10616184" cy="2337716"/>
+            <a:off x="804671" y="2799726"/>
+            <a:ext cx="10616184" cy="1699952"/>
           </a:xfrm>
           <a:prstGeom prst="rect">
             <a:avLst/>
@@ -6737,14 +6697,14 @@
       </p:sp>
       <p:sp>
         <p:nvSpPr>
-          <p:cNvPr id="13" name="Rectangle 12"/>
+          <p:cNvPr id="14" name="Rectangle 13"/>
           <p:cNvSpPr/>
           <p:nvPr/>
         </p:nvSpPr>
         <p:spPr>
           <a:xfrm>
-            <a:off x="640080" y="4257956"/>
-            <a:ext cx="2644902" cy="1959963"/>
+            <a:off x="640080" y="4700847"/>
+            <a:ext cx="2644902" cy="1517072"/>
           </a:xfrm>
           <a:prstGeom prst="rect">
             <a:avLst/>
@@ -6786,13 +6746,13 @@
       </p:sp>
       <p:sp>
         <p:nvSpPr>
-          <p:cNvPr id="14" name="Rectangle 13"/>
+          <p:cNvPr id="15" name="Rectangle 14"/>
           <p:cNvSpPr/>
           <p:nvPr/>
         </p:nvSpPr>
         <p:spPr>
           <a:xfrm>
-            <a:off x="640080" y="4257956"/>
+            <a:off x="640080" y="4700847"/>
             <a:ext cx="2644902" cy="45720"/>
           </a:xfrm>
           <a:prstGeom prst="rect">
@@ -6835,13 +6795,13 @@
       </p:sp>
       <p:sp>
         <p:nvSpPr>
-          <p:cNvPr id="15" name="TextBox 14"/>
+          <p:cNvPr id="16" name="TextBox 15"/>
           <p:cNvSpPr txBox="1"/>
           <p:nvPr/>
         </p:nvSpPr>
         <p:spPr>
           <a:xfrm>
-            <a:off x="749808" y="4385972"/>
+            <a:off x="749808" y="4828863"/>
             <a:ext cx="2425446" cy="201168"/>
           </a:xfrm>
           <a:prstGeom prst="rect">
@@ -6877,13 +6837,13 @@
       </p:sp>
       <p:sp>
         <p:nvSpPr>
-          <p:cNvPr id="16" name="TextBox 15"/>
+          <p:cNvPr id="17" name="TextBox 16"/>
           <p:cNvSpPr txBox="1"/>
           <p:nvPr/>
         </p:nvSpPr>
         <p:spPr>
           <a:xfrm>
-            <a:off x="749808" y="4642004"/>
+            <a:off x="749808" y="5084895"/>
             <a:ext cx="2425446" cy="475488"/>
           </a:xfrm>
           <a:prstGeom prst="rect">
@@ -6919,7 +6879,7 @@
       </p:sp>
       <p:sp>
         <p:nvSpPr>
-          <p:cNvPr id="17" name="TextBox 16"/>
+          <p:cNvPr id="18" name="TextBox 17"/>
           <p:cNvSpPr txBox="1"/>
           <p:nvPr/>
         </p:nvSpPr>
@@ -6961,14 +6921,14 @@
       </p:sp>
       <p:sp>
         <p:nvSpPr>
-          <p:cNvPr id="18" name="Rectangle 17"/>
+          <p:cNvPr id="19" name="Rectangle 18"/>
           <p:cNvSpPr/>
           <p:nvPr/>
         </p:nvSpPr>
         <p:spPr>
           <a:xfrm>
-            <a:off x="3394710" y="4257956"/>
-            <a:ext cx="2644902" cy="1959963"/>
+            <a:off x="3394710" y="4700847"/>
+            <a:ext cx="2644902" cy="1517072"/>
           </a:xfrm>
           <a:prstGeom prst="rect">
             <a:avLst/>
@@ -7010,13 +6970,13 @@
       </p:sp>
       <p:sp>
         <p:nvSpPr>
-          <p:cNvPr id="19" name="Rectangle 18"/>
+          <p:cNvPr id="20" name="Rectangle 19"/>
           <p:cNvSpPr/>
           <p:nvPr/>
         </p:nvSpPr>
         <p:spPr>
           <a:xfrm>
-            <a:off x="3394710" y="4257956"/>
+            <a:off x="3394710" y="4700847"/>
             <a:ext cx="2644902" cy="45720"/>
           </a:xfrm>
           <a:prstGeom prst="rect">
@@ -7059,13 +7019,13 @@
       </p:sp>
       <p:sp>
         <p:nvSpPr>
-          <p:cNvPr id="20" name="TextBox 19"/>
+          <p:cNvPr id="21" name="TextBox 20"/>
           <p:cNvSpPr txBox="1"/>
           <p:nvPr/>
         </p:nvSpPr>
         <p:spPr>
           <a:xfrm>
-            <a:off x="3504438" y="4385972"/>
+            <a:off x="3504438" y="4828863"/>
             <a:ext cx="2425446" cy="201168"/>
           </a:xfrm>
           <a:prstGeom prst="rect">
@@ -7101,13 +7061,13 @@
       </p:sp>
       <p:sp>
         <p:nvSpPr>
-          <p:cNvPr id="21" name="TextBox 20"/>
+          <p:cNvPr id="22" name="TextBox 21"/>
           <p:cNvSpPr txBox="1"/>
           <p:nvPr/>
         </p:nvSpPr>
         <p:spPr>
           <a:xfrm>
-            <a:off x="3504438" y="4642004"/>
+            <a:off x="3504438" y="5084895"/>
             <a:ext cx="2425446" cy="475488"/>
           </a:xfrm>
           <a:prstGeom prst="rect">
@@ -7143,7 +7103,7 @@
       </p:sp>
       <p:sp>
         <p:nvSpPr>
-          <p:cNvPr id="22" name="TextBox 21"/>
+          <p:cNvPr id="23" name="TextBox 22"/>
           <p:cNvSpPr txBox="1"/>
           <p:nvPr/>
         </p:nvSpPr>
@@ -7185,14 +7145,14 @@
       </p:sp>
       <p:sp>
         <p:nvSpPr>
-          <p:cNvPr id="23" name="Rectangle 22"/>
+          <p:cNvPr id="24" name="Rectangle 23"/>
           <p:cNvSpPr/>
           <p:nvPr/>
         </p:nvSpPr>
         <p:spPr>
           <a:xfrm>
-            <a:off x="6149340" y="4257956"/>
-            <a:ext cx="2644902" cy="1959963"/>
+            <a:off x="6149340" y="4700847"/>
+            <a:ext cx="2644902" cy="1517072"/>
           </a:xfrm>
           <a:prstGeom prst="rect">
             <a:avLst/>
@@ -7234,13 +7194,13 @@
       </p:sp>
       <p:sp>
         <p:nvSpPr>
-          <p:cNvPr id="24" name="Rectangle 23"/>
+          <p:cNvPr id="25" name="Rectangle 24"/>
           <p:cNvSpPr/>
           <p:nvPr/>
         </p:nvSpPr>
         <p:spPr>
           <a:xfrm>
-            <a:off x="6149340" y="4257956"/>
+            <a:off x="6149340" y="4700847"/>
             <a:ext cx="2644902" cy="45720"/>
           </a:xfrm>
           <a:prstGeom prst="rect">
@@ -7283,13 +7243,13 @@
       </p:sp>
       <p:sp>
         <p:nvSpPr>
-          <p:cNvPr id="25" name="TextBox 24"/>
+          <p:cNvPr id="26" name="TextBox 25"/>
           <p:cNvSpPr txBox="1"/>
           <p:nvPr/>
         </p:nvSpPr>
         <p:spPr>
           <a:xfrm>
-            <a:off x="6259068" y="4385972"/>
+            <a:off x="6259068" y="4828863"/>
             <a:ext cx="2425446" cy="201168"/>
           </a:xfrm>
           <a:prstGeom prst="rect">
@@ -7325,13 +7285,13 @@
       </p:sp>
       <p:sp>
         <p:nvSpPr>
-          <p:cNvPr id="26" name="TextBox 25"/>
+          <p:cNvPr id="27" name="TextBox 26"/>
           <p:cNvSpPr txBox="1"/>
           <p:nvPr/>
         </p:nvSpPr>
         <p:spPr>
           <a:xfrm>
-            <a:off x="6259068" y="4642004"/>
+            <a:off x="6259068" y="5084895"/>
             <a:ext cx="2425446" cy="475488"/>
           </a:xfrm>
           <a:prstGeom prst="rect">
@@ -7367,7 +7327,7 @@
       </p:sp>
       <p:sp>
         <p:nvSpPr>
-          <p:cNvPr id="27" name="TextBox 26"/>
+          <p:cNvPr id="28" name="TextBox 27"/>
           <p:cNvSpPr txBox="1"/>
           <p:nvPr/>
         </p:nvSpPr>
@@ -7409,14 +7369,14 @@
       </p:sp>
       <p:sp>
         <p:nvSpPr>
-          <p:cNvPr id="28" name="Rectangle 27"/>
+          <p:cNvPr id="29" name="Rectangle 28"/>
           <p:cNvSpPr/>
           <p:nvPr/>
         </p:nvSpPr>
         <p:spPr>
           <a:xfrm>
-            <a:off x="8903970" y="4257956"/>
-            <a:ext cx="2644902" cy="1959963"/>
+            <a:off x="8903970" y="4700847"/>
+            <a:ext cx="2644902" cy="1517072"/>
           </a:xfrm>
           <a:prstGeom prst="rect">
             <a:avLst/>
@@ -7458,13 +7418,13 @@
       </p:sp>
       <p:sp>
         <p:nvSpPr>
-          <p:cNvPr id="29" name="Rectangle 28"/>
+          <p:cNvPr id="30" name="Rectangle 29"/>
           <p:cNvSpPr/>
           <p:nvPr/>
         </p:nvSpPr>
         <p:spPr>
           <a:xfrm>
-            <a:off x="8903970" y="4257956"/>
+            <a:off x="8903970" y="4700847"/>
             <a:ext cx="2644902" cy="45720"/>
           </a:xfrm>
           <a:prstGeom prst="rect">
@@ -7507,13 +7467,13 @@
       </p:sp>
       <p:sp>
         <p:nvSpPr>
-          <p:cNvPr id="30" name="TextBox 29"/>
+          <p:cNvPr id="31" name="TextBox 30"/>
           <p:cNvSpPr txBox="1"/>
           <p:nvPr/>
         </p:nvSpPr>
         <p:spPr>
           <a:xfrm>
-            <a:off x="9013698" y="4385972"/>
+            <a:off x="9013698" y="4828863"/>
             <a:ext cx="2425446" cy="201168"/>
           </a:xfrm>
           <a:prstGeom prst="rect">
@@ -7549,13 +7509,13 @@
       </p:sp>
       <p:sp>
         <p:nvSpPr>
-          <p:cNvPr id="31" name="TextBox 30"/>
+          <p:cNvPr id="32" name="TextBox 31"/>
           <p:cNvSpPr txBox="1"/>
           <p:nvPr/>
         </p:nvSpPr>
         <p:spPr>
           <a:xfrm>
-            <a:off x="9013698" y="4642004"/>
+            <a:off x="9013698" y="5084895"/>
             <a:ext cx="2425446" cy="475488"/>
           </a:xfrm>
           <a:prstGeom prst="rect">
@@ -7591,7 +7551,7 @@
       </p:sp>
       <p:sp>
         <p:nvSpPr>
-          <p:cNvPr id="32" name="TextBox 31"/>
+          <p:cNvPr id="33" name="TextBox 32"/>
           <p:cNvSpPr txBox="1"/>
           <p:nvPr/>
         </p:nvSpPr>
@@ -7633,7 +7593,7 @@
       </p:sp>
       <p:sp>
         <p:nvSpPr>
-          <p:cNvPr id="33" name="Rectangle 32"/>
+          <p:cNvPr id="34" name="Rectangle 33"/>
           <p:cNvSpPr/>
           <p:nvPr/>
         </p:nvSpPr>
@@ -7682,7 +7642,7 @@
       </p:sp>
       <p:sp>
         <p:nvSpPr>
-          <p:cNvPr id="34" name="TextBox 33"/>
+          <p:cNvPr id="35" name="TextBox 34"/>
           <p:cNvSpPr txBox="1"/>
           <p:nvPr/>
         </p:nvSpPr>
@@ -7724,7 +7684,7 @@
       </p:sp>
       <p:sp>
         <p:nvSpPr>
-          <p:cNvPr id="35" name="TextBox 34"/>
+          <p:cNvPr id="36" name="TextBox 35"/>
           <p:cNvSpPr txBox="1"/>
           <p:nvPr/>
         </p:nvSpPr>
@@ -7766,7 +7726,7 @@
       </p:sp>
       <p:sp>
         <p:nvSpPr>
-          <p:cNvPr id="36" name="TextBox 35"/>
+          <p:cNvPr id="37" name="TextBox 36"/>
           <p:cNvSpPr txBox="1"/>
           <p:nvPr/>
         </p:nvSpPr>
@@ -7882,7 +7842,7 @@
         <p:spPr>
           <a:xfrm>
             <a:off x="640080" y="329184"/>
-            <a:ext cx="5303520" cy="182880"/>
+            <a:ext cx="9875520" cy="182880"/>
           </a:xfrm>
           <a:prstGeom prst="rect">
             <a:avLst/>
@@ -7923,48 +7883,6 @@
         </p:nvSpPr>
         <p:spPr>
           <a:xfrm>
-            <a:off x="5897880" y="310896"/>
-            <a:ext cx="4800600" cy="256032"/>
-          </a:xfrm>
-          <a:prstGeom prst="rect">
-            <a:avLst/>
-          </a:prstGeom>
-          <a:noFill/>
-        </p:spPr>
-        <p:txBody>
-          <a:bodyPr wrap="none" lIns="9144" rIns="9144" tIns="9144" bIns="9144" anchor="t">
-            <a:spAutoFit/>
-          </a:bodyPr>
-          <a:lstStyle/>
-          <a:p>
-            <a:pPr algn="r">
-              <a:spcAft>
-                <a:spcPts val="0"/>
-              </a:spcAft>
-              <a:defRPr sz="680" b="1">
-                <a:solidFill>
-                  <a:srgbClr val="4F6B00"/>
-                </a:solidFill>
-                <a:latin typeface="Inter"/>
-              </a:defRPr>
-            </a:pPr>
-            <a:r>
-              <a:rPr>
-                <a:latin typeface="Inter"/>
-              </a:rPr>
-              <a:t>Illustrative, Gradient Maintained — demo data, not the client's holdings or managers</a:t>
-            </a:r>
-          </a:p>
-        </p:txBody>
-      </p:sp>
-      <p:sp>
-        <p:nvSpPr>
-          <p:cNvPr id="5" name="TextBox 4"/>
-          <p:cNvSpPr txBox="1"/>
-          <p:nvPr/>
-        </p:nvSpPr>
-        <p:spPr>
-          <a:xfrm>
             <a:off x="640080" y="566928"/>
             <a:ext cx="10058400" cy="530352"/>
           </a:xfrm>
@@ -8001,7 +7919,7 @@
       </p:sp>
       <p:sp>
         <p:nvSpPr>
-          <p:cNvPr id="6" name="Rectangle 5"/>
+          <p:cNvPr id="5" name="Rectangle 4"/>
           <p:cNvSpPr/>
           <p:nvPr/>
         </p:nvSpPr>
@@ -8050,7 +7968,7 @@
       </p:sp>
       <p:sp>
         <p:nvSpPr>
-          <p:cNvPr id="7" name="Rectangle 6"/>
+          <p:cNvPr id="6" name="Rectangle 5"/>
           <p:cNvSpPr/>
           <p:nvPr/>
         </p:nvSpPr>
@@ -8099,7 +8017,7 @@
       </p:sp>
       <p:sp>
         <p:nvSpPr>
-          <p:cNvPr id="8" name="TextBox 7"/>
+          <p:cNvPr id="7" name="TextBox 6"/>
           <p:cNvSpPr txBox="1"/>
           <p:nvPr/>
         </p:nvSpPr>
@@ -8141,7 +8059,7 @@
       </p:sp>
       <p:sp>
         <p:nvSpPr>
-          <p:cNvPr id="9" name="TextBox 8"/>
+          <p:cNvPr id="8" name="TextBox 7"/>
           <p:cNvSpPr txBox="1"/>
           <p:nvPr/>
         </p:nvSpPr>
@@ -8183,7 +8101,7 @@
       </p:sp>
       <p:graphicFrame>
         <p:nvGraphicFramePr>
-          <p:cNvPr id="10" name="Chart 9"/>
+          <p:cNvPr id="9" name="Chart 8"/>
           <p:cNvGraphicFramePr>
             <a:graphicFrameLocks noGrp="1"/>
           </p:cNvGraphicFramePr>
@@ -8201,7 +8119,7 @@
       </p:graphicFrame>
       <p:sp>
         <p:nvSpPr>
-          <p:cNvPr id="11" name="Rectangle 10"/>
+          <p:cNvPr id="10" name="Rectangle 9"/>
           <p:cNvSpPr/>
           <p:nvPr/>
         </p:nvSpPr>
@@ -8250,7 +8168,7 @@
       </p:sp>
       <p:sp>
         <p:nvSpPr>
-          <p:cNvPr id="12" name="TextBox 11"/>
+          <p:cNvPr id="11" name="TextBox 10"/>
           <p:cNvSpPr txBox="1"/>
           <p:nvPr/>
         </p:nvSpPr>
@@ -8292,7 +8210,7 @@
       </p:sp>
       <p:sp>
         <p:nvSpPr>
-          <p:cNvPr id="13" name="TextBox 12"/>
+          <p:cNvPr id="12" name="TextBox 11"/>
           <p:cNvSpPr txBox="1"/>
           <p:nvPr/>
         </p:nvSpPr>
@@ -8334,7 +8252,7 @@
       </p:sp>
       <p:sp>
         <p:nvSpPr>
-          <p:cNvPr id="14" name="TextBox 13"/>
+          <p:cNvPr id="13" name="TextBox 12"/>
           <p:cNvSpPr txBox="1"/>
           <p:nvPr/>
         </p:nvSpPr>
@@ -8450,7 +8368,7 @@
         <p:spPr>
           <a:xfrm>
             <a:off x="640080" y="329184"/>
-            <a:ext cx="5303520" cy="182880"/>
+            <a:ext cx="9875520" cy="182880"/>
           </a:xfrm>
           <a:prstGeom prst="rect">
             <a:avLst/>
@@ -8491,48 +8409,6 @@
         </p:nvSpPr>
         <p:spPr>
           <a:xfrm>
-            <a:off x="5897880" y="310896"/>
-            <a:ext cx="4800600" cy="256032"/>
-          </a:xfrm>
-          <a:prstGeom prst="rect">
-            <a:avLst/>
-          </a:prstGeom>
-          <a:noFill/>
-        </p:spPr>
-        <p:txBody>
-          <a:bodyPr wrap="none" lIns="9144" rIns="9144" tIns="9144" bIns="9144" anchor="t">
-            <a:spAutoFit/>
-          </a:bodyPr>
-          <a:lstStyle/>
-          <a:p>
-            <a:pPr algn="r">
-              <a:spcAft>
-                <a:spcPts val="0"/>
-              </a:spcAft>
-              <a:defRPr sz="680" b="1">
-                <a:solidFill>
-                  <a:srgbClr val="4F6B00"/>
-                </a:solidFill>
-                <a:latin typeface="Inter"/>
-              </a:defRPr>
-            </a:pPr>
-            <a:r>
-              <a:rPr>
-                <a:latin typeface="Inter"/>
-              </a:rPr>
-              <a:t>Illustrative, Gradient Maintained — demo data, not the client's holdings or managers</a:t>
-            </a:r>
-          </a:p>
-        </p:txBody>
-      </p:sp>
-      <p:sp>
-        <p:nvSpPr>
-          <p:cNvPr id="5" name="TextBox 4"/>
-          <p:cNvSpPr txBox="1"/>
-          <p:nvPr/>
-        </p:nvSpPr>
-        <p:spPr>
-          <a:xfrm>
             <a:off x="640080" y="566928"/>
             <a:ext cx="10058400" cy="530352"/>
           </a:xfrm>
@@ -8569,7 +8445,7 @@
       </p:sp>
       <p:sp>
         <p:nvSpPr>
-          <p:cNvPr id="6" name="Rectangle 5"/>
+          <p:cNvPr id="5" name="Rectangle 4"/>
           <p:cNvSpPr/>
           <p:nvPr/>
         </p:nvSpPr>
@@ -8618,7 +8494,7 @@
       </p:sp>
       <p:sp>
         <p:nvSpPr>
-          <p:cNvPr id="7" name="Rectangle 6"/>
+          <p:cNvPr id="6" name="Rectangle 5"/>
           <p:cNvSpPr/>
           <p:nvPr/>
         </p:nvSpPr>
@@ -8667,7 +8543,7 @@
       </p:sp>
       <p:sp>
         <p:nvSpPr>
-          <p:cNvPr id="8" name="TextBox 7"/>
+          <p:cNvPr id="7" name="TextBox 6"/>
           <p:cNvSpPr txBox="1"/>
           <p:nvPr/>
         </p:nvSpPr>
@@ -8709,7 +8585,7 @@
       </p:sp>
       <p:sp>
         <p:nvSpPr>
-          <p:cNvPr id="9" name="TextBox 8"/>
+          <p:cNvPr id="8" name="TextBox 7"/>
           <p:cNvSpPr txBox="1"/>
           <p:nvPr/>
         </p:nvSpPr>
@@ -8751,7 +8627,7 @@
       </p:sp>
       <p:graphicFrame>
         <p:nvGraphicFramePr>
-          <p:cNvPr id="10" name="Table 9"/>
+          <p:cNvPr id="9" name="Table 8"/>
           <p:cNvGraphicFramePr>
             <a:graphicFrameLocks noGrp="1"/>
           </p:cNvGraphicFramePr>
@@ -8759,7 +8635,7 @@
         </p:nvGraphicFramePr>
         <p:xfrm>
           <a:off x="640080" y="1600200"/>
-          <a:ext cx="10908792" cy="741226"/>
+          <a:ext cx="10908792" cy="944145"/>
         </p:xfrm>
         <a:graphic>
           <a:graphicData uri="http://schemas.openxmlformats.org/drawingml/2006/table">
@@ -8772,7 +8648,7 @@
                 <a:gridCol w="4448556"/>
                 <a:gridCol w="4448556"/>
               </a:tblGrid>
-              <a:tr h="370613">
+              <a:tr h="472072">
                 <a:tc>
                   <a:txBody>
                     <a:bodyPr/>
@@ -8855,7 +8731,7 @@
                   </a:tcPr>
                 </a:tc>
               </a:tr>
-              <a:tr h="370613">
+              <a:tr h="472073">
                 <a:tc>
                   <a:txBody>
                     <a:bodyPr/>
@@ -8873,7 +8749,7 @@
                         <a:rPr>
                           <a:latin typeface="Inter"/>
                         </a:rPr>
-                        <a:t>● MEDIUM</a:t>
+                        <a:t>● Medium</a:t>
                       </a:r>
                     </a:p>
                   </a:txBody>
@@ -8944,14 +8820,14 @@
       </p:graphicFrame>
       <p:sp>
         <p:nvSpPr>
-          <p:cNvPr id="11" name="Rectangle 10"/>
+          <p:cNvPr id="10" name="Rectangle 9"/>
           <p:cNvSpPr/>
           <p:nvPr/>
         </p:nvSpPr>
         <p:spPr>
           <a:xfrm>
-            <a:off x="640080" y="2451154"/>
-            <a:ext cx="10908792" cy="1217945"/>
+            <a:off x="640080" y="2654073"/>
+            <a:ext cx="10908792" cy="1154560"/>
           </a:xfrm>
           <a:prstGeom prst="rect">
             <a:avLst/>
@@ -8993,14 +8869,14 @@
       </p:sp>
       <p:sp>
         <p:nvSpPr>
-          <p:cNvPr id="12" name="Rectangle 11"/>
+          <p:cNvPr id="11" name="Rectangle 10"/>
           <p:cNvSpPr/>
           <p:nvPr/>
         </p:nvSpPr>
         <p:spPr>
           <a:xfrm>
-            <a:off x="640080" y="2451154"/>
-            <a:ext cx="54864" cy="1217945"/>
+            <a:off x="640080" y="2654073"/>
+            <a:ext cx="54864" cy="1154560"/>
           </a:xfrm>
           <a:prstGeom prst="rect">
             <a:avLst/>
@@ -9042,13 +8918,13 @@
       </p:sp>
       <p:sp>
         <p:nvSpPr>
-          <p:cNvPr id="13" name="TextBox 12"/>
+          <p:cNvPr id="12" name="TextBox 11"/>
           <p:cNvSpPr txBox="1"/>
           <p:nvPr/>
         </p:nvSpPr>
         <p:spPr>
           <a:xfrm>
-            <a:off x="804671" y="2560882"/>
+            <a:off x="804671" y="2763801"/>
             <a:ext cx="10616184" cy="228600"/>
           </a:xfrm>
           <a:prstGeom prst="rect">
@@ -9077,21 +8953,21 @@
               <a:rPr>
                 <a:latin typeface="Inter"/>
               </a:rPr>
-              <a:t>Key judgment — headline signal</a:t>
-            </a:r>
-          </a:p>
-        </p:txBody>
-      </p:sp>
-      <p:sp>
-        <p:nvSpPr>
-          <p:cNvPr id="14" name="TextBox 13"/>
+              <a:t>Key judgment — This week</a:t>
+            </a:r>
+          </a:p>
+        </p:txBody>
+      </p:sp>
+      <p:sp>
+        <p:nvSpPr>
+          <p:cNvPr id="13" name="TextBox 12"/>
           <p:cNvSpPr txBox="1"/>
           <p:nvPr/>
         </p:nvSpPr>
         <p:spPr>
           <a:xfrm>
-            <a:off x="804671" y="2844346"/>
-            <a:ext cx="10616184" cy="733313"/>
+            <a:off x="804671" y="3047265"/>
+            <a:ext cx="10616184" cy="669928"/>
           </a:xfrm>
           <a:prstGeom prst="rect">
             <a:avLst/>
@@ -9119,21 +8995,21 @@
               <a:rPr>
                 <a:latin typeface="Inter"/>
               </a:rPr>
-              <a:t>Observation: The sample report carries a 1 item to review signal [S1]. Why it matters: This signal focuses oversight on the report's most decision-relevant condition. Uncertainty: Evidence coverage may exclude newer or more detailed observations. What would change the view: A governed refresh showing a different signal or breached threshold.</a:t>
-            </a:r>
-          </a:p>
-        </p:txBody>
-      </p:sp>
-      <p:sp>
-        <p:nvSpPr>
-          <p:cNvPr id="15" name="Rectangle 14"/>
+              <a:t>Observation: One manager change needs review this week [S1]. Why it matters: It is the only item that requires analyst action. Uncertainty: Filings published after the digest date are not included. What would change the view: A new filing or alert before the next digest.</a:t>
+            </a:r>
+          </a:p>
+        </p:txBody>
+      </p:sp>
+      <p:sp>
+        <p:nvSpPr>
+          <p:cNvPr id="14" name="Rectangle 13"/>
           <p:cNvSpPr/>
           <p:nvPr/>
         </p:nvSpPr>
         <p:spPr>
           <a:xfrm>
-            <a:off x="640080" y="3778827"/>
-            <a:ext cx="10908792" cy="1132724"/>
+            <a:off x="640080" y="3918361"/>
+            <a:ext cx="10908792" cy="1094915"/>
           </a:xfrm>
           <a:prstGeom prst="rect">
             <a:avLst/>
@@ -9175,14 +9051,14 @@
       </p:sp>
       <p:sp>
         <p:nvSpPr>
-          <p:cNvPr id="16" name="Rectangle 15"/>
+          <p:cNvPr id="15" name="Rectangle 14"/>
           <p:cNvSpPr/>
           <p:nvPr/>
         </p:nvSpPr>
         <p:spPr>
           <a:xfrm>
-            <a:off x="640080" y="3778827"/>
-            <a:ext cx="54864" cy="1132724"/>
+            <a:off x="640080" y="3918361"/>
+            <a:ext cx="54864" cy="1094915"/>
           </a:xfrm>
           <a:prstGeom prst="rect">
             <a:avLst/>
@@ -9224,13 +9100,13 @@
       </p:sp>
       <p:sp>
         <p:nvSpPr>
-          <p:cNvPr id="17" name="TextBox 16"/>
+          <p:cNvPr id="16" name="TextBox 15"/>
           <p:cNvSpPr txBox="1"/>
           <p:nvPr/>
         </p:nvSpPr>
         <p:spPr>
           <a:xfrm>
-            <a:off x="804671" y="3888555"/>
+            <a:off x="804671" y="4028089"/>
             <a:ext cx="10616184" cy="228600"/>
           </a:xfrm>
           <a:prstGeom prst="rect">
@@ -9259,21 +9135,21 @@
               <a:rPr>
                 <a:latin typeface="Inter"/>
               </a:rPr>
-              <a:t>Key judgment — primary measure</a:t>
-            </a:r>
-          </a:p>
-        </p:txBody>
-      </p:sp>
-      <p:sp>
-        <p:nvSpPr>
-          <p:cNvPr id="18" name="TextBox 17"/>
+              <a:t>Key judgment — Alerts</a:t>
+            </a:r>
+          </a:p>
+        </p:txBody>
+      </p:sp>
+      <p:sp>
+        <p:nvSpPr>
+          <p:cNvPr id="17" name="TextBox 16"/>
           <p:cNvSpPr txBox="1"/>
           <p:nvPr/>
         </p:nvSpPr>
         <p:spPr>
           <a:xfrm>
-            <a:off x="804671" y="4172019"/>
-            <a:ext cx="10616184" cy="648092"/>
+            <a:off x="804671" y="4311553"/>
+            <a:ext cx="10616184" cy="610283"/>
           </a:xfrm>
           <a:prstGeom prst="rect">
             <a:avLst/>
@@ -9301,21 +9177,21 @@
               <a:rPr>
                 <a:latin typeface="Inter"/>
               </a:rPr>
-              <a:t>Observation: New alerts is 0 in the review evidence [S2]. Why it matters: This measure establishes the baseline for comparing later governed results. Uncertainty: The source basis may omit newer observations outside the reviewed evidence. What would change the view: A refreshed source report showing a change above 1%.</a:t>
-            </a:r>
-          </a:p>
-        </p:txBody>
-      </p:sp>
-      <p:sp>
-        <p:nvSpPr>
-          <p:cNvPr id="19" name="Rectangle 18"/>
+              <a:t>Observation: No new alerts were raised this week [S2]. Why it matters: Monitoring found no new risk events across the roster. Uncertainty: Alerts depend on filing publication dates. What would change the view: A late-published filing that triggers an alert.</a:t>
+            </a:r>
+          </a:p>
+        </p:txBody>
+      </p:sp>
+      <p:sp>
+        <p:nvSpPr>
+          <p:cNvPr id="18" name="Rectangle 17"/>
           <p:cNvSpPr/>
           <p:nvPr/>
         </p:nvSpPr>
         <p:spPr>
           <a:xfrm>
-            <a:off x="640080" y="5021279"/>
-            <a:ext cx="10908792" cy="1196640"/>
+            <a:off x="640080" y="5123004"/>
+            <a:ext cx="10908792" cy="1094915"/>
           </a:xfrm>
           <a:prstGeom prst="rect">
             <a:avLst/>
@@ -9357,14 +9233,14 @@
       </p:sp>
       <p:sp>
         <p:nvSpPr>
-          <p:cNvPr id="20" name="Rectangle 19"/>
+          <p:cNvPr id="19" name="Rectangle 18"/>
           <p:cNvSpPr/>
           <p:nvPr/>
         </p:nvSpPr>
         <p:spPr>
           <a:xfrm>
-            <a:off x="640080" y="5021279"/>
-            <a:ext cx="54864" cy="1196640"/>
+            <a:off x="640080" y="5123004"/>
+            <a:ext cx="54864" cy="1094915"/>
           </a:xfrm>
           <a:prstGeom prst="rect">
             <a:avLst/>
@@ -9406,13 +9282,13 @@
       </p:sp>
       <p:sp>
         <p:nvSpPr>
-          <p:cNvPr id="21" name="TextBox 20"/>
+          <p:cNvPr id="20" name="TextBox 19"/>
           <p:cNvSpPr txBox="1"/>
           <p:nvPr/>
         </p:nvSpPr>
         <p:spPr>
           <a:xfrm>
-            <a:off x="804671" y="5131007"/>
+            <a:off x="804671" y="5232732"/>
             <a:ext cx="10616184" cy="228600"/>
           </a:xfrm>
           <a:prstGeom prst="rect">
@@ -9441,21 +9317,21 @@
               <a:rPr>
                 <a:latin typeface="Inter"/>
               </a:rPr>
-              <a:t>Key judgment — monitoring priority</a:t>
-            </a:r>
-          </a:p>
-        </p:txBody>
-      </p:sp>
-      <p:sp>
-        <p:nvSpPr>
-          <p:cNvPr id="22" name="TextBox 21"/>
+              <a:t>Key judgment — Reviews due</a:t>
+            </a:r>
+          </a:p>
+        </p:txBody>
+      </p:sp>
+      <p:sp>
+        <p:nvSpPr>
+          <p:cNvPr id="21" name="TextBox 20"/>
           <p:cNvSpPr txBox="1"/>
           <p:nvPr/>
         </p:nvSpPr>
         <p:spPr>
           <a:xfrm>
-            <a:off x="804671" y="5414471"/>
-            <a:ext cx="10616184" cy="712008"/>
+            <a:off x="804671" y="5516196"/>
+            <a:ext cx="10616184" cy="610283"/>
           </a:xfrm>
           <a:prstGeom prst="rect">
             <a:avLst/>
@@ -9483,14 +9359,14 @@
               <a:rPr>
                 <a:latin typeface="Inter"/>
               </a:rPr>
-              <a:t>Observation: Reviews due ≤30d is 0 in the review evidence [S3]. Why it matters: This result determines which item receives priority in the next monitoring cycle. Uncertainty: Supporting coverage may omit later filings or corroborating detail. What would change the view: A new filing or report that resolves the item or changes it by 1%.</a:t>
-            </a:r>
-          </a:p>
-        </p:txBody>
-      </p:sp>
-      <p:sp>
-        <p:nvSpPr>
-          <p:cNvPr id="23" name="Rectangle 22"/>
+              <a:t>Observation: No reviews fall due in the next 30 days [S3]. Why it matters: There is no scheduled diligence pressure this month. Uncertainty: Review dates come from the roster schedule. What would change the view: A schedule change or an event-driven review.</a:t>
+            </a:r>
+          </a:p>
+        </p:txBody>
+      </p:sp>
+      <p:sp>
+        <p:nvSpPr>
+          <p:cNvPr id="22" name="Rectangle 21"/>
           <p:cNvSpPr/>
           <p:nvPr/>
         </p:nvSpPr>
@@ -9539,7 +9415,7 @@
       </p:sp>
       <p:sp>
         <p:nvSpPr>
-          <p:cNvPr id="24" name="TextBox 23"/>
+          <p:cNvPr id="23" name="TextBox 22"/>
           <p:cNvSpPr txBox="1"/>
           <p:nvPr/>
         </p:nvSpPr>
@@ -9581,7 +9457,7 @@
       </p:sp>
       <p:sp>
         <p:nvSpPr>
-          <p:cNvPr id="25" name="TextBox 24"/>
+          <p:cNvPr id="24" name="TextBox 23"/>
           <p:cNvSpPr txBox="1"/>
           <p:nvPr/>
         </p:nvSpPr>
@@ -9623,7 +9499,7 @@
       </p:sp>
       <p:sp>
         <p:nvSpPr>
-          <p:cNvPr id="26" name="TextBox 25"/>
+          <p:cNvPr id="25" name="TextBox 24"/>
           <p:cNvSpPr txBox="1"/>
           <p:nvPr/>
         </p:nvSpPr>
@@ -9739,7 +9615,7 @@
         <p:spPr>
           <a:xfrm>
             <a:off x="640080" y="329184"/>
-            <a:ext cx="5303520" cy="182880"/>
+            <a:ext cx="9875520" cy="182880"/>
           </a:xfrm>
           <a:prstGeom prst="rect">
             <a:avLst/>
@@ -9780,48 +9656,6 @@
         </p:nvSpPr>
         <p:spPr>
           <a:xfrm>
-            <a:off x="5897880" y="310896"/>
-            <a:ext cx="4800600" cy="256032"/>
-          </a:xfrm>
-          <a:prstGeom prst="rect">
-            <a:avLst/>
-          </a:prstGeom>
-          <a:noFill/>
-        </p:spPr>
-        <p:txBody>
-          <a:bodyPr wrap="none" lIns="9144" rIns="9144" tIns="9144" bIns="9144" anchor="t">
-            <a:spAutoFit/>
-          </a:bodyPr>
-          <a:lstStyle/>
-          <a:p>
-            <a:pPr algn="r">
-              <a:spcAft>
-                <a:spcPts val="0"/>
-              </a:spcAft>
-              <a:defRPr sz="680" b="1">
-                <a:solidFill>
-                  <a:srgbClr val="4F6B00"/>
-                </a:solidFill>
-                <a:latin typeface="Inter"/>
-              </a:defRPr>
-            </a:pPr>
-            <a:r>
-              <a:rPr>
-                <a:latin typeface="Inter"/>
-              </a:rPr>
-              <a:t>Illustrative, Gradient Maintained — demo data, not the client's holdings or managers</a:t>
-            </a:r>
-          </a:p>
-        </p:txBody>
-      </p:sp>
-      <p:sp>
-        <p:nvSpPr>
-          <p:cNvPr id="5" name="TextBox 4"/>
-          <p:cNvSpPr txBox="1"/>
-          <p:nvPr/>
-        </p:nvSpPr>
-        <p:spPr>
-          <a:xfrm>
             <a:off x="640080" y="566928"/>
             <a:ext cx="10058400" cy="530352"/>
           </a:xfrm>
@@ -9858,7 +9692,7 @@
       </p:sp>
       <p:sp>
         <p:nvSpPr>
-          <p:cNvPr id="6" name="Rectangle 5"/>
+          <p:cNvPr id="5" name="Rectangle 4"/>
           <p:cNvSpPr/>
           <p:nvPr/>
         </p:nvSpPr>
@@ -9907,7 +9741,7 @@
       </p:sp>
       <p:sp>
         <p:nvSpPr>
-          <p:cNvPr id="7" name="Rectangle 6"/>
+          <p:cNvPr id="6" name="Rectangle 5"/>
           <p:cNvSpPr/>
           <p:nvPr/>
         </p:nvSpPr>
@@ -9956,7 +9790,7 @@
       </p:sp>
       <p:sp>
         <p:nvSpPr>
-          <p:cNvPr id="8" name="TextBox 7"/>
+          <p:cNvPr id="7" name="TextBox 6"/>
           <p:cNvSpPr txBox="1"/>
           <p:nvPr/>
         </p:nvSpPr>
@@ -9998,7 +9832,7 @@
       </p:sp>
       <p:sp>
         <p:nvSpPr>
-          <p:cNvPr id="9" name="TextBox 8"/>
+          <p:cNvPr id="8" name="TextBox 7"/>
           <p:cNvSpPr txBox="1"/>
           <p:nvPr/>
         </p:nvSpPr>
@@ -10040,7 +9874,7 @@
       </p:sp>
       <p:graphicFrame>
         <p:nvGraphicFramePr>
-          <p:cNvPr id="10" name="Table 9"/>
+          <p:cNvPr id="9" name="Table 8"/>
           <p:cNvGraphicFramePr>
             <a:graphicFrameLocks noGrp="1"/>
           </p:cNvGraphicFramePr>
@@ -10162,7 +9996,7 @@
                         <a:rPr>
                           <a:latin typeface="Inter"/>
                         </a:rPr>
-                        <a:t>● MEDIUM</a:t>
+                        <a:t>● Medium</a:t>
                       </a:r>
                     </a:p>
                   </a:txBody>
@@ -10233,7 +10067,7 @@
       </p:graphicFrame>
       <p:sp>
         <p:nvSpPr>
-          <p:cNvPr id="11" name="TextBox 10"/>
+          <p:cNvPr id="10" name="TextBox 9"/>
           <p:cNvSpPr txBox="1"/>
           <p:nvPr/>
         </p:nvSpPr>
@@ -10275,7 +10109,7 @@
       </p:sp>
       <p:graphicFrame>
         <p:nvGraphicFramePr>
-          <p:cNvPr id="12" name="Table 11"/>
+          <p:cNvPr id="11" name="Table 10"/>
           <p:cNvGraphicFramePr>
             <a:graphicFrameLocks noGrp="1"/>
           </p:cNvGraphicFramePr>
@@ -10637,7 +10471,7 @@
       </p:graphicFrame>
       <p:sp>
         <p:nvSpPr>
-          <p:cNvPr id="13" name="Rectangle 12"/>
+          <p:cNvPr id="12" name="Rectangle 11"/>
           <p:cNvSpPr/>
           <p:nvPr/>
         </p:nvSpPr>
@@ -10686,7 +10520,7 @@
       </p:sp>
       <p:sp>
         <p:nvSpPr>
-          <p:cNvPr id="14" name="Rectangle 13"/>
+          <p:cNvPr id="13" name="Rectangle 12"/>
           <p:cNvSpPr/>
           <p:nvPr/>
         </p:nvSpPr>
@@ -10735,7 +10569,7 @@
       </p:sp>
       <p:sp>
         <p:nvSpPr>
-          <p:cNvPr id="15" name="Rectangle 14"/>
+          <p:cNvPr id="14" name="Rectangle 13"/>
           <p:cNvSpPr/>
           <p:nvPr/>
         </p:nvSpPr>
@@ -10784,7 +10618,7 @@
       </p:sp>
       <p:sp>
         <p:nvSpPr>
-          <p:cNvPr id="16" name="TextBox 15"/>
+          <p:cNvPr id="15" name="TextBox 14"/>
           <p:cNvSpPr txBox="1"/>
           <p:nvPr/>
         </p:nvSpPr>
@@ -10826,7 +10660,7 @@
       </p:sp>
       <p:sp>
         <p:nvSpPr>
-          <p:cNvPr id="17" name="TextBox 16"/>
+          <p:cNvPr id="16" name="TextBox 15"/>
           <p:cNvSpPr txBox="1"/>
           <p:nvPr/>
         </p:nvSpPr>
@@ -10868,7 +10702,7 @@
       </p:sp>
       <p:sp>
         <p:nvSpPr>
-          <p:cNvPr id="18" name="Rectangle 17"/>
+          <p:cNvPr id="17" name="Rectangle 16"/>
           <p:cNvSpPr/>
           <p:nvPr/>
         </p:nvSpPr>
@@ -10917,7 +10751,7 @@
       </p:sp>
       <p:sp>
         <p:nvSpPr>
-          <p:cNvPr id="19" name="TextBox 18"/>
+          <p:cNvPr id="18" name="TextBox 17"/>
           <p:cNvSpPr txBox="1"/>
           <p:nvPr/>
         </p:nvSpPr>
@@ -10959,7 +10793,7 @@
       </p:sp>
       <p:sp>
         <p:nvSpPr>
-          <p:cNvPr id="20" name="TextBox 19"/>
+          <p:cNvPr id="19" name="TextBox 18"/>
           <p:cNvSpPr txBox="1"/>
           <p:nvPr/>
         </p:nvSpPr>
@@ -11001,7 +10835,7 @@
       </p:sp>
       <p:sp>
         <p:nvSpPr>
-          <p:cNvPr id="21" name="TextBox 20"/>
+          <p:cNvPr id="20" name="TextBox 19"/>
           <p:cNvSpPr txBox="1"/>
           <p:nvPr/>
         </p:nvSpPr>
@@ -11117,7 +10951,7 @@
         <p:spPr>
           <a:xfrm>
             <a:off x="640080" y="329184"/>
-            <a:ext cx="5303520" cy="182880"/>
+            <a:ext cx="9875520" cy="182880"/>
           </a:xfrm>
           <a:prstGeom prst="rect">
             <a:avLst/>
@@ -11158,48 +10992,6 @@
         </p:nvSpPr>
         <p:spPr>
           <a:xfrm>
-            <a:off x="5897880" y="310896"/>
-            <a:ext cx="4800600" cy="256032"/>
-          </a:xfrm>
-          <a:prstGeom prst="rect">
-            <a:avLst/>
-          </a:prstGeom>
-          <a:noFill/>
-        </p:spPr>
-        <p:txBody>
-          <a:bodyPr wrap="none" lIns="9144" rIns="9144" tIns="9144" bIns="9144" anchor="t">
-            <a:spAutoFit/>
-          </a:bodyPr>
-          <a:lstStyle/>
-          <a:p>
-            <a:pPr algn="r">
-              <a:spcAft>
-                <a:spcPts val="0"/>
-              </a:spcAft>
-              <a:defRPr sz="680" b="1">
-                <a:solidFill>
-                  <a:srgbClr val="4F6B00"/>
-                </a:solidFill>
-                <a:latin typeface="Inter"/>
-              </a:defRPr>
-            </a:pPr>
-            <a:r>
-              <a:rPr>
-                <a:latin typeface="Inter"/>
-              </a:rPr>
-              <a:t>Illustrative, Gradient Maintained — demo data, not the client's holdings or managers</a:t>
-            </a:r>
-          </a:p>
-        </p:txBody>
-      </p:sp>
-      <p:sp>
-        <p:nvSpPr>
-          <p:cNvPr id="5" name="TextBox 4"/>
-          <p:cNvSpPr txBox="1"/>
-          <p:nvPr/>
-        </p:nvSpPr>
-        <p:spPr>
-          <a:xfrm>
             <a:off x="640080" y="566928"/>
             <a:ext cx="10058400" cy="530352"/>
           </a:xfrm>
@@ -11236,7 +11028,7 @@
       </p:sp>
       <p:sp>
         <p:nvSpPr>
-          <p:cNvPr id="6" name="Rectangle 5"/>
+          <p:cNvPr id="5" name="Rectangle 4"/>
           <p:cNvSpPr/>
           <p:nvPr/>
         </p:nvSpPr>
@@ -11285,7 +11077,7 @@
       </p:sp>
       <p:sp>
         <p:nvSpPr>
-          <p:cNvPr id="7" name="Rectangle 6"/>
+          <p:cNvPr id="6" name="Rectangle 5"/>
           <p:cNvSpPr/>
           <p:nvPr/>
         </p:nvSpPr>
@@ -11334,7 +11126,7 @@
       </p:sp>
       <p:sp>
         <p:nvSpPr>
-          <p:cNvPr id="8" name="TextBox 7"/>
+          <p:cNvPr id="7" name="TextBox 6"/>
           <p:cNvSpPr txBox="1"/>
           <p:nvPr/>
         </p:nvSpPr>
@@ -11376,7 +11168,7 @@
       </p:sp>
       <p:sp>
         <p:nvSpPr>
-          <p:cNvPr id="9" name="Rectangle 8"/>
+          <p:cNvPr id="8" name="Rectangle 7"/>
           <p:cNvSpPr/>
           <p:nvPr/>
         </p:nvSpPr>
@@ -11425,7 +11217,7 @@
       </p:sp>
       <p:sp>
         <p:nvSpPr>
-          <p:cNvPr id="10" name="Rectangle 9"/>
+          <p:cNvPr id="9" name="Rectangle 8"/>
           <p:cNvSpPr/>
           <p:nvPr/>
         </p:nvSpPr>
@@ -11474,7 +11266,7 @@
       </p:sp>
       <p:sp>
         <p:nvSpPr>
-          <p:cNvPr id="11" name="TextBox 10"/>
+          <p:cNvPr id="10" name="TextBox 9"/>
           <p:cNvSpPr txBox="1"/>
           <p:nvPr/>
         </p:nvSpPr>
@@ -11516,7 +11308,7 @@
       </p:sp>
       <p:sp>
         <p:nvSpPr>
-          <p:cNvPr id="12" name="TextBox 11"/>
+          <p:cNvPr id="11" name="TextBox 10"/>
           <p:cNvSpPr txBox="1"/>
           <p:nvPr/>
         </p:nvSpPr>
@@ -11558,7 +11350,7 @@
       </p:sp>
       <p:sp>
         <p:nvSpPr>
-          <p:cNvPr id="13" name="Rectangle 12"/>
+          <p:cNvPr id="12" name="Rectangle 11"/>
           <p:cNvSpPr/>
           <p:nvPr/>
         </p:nvSpPr>
@@ -11607,7 +11399,7 @@
       </p:sp>
       <p:sp>
         <p:nvSpPr>
-          <p:cNvPr id="14" name="TextBox 13"/>
+          <p:cNvPr id="13" name="TextBox 12"/>
           <p:cNvSpPr txBox="1"/>
           <p:nvPr/>
         </p:nvSpPr>
@@ -11649,7 +11441,7 @@
       </p:sp>
       <p:sp>
         <p:nvSpPr>
-          <p:cNvPr id="15" name="TextBox 14"/>
+          <p:cNvPr id="14" name="TextBox 13"/>
           <p:cNvSpPr txBox="1"/>
           <p:nvPr/>
         </p:nvSpPr>
@@ -11691,7 +11483,7 @@
       </p:sp>
       <p:sp>
         <p:nvSpPr>
-          <p:cNvPr id="16" name="TextBox 15"/>
+          <p:cNvPr id="15" name="TextBox 14"/>
           <p:cNvSpPr txBox="1"/>
           <p:nvPr/>
         </p:nvSpPr>
@@ -11807,7 +11599,7 @@
         <p:spPr>
           <a:xfrm>
             <a:off x="640080" y="329184"/>
-            <a:ext cx="5303520" cy="182880"/>
+            <a:ext cx="9875520" cy="182880"/>
           </a:xfrm>
           <a:prstGeom prst="rect">
             <a:avLst/>
@@ -11848,48 +11640,6 @@
         </p:nvSpPr>
         <p:spPr>
           <a:xfrm>
-            <a:off x="5897880" y="310896"/>
-            <a:ext cx="4800600" cy="256032"/>
-          </a:xfrm>
-          <a:prstGeom prst="rect">
-            <a:avLst/>
-          </a:prstGeom>
-          <a:noFill/>
-        </p:spPr>
-        <p:txBody>
-          <a:bodyPr wrap="none" lIns="9144" rIns="9144" tIns="9144" bIns="9144" anchor="t">
-            <a:spAutoFit/>
-          </a:bodyPr>
-          <a:lstStyle/>
-          <a:p>
-            <a:pPr algn="r">
-              <a:spcAft>
-                <a:spcPts val="0"/>
-              </a:spcAft>
-              <a:defRPr sz="680" b="1">
-                <a:solidFill>
-                  <a:srgbClr val="4F6B00"/>
-                </a:solidFill>
-                <a:latin typeface="Inter"/>
-              </a:defRPr>
-            </a:pPr>
-            <a:r>
-              <a:rPr>
-                <a:latin typeface="Inter"/>
-              </a:rPr>
-              <a:t>Illustrative, Gradient Maintained — demo data, not the client's holdings or managers</a:t>
-            </a:r>
-          </a:p>
-        </p:txBody>
-      </p:sp>
-      <p:sp>
-        <p:nvSpPr>
-          <p:cNvPr id="5" name="TextBox 4"/>
-          <p:cNvSpPr txBox="1"/>
-          <p:nvPr/>
-        </p:nvSpPr>
-        <p:spPr>
-          <a:xfrm>
             <a:off x="640080" y="566928"/>
             <a:ext cx="10058400" cy="530352"/>
           </a:xfrm>
@@ -11926,7 +11676,7 @@
       </p:sp>
       <p:sp>
         <p:nvSpPr>
-          <p:cNvPr id="6" name="Rectangle 5"/>
+          <p:cNvPr id="5" name="Rectangle 4"/>
           <p:cNvSpPr/>
           <p:nvPr/>
         </p:nvSpPr>
@@ -11975,7 +11725,7 @@
       </p:sp>
       <p:sp>
         <p:nvSpPr>
-          <p:cNvPr id="7" name="Rectangle 6"/>
+          <p:cNvPr id="6" name="Rectangle 5"/>
           <p:cNvSpPr/>
           <p:nvPr/>
         </p:nvSpPr>
@@ -12024,7 +11774,7 @@
       </p:sp>
       <p:sp>
         <p:nvSpPr>
-          <p:cNvPr id="8" name="TextBox 7"/>
+          <p:cNvPr id="7" name="TextBox 6"/>
           <p:cNvSpPr txBox="1"/>
           <p:nvPr/>
         </p:nvSpPr>
@@ -12066,7 +11816,7 @@
       </p:sp>
       <p:sp>
         <p:nvSpPr>
-          <p:cNvPr id="9" name="TextBox 8"/>
+          <p:cNvPr id="8" name="TextBox 7"/>
           <p:cNvSpPr txBox="1"/>
           <p:nvPr/>
         </p:nvSpPr>
@@ -12108,7 +11858,7 @@
       </p:sp>
       <p:sp>
         <p:nvSpPr>
-          <p:cNvPr id="10" name="Rectangle 9"/>
+          <p:cNvPr id="9" name="Rectangle 8"/>
           <p:cNvSpPr/>
           <p:nvPr/>
         </p:nvSpPr>
@@ -12157,7 +11907,7 @@
       </p:sp>
       <p:sp>
         <p:nvSpPr>
-          <p:cNvPr id="11" name="Oval 10"/>
+          <p:cNvPr id="10" name="Oval 9"/>
           <p:cNvSpPr/>
           <p:nvPr/>
         </p:nvSpPr>
@@ -12206,7 +11956,7 @@
       </p:sp>
       <p:sp>
         <p:nvSpPr>
-          <p:cNvPr id="12" name="TextBox 11"/>
+          <p:cNvPr id="11" name="TextBox 10"/>
           <p:cNvSpPr txBox="1"/>
           <p:nvPr/>
         </p:nvSpPr>
@@ -12248,7 +11998,7 @@
       </p:sp>
       <p:sp>
         <p:nvSpPr>
-          <p:cNvPr id="13" name="TextBox 12"/>
+          <p:cNvPr id="12" name="TextBox 11"/>
           <p:cNvSpPr txBox="1"/>
           <p:nvPr/>
         </p:nvSpPr>
@@ -12290,7 +12040,7 @@
       </p:sp>
       <p:sp>
         <p:nvSpPr>
-          <p:cNvPr id="14" name="TextBox 13"/>
+          <p:cNvPr id="13" name="TextBox 12"/>
           <p:cNvSpPr txBox="1"/>
           <p:nvPr/>
         </p:nvSpPr>
@@ -12332,7 +12082,7 @@
       </p:sp>
       <p:sp>
         <p:nvSpPr>
-          <p:cNvPr id="15" name="Oval 14"/>
+          <p:cNvPr id="14" name="Oval 13"/>
           <p:cNvSpPr/>
           <p:nvPr/>
         </p:nvSpPr>
@@ -12381,7 +12131,7 @@
       </p:sp>
       <p:sp>
         <p:nvSpPr>
-          <p:cNvPr id="16" name="TextBox 15"/>
+          <p:cNvPr id="15" name="TextBox 14"/>
           <p:cNvSpPr txBox="1"/>
           <p:nvPr/>
         </p:nvSpPr>
@@ -12423,7 +12173,7 @@
       </p:sp>
       <p:sp>
         <p:nvSpPr>
-          <p:cNvPr id="17" name="TextBox 16"/>
+          <p:cNvPr id="16" name="TextBox 15"/>
           <p:cNvSpPr txBox="1"/>
           <p:nvPr/>
         </p:nvSpPr>
@@ -12465,7 +12215,7 @@
       </p:sp>
       <p:sp>
         <p:nvSpPr>
-          <p:cNvPr id="18" name="TextBox 17"/>
+          <p:cNvPr id="17" name="TextBox 16"/>
           <p:cNvSpPr txBox="1"/>
           <p:nvPr/>
         </p:nvSpPr>
@@ -12507,7 +12257,7 @@
       </p:sp>
       <p:sp>
         <p:nvSpPr>
-          <p:cNvPr id="19" name="Rectangle 18"/>
+          <p:cNvPr id="18" name="Rectangle 17"/>
           <p:cNvSpPr/>
           <p:nvPr/>
         </p:nvSpPr>
@@ -12556,7 +12306,7 @@
       </p:sp>
       <p:sp>
         <p:nvSpPr>
-          <p:cNvPr id="20" name="TextBox 19"/>
+          <p:cNvPr id="19" name="TextBox 18"/>
           <p:cNvSpPr txBox="1"/>
           <p:nvPr/>
         </p:nvSpPr>
@@ -12598,7 +12348,7 @@
       </p:sp>
       <p:sp>
         <p:nvSpPr>
-          <p:cNvPr id="21" name="TextBox 20"/>
+          <p:cNvPr id="20" name="TextBox 19"/>
           <p:cNvSpPr txBox="1"/>
           <p:nvPr/>
         </p:nvSpPr>
@@ -12640,7 +12390,7 @@
       </p:sp>
       <p:sp>
         <p:nvSpPr>
-          <p:cNvPr id="22" name="TextBox 21"/>
+          <p:cNvPr id="21" name="TextBox 20"/>
           <p:cNvSpPr txBox="1"/>
           <p:nvPr/>
         </p:nvSpPr>
@@ -12756,7 +12506,7 @@
         <p:spPr>
           <a:xfrm>
             <a:off x="640080" y="329184"/>
-            <a:ext cx="5303520" cy="182880"/>
+            <a:ext cx="9875520" cy="182880"/>
           </a:xfrm>
           <a:prstGeom prst="rect">
             <a:avLst/>
@@ -12797,48 +12547,6 @@
         </p:nvSpPr>
         <p:spPr>
           <a:xfrm>
-            <a:off x="5897880" y="310896"/>
-            <a:ext cx="4800600" cy="256032"/>
-          </a:xfrm>
-          <a:prstGeom prst="rect">
-            <a:avLst/>
-          </a:prstGeom>
-          <a:noFill/>
-        </p:spPr>
-        <p:txBody>
-          <a:bodyPr wrap="none" lIns="9144" rIns="9144" tIns="9144" bIns="9144" anchor="t">
-            <a:spAutoFit/>
-          </a:bodyPr>
-          <a:lstStyle/>
-          <a:p>
-            <a:pPr algn="r">
-              <a:spcAft>
-                <a:spcPts val="0"/>
-              </a:spcAft>
-              <a:defRPr sz="680" b="1">
-                <a:solidFill>
-                  <a:srgbClr val="4F6B00"/>
-                </a:solidFill>
-                <a:latin typeface="Inter"/>
-              </a:defRPr>
-            </a:pPr>
-            <a:r>
-              <a:rPr>
-                <a:latin typeface="Inter"/>
-              </a:rPr>
-              <a:t>Illustrative, Gradient Maintained — demo data, not the client's holdings or managers</a:t>
-            </a:r>
-          </a:p>
-        </p:txBody>
-      </p:sp>
-      <p:sp>
-        <p:nvSpPr>
-          <p:cNvPr id="5" name="TextBox 4"/>
-          <p:cNvSpPr txBox="1"/>
-          <p:nvPr/>
-        </p:nvSpPr>
-        <p:spPr>
-          <a:xfrm>
             <a:off x="640080" y="566928"/>
             <a:ext cx="10058400" cy="530352"/>
           </a:xfrm>
@@ -12875,7 +12583,7 @@
       </p:sp>
       <p:sp>
         <p:nvSpPr>
-          <p:cNvPr id="6" name="Rectangle 5"/>
+          <p:cNvPr id="5" name="Rectangle 4"/>
           <p:cNvSpPr/>
           <p:nvPr/>
         </p:nvSpPr>
@@ -12924,7 +12632,7 @@
       </p:sp>
       <p:sp>
         <p:nvSpPr>
-          <p:cNvPr id="7" name="Rectangle 6"/>
+          <p:cNvPr id="6" name="Rectangle 5"/>
           <p:cNvSpPr/>
           <p:nvPr/>
         </p:nvSpPr>
@@ -12973,7 +12681,7 @@
       </p:sp>
       <p:sp>
         <p:nvSpPr>
-          <p:cNvPr id="8" name="TextBox 7"/>
+          <p:cNvPr id="7" name="TextBox 6"/>
           <p:cNvSpPr txBox="1"/>
           <p:nvPr/>
         </p:nvSpPr>
@@ -13015,7 +12723,7 @@
       </p:sp>
       <p:graphicFrame>
         <p:nvGraphicFramePr>
-          <p:cNvPr id="9" name="Table 8"/>
+          <p:cNvPr id="8" name="Table 7"/>
           <p:cNvGraphicFramePr>
             <a:graphicFrameLocks noGrp="1"/>
           </p:cNvGraphicFramePr>
@@ -13373,7 +13081,7 @@
       </p:graphicFrame>
       <p:sp>
         <p:nvSpPr>
-          <p:cNvPr id="10" name="TextBox 9"/>
+          <p:cNvPr id="9" name="TextBox 8"/>
           <p:cNvSpPr txBox="1"/>
           <p:nvPr/>
         </p:nvSpPr>
@@ -13415,7 +13123,7 @@
       </p:sp>
       <p:sp>
         <p:nvSpPr>
-          <p:cNvPr id="11" name="Rectangle 10"/>
+          <p:cNvPr id="10" name="Rectangle 9"/>
           <p:cNvSpPr/>
           <p:nvPr/>
         </p:nvSpPr>
@@ -13464,7 +13172,7 @@
       </p:sp>
       <p:sp>
         <p:nvSpPr>
-          <p:cNvPr id="12" name="Rectangle 11"/>
+          <p:cNvPr id="11" name="Rectangle 10"/>
           <p:cNvSpPr/>
           <p:nvPr/>
         </p:nvSpPr>
@@ -13513,7 +13221,7 @@
       </p:sp>
       <p:sp>
         <p:nvSpPr>
-          <p:cNvPr id="13" name="TextBox 12"/>
+          <p:cNvPr id="12" name="TextBox 11"/>
           <p:cNvSpPr txBox="1"/>
           <p:nvPr/>
         </p:nvSpPr>
@@ -13555,7 +13263,7 @@
       </p:sp>
       <p:sp>
         <p:nvSpPr>
-          <p:cNvPr id="14" name="TextBox 13"/>
+          <p:cNvPr id="13" name="TextBox 12"/>
           <p:cNvSpPr txBox="1"/>
           <p:nvPr/>
         </p:nvSpPr>
@@ -13597,7 +13305,7 @@
       </p:sp>
       <p:sp>
         <p:nvSpPr>
-          <p:cNvPr id="15" name="Rectangle 14"/>
+          <p:cNvPr id="14" name="Rectangle 13"/>
           <p:cNvSpPr/>
           <p:nvPr/>
         </p:nvSpPr>
@@ -13646,7 +13354,7 @@
       </p:sp>
       <p:sp>
         <p:nvSpPr>
-          <p:cNvPr id="16" name="TextBox 15"/>
+          <p:cNvPr id="15" name="TextBox 14"/>
           <p:cNvSpPr txBox="1"/>
           <p:nvPr/>
         </p:nvSpPr>
@@ -13688,7 +13396,7 @@
       </p:sp>
       <p:sp>
         <p:nvSpPr>
-          <p:cNvPr id="17" name="TextBox 16"/>
+          <p:cNvPr id="16" name="TextBox 15"/>
           <p:cNvSpPr txBox="1"/>
           <p:nvPr/>
         </p:nvSpPr>
@@ -13730,7 +13438,7 @@
       </p:sp>
       <p:sp>
         <p:nvSpPr>
-          <p:cNvPr id="18" name="TextBox 17"/>
+          <p:cNvPr id="17" name="TextBox 16"/>
           <p:cNvSpPr txBox="1"/>
           <p:nvPr/>
         </p:nvSpPr>
@@ -13846,7 +13554,7 @@
         <p:spPr>
           <a:xfrm>
             <a:off x="640080" y="329184"/>
-            <a:ext cx="5303520" cy="182880"/>
+            <a:ext cx="9875520" cy="182880"/>
           </a:xfrm>
           <a:prstGeom prst="rect">
             <a:avLst/>
@@ -13887,48 +13595,6 @@
         </p:nvSpPr>
         <p:spPr>
           <a:xfrm>
-            <a:off x="5897880" y="310896"/>
-            <a:ext cx="4800600" cy="256032"/>
-          </a:xfrm>
-          <a:prstGeom prst="rect">
-            <a:avLst/>
-          </a:prstGeom>
-          <a:noFill/>
-        </p:spPr>
-        <p:txBody>
-          <a:bodyPr wrap="none" lIns="9144" rIns="9144" tIns="9144" bIns="9144" anchor="t">
-            <a:spAutoFit/>
-          </a:bodyPr>
-          <a:lstStyle/>
-          <a:p>
-            <a:pPr algn="r">
-              <a:spcAft>
-                <a:spcPts val="0"/>
-              </a:spcAft>
-              <a:defRPr sz="680" b="1">
-                <a:solidFill>
-                  <a:srgbClr val="4F6B00"/>
-                </a:solidFill>
-                <a:latin typeface="Inter"/>
-              </a:defRPr>
-            </a:pPr>
-            <a:r>
-              <a:rPr>
-                <a:latin typeface="Inter"/>
-              </a:rPr>
-              <a:t>Illustrative, Gradient Maintained — demo data, not the client's holdings or managers</a:t>
-            </a:r>
-          </a:p>
-        </p:txBody>
-      </p:sp>
-      <p:sp>
-        <p:nvSpPr>
-          <p:cNvPr id="5" name="TextBox 4"/>
-          <p:cNvSpPr txBox="1"/>
-          <p:nvPr/>
-        </p:nvSpPr>
-        <p:spPr>
-          <a:xfrm>
             <a:off x="640080" y="566928"/>
             <a:ext cx="10058400" cy="530352"/>
           </a:xfrm>
@@ -13965,7 +13631,7 @@
       </p:sp>
       <p:sp>
         <p:nvSpPr>
-          <p:cNvPr id="6" name="Rectangle 5"/>
+          <p:cNvPr id="5" name="Rectangle 4"/>
           <p:cNvSpPr/>
           <p:nvPr/>
         </p:nvSpPr>
@@ -14014,7 +13680,7 @@
       </p:sp>
       <p:sp>
         <p:nvSpPr>
-          <p:cNvPr id="7" name="Rectangle 6"/>
+          <p:cNvPr id="6" name="Rectangle 5"/>
           <p:cNvSpPr/>
           <p:nvPr/>
         </p:nvSpPr>
@@ -14063,7 +13729,7 @@
       </p:sp>
       <p:sp>
         <p:nvSpPr>
-          <p:cNvPr id="8" name="TextBox 7"/>
+          <p:cNvPr id="7" name="TextBox 6"/>
           <p:cNvSpPr txBox="1"/>
           <p:nvPr/>
         </p:nvSpPr>
@@ -14105,7 +13771,7 @@
       </p:sp>
       <p:graphicFrame>
         <p:nvGraphicFramePr>
-          <p:cNvPr id="9" name="Table 8"/>
+          <p:cNvPr id="8" name="Table 7"/>
           <p:cNvGraphicFramePr>
             <a:graphicFrameLocks noGrp="1"/>
           </p:cNvGraphicFramePr>
@@ -14254,7 +13920,7 @@
                         <a:rPr>
                           <a:latin typeface="Inter"/>
                         </a:rPr>
-                        <a:t>● available</a:t>
+                        <a:t>● Available</a:t>
                       </a:r>
                     </a:p>
                   </a:txBody>
@@ -14281,7 +13947,7 @@
                         <a:rPr>
                           <a:latin typeface="Inter"/>
                         </a:rPr>
-                        <a:t>2 subjects, completeness complete; as of 2026-10-04 [S2]</a:t>
+                        <a:t>2 subjects, all evaluated; as of 2026-10-04 [S2]</a:t>
                       </a:r>
                     </a:p>
                   </a:txBody>
@@ -14337,7 +14003,7 @@
                         <a:rPr>
                           <a:latin typeface="Inter"/>
                         </a:rPr>
-                        <a:t>● available</a:t>
+                        <a:t>● Available</a:t>
                       </a:r>
                     </a:p>
                   </a:txBody>
@@ -14364,7 +14030,7 @@
                         <a:rPr>
                           <a:latin typeface="Inter"/>
                         </a:rPr>
-                        <a:t>Registered and exempt ADV runs for 2026-10-01 completed 2026-10-04; aligned [S3]</a:t>
+                        <a:t>Form ADV runs for 2026-10-01 completed on 2026-10-04 [S3]</a:t>
                       </a:r>
                     </a:p>
                   </a:txBody>
@@ -14420,7 +14086,7 @@
                         <a:rPr>
                           <a:latin typeface="Inter"/>
                         </a:rPr>
-                        <a:t>● available</a:t>
+                        <a:t>● Available</a:t>
                       </a:r>
                     </a:p>
                   </a:txBody>
@@ -14503,7 +14169,7 @@
                         <a:rPr>
                           <a:latin typeface="Inter"/>
                         </a:rPr>
-                        <a:t>● available</a:t>
+                        <a:t>● Available</a:t>
                       </a:r>
                     </a:p>
                   </a:txBody>
@@ -14586,7 +14252,7 @@
                         <a:rPr>
                           <a:latin typeface="Inter"/>
                         </a:rPr>
-                        <a:t>● unavailable</a:t>
+                        <a:t>● Not available</a:t>
                       </a:r>
                     </a:p>
                   </a:txBody>
@@ -14613,7 +14279,7 @@
                         <a:rPr>
                           <a:latin typeface="Inter"/>
                         </a:rPr>
-                        <a:t>Event publication not ready — absence is not evidence [S5]</a:t>
+                        <a:t>Event feed not yet published, so no events here does not mean none occurred [S5]</a:t>
                       </a:r>
                     </a:p>
                   </a:txBody>
@@ -14669,7 +14335,7 @@
                         <a:rPr>
                           <a:latin typeface="Inter"/>
                         </a:rPr>
-                        <a:t>● available</a:t>
+                        <a:t>● Available</a:t>
                       </a:r>
                     </a:p>
                   </a:txBody>
@@ -14713,7 +14379,7 @@
       </p:graphicFrame>
       <p:sp>
         <p:nvSpPr>
-          <p:cNvPr id="10" name="Rectangle 9"/>
+          <p:cNvPr id="9" name="Rectangle 8"/>
           <p:cNvSpPr/>
           <p:nvPr/>
         </p:nvSpPr>
@@ -14762,7 +14428,7 @@
       </p:sp>
       <p:sp>
         <p:nvSpPr>
-          <p:cNvPr id="11" name="TextBox 10"/>
+          <p:cNvPr id="10" name="TextBox 9"/>
           <p:cNvSpPr txBox="1"/>
           <p:nvPr/>
         </p:nvSpPr>
@@ -14804,7 +14470,7 @@
       </p:sp>
       <p:sp>
         <p:nvSpPr>
-          <p:cNvPr id="12" name="TextBox 11"/>
+          <p:cNvPr id="11" name="TextBox 10"/>
           <p:cNvSpPr txBox="1"/>
           <p:nvPr/>
         </p:nvSpPr>
@@ -14846,7 +14512,7 @@
       </p:sp>
       <p:sp>
         <p:nvSpPr>
-          <p:cNvPr id="13" name="TextBox 12"/>
+          <p:cNvPr id="12" name="TextBox 11"/>
           <p:cNvSpPr txBox="1"/>
           <p:nvPr/>
         </p:nvSpPr>

--- a/plugins/gradient-cio/assets/examples/gradient-odd-manager-monitor.pptx
+++ b/plugins/gradient-cio/assets/examples/gradient-odd-manager-monitor.pptx
@@ -4185,7 +4185,7 @@
         </p:nvGraphicFramePr>
         <p:xfrm>
           <a:off x="640080" y="1325880"/>
-          <a:ext cx="10908792" cy="2706387"/>
+          <a:ext cx="10908792" cy="3202929"/>
         </p:xfrm>
         <a:graphic>
           <a:graphicData uri="http://schemas.openxmlformats.org/drawingml/2006/table">
@@ -4204,7 +4204,7 @@
                 <a:gridCol w="1112139"/>
                 <a:gridCol w="1112139"/>
               </a:tblGrid>
-              <a:tr h="386626">
+              <a:tr h="457561">
                 <a:tc>
                   <a:txBody>
                     <a:bodyPr/>
@@ -4449,7 +4449,7 @@
                   </a:tcPr>
                 </a:tc>
               </a:tr>
-              <a:tr h="386626">
+              <a:tr h="457561">
                 <a:tc>
                   <a:txBody>
                     <a:bodyPr/>
@@ -4694,7 +4694,7 @@
                   </a:tcPr>
                 </a:tc>
               </a:tr>
-              <a:tr h="386626">
+              <a:tr h="457561">
                 <a:tc>
                   <a:txBody>
                     <a:bodyPr/>
@@ -4939,7 +4939,7 @@
                   </a:tcPr>
                 </a:tc>
               </a:tr>
-              <a:tr h="386626">
+              <a:tr h="457561">
                 <a:tc>
                   <a:txBody>
                     <a:bodyPr/>
@@ -5184,7 +5184,7 @@
                   </a:tcPr>
                 </a:tc>
               </a:tr>
-              <a:tr h="386626">
+              <a:tr h="457561">
                 <a:tc>
                   <a:txBody>
                     <a:bodyPr/>
@@ -5429,7 +5429,7 @@
                   </a:tcPr>
                 </a:tc>
               </a:tr>
-              <a:tr h="386626">
+              <a:tr h="457561">
                 <a:tc>
                   <a:txBody>
                     <a:bodyPr/>
@@ -5674,7 +5674,7 @@
                   </a:tcPr>
                 </a:tc>
               </a:tr>
-              <a:tr h="386631">
+              <a:tr h="457563">
                 <a:tc>
                   <a:txBody>
                     <a:bodyPr/>
@@ -5931,7 +5931,7 @@
         </p:nvSpPr>
         <p:spPr>
           <a:xfrm>
-            <a:off x="640080" y="4050555"/>
+            <a:off x="640080" y="4547097"/>
             <a:ext cx="10908792" cy="164592"/>
           </a:xfrm>
           <a:prstGeom prst="rect">
@@ -5973,8 +5973,8 @@
         </p:nvSpPr>
         <p:spPr>
           <a:xfrm>
-            <a:off x="640080" y="4343163"/>
-            <a:ext cx="10908792" cy="1874756"/>
+            <a:off x="640080" y="4839705"/>
+            <a:ext cx="10908792" cy="1378214"/>
           </a:xfrm>
           <a:prstGeom prst="rect">
             <a:avLst/>
@@ -6562,7 +6562,7 @@
         <p:spPr>
           <a:xfrm>
             <a:off x="640080" y="1325880"/>
-            <a:ext cx="10908792" cy="2822348"/>
+            <a:ext cx="10908792" cy="2263980"/>
           </a:xfrm>
           <a:prstGeom prst="rect">
             <a:avLst/>
@@ -6611,7 +6611,7 @@
         <p:spPr>
           <a:xfrm>
             <a:off x="640080" y="1325880"/>
-            <a:ext cx="54864" cy="2822348"/>
+            <a:ext cx="54864" cy="2263980"/>
           </a:xfrm>
           <a:prstGeom prst="rect">
             <a:avLst/>
@@ -6702,7 +6702,7 @@
         <p:spPr>
           <a:xfrm>
             <a:off x="804671" y="1719072"/>
-            <a:ext cx="10616184" cy="2337716"/>
+            <a:ext cx="10616184" cy="1779348"/>
           </a:xfrm>
           <a:prstGeom prst="rect">
             <a:avLst/>
@@ -6743,8 +6743,8 @@
         </p:nvSpPr>
         <p:spPr>
           <a:xfrm>
-            <a:off x="640080" y="4257956"/>
-            <a:ext cx="2644902" cy="1959963"/>
+            <a:off x="640080" y="3699588"/>
+            <a:ext cx="2644902" cy="2518331"/>
           </a:xfrm>
           <a:prstGeom prst="rect">
             <a:avLst/>
@@ -6792,7 +6792,7 @@
         </p:nvSpPr>
         <p:spPr>
           <a:xfrm>
-            <a:off x="640080" y="4257956"/>
+            <a:off x="640080" y="3699588"/>
             <a:ext cx="2644902" cy="45720"/>
           </a:xfrm>
           <a:prstGeom prst="rect">
@@ -6841,7 +6841,7 @@
         </p:nvSpPr>
         <p:spPr>
           <a:xfrm>
-            <a:off x="749808" y="4385972"/>
+            <a:off x="749808" y="3827604"/>
             <a:ext cx="2425446" cy="201168"/>
           </a:xfrm>
           <a:prstGeom prst="rect">
@@ -6883,7 +6883,7 @@
         </p:nvSpPr>
         <p:spPr>
           <a:xfrm>
-            <a:off x="749808" y="4642004"/>
+            <a:off x="749808" y="4083636"/>
             <a:ext cx="2425446" cy="475488"/>
           </a:xfrm>
           <a:prstGeom prst="rect">
@@ -6967,8 +6967,8 @@
         </p:nvSpPr>
         <p:spPr>
           <a:xfrm>
-            <a:off x="3394710" y="4257956"/>
-            <a:ext cx="2644902" cy="1959963"/>
+            <a:off x="3394710" y="3699588"/>
+            <a:ext cx="2644902" cy="2518331"/>
           </a:xfrm>
           <a:prstGeom prst="rect">
             <a:avLst/>
@@ -7016,7 +7016,7 @@
         </p:nvSpPr>
         <p:spPr>
           <a:xfrm>
-            <a:off x="3394710" y="4257956"/>
+            <a:off x="3394710" y="3699588"/>
             <a:ext cx="2644902" cy="45720"/>
           </a:xfrm>
           <a:prstGeom prst="rect">
@@ -7065,7 +7065,7 @@
         </p:nvSpPr>
         <p:spPr>
           <a:xfrm>
-            <a:off x="3504438" y="4385972"/>
+            <a:off x="3504438" y="3827604"/>
             <a:ext cx="2425446" cy="201168"/>
           </a:xfrm>
           <a:prstGeom prst="rect">
@@ -7107,7 +7107,7 @@
         </p:nvSpPr>
         <p:spPr>
           <a:xfrm>
-            <a:off x="3504438" y="4642004"/>
+            <a:off x="3504438" y="4083636"/>
             <a:ext cx="2425446" cy="475488"/>
           </a:xfrm>
           <a:prstGeom prst="rect">
@@ -7191,8 +7191,8 @@
         </p:nvSpPr>
         <p:spPr>
           <a:xfrm>
-            <a:off x="6149340" y="4257956"/>
-            <a:ext cx="2644902" cy="1959963"/>
+            <a:off x="6149340" y="3699588"/>
+            <a:ext cx="2644902" cy="2518331"/>
           </a:xfrm>
           <a:prstGeom prst="rect">
             <a:avLst/>
@@ -7240,7 +7240,7 @@
         </p:nvSpPr>
         <p:spPr>
           <a:xfrm>
-            <a:off x="6149340" y="4257956"/>
+            <a:off x="6149340" y="3699588"/>
             <a:ext cx="2644902" cy="45720"/>
           </a:xfrm>
           <a:prstGeom prst="rect">
@@ -7289,7 +7289,7 @@
         </p:nvSpPr>
         <p:spPr>
           <a:xfrm>
-            <a:off x="6259068" y="4385972"/>
+            <a:off x="6259068" y="3827604"/>
             <a:ext cx="2425446" cy="201168"/>
           </a:xfrm>
           <a:prstGeom prst="rect">
@@ -7331,7 +7331,7 @@
         </p:nvSpPr>
         <p:spPr>
           <a:xfrm>
-            <a:off x="6259068" y="4642004"/>
+            <a:off x="6259068" y="4083636"/>
             <a:ext cx="2425446" cy="475488"/>
           </a:xfrm>
           <a:prstGeom prst="rect">
@@ -7415,8 +7415,8 @@
         </p:nvSpPr>
         <p:spPr>
           <a:xfrm>
-            <a:off x="8903970" y="4257956"/>
-            <a:ext cx="2644902" cy="1959963"/>
+            <a:off x="8903970" y="3699588"/>
+            <a:ext cx="2644902" cy="2518331"/>
           </a:xfrm>
           <a:prstGeom prst="rect">
             <a:avLst/>
@@ -7464,7 +7464,7 @@
         </p:nvSpPr>
         <p:spPr>
           <a:xfrm>
-            <a:off x="8903970" y="4257956"/>
+            <a:off x="8903970" y="3699588"/>
             <a:ext cx="2644902" cy="45720"/>
           </a:xfrm>
           <a:prstGeom prst="rect">
@@ -7513,7 +7513,7 @@
         </p:nvSpPr>
         <p:spPr>
           <a:xfrm>
-            <a:off x="9013698" y="4385972"/>
+            <a:off x="9013698" y="3827604"/>
             <a:ext cx="2425446" cy="201168"/>
           </a:xfrm>
           <a:prstGeom prst="rect">
@@ -7555,7 +7555,7 @@
         </p:nvSpPr>
         <p:spPr>
           <a:xfrm>
-            <a:off x="9013698" y="4642004"/>
+            <a:off x="9013698" y="4083636"/>
             <a:ext cx="2425446" cy="475488"/>
           </a:xfrm>
           <a:prstGeom prst="rect">
@@ -8759,7 +8759,7 @@
         </p:nvGraphicFramePr>
         <p:xfrm>
           <a:off x="640080" y="1600200"/>
-          <a:ext cx="10908792" cy="741226"/>
+          <a:ext cx="10908792" cy="957245"/>
         </p:xfrm>
         <a:graphic>
           <a:graphicData uri="http://schemas.openxmlformats.org/drawingml/2006/table">
@@ -8772,7 +8772,7 @@
                 <a:gridCol w="4448556"/>
                 <a:gridCol w="4448556"/>
               </a:tblGrid>
-              <a:tr h="370613">
+              <a:tr h="478622">
                 <a:tc>
                   <a:txBody>
                     <a:bodyPr/>
@@ -8855,7 +8855,7 @@
                   </a:tcPr>
                 </a:tc>
               </a:tr>
-              <a:tr h="370613">
+              <a:tr h="478623">
                 <a:tc>
                   <a:txBody>
                     <a:bodyPr/>
@@ -8950,8 +8950,8 @@
         </p:nvSpPr>
         <p:spPr>
           <a:xfrm>
-            <a:off x="640080" y="2451154"/>
-            <a:ext cx="10908792" cy="1217945"/>
+            <a:off x="640080" y="2667173"/>
+            <a:ext cx="10908792" cy="1258155"/>
           </a:xfrm>
           <a:prstGeom prst="rect">
             <a:avLst/>
@@ -8999,8 +8999,8 @@
         </p:nvSpPr>
         <p:spPr>
           <a:xfrm>
-            <a:off x="640080" y="2451154"/>
-            <a:ext cx="54864" cy="1217945"/>
+            <a:off x="640080" y="2667173"/>
+            <a:ext cx="54864" cy="1258155"/>
           </a:xfrm>
           <a:prstGeom prst="rect">
             <a:avLst/>
@@ -9048,7 +9048,7 @@
         </p:nvSpPr>
         <p:spPr>
           <a:xfrm>
-            <a:off x="804671" y="2560882"/>
+            <a:off x="804671" y="2776901"/>
             <a:ext cx="10616184" cy="228600"/>
           </a:xfrm>
           <a:prstGeom prst="rect">
@@ -9090,8 +9090,8 @@
         </p:nvSpPr>
         <p:spPr>
           <a:xfrm>
-            <a:off x="804671" y="2844346"/>
-            <a:ext cx="10616184" cy="733313"/>
+            <a:off x="804671" y="3060365"/>
+            <a:ext cx="10616184" cy="773523"/>
           </a:xfrm>
           <a:prstGeom prst="rect">
             <a:avLst/>
@@ -9132,8 +9132,8 @@
         </p:nvSpPr>
         <p:spPr>
           <a:xfrm>
-            <a:off x="640080" y="3778827"/>
-            <a:ext cx="10908792" cy="1132724"/>
+            <a:off x="640080" y="4035057"/>
+            <a:ext cx="10908792" cy="1036567"/>
           </a:xfrm>
           <a:prstGeom prst="rect">
             <a:avLst/>
@@ -9181,8 +9181,8 @@
         </p:nvSpPr>
         <p:spPr>
           <a:xfrm>
-            <a:off x="640080" y="3778827"/>
-            <a:ext cx="54864" cy="1132724"/>
+            <a:off x="640080" y="4035057"/>
+            <a:ext cx="54864" cy="1036567"/>
           </a:xfrm>
           <a:prstGeom prst="rect">
             <a:avLst/>
@@ -9230,7 +9230,7 @@
         </p:nvSpPr>
         <p:spPr>
           <a:xfrm>
-            <a:off x="804671" y="3888555"/>
+            <a:off x="804671" y="4144785"/>
             <a:ext cx="10616184" cy="228600"/>
           </a:xfrm>
           <a:prstGeom prst="rect">
@@ -9272,8 +9272,8 @@
         </p:nvSpPr>
         <p:spPr>
           <a:xfrm>
-            <a:off x="804671" y="4172019"/>
-            <a:ext cx="10616184" cy="648092"/>
+            <a:off x="804671" y="4428249"/>
+            <a:ext cx="10616184" cy="551935"/>
           </a:xfrm>
           <a:prstGeom prst="rect">
             <a:avLst/>
@@ -9314,8 +9314,8 @@
         </p:nvSpPr>
         <p:spPr>
           <a:xfrm>
-            <a:off x="640080" y="5021279"/>
-            <a:ext cx="10908792" cy="1196640"/>
+            <a:off x="640080" y="5181352"/>
+            <a:ext cx="10908792" cy="1036567"/>
           </a:xfrm>
           <a:prstGeom prst="rect">
             <a:avLst/>
@@ -9363,8 +9363,8 @@
         </p:nvSpPr>
         <p:spPr>
           <a:xfrm>
-            <a:off x="640080" y="5021279"/>
-            <a:ext cx="54864" cy="1196640"/>
+            <a:off x="640080" y="5181352"/>
+            <a:ext cx="54864" cy="1036567"/>
           </a:xfrm>
           <a:prstGeom prst="rect">
             <a:avLst/>
@@ -9412,7 +9412,7 @@
         </p:nvSpPr>
         <p:spPr>
           <a:xfrm>
-            <a:off x="804671" y="5131007"/>
+            <a:off x="804671" y="5291080"/>
             <a:ext cx="10616184" cy="228600"/>
           </a:xfrm>
           <a:prstGeom prst="rect">
@@ -9454,8 +9454,8 @@
         </p:nvSpPr>
         <p:spPr>
           <a:xfrm>
-            <a:off x="804671" y="5414471"/>
-            <a:ext cx="10616184" cy="712008"/>
+            <a:off x="804671" y="5574544"/>
+            <a:ext cx="10616184" cy="551935"/>
           </a:xfrm>
           <a:prstGeom prst="rect">
             <a:avLst/>
@@ -13023,7 +13023,7 @@
         </p:nvGraphicFramePr>
         <p:xfrm>
           <a:off x="640080" y="1325880"/>
-          <a:ext cx="10908792" cy="2357184"/>
+          <a:ext cx="10908792" cy="2527356"/>
         </p:xfrm>
         <a:graphic>
           <a:graphicData uri="http://schemas.openxmlformats.org/drawingml/2006/table">
@@ -13037,7 +13037,7 @@
                 <a:gridCol w="2965704"/>
                 <a:gridCol w="2965704"/>
               </a:tblGrid>
-              <a:tr h="785728">
+              <a:tr h="842452">
                 <a:tc>
                   <a:txBody>
                     <a:bodyPr/>
@@ -13147,7 +13147,7 @@
                   </a:tcPr>
                 </a:tc>
               </a:tr>
-              <a:tr h="785728">
+              <a:tr h="842452">
                 <a:tc>
                   <a:txBody>
                     <a:bodyPr/>
@@ -13257,7 +13257,7 @@
                   </a:tcPr>
                 </a:tc>
               </a:tr>
-              <a:tr h="785728">
+              <a:tr h="842452">
                 <a:tc>
                   <a:txBody>
                     <a:bodyPr/>
@@ -13379,7 +13379,7 @@
         </p:nvSpPr>
         <p:spPr>
           <a:xfrm>
-            <a:off x="640080" y="3701352"/>
+            <a:off x="640080" y="3871524"/>
             <a:ext cx="10908792" cy="164592"/>
           </a:xfrm>
           <a:prstGeom prst="rect">
@@ -13421,8 +13421,8 @@
         </p:nvSpPr>
         <p:spPr>
           <a:xfrm>
-            <a:off x="640080" y="3993960"/>
-            <a:ext cx="10908792" cy="2223959"/>
+            <a:off x="640080" y="4164132"/>
+            <a:ext cx="10908792" cy="2053787"/>
           </a:xfrm>
           <a:prstGeom prst="rect">
             <a:avLst/>
@@ -13470,8 +13470,8 @@
         </p:nvSpPr>
         <p:spPr>
           <a:xfrm>
-            <a:off x="640080" y="3993960"/>
-            <a:ext cx="54864" cy="2223959"/>
+            <a:off x="640080" y="4164132"/>
+            <a:ext cx="54864" cy="2053787"/>
           </a:xfrm>
           <a:prstGeom prst="rect">
             <a:avLst/>
@@ -13519,7 +13519,7 @@
         </p:nvSpPr>
         <p:spPr>
           <a:xfrm>
-            <a:off x="804671" y="4103688"/>
+            <a:off x="804671" y="4273860"/>
             <a:ext cx="10616184" cy="228600"/>
           </a:xfrm>
           <a:prstGeom prst="rect">
@@ -13561,8 +13561,8 @@
         </p:nvSpPr>
         <p:spPr>
           <a:xfrm>
-            <a:off x="804671" y="4387152"/>
-            <a:ext cx="10616184" cy="1739327"/>
+            <a:off x="804671" y="4557324"/>
+            <a:ext cx="10616184" cy="1569155"/>
           </a:xfrm>
           <a:prstGeom prst="rect">
             <a:avLst/>

--- a/plugins/gradient-cio/assets/examples/gradient-odd-manager-monitor.pptx
+++ b/plugins/gradient-cio/assets/examples/gradient-odd-manager-monitor.pptx
@@ -15,6 +15,7 @@
     <ns0:sldId id="263" ns1:id="rId14"/>
     <ns0:sldId id="264" ns1:id="rId15"/>
     <ns0:sldId id="265" ns1:id="rId16"/>
+    <ns0:sldId id="266" ns1:id="rId17"/>
   </ns0:sldIdLst>
   <ns0:sldSz cx="12191695" cy="6858000" type="screen16x9"/>
   <ns0:notesSz cx="6858000" cy="9144000"/>
@@ -3242,7 +3243,7 @@
               <a:rPr>
                 <a:latin typeface="Inter"/>
               </a:rPr>
-              <a:t>ROSTER FUNDS</a:t>
+              <a:t>MANAGERS</a:t>
             </a:r>
           </a:p>
         </p:txBody>
@@ -3284,7 +3285,7 @@
               <a:rPr>
                 <a:latin typeface="Inter"/>
               </a:rPr>
-              <a:t>1 of 3 slots</a:t>
+              <a:t>1</a:t>
             </a:r>
           </a:p>
         </p:txBody>
@@ -3326,7 +3327,7 @@
               <a:rPr>
                 <a:latin typeface="Inter"/>
               </a:rPr>
-              <a:t>MANAGERS</a:t>
+              <a:t>CHANGES SINCE REVIEW</a:t>
             </a:r>
           </a:p>
         </p:txBody>
@@ -3381,391 +3382,6 @@
         </p:nvSpPr>
         <p:spPr>
           <a:xfrm>
-            <a:off x="685800" y="4937759"/>
-            <a:ext cx="4709160" cy="182880"/>
-          </a:xfrm>
-          <a:prstGeom prst="rect">
-            <a:avLst/>
-          </a:prstGeom>
-          <a:noFill/>
-        </p:spPr>
-        <p:txBody>
-          <a:bodyPr wrap="none" lIns="9144" rIns="9144" tIns="9144" bIns="9144" anchor="t">
-            <a:spAutoFit/>
-          </a:bodyPr>
-          <a:lstStyle/>
-          <a:p>
-            <a:pPr algn="l">
-              <a:spcAft>
-                <a:spcPts val="0"/>
-              </a:spcAft>
-              <a:defRPr sz="700" b="1">
-                <a:solidFill>
-                  <a:srgbClr val="8A94A1"/>
-                </a:solidFill>
-                <a:latin typeface="Inter"/>
-              </a:defRPr>
-            </a:pPr>
-            <a:r>
-              <a:rPr>
-                <a:latin typeface="Inter"/>
-              </a:rPr>
-              <a:t>NEW ALERTS</a:t>
-            </a:r>
-          </a:p>
-        </p:txBody>
-      </p:sp>
-      <p:sp>
-        <p:nvSpPr>
-          <p:cNvPr id="14" name="TextBox 13"/>
-          <p:cNvSpPr txBox="1"/>
-          <p:nvPr/>
-        </p:nvSpPr>
-        <p:spPr>
-          <a:xfrm>
-            <a:off x="685800" y="5129783"/>
-            <a:ext cx="4709160" cy="310896"/>
-          </a:xfrm>
-          <a:prstGeom prst="rect">
-            <a:avLst/>
-          </a:prstGeom>
-          <a:noFill/>
-        </p:spPr>
-        <p:txBody>
-          <a:bodyPr wrap="none" lIns="9144" rIns="9144" tIns="9144" bIns="9144" anchor="t">
-            <a:spAutoFit/>
-          </a:bodyPr>
-          <a:lstStyle/>
-          <a:p>
-            <a:pPr algn="l">
-              <a:spcAft>
-                <a:spcPts val="0"/>
-              </a:spcAft>
-              <a:defRPr sz="1000" b="1">
-                <a:solidFill>
-                  <a:srgbClr val="FFFFFF"/>
-                </a:solidFill>
-                <a:latin typeface="Inter"/>
-              </a:defRPr>
-            </a:pPr>
-            <a:r>
-              <a:rPr>
-                <a:latin typeface="Inter"/>
-              </a:rPr>
-              <a:t>0</a:t>
-            </a:r>
-          </a:p>
-        </p:txBody>
-      </p:sp>
-      <p:sp>
-        <p:nvSpPr>
-          <p:cNvPr id="15" name="TextBox 14"/>
-          <p:cNvSpPr txBox="1"/>
-          <p:nvPr/>
-        </p:nvSpPr>
-        <p:spPr>
-          <a:xfrm>
-            <a:off x="5852160" y="4937759"/>
-            <a:ext cx="4709160" cy="182880"/>
-          </a:xfrm>
-          <a:prstGeom prst="rect">
-            <a:avLst/>
-          </a:prstGeom>
-          <a:noFill/>
-        </p:spPr>
-        <p:txBody>
-          <a:bodyPr wrap="none" lIns="9144" rIns="9144" tIns="9144" bIns="9144" anchor="t">
-            <a:spAutoFit/>
-          </a:bodyPr>
-          <a:lstStyle/>
-          <a:p>
-            <a:pPr algn="l">
-              <a:spcAft>
-                <a:spcPts val="0"/>
-              </a:spcAft>
-              <a:defRPr sz="700" b="1">
-                <a:solidFill>
-                  <a:srgbClr val="8A94A1"/>
-                </a:solidFill>
-                <a:latin typeface="Inter"/>
-              </a:defRPr>
-            </a:pPr>
-            <a:r>
-              <a:rPr>
-                <a:latin typeface="Inter"/>
-              </a:rPr>
-              <a:t>CHANGES SINCE REVIEW</a:t>
-            </a:r>
-          </a:p>
-        </p:txBody>
-      </p:sp>
-      <p:sp>
-        <p:nvSpPr>
-          <p:cNvPr id="16" name="TextBox 15"/>
-          <p:cNvSpPr txBox="1"/>
-          <p:nvPr/>
-        </p:nvSpPr>
-        <p:spPr>
-          <a:xfrm>
-            <a:off x="5852160" y="5129783"/>
-            <a:ext cx="4709160" cy="310896"/>
-          </a:xfrm>
-          <a:prstGeom prst="rect">
-            <a:avLst/>
-          </a:prstGeom>
-          <a:noFill/>
-        </p:spPr>
-        <p:txBody>
-          <a:bodyPr wrap="none" lIns="9144" rIns="9144" tIns="9144" bIns="9144" anchor="t">
-            <a:spAutoFit/>
-          </a:bodyPr>
-          <a:lstStyle/>
-          <a:p>
-            <a:pPr algn="l">
-              <a:spcAft>
-                <a:spcPts val="0"/>
-              </a:spcAft>
-              <a:defRPr sz="1000" b="1">
-                <a:solidFill>
-                  <a:srgbClr val="FFFFFF"/>
-                </a:solidFill>
-                <a:latin typeface="Inter"/>
-              </a:defRPr>
-            </a:pPr>
-            <a:r>
-              <a:rPr>
-                <a:latin typeface="Inter"/>
-              </a:rPr>
-              <a:t>1</a:t>
-            </a:r>
-          </a:p>
-        </p:txBody>
-      </p:sp>
-      <p:sp>
-        <p:nvSpPr>
-          <p:cNvPr id="17" name="Rectangle 16"/>
-          <p:cNvSpPr/>
-          <p:nvPr/>
-        </p:nvSpPr>
-        <p:spPr>
-          <a:xfrm>
-            <a:off x="685800" y="5687568"/>
-            <a:ext cx="3337560" cy="530352"/>
-          </a:xfrm>
-          <a:prstGeom prst="rect">
-            <a:avLst/>
-          </a:prstGeom>
-          <a:solidFill>
-            <a:srgbClr val="F2A93B"/>
-          </a:solidFill>
-          <a:ln>
-            <a:solidFill>
-              <a:srgbClr val="F2A93B"/>
-            </a:solidFill>
-          </a:ln>
-        </p:spPr>
-        <p:style>
-          <a:lnRef idx="1">
-            <a:schemeClr val="accent1"/>
-          </a:lnRef>
-          <a:fillRef idx="3">
-            <a:schemeClr val="accent1"/>
-          </a:fillRef>
-          <a:effectRef idx="2">
-            <a:schemeClr val="accent1"/>
-          </a:effectRef>
-          <a:fontRef idx="minor">
-            <a:schemeClr val="lt1"/>
-          </a:fontRef>
-        </p:style>
-        <p:txBody>
-          <a:bodyPr rtlCol="0" anchor="ctr"/>
-          <a:lstStyle/>
-          <a:p>
-            <a:pPr algn="ctr">
-              <a:defRPr>
-                <a:latin typeface="Inter"/>
-              </a:defRPr>
-            </a:pPr>
-          </a:p>
-        </p:txBody>
-      </p:sp>
-      <p:sp>
-        <p:nvSpPr>
-          <p:cNvPr id="18" name="TextBox 17"/>
-          <p:cNvSpPr txBox="1"/>
-          <p:nvPr/>
-        </p:nvSpPr>
-        <p:spPr>
-          <a:xfrm>
-            <a:off x="822960" y="5760720"/>
-            <a:ext cx="3063240" cy="128016"/>
-          </a:xfrm>
-          <a:prstGeom prst="rect">
-            <a:avLst/>
-          </a:prstGeom>
-          <a:noFill/>
-        </p:spPr>
-        <p:txBody>
-          <a:bodyPr wrap="none" lIns="9144" rIns="9144" tIns="9144" bIns="9144" anchor="t">
-            <a:spAutoFit/>
-          </a:bodyPr>
-          <a:lstStyle/>
-          <a:p>
-            <a:pPr algn="l">
-              <a:spcAft>
-                <a:spcPts val="0"/>
-              </a:spcAft>
-              <a:defRPr sz="620" b="1">
-                <a:solidFill>
-                  <a:srgbClr val="0D1117"/>
-                </a:solidFill>
-                <a:latin typeface="Inter"/>
-              </a:defRPr>
-            </a:pPr>
-            <a:r>
-              <a:rPr>
-                <a:latin typeface="Inter"/>
-              </a:rPr>
-              <a:t>THIS WEEK</a:t>
-            </a:r>
-          </a:p>
-        </p:txBody>
-      </p:sp>
-      <p:sp>
-        <p:nvSpPr>
-          <p:cNvPr id="19" name="TextBox 18"/>
-          <p:cNvSpPr txBox="1"/>
-          <p:nvPr/>
-        </p:nvSpPr>
-        <p:spPr>
-          <a:xfrm>
-            <a:off x="822960" y="5916168"/>
-            <a:ext cx="3063240" cy="182880"/>
-          </a:xfrm>
-          <a:prstGeom prst="rect">
-            <a:avLst/>
-          </a:prstGeom>
-          <a:noFill/>
-        </p:spPr>
-        <p:txBody>
-          <a:bodyPr wrap="none" lIns="9144" rIns="9144" tIns="9144" bIns="9144" anchor="t">
-            <a:spAutoFit/>
-          </a:bodyPr>
-          <a:lstStyle/>
-          <a:p>
-            <a:pPr algn="l">
-              <a:spcAft>
-                <a:spcPts val="0"/>
-              </a:spcAft>
-              <a:defRPr sz="900" b="1">
-                <a:solidFill>
-                  <a:srgbClr val="0D1117"/>
-                </a:solidFill>
-                <a:latin typeface="Inter"/>
-              </a:defRPr>
-            </a:pPr>
-            <a:r>
-              <a:rPr>
-                <a:latin typeface="Inter"/>
-              </a:rPr>
-              <a:t>1 item to review</a:t>
-            </a:r>
-          </a:p>
-        </p:txBody>
-      </p:sp>
-      <p:sp>
-        <p:nvSpPr>
-          <p:cNvPr id="20" name="TextBox 19"/>
-          <p:cNvSpPr txBox="1"/>
-          <p:nvPr/>
-        </p:nvSpPr>
-        <p:spPr>
-          <a:xfrm>
-            <a:off x="4297680" y="5733288"/>
-            <a:ext cx="3108960" cy="164592"/>
-          </a:xfrm>
-          <a:prstGeom prst="rect">
-            <a:avLst/>
-          </a:prstGeom>
-          <a:noFill/>
-        </p:spPr>
-        <p:txBody>
-          <a:bodyPr wrap="none" lIns="9144" rIns="9144" tIns="9144" bIns="9144" anchor="t">
-            <a:spAutoFit/>
-          </a:bodyPr>
-          <a:lstStyle/>
-          <a:p>
-            <a:pPr algn="l">
-              <a:spcAft>
-                <a:spcPts val="0"/>
-              </a:spcAft>
-              <a:defRPr sz="650" b="1">
-                <a:solidFill>
-                  <a:srgbClr val="8A94A1"/>
-                </a:solidFill>
-                <a:latin typeface="Inter"/>
-              </a:defRPr>
-            </a:pPr>
-            <a:r>
-              <a:rPr>
-                <a:latin typeface="Inter"/>
-              </a:rPr>
-              <a:t>ROSTER REVIEWED</a:t>
-            </a:r>
-          </a:p>
-        </p:txBody>
-      </p:sp>
-      <p:sp>
-        <p:nvSpPr>
-          <p:cNvPr id="21" name="TextBox 20"/>
-          <p:cNvSpPr txBox="1"/>
-          <p:nvPr/>
-        </p:nvSpPr>
-        <p:spPr>
-          <a:xfrm>
-            <a:off x="4297680" y="5934456"/>
-            <a:ext cx="3108960" cy="201168"/>
-          </a:xfrm>
-          <a:prstGeom prst="rect">
-            <a:avLst/>
-          </a:prstGeom>
-          <a:noFill/>
-        </p:spPr>
-        <p:txBody>
-          <a:bodyPr wrap="none" lIns="9144" rIns="9144" tIns="9144" bIns="9144" anchor="t">
-            <a:spAutoFit/>
-          </a:bodyPr>
-          <a:lstStyle/>
-          <a:p>
-            <a:pPr algn="l">
-              <a:spcAft>
-                <a:spcPts val="0"/>
-              </a:spcAft>
-              <a:defRPr sz="800" b="1">
-                <a:solidFill>
-                  <a:srgbClr val="FFFFFF"/>
-                </a:solidFill>
-                <a:latin typeface="Inter"/>
-              </a:defRPr>
-            </a:pPr>
-            <a:r>
-              <a:rPr>
-                <a:latin typeface="Inter"/>
-              </a:rPr>
-              <a:t>2 of 2 · Complete</a:t>
-            </a:r>
-          </a:p>
-        </p:txBody>
-      </p:sp>
-      <p:sp>
-        <p:nvSpPr>
-          <p:cNvPr id="22" name="TextBox 21"/>
-          <p:cNvSpPr txBox="1"/>
-          <p:nvPr/>
-        </p:nvSpPr>
-        <p:spPr>
-          <a:xfrm>
             <a:off x="685800" y="6400800"/>
             <a:ext cx="8046720" cy="146304"/>
           </a:xfrm>
@@ -3802,7 +3418,7 @@
       </p:sp>
       <p:sp>
         <p:nvSpPr>
-          <p:cNvPr id="23" name="TextBox 22"/>
+          <p:cNvPr id="14" name="TextBox 13"/>
           <p:cNvSpPr txBox="1"/>
           <p:nvPr/>
         </p:nvSpPr>
@@ -3844,7 +3460,7 @@
       </p:sp>
       <p:sp>
         <p:nvSpPr>
-          <p:cNvPr id="24" name="TextBox 23"/>
+          <p:cNvPr id="15" name="TextBox 14"/>
           <p:cNvSpPr txBox="1"/>
           <p:nvPr/>
         </p:nvSpPr>
@@ -3959,48 +3575,6 @@
         </p:nvSpPr>
         <p:spPr>
           <a:xfrm>
-            <a:off x="5897880" y="310896"/>
-            <a:ext cx="4800600" cy="256032"/>
-          </a:xfrm>
-          <a:prstGeom prst="rect">
-            <a:avLst/>
-          </a:prstGeom>
-          <a:noFill/>
-        </p:spPr>
-        <p:txBody>
-          <a:bodyPr wrap="none" lIns="9144" rIns="9144" tIns="9144" bIns="9144" anchor="t">
-            <a:spAutoFit/>
-          </a:bodyPr>
-          <a:lstStyle/>
-          <a:p>
-            <a:pPr algn="r">
-              <a:spcAft>
-                <a:spcPts val="0"/>
-              </a:spcAft>
-              <a:defRPr sz="680" b="1">
-                <a:solidFill>
-                  <a:srgbClr val="4F6B00"/>
-                </a:solidFill>
-                <a:latin typeface="Inter"/>
-              </a:defRPr>
-            </a:pPr>
-            <a:r>
-              <a:rPr>
-                <a:latin typeface="Inter"/>
-              </a:rPr>
-              <a:t>Illustrative, Gradient Maintained — demo data, not the client's holdings or managers</a:t>
-            </a:r>
-          </a:p>
-        </p:txBody>
-      </p:sp>
-      <p:sp>
-        <p:nvSpPr>
-          <p:cNvPr id="4" name="TextBox 3"/>
-          <p:cNvSpPr txBox="1"/>
-          <p:nvPr/>
-        </p:nvSpPr>
-        <p:spPr>
-          <a:xfrm>
             <a:off x="640080" y="566928"/>
             <a:ext cx="10058400" cy="530352"/>
           </a:xfrm>
@@ -4037,7 +3611,7 @@
       </p:sp>
       <p:sp>
         <p:nvSpPr>
-          <p:cNvPr id="5" name="Rectangle 4"/>
+          <p:cNvPr id="4" name="Rectangle 3"/>
           <p:cNvSpPr/>
           <p:nvPr/>
         </p:nvSpPr>
@@ -4086,7 +3660,7 @@
       </p:sp>
       <p:sp>
         <p:nvSpPr>
-          <p:cNvPr id="6" name="Rectangle 5"/>
+          <p:cNvPr id="5" name="Rectangle 4"/>
           <p:cNvSpPr/>
           <p:nvPr/>
         </p:nvSpPr>
@@ -4135,7 +3709,7 @@
       </p:sp>
       <p:sp>
         <p:nvSpPr>
-          <p:cNvPr id="7" name="TextBox 6"/>
+          <p:cNvPr id="6" name="TextBox 5"/>
           <p:cNvSpPr txBox="1"/>
           <p:nvPr/>
         </p:nvSpPr>
@@ -4175,6 +3749,67 @@
           </a:p>
         </p:txBody>
       </p:sp>
+      <p:sp>
+        <p:nvSpPr>
+          <p:cNvPr id="7" name="TextBox 6"/>
+          <p:cNvSpPr txBox="1"/>
+          <p:nvPr/>
+        </p:nvSpPr>
+        <p:spPr>
+          <a:xfrm>
+            <a:off x="640080" y="1325880"/>
+            <a:ext cx="10908792" cy="1066145"/>
+          </a:xfrm>
+          <a:prstGeom prst="rect">
+            <a:avLst/>
+          </a:prstGeom>
+          <a:noFill/>
+        </p:spPr>
+        <p:txBody>
+          <a:bodyPr wrap="none" lIns="9144" rIns="9144" tIns="9144" bIns="9144" anchor="t">
+            <a:spAutoFit/>
+          </a:bodyPr>
+          <a:lstStyle/>
+          <a:p>
+            <a:pPr algn="l">
+              <a:spcAft>
+                <a:spcPts val="500"/>
+              </a:spcAft>
+              <a:defRPr sz="1050" b="0">
+                <a:solidFill>
+                  <a:srgbClr val="0D1117"/>
+                </a:solidFill>
+                <a:latin typeface="Inter"/>
+              </a:defRPr>
+            </a:pPr>
+            <a:r>
+              <a:rPr>
+                <a:latin typeface="Inter"/>
+              </a:rPr>
+              <a:t>•  Window: 2026-09-28 to 2026-10-04. Severity: high = tier-1 alert, new red flag, overdue high finding or overdue review; medium = material change since review, tier-2 alert, open medium finding, review due within 30 days; low = everything else.</a:t>
+            </a:r>
+          </a:p>
+          <a:p>
+            <a:pPr algn="l">
+              <a:spcAft>
+                <a:spcPts val="500"/>
+              </a:spcAft>
+              <a:defRPr sz="1050" b="0">
+                <a:solidFill>
+                  <a:srgbClr val="0D1117"/>
+                </a:solidFill>
+                <a:latin typeface="Inter"/>
+              </a:defRPr>
+            </a:pPr>
+            <a:r>
+              <a:rPr>
+                <a:latin typeface="Inter"/>
+              </a:rPr>
+              <a:t>•  Form ADV is adviser-reported and not verified by the SEC. This digest is a monitoring aid, not investment, legal or compliance advice.</a:t>
+            </a:r>
+          </a:p>
+        </p:txBody>
+      </p:sp>
       <p:graphicFrame>
         <p:nvGraphicFramePr>
           <p:cNvPr id="8" name="Table 7"/>
@@ -4184,8 +3819,8 @@
           <p:nvPr/>
         </p:nvGraphicFramePr>
         <p:xfrm>
-          <a:off x="640080" y="1325880"/>
-          <a:ext cx="10908792" cy="3202929"/>
+          <a:off x="640080" y="2501753"/>
+          <a:ext cx="10908792" cy="3514998"/>
         </p:xfrm>
         <a:graphic>
           <a:graphicData uri="http://schemas.openxmlformats.org/drawingml/2006/table">
@@ -4195,16 +3830,12 @@
               </a:tblPr>
               <a:tblGrid>
                 <a:gridCol w="2011680"/>
-                <a:gridCol w="1112139"/>
-                <a:gridCol w="1112139"/>
-                <a:gridCol w="1112139"/>
-                <a:gridCol w="1112139"/>
-                <a:gridCol w="1112139"/>
-                <a:gridCol w="1112139"/>
-                <a:gridCol w="1112139"/>
-                <a:gridCol w="1112139"/>
+                <a:gridCol w="2224278"/>
+                <a:gridCol w="2224278"/>
+                <a:gridCol w="2224278"/>
+                <a:gridCol w="2224278"/>
               </a:tblGrid>
-              <a:tr h="457561">
+              <a:tr h="502142">
                 <a:tc>
                   <a:txBody>
                     <a:bodyPr/>
@@ -4276,7 +3907,7 @@
                         <a:rPr>
                           <a:latin typeface="Inter"/>
                         </a:rPr>
-                        <a:t>Basis</a:t>
+                        <a:t>Source</a:t>
                       </a:r>
                     </a:p>
                   </a:txBody>
@@ -4303,7 +3934,1420 @@
                         <a:rPr>
                           <a:latin typeface="Inter"/>
                         </a:rPr>
-                        <a:t>Tool / view</a:t>
+                        <a:t>As of</a:t>
+                      </a:r>
+                    </a:p>
+                  </a:txBody>
+                  <a:tcPr marL="54864" marR="54864" marT="27432" marB="27432" anchor="ctr">
+                    <a:solidFill>
+                      <a:srgbClr val="0D1117"/>
+                    </a:solidFill>
+                  </a:tcPr>
+                </a:tc>
+                <a:tc>
+                  <a:txBody>
+                    <a:bodyPr/>
+                    <a:lstStyle/>
+                    <a:p>
+                      <a:pPr>
+                        <a:defRPr sz="750" b="1">
+                          <a:solidFill>
+                            <a:srgbClr val="FFFFFF"/>
+                          </a:solidFill>
+                          <a:latin typeface="Inter"/>
+                        </a:defRPr>
+                      </a:pPr>
+                      <a:r>
+                        <a:rPr>
+                          <a:latin typeface="Inter"/>
+                        </a:rPr>
+                        <a:t>Check</a:t>
+                      </a:r>
+                    </a:p>
+                  </a:txBody>
+                  <a:tcPr marL="54864" marR="54864" marT="27432" marB="27432" anchor="ctr">
+                    <a:solidFill>
+                      <a:srgbClr val="0D1117"/>
+                    </a:solidFill>
+                  </a:tcPr>
+                </a:tc>
+              </a:tr>
+              <a:tr h="502142">
+                <a:tc>
+                  <a:txBody>
+                    <a:bodyPr/>
+                    <a:lstStyle/>
+                    <a:p>
+                      <a:pPr>
+                        <a:defRPr sz="720" b="1">
+                          <a:solidFill>
+                            <a:srgbClr val="0D1117"/>
+                          </a:solidFill>
+                          <a:latin typeface="Inter"/>
+                        </a:defRPr>
+                      </a:pPr>
+                      <a:r>
+                        <a:rPr>
+                          <a:latin typeface="Inter"/>
+                        </a:rPr>
+                        <a:t>S1</a:t>
+                      </a:r>
+                    </a:p>
+                  </a:txBody>
+                  <a:tcPr marL="54864" marR="54864" marT="27432" marB="27432" anchor="ctr">
+                    <a:solidFill>
+                      <a:srgbClr val="FFFFFF"/>
+                    </a:solidFill>
+                  </a:tcPr>
+                </a:tc>
+                <a:tc>
+                  <a:txBody>
+                    <a:bodyPr/>
+                    <a:lstStyle/>
+                    <a:p>
+                      <a:pPr>
+                        <a:defRPr sz="720" b="0">
+                          <a:solidFill>
+                            <a:srgbClr val="0D1117"/>
+                          </a:solidFill>
+                          <a:latin typeface="Inter"/>
+                        </a:defRPr>
+                      </a:pPr>
+                      <a:r>
+                        <a:rPr>
+                          <a:latin typeface="Inter"/>
+                        </a:rPr>
+                        <a:t>Diligence Roster and capacity</a:t>
+                      </a:r>
+                    </a:p>
+                  </a:txBody>
+                  <a:tcPr marL="54864" marR="54864" marT="27432" marB="27432" anchor="ctr">
+                    <a:solidFill>
+                      <a:srgbClr val="FFFFFF"/>
+                    </a:solidFill>
+                  </a:tcPr>
+                </a:tc>
+                <a:tc>
+                  <a:txBody>
+                    <a:bodyPr/>
+                    <a:lstStyle/>
+                    <a:p>
+                      <a:pPr>
+                        <a:defRPr sz="720" b="0">
+                          <a:solidFill>
+                            <a:srgbClr val="0D1117"/>
+                          </a:solidFill>
+                          <a:latin typeface="Inter"/>
+                        </a:defRPr>
+                      </a:pPr>
+                      <a:r>
+                        <a:rPr>
+                          <a:latin typeface="Inter"/>
+                        </a:rPr>
+                        <a:t>get_diligence_roster_funds</a:t>
+                      </a:r>
+                    </a:p>
+                  </a:txBody>
+                  <a:tcPr marL="54864" marR="54864" marT="27432" marB="27432" anchor="ctr">
+                    <a:solidFill>
+                      <a:srgbClr val="FFFFFF"/>
+                    </a:solidFill>
+                  </a:tcPr>
+                </a:tc>
+                <a:tc>
+                  <a:txBody>
+                    <a:bodyPr/>
+                    <a:lstStyle/>
+                    <a:p>
+                      <a:pPr>
+                        <a:defRPr sz="720" b="0">
+                          <a:solidFill>
+                            <a:srgbClr val="0D1117"/>
+                          </a:solidFill>
+                          <a:latin typeface="Inter"/>
+                        </a:defRPr>
+                      </a:pPr>
+                      <a:r>
+                        <a:rPr>
+                          <a:latin typeface="Inter"/>
+                        </a:rPr>
+                        <a:t>2026-10-04</a:t>
+                      </a:r>
+                    </a:p>
+                  </a:txBody>
+                  <a:tcPr marL="54864" marR="54864" marT="27432" marB="27432" anchor="ctr">
+                    <a:solidFill>
+                      <a:srgbClr val="FFFFFF"/>
+                    </a:solidFill>
+                  </a:tcPr>
+                </a:tc>
+                <a:tc>
+                  <a:txBody>
+                    <a:bodyPr/>
+                    <a:lstStyle/>
+                    <a:p>
+                      <a:pPr>
+                        <a:defRPr sz="720" b="1">
+                          <a:solidFill>
+                            <a:srgbClr val="C6F432"/>
+                          </a:solidFill>
+                          <a:latin typeface="Inter"/>
+                        </a:defRPr>
+                      </a:pPr>
+                      <a:r>
+                        <a:rPr>
+                          <a:latin typeface="Inter"/>
+                        </a:rPr>
+                        <a:t>● Passed</a:t>
+                      </a:r>
+                    </a:p>
+                  </a:txBody>
+                  <a:tcPr marL="54864" marR="54864" marT="27432" marB="27432" anchor="ctr">
+                    <a:solidFill>
+                      <a:srgbClr val="F5F7F9"/>
+                    </a:solidFill>
+                  </a:tcPr>
+                </a:tc>
+              </a:tr>
+              <a:tr h="502142">
+                <a:tc>
+                  <a:txBody>
+                    <a:bodyPr/>
+                    <a:lstStyle/>
+                    <a:p>
+                      <a:pPr>
+                        <a:defRPr sz="720" b="1">
+                          <a:solidFill>
+                            <a:srgbClr val="0D1117"/>
+                          </a:solidFill>
+                          <a:latin typeface="Inter"/>
+                        </a:defRPr>
+                      </a:pPr>
+                      <a:r>
+                        <a:rPr>
+                          <a:latin typeface="Inter"/>
+                        </a:rPr>
+                        <a:t>S2</a:t>
+                      </a:r>
+                    </a:p>
+                  </a:txBody>
+                  <a:tcPr marL="54864" marR="54864" marT="27432" marB="27432" anchor="ctr">
+                    <a:solidFill>
+                      <a:srgbClr val="F5F7F9"/>
+                    </a:solidFill>
+                  </a:tcPr>
+                </a:tc>
+                <a:tc>
+                  <a:txBody>
+                    <a:bodyPr/>
+                    <a:lstStyle/>
+                    <a:p>
+                      <a:pPr>
+                        <a:defRPr sz="720" b="0">
+                          <a:solidFill>
+                            <a:srgbClr val="0D1117"/>
+                          </a:solidFill>
+                          <a:latin typeface="Inter"/>
+                        </a:defRPr>
+                      </a:pPr>
+                      <a:r>
+                        <a:rPr>
+                          <a:latin typeface="Inter"/>
+                        </a:rPr>
+                        <a:t>Attention queue, changes since review, red flags</a:t>
+                      </a:r>
+                    </a:p>
+                  </a:txBody>
+                  <a:tcPr marL="54864" marR="54864" marT="27432" marB="27432" anchor="ctr">
+                    <a:solidFill>
+                      <a:srgbClr val="F5F7F9"/>
+                    </a:solidFill>
+                  </a:tcPr>
+                </a:tc>
+                <a:tc>
+                  <a:txBody>
+                    <a:bodyPr/>
+                    <a:lstStyle/>
+                    <a:p>
+                      <a:pPr>
+                        <a:defRPr sz="720" b="0">
+                          <a:solidFill>
+                            <a:srgbClr val="0D1117"/>
+                          </a:solidFill>
+                          <a:latin typeface="Inter"/>
+                        </a:defRPr>
+                      </a:pPr>
+                      <a:r>
+                        <a:rPr>
+                          <a:latin typeface="Inter"/>
+                        </a:rPr>
+                        <a:t>get_manager_diligence_attention_queue</a:t>
+                      </a:r>
+                    </a:p>
+                  </a:txBody>
+                  <a:tcPr marL="54864" marR="54864" marT="27432" marB="27432" anchor="ctr">
+                    <a:solidFill>
+                      <a:srgbClr val="F5F7F9"/>
+                    </a:solidFill>
+                  </a:tcPr>
+                </a:tc>
+                <a:tc>
+                  <a:txBody>
+                    <a:bodyPr/>
+                    <a:lstStyle/>
+                    <a:p>
+                      <a:pPr>
+                        <a:defRPr sz="720" b="0">
+                          <a:solidFill>
+                            <a:srgbClr val="0D1117"/>
+                          </a:solidFill>
+                          <a:latin typeface="Inter"/>
+                        </a:defRPr>
+                      </a:pPr>
+                      <a:r>
+                        <a:rPr>
+                          <a:latin typeface="Inter"/>
+                        </a:rPr>
+                        <a:t>2026-10-04</a:t>
+                      </a:r>
+                    </a:p>
+                  </a:txBody>
+                  <a:tcPr marL="54864" marR="54864" marT="27432" marB="27432" anchor="ctr">
+                    <a:solidFill>
+                      <a:srgbClr val="F5F7F9"/>
+                    </a:solidFill>
+                  </a:tcPr>
+                </a:tc>
+                <a:tc>
+                  <a:txBody>
+                    <a:bodyPr/>
+                    <a:lstStyle/>
+                    <a:p>
+                      <a:pPr>
+                        <a:defRPr sz="720" b="1">
+                          <a:solidFill>
+                            <a:srgbClr val="C6F432"/>
+                          </a:solidFill>
+                          <a:latin typeface="Inter"/>
+                        </a:defRPr>
+                      </a:pPr>
+                      <a:r>
+                        <a:rPr>
+                          <a:latin typeface="Inter"/>
+                        </a:rPr>
+                        <a:t>● Passed</a:t>
+                      </a:r>
+                    </a:p>
+                  </a:txBody>
+                  <a:tcPr marL="54864" marR="54864" marT="27432" marB="27432" anchor="ctr">
+                    <a:solidFill>
+                      <a:srgbClr val="F5F7F9"/>
+                    </a:solidFill>
+                  </a:tcPr>
+                </a:tc>
+              </a:tr>
+              <a:tr h="502142">
+                <a:tc>
+                  <a:txBody>
+                    <a:bodyPr/>
+                    <a:lstStyle/>
+                    <a:p>
+                      <a:pPr>
+                        <a:defRPr sz="720" b="1">
+                          <a:solidFill>
+                            <a:srgbClr val="0D1117"/>
+                          </a:solidFill>
+                          <a:latin typeface="Inter"/>
+                        </a:defRPr>
+                      </a:pPr>
+                      <a:r>
+                        <a:rPr>
+                          <a:latin typeface="Inter"/>
+                        </a:rPr>
+                        <a:t>S3</a:t>
+                      </a:r>
+                    </a:p>
+                  </a:txBody>
+                  <a:tcPr marL="54864" marR="54864" marT="27432" marB="27432" anchor="ctr">
+                    <a:solidFill>
+                      <a:srgbClr val="FFFFFF"/>
+                    </a:solidFill>
+                  </a:tcPr>
+                </a:tc>
+                <a:tc>
+                  <a:txBody>
+                    <a:bodyPr/>
+                    <a:lstStyle/>
+                    <a:p>
+                      <a:pPr>
+                        <a:defRPr sz="720" b="0">
+                          <a:solidFill>
+                            <a:srgbClr val="0D1117"/>
+                          </a:solidFill>
+                          <a:latin typeface="Inter"/>
+                        </a:defRPr>
+                      </a:pPr>
+                      <a:r>
+                        <a:rPr>
+                          <a:latin typeface="Inter"/>
+                        </a:rPr>
+                        <a:t>Monitor alerts and coverage</a:t>
+                      </a:r>
+                    </a:p>
+                  </a:txBody>
+                  <a:tcPr marL="54864" marR="54864" marT="27432" marB="27432" anchor="ctr">
+                    <a:solidFill>
+                      <a:srgbClr val="FFFFFF"/>
+                    </a:solidFill>
+                  </a:tcPr>
+                </a:tc>
+                <a:tc>
+                  <a:txBody>
+                    <a:bodyPr/>
+                    <a:lstStyle/>
+                    <a:p>
+                      <a:pPr>
+                        <a:defRPr sz="720" b="0">
+                          <a:solidFill>
+                            <a:srgbClr val="0D1117"/>
+                          </a:solidFill>
+                          <a:latin typeface="Inter"/>
+                        </a:defRPr>
+                      </a:pPr>
+                      <a:r>
+                        <a:rPr>
+                          <a:latin typeface="Inter"/>
+                        </a:rPr>
+                        <a:t>get_manager_monitor_evidence</a:t>
+                      </a:r>
+                    </a:p>
+                  </a:txBody>
+                  <a:tcPr marL="54864" marR="54864" marT="27432" marB="27432" anchor="ctr">
+                    <a:solidFill>
+                      <a:srgbClr val="FFFFFF"/>
+                    </a:solidFill>
+                  </a:tcPr>
+                </a:tc>
+                <a:tc>
+                  <a:txBody>
+                    <a:bodyPr/>
+                    <a:lstStyle/>
+                    <a:p>
+                      <a:pPr>
+                        <a:defRPr sz="720" b="0">
+                          <a:solidFill>
+                            <a:srgbClr val="0D1117"/>
+                          </a:solidFill>
+                          <a:latin typeface="Inter"/>
+                        </a:defRPr>
+                      </a:pPr>
+                      <a:r>
+                        <a:rPr>
+                          <a:latin typeface="Inter"/>
+                        </a:rPr>
+                        <a:t>2026-10-01</a:t>
+                      </a:r>
+                    </a:p>
+                  </a:txBody>
+                  <a:tcPr marL="54864" marR="54864" marT="27432" marB="27432" anchor="ctr">
+                    <a:solidFill>
+                      <a:srgbClr val="FFFFFF"/>
+                    </a:solidFill>
+                  </a:tcPr>
+                </a:tc>
+                <a:tc>
+                  <a:txBody>
+                    <a:bodyPr/>
+                    <a:lstStyle/>
+                    <a:p>
+                      <a:pPr>
+                        <a:defRPr sz="720" b="1">
+                          <a:solidFill>
+                            <a:srgbClr val="C6F432"/>
+                          </a:solidFill>
+                          <a:latin typeface="Inter"/>
+                        </a:defRPr>
+                      </a:pPr>
+                      <a:r>
+                        <a:rPr>
+                          <a:latin typeface="Inter"/>
+                        </a:rPr>
+                        <a:t>● Passed</a:t>
+                      </a:r>
+                    </a:p>
+                  </a:txBody>
+                  <a:tcPr marL="54864" marR="54864" marT="27432" marB="27432" anchor="ctr">
+                    <a:solidFill>
+                      <a:srgbClr val="F5F7F9"/>
+                    </a:solidFill>
+                  </a:tcPr>
+                </a:tc>
+              </a:tr>
+              <a:tr h="502142">
+                <a:tc>
+                  <a:txBody>
+                    <a:bodyPr/>
+                    <a:lstStyle/>
+                    <a:p>
+                      <a:pPr>
+                        <a:defRPr sz="720" b="1">
+                          <a:solidFill>
+                            <a:srgbClr val="0D1117"/>
+                          </a:solidFill>
+                          <a:latin typeface="Inter"/>
+                        </a:defRPr>
+                      </a:pPr>
+                      <a:r>
+                        <a:rPr>
+                          <a:latin typeface="Inter"/>
+                        </a:rPr>
+                        <a:t>S4</a:t>
+                      </a:r>
+                    </a:p>
+                  </a:txBody>
+                  <a:tcPr marL="54864" marR="54864" marT="27432" marB="27432" anchor="ctr">
+                    <a:solidFill>
+                      <a:srgbClr val="F5F7F9"/>
+                    </a:solidFill>
+                  </a:tcPr>
+                </a:tc>
+                <a:tc>
+                  <a:txBody>
+                    <a:bodyPr/>
+                    <a:lstStyle/>
+                    <a:p>
+                      <a:pPr>
+                        <a:defRPr sz="720" b="0">
+                          <a:solidFill>
+                            <a:srgbClr val="0D1117"/>
+                          </a:solidFill>
+                          <a:latin typeface="Inter"/>
+                        </a:defRPr>
+                      </a:pPr>
+                      <a:r>
+                        <a:rPr>
+                          <a:latin typeface="Inter"/>
+                        </a:rPr>
+                        <a:t>Open findings — Ridgeview Advisors</a:t>
+                      </a:r>
+                    </a:p>
+                  </a:txBody>
+                  <a:tcPr marL="54864" marR="54864" marT="27432" marB="27432" anchor="ctr">
+                    <a:solidFill>
+                      <a:srgbClr val="F5F7F9"/>
+                    </a:solidFill>
+                  </a:tcPr>
+                </a:tc>
+                <a:tc>
+                  <a:txBody>
+                    <a:bodyPr/>
+                    <a:lstStyle/>
+                    <a:p>
+                      <a:pPr>
+                        <a:defRPr sz="720" b="0">
+                          <a:solidFill>
+                            <a:srgbClr val="0D1117"/>
+                          </a:solidFill>
+                          <a:latin typeface="Inter"/>
+                        </a:defRPr>
+                      </a:pPr>
+                      <a:r>
+                        <a:rPr>
+                          <a:latin typeface="Inter"/>
+                        </a:rPr>
+                        <a:t>get_manager_diligence_findings</a:t>
+                      </a:r>
+                    </a:p>
+                  </a:txBody>
+                  <a:tcPr marL="54864" marR="54864" marT="27432" marB="27432" anchor="ctr">
+                    <a:solidFill>
+                      <a:srgbClr val="F5F7F9"/>
+                    </a:solidFill>
+                  </a:tcPr>
+                </a:tc>
+                <a:tc>
+                  <a:txBody>
+                    <a:bodyPr/>
+                    <a:lstStyle/>
+                    <a:p>
+                      <a:pPr>
+                        <a:defRPr sz="720" b="0">
+                          <a:solidFill>
+                            <a:srgbClr val="0D1117"/>
+                          </a:solidFill>
+                          <a:latin typeface="Inter"/>
+                        </a:defRPr>
+                      </a:pPr>
+                      <a:r>
+                        <a:rPr>
+                          <a:latin typeface="Inter"/>
+                        </a:rPr>
+                        <a:t>2026-10-04</a:t>
+                      </a:r>
+                    </a:p>
+                  </a:txBody>
+                  <a:tcPr marL="54864" marR="54864" marT="27432" marB="27432" anchor="ctr">
+                    <a:solidFill>
+                      <a:srgbClr val="F5F7F9"/>
+                    </a:solidFill>
+                  </a:tcPr>
+                </a:tc>
+                <a:tc>
+                  <a:txBody>
+                    <a:bodyPr/>
+                    <a:lstStyle/>
+                    <a:p>
+                      <a:pPr>
+                        <a:defRPr sz="720" b="1">
+                          <a:solidFill>
+                            <a:srgbClr val="F2A93B"/>
+                          </a:solidFill>
+                          <a:latin typeface="Inter"/>
+                        </a:defRPr>
+                      </a:pPr>
+                      <a:r>
+                        <a:rPr>
+                          <a:latin typeface="Inter"/>
+                        </a:rPr>
+                        <a:t>● Advisory</a:t>
+                      </a:r>
+                    </a:p>
+                  </a:txBody>
+                  <a:tcPr marL="54864" marR="54864" marT="27432" marB="27432" anchor="ctr">
+                    <a:solidFill>
+                      <a:srgbClr val="F5F7F9"/>
+                    </a:solidFill>
+                  </a:tcPr>
+                </a:tc>
+              </a:tr>
+              <a:tr h="502142">
+                <a:tc>
+                  <a:txBody>
+                    <a:bodyPr/>
+                    <a:lstStyle/>
+                    <a:p>
+                      <a:pPr>
+                        <a:defRPr sz="720" b="1">
+                          <a:solidFill>
+                            <a:srgbClr val="0D1117"/>
+                          </a:solidFill>
+                          <a:latin typeface="Inter"/>
+                        </a:defRPr>
+                      </a:pPr>
+                      <a:r>
+                        <a:rPr>
+                          <a:latin typeface="Inter"/>
+                        </a:rPr>
+                        <a:t>S5</a:t>
+                      </a:r>
+                    </a:p>
+                  </a:txBody>
+                  <a:tcPr marL="54864" marR="54864" marT="27432" marB="27432" anchor="ctr">
+                    <a:solidFill>
+                      <a:srgbClr val="FFFFFF"/>
+                    </a:solidFill>
+                  </a:tcPr>
+                </a:tc>
+                <a:tc>
+                  <a:txBody>
+                    <a:bodyPr/>
+                    <a:lstStyle/>
+                    <a:p>
+                      <a:pPr>
+                        <a:defRPr sz="720" b="0">
+                          <a:solidFill>
+                            <a:srgbClr val="0D1117"/>
+                          </a:solidFill>
+                          <a:latin typeface="Inter"/>
+                        </a:defRPr>
+                      </a:pPr>
+                      <a:r>
+                        <a:rPr>
+                          <a:latin typeface="Inter"/>
+                        </a:rPr>
+                        <a:t>Firm and fund events — Ridgeview Advisors</a:t>
+                      </a:r>
+                    </a:p>
+                  </a:txBody>
+                  <a:tcPr marL="54864" marR="54864" marT="27432" marB="27432" anchor="ctr">
+                    <a:solidFill>
+                      <a:srgbClr val="FFFFFF"/>
+                    </a:solidFill>
+                  </a:tcPr>
+                </a:tc>
+                <a:tc>
+                  <a:txBody>
+                    <a:bodyPr/>
+                    <a:lstStyle/>
+                    <a:p>
+                      <a:pPr>
+                        <a:defRPr sz="720" b="0">
+                          <a:solidFill>
+                            <a:srgbClr val="0D1117"/>
+                          </a:solidFill>
+                          <a:latin typeface="Inter"/>
+                        </a:defRPr>
+                      </a:pPr>
+                      <a:r>
+                        <a:rPr>
+                          <a:latin typeface="Inter"/>
+                        </a:rPr>
+                        <a:t>get_firm_fund_events</a:t>
+                      </a:r>
+                    </a:p>
+                  </a:txBody>
+                  <a:tcPr marL="54864" marR="54864" marT="27432" marB="27432" anchor="ctr">
+                    <a:solidFill>
+                      <a:srgbClr val="FFFFFF"/>
+                    </a:solidFill>
+                  </a:tcPr>
+                </a:tc>
+                <a:tc>
+                  <a:txBody>
+                    <a:bodyPr/>
+                    <a:lstStyle/>
+                    <a:p>
+                      <a:pPr>
+                        <a:defRPr sz="720" b="0">
+                          <a:solidFill>
+                            <a:srgbClr val="0D1117"/>
+                          </a:solidFill>
+                          <a:latin typeface="Inter"/>
+                        </a:defRPr>
+                      </a:pPr>
+                      <a:r>
+                        <a:rPr>
+                          <a:latin typeface="Inter"/>
+                        </a:rPr>
+                        <a:t>2026-10-04</a:t>
+                      </a:r>
+                    </a:p>
+                  </a:txBody>
+                  <a:tcPr marL="54864" marR="54864" marT="27432" marB="27432" anchor="ctr">
+                    <a:solidFill>
+                      <a:srgbClr val="FFFFFF"/>
+                    </a:solidFill>
+                  </a:tcPr>
+                </a:tc>
+                <a:tc>
+                  <a:txBody>
+                    <a:bodyPr/>
+                    <a:lstStyle/>
+                    <a:p>
+                      <a:pPr>
+                        <a:defRPr sz="720" b="1">
+                          <a:solidFill>
+                            <a:srgbClr val="C6F432"/>
+                          </a:solidFill>
+                          <a:latin typeface="Inter"/>
+                        </a:defRPr>
+                      </a:pPr>
+                      <a:r>
+                        <a:rPr>
+                          <a:latin typeface="Inter"/>
+                        </a:rPr>
+                        <a:t>● Passed</a:t>
+                      </a:r>
+                    </a:p>
+                  </a:txBody>
+                  <a:tcPr marL="54864" marR="54864" marT="27432" marB="27432" anchor="ctr">
+                    <a:solidFill>
+                      <a:srgbClr val="F5F7F9"/>
+                    </a:solidFill>
+                  </a:tcPr>
+                </a:tc>
+              </a:tr>
+              <a:tr h="502146">
+                <a:tc>
+                  <a:txBody>
+                    <a:bodyPr/>
+                    <a:lstStyle/>
+                    <a:p>
+                      <a:pPr>
+                        <a:defRPr sz="720" b="1">
+                          <a:solidFill>
+                            <a:srgbClr val="0D1117"/>
+                          </a:solidFill>
+                          <a:latin typeface="Inter"/>
+                        </a:defRPr>
+                      </a:pPr>
+                      <a:r>
+                        <a:rPr>
+                          <a:latin typeface="Inter"/>
+                        </a:rPr>
+                        <a:t>S6</a:t>
+                      </a:r>
+                    </a:p>
+                  </a:txBody>
+                  <a:tcPr marL="54864" marR="54864" marT="27432" marB="27432" anchor="ctr">
+                    <a:solidFill>
+                      <a:srgbClr val="F5F7F9"/>
+                    </a:solidFill>
+                  </a:tcPr>
+                </a:tc>
+                <a:tc>
+                  <a:txBody>
+                    <a:bodyPr/>
+                    <a:lstStyle/>
+                    <a:p>
+                      <a:pPr>
+                        <a:defRPr sz="720" b="0">
+                          <a:solidFill>
+                            <a:srgbClr val="0D1117"/>
+                          </a:solidFill>
+                          <a:latin typeface="Inter"/>
+                        </a:defRPr>
+                      </a:pPr>
+                      <a:r>
+                        <a:rPr>
+                          <a:latin typeface="Inter"/>
+                        </a:rPr>
+                        <a:t>Research watchlist changes</a:t>
+                      </a:r>
+                    </a:p>
+                  </a:txBody>
+                  <a:tcPr marL="54864" marR="54864" marT="27432" marB="27432" anchor="ctr">
+                    <a:solidFill>
+                      <a:srgbClr val="F5F7F9"/>
+                    </a:solidFill>
+                  </a:tcPr>
+                </a:tc>
+                <a:tc>
+                  <a:txBody>
+                    <a:bodyPr/>
+                    <a:lstStyle/>
+                    <a:p>
+                      <a:pPr>
+                        <a:defRPr sz="720" b="0">
+                          <a:solidFill>
+                            <a:srgbClr val="0D1117"/>
+                          </a:solidFill>
+                          <a:latin typeface="Inter"/>
+                        </a:defRPr>
+                      </a:pPr>
+                      <a:r>
+                        <a:rPr>
+                          <a:latin typeface="Inter"/>
+                        </a:rPr>
+                        <a:t>get_research_watchlist_changes</a:t>
+                      </a:r>
+                    </a:p>
+                  </a:txBody>
+                  <a:tcPr marL="54864" marR="54864" marT="27432" marB="27432" anchor="ctr">
+                    <a:solidFill>
+                      <a:srgbClr val="F5F7F9"/>
+                    </a:solidFill>
+                  </a:tcPr>
+                </a:tc>
+                <a:tc>
+                  <a:txBody>
+                    <a:bodyPr/>
+                    <a:lstStyle/>
+                    <a:p>
+                      <a:pPr>
+                        <a:defRPr sz="720" b="0">
+                          <a:solidFill>
+                            <a:srgbClr val="0D1117"/>
+                          </a:solidFill>
+                          <a:latin typeface="Inter"/>
+                        </a:defRPr>
+                      </a:pPr>
+                      <a:r>
+                        <a:rPr>
+                          <a:latin typeface="Inter"/>
+                        </a:rPr>
+                        <a:t>2026-10-04</a:t>
+                      </a:r>
+                    </a:p>
+                  </a:txBody>
+                  <a:tcPr marL="54864" marR="54864" marT="27432" marB="27432" anchor="ctr">
+                    <a:solidFill>
+                      <a:srgbClr val="F5F7F9"/>
+                    </a:solidFill>
+                  </a:tcPr>
+                </a:tc>
+                <a:tc>
+                  <a:txBody>
+                    <a:bodyPr/>
+                    <a:lstStyle/>
+                    <a:p>
+                      <a:pPr>
+                        <a:defRPr sz="720" b="1">
+                          <a:solidFill>
+                            <a:srgbClr val="C6F432"/>
+                          </a:solidFill>
+                          <a:latin typeface="Inter"/>
+                        </a:defRPr>
+                      </a:pPr>
+                      <a:r>
+                        <a:rPr>
+                          <a:latin typeface="Inter"/>
+                        </a:rPr>
+                        <a:t>● Passed</a:t>
+                      </a:r>
+                    </a:p>
+                  </a:txBody>
+                  <a:tcPr marL="54864" marR="54864" marT="27432" marB="27432" anchor="ctr">
+                    <a:solidFill>
+                      <a:srgbClr val="F5F7F9"/>
+                    </a:solidFill>
+                  </a:tcPr>
+                </a:tc>
+              </a:tr>
+            </a:tbl>
+          </a:graphicData>
+        </a:graphic>
+      </p:graphicFrame>
+      <p:sp>
+        <p:nvSpPr>
+          <p:cNvPr id="9" name="TextBox 8"/>
+          <p:cNvSpPr txBox="1"/>
+          <p:nvPr/>
+        </p:nvSpPr>
+        <p:spPr>
+          <a:xfrm>
+            <a:off x="640080" y="6035040"/>
+            <a:ext cx="10908792" cy="164592"/>
+          </a:xfrm>
+          <a:prstGeom prst="rect">
+            <a:avLst/>
+          </a:prstGeom>
+          <a:noFill/>
+        </p:spPr>
+        <p:txBody>
+          <a:bodyPr wrap="none" lIns="9144" rIns="9144" tIns="9144" bIns="9144" anchor="t">
+            <a:spAutoFit/>
+          </a:bodyPr>
+          <a:lstStyle/>
+          <a:p>
+            <a:pPr algn="l">
+              <a:spcAft>
+                <a:spcPts val="0"/>
+              </a:spcAft>
+              <a:defRPr sz="680" b="0">
+                <a:solidFill>
+                  <a:srgbClr val="8A94A1"/>
+                </a:solidFill>
+                <a:latin typeface="Inter"/>
+              </a:defRPr>
+            </a:pPr>
+            <a:r>
+              <a:rPr>
+                <a:latin typeface="Inter"/>
+              </a:rPr>
+              <a:t>S4 check: the findings list came back empty without a stated reason, although the response reports no open findings. Illustrative, Gradient Maintained — demo data, not the client's holdings or managers. All organizations, portfolios, managers and results in this public example are illustrative.</a:t>
+            </a:r>
+          </a:p>
+        </p:txBody>
+      </p:sp>
+      <p:sp>
+        <p:nvSpPr>
+          <p:cNvPr id="10" name="Rectangle 9"/>
+          <p:cNvSpPr/>
+          <p:nvPr/>
+        </p:nvSpPr>
+        <p:spPr>
+          <a:xfrm>
+            <a:off x="640080" y="6446520"/>
+            <a:ext cx="10908792" cy="9144"/>
+          </a:xfrm>
+          <a:prstGeom prst="rect">
+            <a:avLst/>
+          </a:prstGeom>
+          <a:solidFill>
+            <a:srgbClr val="E3E7EC"/>
+          </a:solidFill>
+          <a:ln>
+            <a:solidFill>
+              <a:srgbClr val="E3E7EC"/>
+            </a:solidFill>
+          </a:ln>
+        </p:spPr>
+        <p:style>
+          <a:lnRef idx="1">
+            <a:schemeClr val="accent1"/>
+          </a:lnRef>
+          <a:fillRef idx="3">
+            <a:schemeClr val="accent1"/>
+          </a:fillRef>
+          <a:effectRef idx="2">
+            <a:schemeClr val="accent1"/>
+          </a:effectRef>
+          <a:fontRef idx="minor">
+            <a:schemeClr val="lt1"/>
+          </a:fontRef>
+        </p:style>
+        <p:txBody>
+          <a:bodyPr rtlCol="0" anchor="ctr"/>
+          <a:lstStyle/>
+          <a:p>
+            <a:pPr algn="ctr">
+              <a:defRPr>
+                <a:latin typeface="Inter"/>
+              </a:defRPr>
+            </a:pPr>
+          </a:p>
+        </p:txBody>
+      </p:sp>
+      <p:sp>
+        <p:nvSpPr>
+          <p:cNvPr id="11" name="TextBox 10"/>
+          <p:cNvSpPr txBox="1"/>
+          <p:nvPr/>
+        </p:nvSpPr>
+        <p:spPr>
+          <a:xfrm>
+            <a:off x="640080" y="6501384"/>
+            <a:ext cx="4297680" cy="146304"/>
+          </a:xfrm>
+          <a:prstGeom prst="rect">
+            <a:avLst/>
+          </a:prstGeom>
+          <a:noFill/>
+        </p:spPr>
+        <p:txBody>
+          <a:bodyPr wrap="none" lIns="9144" rIns="9144" tIns="9144" bIns="9144" anchor="t">
+            <a:spAutoFit/>
+          </a:bodyPr>
+          <a:lstStyle/>
+          <a:p>
+            <a:pPr algn="l">
+              <a:spcAft>
+                <a:spcPts val="0"/>
+              </a:spcAft>
+              <a:defRPr sz="650" b="0">
+                <a:solidFill>
+                  <a:srgbClr val="8A94A1"/>
+                </a:solidFill>
+                <a:latin typeface="Inter"/>
+              </a:defRPr>
+            </a:pPr>
+            <a:r>
+              <a:rPr>
+                <a:latin typeface="Inter"/>
+              </a:rPr>
+              <a:t>Sources: S1 · S2 · S3 · S4 · S5 · S6</a:t>
+            </a:r>
+          </a:p>
+        </p:txBody>
+      </p:sp>
+      <p:sp>
+        <p:nvSpPr>
+          <p:cNvPr id="12" name="TextBox 11"/>
+          <p:cNvSpPr txBox="1"/>
+          <p:nvPr/>
+        </p:nvSpPr>
+        <p:spPr>
+          <a:xfrm>
+            <a:off x="4480560" y="6501384"/>
+            <a:ext cx="5303520" cy="146304"/>
+          </a:xfrm>
+          <a:prstGeom prst="rect">
+            <a:avLst/>
+          </a:prstGeom>
+          <a:noFill/>
+        </p:spPr>
+        <p:txBody>
+          <a:bodyPr wrap="none" lIns="9144" rIns="9144" tIns="9144" bIns="9144" anchor="t">
+            <a:spAutoFit/>
+          </a:bodyPr>
+          <a:lstStyle/>
+          <a:p>
+            <a:pPr algn="ctr">
+              <a:spcAft>
+                <a:spcPts val="0"/>
+              </a:spcAft>
+              <a:defRPr sz="650" b="0">
+                <a:solidFill>
+                  <a:srgbClr val="8A94A1"/>
+                </a:solidFill>
+                <a:latin typeface="Inter"/>
+              </a:defRPr>
+            </a:pPr>
+            <a:r>
+              <a:rPr>
+                <a:latin typeface="Inter"/>
+              </a:rPr>
+              <a:t>Confidential — Investment Committee · Data as of 2026-10-01 (Form ADV); queue 2026-10-04</a:t>
+            </a:r>
+          </a:p>
+        </p:txBody>
+      </p:sp>
+      <p:sp>
+        <p:nvSpPr>
+          <p:cNvPr id="13" name="TextBox 12"/>
+          <p:cNvSpPr txBox="1"/>
+          <p:nvPr/>
+        </p:nvSpPr>
+        <p:spPr>
+          <a:xfrm>
+            <a:off x="10287000" y="6501384"/>
+            <a:ext cx="1261872" cy="146304"/>
+          </a:xfrm>
+          <a:prstGeom prst="rect">
+            <a:avLst/>
+          </a:prstGeom>
+          <a:noFill/>
+        </p:spPr>
+        <p:txBody>
+          <a:bodyPr wrap="none" lIns="9144" rIns="9144" tIns="9144" bIns="9144" anchor="t">
+            <a:spAutoFit/>
+          </a:bodyPr>
+          <a:lstStyle/>
+          <a:p>
+            <a:pPr algn="r">
+              <a:spcAft>
+                <a:spcPts val="0"/>
+              </a:spcAft>
+              <a:defRPr sz="650" b="0">
+                <a:solidFill>
+                  <a:srgbClr val="8A94A1"/>
+                </a:solidFill>
+                <a:latin typeface="Inter"/>
+              </a:defRPr>
+            </a:pPr>
+            <a:r>
+              <a:rPr>
+                <a:latin typeface="Inter"/>
+              </a:rPr>
+              <a:t>10</a:t>
+            </a:r>
+          </a:p>
+        </p:txBody>
+      </p:sp>
+    </p:spTree>
+  </p:cSld>
+  <p:clrMapOvr>
+    <a:masterClrMapping/>
+  </p:clrMapOvr>
+</p:sld>
+</file>
+
+<file path=ppt/slides/slide11.xml><?xml version="1.0" encoding="utf-8"?>
+<p:sld xmlns:a="http://schemas.openxmlformats.org/drawingml/2006/main" xmlns:p="http://schemas.openxmlformats.org/presentationml/2006/main" xmlns:r="http://schemas.openxmlformats.org/officeDocument/2006/relationships">
+  <p:cSld>
+    <p:spTree>
+      <p:nvGrpSpPr>
+        <p:cNvPr id="1" name=""/>
+        <p:cNvGrpSpPr/>
+        <p:nvPr/>
+      </p:nvGrpSpPr>
+      <p:grpSpPr/>
+      <p:sp>
+        <p:nvSpPr>
+          <p:cNvPr id="2" name="Rectangle 1"/>
+          <p:cNvSpPr/>
+          <p:nvPr/>
+        </p:nvSpPr>
+        <p:spPr>
+          <a:xfrm>
+            <a:off x="0" y="0"/>
+            <a:ext cx="12191695" cy="6858000"/>
+          </a:xfrm>
+          <a:prstGeom prst="rect">
+            <a:avLst/>
+          </a:prstGeom>
+          <a:solidFill>
+            <a:srgbClr val="FFFFFF"/>
+          </a:solidFill>
+          <a:ln>
+            <a:solidFill>
+              <a:srgbClr val="FFFFFF"/>
+            </a:solidFill>
+          </a:ln>
+        </p:spPr>
+        <p:style>
+          <a:lnRef idx="1">
+            <a:schemeClr val="accent1"/>
+          </a:lnRef>
+          <a:fillRef idx="3">
+            <a:schemeClr val="accent1"/>
+          </a:fillRef>
+          <a:effectRef idx="2">
+            <a:schemeClr val="accent1"/>
+          </a:effectRef>
+          <a:fontRef idx="minor">
+            <a:schemeClr val="lt1"/>
+          </a:fontRef>
+        </p:style>
+        <p:txBody>
+          <a:bodyPr rtlCol="0" anchor="ctr"/>
+          <a:lstStyle/>
+          <a:p>
+            <a:pPr algn="ctr">
+              <a:defRPr>
+                <a:latin typeface="Inter"/>
+              </a:defRPr>
+            </a:pPr>
+          </a:p>
+        </p:txBody>
+      </p:sp>
+      <p:sp>
+        <p:nvSpPr>
+          <p:cNvPr id="3" name="TextBox 2"/>
+          <p:cNvSpPr txBox="1"/>
+          <p:nvPr/>
+        </p:nvSpPr>
+        <p:spPr>
+          <a:xfrm>
+            <a:off x="640080" y="566928"/>
+            <a:ext cx="10058400" cy="530352"/>
+          </a:xfrm>
+          <a:prstGeom prst="rect">
+            <a:avLst/>
+          </a:prstGeom>
+          <a:noFill/>
+        </p:spPr>
+        <p:txBody>
+          <a:bodyPr wrap="none" lIns="9144" rIns="9144" tIns="9144" bIns="9144" anchor="t">
+            <a:spAutoFit/>
+          </a:bodyPr>
+          <a:lstStyle/>
+          <a:p>
+            <a:pPr algn="l">
+              <a:spcAft>
+                <a:spcPts val="0"/>
+              </a:spcAft>
+              <a:defRPr sz="2300" b="1">
+                <a:solidFill>
+                  <a:srgbClr val="0D1117"/>
+                </a:solidFill>
+                <a:latin typeface="Inter"/>
+              </a:defRPr>
+            </a:pPr>
+            <a:r>
+              <a:rPr>
+                <a:latin typeface="Inter"/>
+              </a:rPr>
+              <a:t>Appendix — Sources and methods — continued</a:t>
+            </a:r>
+          </a:p>
+        </p:txBody>
+      </p:sp>
+      <p:sp>
+        <p:nvSpPr>
+          <p:cNvPr id="4" name="Rectangle 3"/>
+          <p:cNvSpPr/>
+          <p:nvPr/>
+        </p:nvSpPr>
+        <p:spPr>
+          <a:xfrm>
+            <a:off x="640080" y="1115568"/>
+            <a:ext cx="10908792" cy="18288"/>
+          </a:xfrm>
+          <a:prstGeom prst="rect">
+            <a:avLst/>
+          </a:prstGeom>
+          <a:solidFill>
+            <a:srgbClr val="0D1117"/>
+          </a:solidFill>
+          <a:ln>
+            <a:solidFill>
+              <a:srgbClr val="0D1117"/>
+            </a:solidFill>
+          </a:ln>
+        </p:spPr>
+        <p:style>
+          <a:lnRef idx="1">
+            <a:schemeClr val="accent1"/>
+          </a:lnRef>
+          <a:fillRef idx="3">
+            <a:schemeClr val="accent1"/>
+          </a:fillRef>
+          <a:effectRef idx="2">
+            <a:schemeClr val="accent1"/>
+          </a:effectRef>
+          <a:fontRef idx="minor">
+            <a:schemeClr val="lt1"/>
+          </a:fontRef>
+        </p:style>
+        <p:txBody>
+          <a:bodyPr rtlCol="0" anchor="ctr"/>
+          <a:lstStyle/>
+          <a:p>
+            <a:pPr algn="ctr">
+              <a:defRPr>
+                <a:latin typeface="Inter"/>
+              </a:defRPr>
+            </a:pPr>
+          </a:p>
+        </p:txBody>
+      </p:sp>
+      <p:sp>
+        <p:nvSpPr>
+          <p:cNvPr id="5" name="Rectangle 4"/>
+          <p:cNvSpPr/>
+          <p:nvPr/>
+        </p:nvSpPr>
+        <p:spPr>
+          <a:xfrm>
+            <a:off x="11018520" y="502920"/>
+            <a:ext cx="530352" cy="393192"/>
+          </a:xfrm>
+          <a:prstGeom prst="rect">
+            <a:avLst/>
+          </a:prstGeom>
+          <a:solidFill>
+            <a:srgbClr val="9AA5B1"/>
+          </a:solidFill>
+          <a:ln>
+            <a:solidFill>
+              <a:srgbClr val="9AA5B1"/>
+            </a:solidFill>
+          </a:ln>
+        </p:spPr>
+        <p:style>
+          <a:lnRef idx="1">
+            <a:schemeClr val="accent1"/>
+          </a:lnRef>
+          <a:fillRef idx="3">
+            <a:schemeClr val="accent1"/>
+          </a:fillRef>
+          <a:effectRef idx="2">
+            <a:schemeClr val="accent1"/>
+          </a:effectRef>
+          <a:fontRef idx="minor">
+            <a:schemeClr val="lt1"/>
+          </a:fontRef>
+        </p:style>
+        <p:txBody>
+          <a:bodyPr rtlCol="0" anchor="ctr"/>
+          <a:lstStyle/>
+          <a:p>
+            <a:pPr algn="ctr">
+              <a:defRPr>
+                <a:latin typeface="Inter"/>
+              </a:defRPr>
+            </a:pPr>
+          </a:p>
+        </p:txBody>
+      </p:sp>
+      <p:sp>
+        <p:nvSpPr>
+          <p:cNvPr id="6" name="TextBox 5"/>
+          <p:cNvSpPr txBox="1"/>
+          <p:nvPr/>
+        </p:nvSpPr>
+        <p:spPr>
+          <a:xfrm>
+            <a:off x="11045952" y="557784"/>
+            <a:ext cx="475488" cy="182880"/>
+          </a:xfrm>
+          <a:prstGeom prst="rect">
+            <a:avLst/>
+          </a:prstGeom>
+          <a:noFill/>
+        </p:spPr>
+        <p:txBody>
+          <a:bodyPr wrap="none" lIns="9144" rIns="9144" tIns="9144" bIns="9144" anchor="t">
+            <a:spAutoFit/>
+          </a:bodyPr>
+          <a:lstStyle/>
+          <a:p>
+            <a:pPr algn="ctr">
+              <a:spcAft>
+                <a:spcPts val="0"/>
+              </a:spcAft>
+              <a:defRPr sz="1000" b="1">
+                <a:solidFill>
+                  <a:srgbClr val="0D1117"/>
+                </a:solidFill>
+                <a:latin typeface="Inter"/>
+              </a:defRPr>
+            </a:pPr>
+            <a:r>
+              <a:rPr>
+                <a:latin typeface="Inter"/>
+              </a:rPr>
+              <a:t>A</a:t>
+            </a:r>
+          </a:p>
+        </p:txBody>
+      </p:sp>
+      <p:sp>
+        <p:nvSpPr>
+          <p:cNvPr id="7" name="TextBox 6"/>
+          <p:cNvSpPr txBox="1"/>
+          <p:nvPr/>
+        </p:nvSpPr>
+        <p:spPr>
+          <a:xfrm>
+            <a:off x="640080" y="1325880"/>
+            <a:ext cx="10908792" cy="201168"/>
+          </a:xfrm>
+          <a:prstGeom prst="rect">
+            <a:avLst/>
+          </a:prstGeom>
+          <a:noFill/>
+        </p:spPr>
+        <p:txBody>
+          <a:bodyPr wrap="none" lIns="9144" rIns="9144" tIns="9144" bIns="9144" anchor="t">
+            <a:spAutoFit/>
+          </a:bodyPr>
+          <a:lstStyle/>
+          <a:p>
+            <a:pPr algn="l">
+              <a:spcAft>
+                <a:spcPts val="0"/>
+              </a:spcAft>
+              <a:defRPr sz="720" b="1">
+                <a:solidFill>
+                  <a:srgbClr val="4A5563"/>
+                </a:solidFill>
+                <a:latin typeface="Inter"/>
+              </a:defRPr>
+            </a:pPr>
+            <a:r>
+              <a:rPr>
+                <a:latin typeface="Inter"/>
+              </a:rPr>
+              <a:t>SOURCE AUDIT TRAIL</a:t>
+            </a:r>
+          </a:p>
+        </p:txBody>
+      </p:sp>
+      <p:graphicFrame>
+        <p:nvGraphicFramePr>
+          <p:cNvPr id="8" name="Table 7"/>
+          <p:cNvGraphicFramePr>
+            <a:graphicFrameLocks noGrp="1"/>
+          </p:cNvGraphicFramePr>
+          <p:nvPr/>
+        </p:nvGraphicFramePr>
+        <p:xfrm>
+          <a:off x="640080" y="1600200"/>
+          <a:ext cx="10908792" cy="4416552"/>
+        </p:xfrm>
+        <a:graphic>
+          <a:graphicData uri="http://schemas.openxmlformats.org/drawingml/2006/table">
+            <a:tbl>
+              <a:tblPr firstRow="1" bandRow="1">
+                <a:tableStyleId>{5C22544A-7EE6-4342-B048-85BDC9FD1C3A}</a:tableStyleId>
+              </a:tblPr>
+              <a:tblGrid>
+                <a:gridCol w="2011680"/>
+                <a:gridCol w="4448556"/>
+                <a:gridCol w="4448556"/>
+              </a:tblGrid>
+              <a:tr h="630936">
+                <a:tc>
+                  <a:txBody>
+                    <a:bodyPr/>
+                    <a:lstStyle/>
+                    <a:p>
+                      <a:pPr>
+                        <a:defRPr sz="750" b="1">
+                          <a:solidFill>
+                            <a:srgbClr val="FFFFFF"/>
+                          </a:solidFill>
+                          <a:latin typeface="Inter"/>
+                        </a:defRPr>
+                      </a:pPr>
+                      <a:r>
+                        <a:rPr>
+                          <a:latin typeface="Inter"/>
+                        </a:rPr>
+                        <a:t>Tag</a:t>
                       </a:r>
                     </a:p>
                   </a:txBody>
@@ -4357,87 +5401,6 @@
                         <a:rPr>
                           <a:latin typeface="Inter"/>
                         </a:rPr>
-                        <a:t>As of</a:t>
-                      </a:r>
-                    </a:p>
-                  </a:txBody>
-                  <a:tcPr marL="54864" marR="54864" marT="27432" marB="27432" anchor="ctr">
-                    <a:solidFill>
-                      <a:srgbClr val="0D1117"/>
-                    </a:solidFill>
-                  </a:tcPr>
-                </a:tc>
-                <a:tc>
-                  <a:txBody>
-                    <a:bodyPr/>
-                    <a:lstStyle/>
-                    <a:p>
-                      <a:pPr>
-                        <a:defRPr sz="750" b="1">
-                          <a:solidFill>
-                            <a:srgbClr val="FFFFFF"/>
-                          </a:solidFill>
-                          <a:latin typeface="Inter"/>
-                        </a:defRPr>
-                      </a:pPr>
-                      <a:r>
-                        <a:rPr>
-                          <a:latin typeface="Inter"/>
-                        </a:rPr>
-                        <a:t>Data scope</a:t>
-                      </a:r>
-                    </a:p>
-                  </a:txBody>
-                  <a:tcPr marL="54864" marR="54864" marT="27432" marB="27432" anchor="ctr">
-                    <a:solidFill>
-                      <a:srgbClr val="0D1117"/>
-                    </a:solidFill>
-                  </a:tcPr>
-                </a:tc>
-                <a:tc>
-                  <a:txBody>
-                    <a:bodyPr/>
-                    <a:lstStyle/>
-                    <a:p>
-                      <a:pPr>
-                        <a:defRPr sz="750" b="1">
-                          <a:solidFill>
-                            <a:srgbClr val="FFFFFF"/>
-                          </a:solidFill>
-                          <a:latin typeface="Inter"/>
-                        </a:defRPr>
-                      </a:pPr>
-                      <a:r>
-                        <a:rPr>
-                          <a:latin typeface="Inter"/>
-                        </a:rPr>
-                        <a:t>Validation</a:t>
-                      </a:r>
-                    </a:p>
-                  </a:txBody>
-                  <a:tcPr marL="54864" marR="54864" marT="27432" marB="27432" anchor="ctr">
-                    <a:solidFill>
-                      <a:srgbClr val="0D1117"/>
-                    </a:solidFill>
-                  </a:tcPr>
-                </a:tc>
-                <a:tc>
-                  <a:txBody>
-                    <a:bodyPr/>
-                    <a:lstStyle/>
-                    <a:p>
-                      <a:pPr>
-                        <a:defRPr sz="750" b="1">
-                          <a:solidFill>
-                            <a:srgbClr val="FFFFFF"/>
-                          </a:solidFill>
-                          <a:latin typeface="Inter"/>
-                        </a:defRPr>
-                      </a:pPr>
-                      <a:r>
-                        <a:rPr>
-                          <a:latin typeface="Inter"/>
-                        </a:rPr>
                         <a:t>Digest</a:t>
                       </a:r>
                     </a:p>
@@ -4449,14 +5412,14 @@
                   </a:tcPr>
                 </a:tc>
               </a:tr>
-              <a:tr h="457561">
+              <a:tr h="630936">
                 <a:tc>
                   <a:txBody>
                     <a:bodyPr/>
                     <a:lstStyle/>
                     <a:p>
                       <a:pPr>
-                        <a:defRPr sz="650" b="1">
+                        <a:defRPr sz="800" b="1">
                           <a:solidFill>
                             <a:srgbClr val="0D1117"/>
                           </a:solidFill>
@@ -4483,88 +5446,7 @@
                     <a:lstStyle/>
                     <a:p>
                       <a:pPr>
-                        <a:defRPr sz="650" b="0">
-                          <a:solidFill>
-                            <a:srgbClr val="0D1117"/>
-                          </a:solidFill>
-                          <a:latin typeface="Inter"/>
-                        </a:defRPr>
-                      </a:pPr>
-                      <a:r>
-                        <a:rPr>
-                          <a:latin typeface="Inter"/>
-                        </a:rPr>
-                        <a:t>Diligence Roster and capacity</a:t>
-                      </a:r>
-                    </a:p>
-                  </a:txBody>
-                  <a:tcPr marL="54864" marR="54864" marT="27432" marB="27432" anchor="ctr">
-                    <a:solidFill>
-                      <a:srgbClr val="FFFFFF"/>
-                    </a:solidFill>
-                  </a:tcPr>
-                </a:tc>
-                <a:tc>
-                  <a:txBody>
-                    <a:bodyPr/>
-                    <a:lstStyle/>
-                    <a:p>
-                      <a:pPr>
-                        <a:defRPr sz="650" b="0">
-                          <a:solidFill>
-                            <a:srgbClr val="0D1117"/>
-                          </a:solidFill>
-                          <a:latin typeface="Inter"/>
-                        </a:defRPr>
-                      </a:pPr>
-                      <a:r>
-                        <a:rPr>
-                          <a:latin typeface="Inter"/>
-                        </a:rPr>
-                        <a:t>gradient_tool</a:t>
-                      </a:r>
-                    </a:p>
-                  </a:txBody>
-                  <a:tcPr marL="54864" marR="54864" marT="27432" marB="27432" anchor="ctr">
-                    <a:solidFill>
-                      <a:srgbClr val="FFFFFF"/>
-                    </a:solidFill>
-                  </a:tcPr>
-                </a:tc>
-                <a:tc>
-                  <a:txBody>
-                    <a:bodyPr/>
-                    <a:lstStyle/>
-                    <a:p>
-                      <a:pPr>
-                        <a:defRPr sz="650" b="0">
-                          <a:solidFill>
-                            <a:srgbClr val="0D1117"/>
-                          </a:solidFill>
-                          <a:latin typeface="Inter"/>
-                        </a:defRPr>
-                      </a:pPr>
-                      <a:r>
-                        <a:rPr>
-                          <a:latin typeface="Inter"/>
-                        </a:rPr>
-                        <a:t>get_diligence_roster_funds</a:t>
-                      </a:r>
-                    </a:p>
-                  </a:txBody>
-                  <a:tcPr marL="54864" marR="54864" marT="27432" marB="27432" anchor="ctr">
-                    <a:solidFill>
-                      <a:srgbClr val="FFFFFF"/>
-                    </a:solidFill>
-                  </a:tcPr>
-                </a:tc>
-                <a:tc>
-                  <a:txBody>
-                    <a:bodyPr/>
-                    <a:lstStyle/>
-                    <a:p>
-                      <a:pPr>
-                        <a:defRPr sz="650" b="0">
+                        <a:defRPr sz="800" b="0">
                           <a:solidFill>
                             <a:srgbClr val="0D1117"/>
                           </a:solidFill>
@@ -4591,88 +5473,7 @@
                     <a:lstStyle/>
                     <a:p>
                       <a:pPr>
-                        <a:defRPr sz="650" b="0">
-                          <a:solidFill>
-                            <a:srgbClr val="0D1117"/>
-                          </a:solidFill>
-                          <a:latin typeface="Inter"/>
-                        </a:defRPr>
-                      </a:pPr>
-                      <a:r>
-                        <a:rPr>
-                          <a:latin typeface="Inter"/>
-                        </a:rPr>
-                        <a:t>2026-10-04</a:t>
-                      </a:r>
-                    </a:p>
-                  </a:txBody>
-                  <a:tcPr marL="54864" marR="54864" marT="27432" marB="27432" anchor="ctr">
-                    <a:solidFill>
-                      <a:srgbClr val="FFFFFF"/>
-                    </a:solidFill>
-                  </a:tcPr>
-                </a:tc>
-                <a:tc>
-                  <a:txBody>
-                    <a:bodyPr/>
-                    <a:lstStyle/>
-                    <a:p>
-                      <a:pPr>
-                        <a:defRPr sz="650" b="0">
-                          <a:solidFill>
-                            <a:srgbClr val="0D1117"/>
-                          </a:solidFill>
-                          <a:latin typeface="Inter"/>
-                        </a:defRPr>
-                      </a:pPr>
-                      <a:r>
-                        <a:rPr>
-                          <a:latin typeface="Inter"/>
-                        </a:rPr>
-                        <a:t>Gradient-governed review evidence</a:t>
-                      </a:r>
-                    </a:p>
-                  </a:txBody>
-                  <a:tcPr marL="54864" marR="54864" marT="27432" marB="27432" anchor="ctr">
-                    <a:solidFill>
-                      <a:srgbClr val="FFFFFF"/>
-                    </a:solidFill>
-                  </a:tcPr>
-                </a:tc>
-                <a:tc>
-                  <a:txBody>
-                    <a:bodyPr/>
-                    <a:lstStyle/>
-                    <a:p>
-                      <a:pPr>
-                        <a:defRPr sz="650" b="0">
-                          <a:solidFill>
-                            <a:srgbClr val="0D1117"/>
-                          </a:solidFill>
-                          <a:latin typeface="Inter"/>
-                        </a:defRPr>
-                      </a:pPr>
-                      <a:r>
-                        <a:rPr>
-                          <a:latin typeface="Inter"/>
-                        </a:rPr>
-                        <a:t>{'chip': 'passed', 'status': 'passed'}</a:t>
-                      </a:r>
-                    </a:p>
-                  </a:txBody>
-                  <a:tcPr marL="54864" marR="54864" marT="27432" marB="27432" anchor="ctr">
-                    <a:solidFill>
-                      <a:srgbClr val="FFFFFF"/>
-                    </a:solidFill>
-                  </a:tcPr>
-                </a:tc>
-                <a:tc>
-                  <a:txBody>
-                    <a:bodyPr/>
-                    <a:lstStyle/>
-                    <a:p>
-                      <a:pPr>
-                        <a:defRPr sz="650" b="0">
+                        <a:defRPr sz="800" b="0">
                           <a:solidFill>
                             <a:srgbClr val="0D1117"/>
                           </a:solidFill>
@@ -4694,14 +5495,14 @@
                   </a:tcPr>
                 </a:tc>
               </a:tr>
-              <a:tr h="457561">
+              <a:tr h="630936">
                 <a:tc>
                   <a:txBody>
                     <a:bodyPr/>
                     <a:lstStyle/>
                     <a:p>
                       <a:pPr>
-                        <a:defRPr sz="650" b="1">
+                        <a:defRPr sz="800" b="1">
                           <a:solidFill>
                             <a:srgbClr val="0D1117"/>
                           </a:solidFill>
@@ -4728,88 +5529,7 @@
                     <a:lstStyle/>
                     <a:p>
                       <a:pPr>
-                        <a:defRPr sz="650" b="0">
-                          <a:solidFill>
-                            <a:srgbClr val="0D1117"/>
-                          </a:solidFill>
-                          <a:latin typeface="Inter"/>
-                        </a:defRPr>
-                      </a:pPr>
-                      <a:r>
-                        <a:rPr>
-                          <a:latin typeface="Inter"/>
-                        </a:rPr>
-                        <a:t>Attention queue, changes since review, red flags</a:t>
-                      </a:r>
-                    </a:p>
-                  </a:txBody>
-                  <a:tcPr marL="54864" marR="54864" marT="27432" marB="27432" anchor="ctr">
-                    <a:solidFill>
-                      <a:srgbClr val="F5F7F9"/>
-                    </a:solidFill>
-                  </a:tcPr>
-                </a:tc>
-                <a:tc>
-                  <a:txBody>
-                    <a:bodyPr/>
-                    <a:lstStyle/>
-                    <a:p>
-                      <a:pPr>
-                        <a:defRPr sz="650" b="0">
-                          <a:solidFill>
-                            <a:srgbClr val="0D1117"/>
-                          </a:solidFill>
-                          <a:latin typeface="Inter"/>
-                        </a:defRPr>
-                      </a:pPr>
-                      <a:r>
-                        <a:rPr>
-                          <a:latin typeface="Inter"/>
-                        </a:rPr>
-                        <a:t>gradient_tool</a:t>
-                      </a:r>
-                    </a:p>
-                  </a:txBody>
-                  <a:tcPr marL="54864" marR="54864" marT="27432" marB="27432" anchor="ctr">
-                    <a:solidFill>
-                      <a:srgbClr val="F5F7F9"/>
-                    </a:solidFill>
-                  </a:tcPr>
-                </a:tc>
-                <a:tc>
-                  <a:txBody>
-                    <a:bodyPr/>
-                    <a:lstStyle/>
-                    <a:p>
-                      <a:pPr>
-                        <a:defRPr sz="650" b="0">
-                          <a:solidFill>
-                            <a:srgbClr val="0D1117"/>
-                          </a:solidFill>
-                          <a:latin typeface="Inter"/>
-                        </a:defRPr>
-                      </a:pPr>
-                      <a:r>
-                        <a:rPr>
-                          <a:latin typeface="Inter"/>
-                        </a:rPr>
-                        <a:t>get_manager_diligence_attention_queue</a:t>
-                      </a:r>
-                    </a:p>
-                  </a:txBody>
-                  <a:tcPr marL="54864" marR="54864" marT="27432" marB="27432" anchor="ctr">
-                    <a:solidFill>
-                      <a:srgbClr val="F5F7F9"/>
-                    </a:solidFill>
-                  </a:tcPr>
-                </a:tc>
-                <a:tc>
-                  <a:txBody>
-                    <a:bodyPr/>
-                    <a:lstStyle/>
-                    <a:p>
-                      <a:pPr>
-                        <a:defRPr sz="650" b="0">
+                        <a:defRPr sz="800" b="0">
                           <a:solidFill>
                             <a:srgbClr val="0D1117"/>
                           </a:solidFill>
@@ -4836,88 +5556,7 @@
                     <a:lstStyle/>
                     <a:p>
                       <a:pPr>
-                        <a:defRPr sz="650" b="0">
-                          <a:solidFill>
-                            <a:srgbClr val="0D1117"/>
-                          </a:solidFill>
-                          <a:latin typeface="Inter"/>
-                        </a:defRPr>
-                      </a:pPr>
-                      <a:r>
-                        <a:rPr>
-                          <a:latin typeface="Inter"/>
-                        </a:rPr>
-                        <a:t>2026-10-04</a:t>
-                      </a:r>
-                    </a:p>
-                  </a:txBody>
-                  <a:tcPr marL="54864" marR="54864" marT="27432" marB="27432" anchor="ctr">
-                    <a:solidFill>
-                      <a:srgbClr val="F5F7F9"/>
-                    </a:solidFill>
-                  </a:tcPr>
-                </a:tc>
-                <a:tc>
-                  <a:txBody>
-                    <a:bodyPr/>
-                    <a:lstStyle/>
-                    <a:p>
-                      <a:pPr>
-                        <a:defRPr sz="650" b="0">
-                          <a:solidFill>
-                            <a:srgbClr val="0D1117"/>
-                          </a:solidFill>
-                          <a:latin typeface="Inter"/>
-                        </a:defRPr>
-                      </a:pPr>
-                      <a:r>
-                        <a:rPr>
-                          <a:latin typeface="Inter"/>
-                        </a:rPr>
-                        <a:t>Gradient-governed review evidence</a:t>
-                      </a:r>
-                    </a:p>
-                  </a:txBody>
-                  <a:tcPr marL="54864" marR="54864" marT="27432" marB="27432" anchor="ctr">
-                    <a:solidFill>
-                      <a:srgbClr val="F5F7F9"/>
-                    </a:solidFill>
-                  </a:tcPr>
-                </a:tc>
-                <a:tc>
-                  <a:txBody>
-                    <a:bodyPr/>
-                    <a:lstStyle/>
-                    <a:p>
-                      <a:pPr>
-                        <a:defRPr sz="650" b="0">
-                          <a:solidFill>
-                            <a:srgbClr val="0D1117"/>
-                          </a:solidFill>
-                          <a:latin typeface="Inter"/>
-                        </a:defRPr>
-                      </a:pPr>
-                      <a:r>
-                        <a:rPr>
-                          <a:latin typeface="Inter"/>
-                        </a:rPr>
-                        <a:t>{'chip': 'passed', 'status': 'passed'}</a:t>
-                      </a:r>
-                    </a:p>
-                  </a:txBody>
-                  <a:tcPr marL="54864" marR="54864" marT="27432" marB="27432" anchor="ctr">
-                    <a:solidFill>
-                      <a:srgbClr val="F5F7F9"/>
-                    </a:solidFill>
-                  </a:tcPr>
-                </a:tc>
-                <a:tc>
-                  <a:txBody>
-                    <a:bodyPr/>
-                    <a:lstStyle/>
-                    <a:p>
-                      <a:pPr>
-                        <a:defRPr sz="650" b="0">
+                        <a:defRPr sz="800" b="0">
                           <a:solidFill>
                             <a:srgbClr val="0D1117"/>
                           </a:solidFill>
@@ -4939,14 +5578,14 @@
                   </a:tcPr>
                 </a:tc>
               </a:tr>
-              <a:tr h="457561">
+              <a:tr h="630936">
                 <a:tc>
                   <a:txBody>
                     <a:bodyPr/>
                     <a:lstStyle/>
                     <a:p>
                       <a:pPr>
-                        <a:defRPr sz="650" b="1">
+                        <a:defRPr sz="800" b="1">
                           <a:solidFill>
                             <a:srgbClr val="0D1117"/>
                           </a:solidFill>
@@ -4973,88 +5612,7 @@
                     <a:lstStyle/>
                     <a:p>
                       <a:pPr>
-                        <a:defRPr sz="650" b="0">
-                          <a:solidFill>
-                            <a:srgbClr val="0D1117"/>
-                          </a:solidFill>
-                          <a:latin typeface="Inter"/>
-                        </a:defRPr>
-                      </a:pPr>
-                      <a:r>
-                        <a:rPr>
-                          <a:latin typeface="Inter"/>
-                        </a:rPr>
-                        <a:t>Monitor alerts and coverage</a:t>
-                      </a:r>
-                    </a:p>
-                  </a:txBody>
-                  <a:tcPr marL="54864" marR="54864" marT="27432" marB="27432" anchor="ctr">
-                    <a:solidFill>
-                      <a:srgbClr val="FFFFFF"/>
-                    </a:solidFill>
-                  </a:tcPr>
-                </a:tc>
-                <a:tc>
-                  <a:txBody>
-                    <a:bodyPr/>
-                    <a:lstStyle/>
-                    <a:p>
-                      <a:pPr>
-                        <a:defRPr sz="650" b="0">
-                          <a:solidFill>
-                            <a:srgbClr val="0D1117"/>
-                          </a:solidFill>
-                          <a:latin typeface="Inter"/>
-                        </a:defRPr>
-                      </a:pPr>
-                      <a:r>
-                        <a:rPr>
-                          <a:latin typeface="Inter"/>
-                        </a:rPr>
-                        <a:t>gradient_tool</a:t>
-                      </a:r>
-                    </a:p>
-                  </a:txBody>
-                  <a:tcPr marL="54864" marR="54864" marT="27432" marB="27432" anchor="ctr">
-                    <a:solidFill>
-                      <a:srgbClr val="FFFFFF"/>
-                    </a:solidFill>
-                  </a:tcPr>
-                </a:tc>
-                <a:tc>
-                  <a:txBody>
-                    <a:bodyPr/>
-                    <a:lstStyle/>
-                    <a:p>
-                      <a:pPr>
-                        <a:defRPr sz="650" b="0">
-                          <a:solidFill>
-                            <a:srgbClr val="0D1117"/>
-                          </a:solidFill>
-                          <a:latin typeface="Inter"/>
-                        </a:defRPr>
-                      </a:pPr>
-                      <a:r>
-                        <a:rPr>
-                          <a:latin typeface="Inter"/>
-                        </a:rPr>
-                        <a:t>get_manager_monitor_evidence</a:t>
-                      </a:r>
-                    </a:p>
-                  </a:txBody>
-                  <a:tcPr marL="54864" marR="54864" marT="27432" marB="27432" anchor="ctr">
-                    <a:solidFill>
-                      <a:srgbClr val="FFFFFF"/>
-                    </a:solidFill>
-                  </a:tcPr>
-                </a:tc>
-                <a:tc>
-                  <a:txBody>
-                    <a:bodyPr/>
-                    <a:lstStyle/>
-                    <a:p>
-                      <a:pPr>
-                        <a:defRPr sz="650" b="0">
+                        <a:defRPr sz="800" b="0">
                           <a:solidFill>
                             <a:srgbClr val="0D1117"/>
                           </a:solidFill>
@@ -5081,88 +5639,7 @@
                     <a:lstStyle/>
                     <a:p>
                       <a:pPr>
-                        <a:defRPr sz="650" b="0">
-                          <a:solidFill>
-                            <a:srgbClr val="0D1117"/>
-                          </a:solidFill>
-                          <a:latin typeface="Inter"/>
-                        </a:defRPr>
-                      </a:pPr>
-                      <a:r>
-                        <a:rPr>
-                          <a:latin typeface="Inter"/>
-                        </a:rPr>
-                        <a:t>2026-10-01</a:t>
-                      </a:r>
-                    </a:p>
-                  </a:txBody>
-                  <a:tcPr marL="54864" marR="54864" marT="27432" marB="27432" anchor="ctr">
-                    <a:solidFill>
-                      <a:srgbClr val="FFFFFF"/>
-                    </a:solidFill>
-                  </a:tcPr>
-                </a:tc>
-                <a:tc>
-                  <a:txBody>
-                    <a:bodyPr/>
-                    <a:lstStyle/>
-                    <a:p>
-                      <a:pPr>
-                        <a:defRPr sz="650" b="0">
-                          <a:solidFill>
-                            <a:srgbClr val="0D1117"/>
-                          </a:solidFill>
-                          <a:latin typeface="Inter"/>
-                        </a:defRPr>
-                      </a:pPr>
-                      <a:r>
-                        <a:rPr>
-                          <a:latin typeface="Inter"/>
-                        </a:rPr>
-                        <a:t>Gradient-governed review evidence</a:t>
-                      </a:r>
-                    </a:p>
-                  </a:txBody>
-                  <a:tcPr marL="54864" marR="54864" marT="27432" marB="27432" anchor="ctr">
-                    <a:solidFill>
-                      <a:srgbClr val="FFFFFF"/>
-                    </a:solidFill>
-                  </a:tcPr>
-                </a:tc>
-                <a:tc>
-                  <a:txBody>
-                    <a:bodyPr/>
-                    <a:lstStyle/>
-                    <a:p>
-                      <a:pPr>
-                        <a:defRPr sz="650" b="0">
-                          <a:solidFill>
-                            <a:srgbClr val="0D1117"/>
-                          </a:solidFill>
-                          <a:latin typeface="Inter"/>
-                        </a:defRPr>
-                      </a:pPr>
-                      <a:r>
-                        <a:rPr>
-                          <a:latin typeface="Inter"/>
-                        </a:rPr>
-                        <a:t>{'chip': 'passed', 'status': 'passed'}</a:t>
-                      </a:r>
-                    </a:p>
-                  </a:txBody>
-                  <a:tcPr marL="54864" marR="54864" marT="27432" marB="27432" anchor="ctr">
-                    <a:solidFill>
-                      <a:srgbClr val="FFFFFF"/>
-                    </a:solidFill>
-                  </a:tcPr>
-                </a:tc>
-                <a:tc>
-                  <a:txBody>
-                    <a:bodyPr/>
-                    <a:lstStyle/>
-                    <a:p>
-                      <a:pPr>
-                        <a:defRPr sz="650" b="0">
+                        <a:defRPr sz="800" b="0">
                           <a:solidFill>
                             <a:srgbClr val="0D1117"/>
                           </a:solidFill>
@@ -5184,14 +5661,14 @@
                   </a:tcPr>
                 </a:tc>
               </a:tr>
-              <a:tr h="457561">
+              <a:tr h="630936">
                 <a:tc>
                   <a:txBody>
                     <a:bodyPr/>
                     <a:lstStyle/>
                     <a:p>
                       <a:pPr>
-                        <a:defRPr sz="650" b="1">
+                        <a:defRPr sz="800" b="1">
                           <a:solidFill>
                             <a:srgbClr val="0D1117"/>
                           </a:solidFill>
@@ -5218,88 +5695,7 @@
                     <a:lstStyle/>
                     <a:p>
                       <a:pPr>
-                        <a:defRPr sz="650" b="0">
-                          <a:solidFill>
-                            <a:srgbClr val="0D1117"/>
-                          </a:solidFill>
-                          <a:latin typeface="Inter"/>
-                        </a:defRPr>
-                      </a:pPr>
-                      <a:r>
-                        <a:rPr>
-                          <a:latin typeface="Inter"/>
-                        </a:rPr>
-                        <a:t>Open findings — Ridgeview Advisors</a:t>
-                      </a:r>
-                    </a:p>
-                  </a:txBody>
-                  <a:tcPr marL="54864" marR="54864" marT="27432" marB="27432" anchor="ctr">
-                    <a:solidFill>
-                      <a:srgbClr val="F5F7F9"/>
-                    </a:solidFill>
-                  </a:tcPr>
-                </a:tc>
-                <a:tc>
-                  <a:txBody>
-                    <a:bodyPr/>
-                    <a:lstStyle/>
-                    <a:p>
-                      <a:pPr>
-                        <a:defRPr sz="650" b="0">
-                          <a:solidFill>
-                            <a:srgbClr val="0D1117"/>
-                          </a:solidFill>
-                          <a:latin typeface="Inter"/>
-                        </a:defRPr>
-                      </a:pPr>
-                      <a:r>
-                        <a:rPr>
-                          <a:latin typeface="Inter"/>
-                        </a:rPr>
-                        <a:t>gradient_tool</a:t>
-                      </a:r>
-                    </a:p>
-                  </a:txBody>
-                  <a:tcPr marL="54864" marR="54864" marT="27432" marB="27432" anchor="ctr">
-                    <a:solidFill>
-                      <a:srgbClr val="F5F7F9"/>
-                    </a:solidFill>
-                  </a:tcPr>
-                </a:tc>
-                <a:tc>
-                  <a:txBody>
-                    <a:bodyPr/>
-                    <a:lstStyle/>
-                    <a:p>
-                      <a:pPr>
-                        <a:defRPr sz="650" b="0">
-                          <a:solidFill>
-                            <a:srgbClr val="0D1117"/>
-                          </a:solidFill>
-                          <a:latin typeface="Inter"/>
-                        </a:defRPr>
-                      </a:pPr>
-                      <a:r>
-                        <a:rPr>
-                          <a:latin typeface="Inter"/>
-                        </a:rPr>
-                        <a:t>get_manager_diligence_findings</a:t>
-                      </a:r>
-                    </a:p>
-                  </a:txBody>
-                  <a:tcPr marL="54864" marR="54864" marT="27432" marB="27432" anchor="ctr">
-                    <a:solidFill>
-                      <a:srgbClr val="F5F7F9"/>
-                    </a:solidFill>
-                  </a:tcPr>
-                </a:tc>
-                <a:tc>
-                  <a:txBody>
-                    <a:bodyPr/>
-                    <a:lstStyle/>
-                    <a:p>
-                      <a:pPr>
-                        <a:defRPr sz="650" b="0">
+                        <a:defRPr sz="800" b="0">
                           <a:solidFill>
                             <a:srgbClr val="0D1117"/>
                           </a:solidFill>
@@ -5326,88 +5722,7 @@
                     <a:lstStyle/>
                     <a:p>
                       <a:pPr>
-                        <a:defRPr sz="650" b="0">
-                          <a:solidFill>
-                            <a:srgbClr val="0D1117"/>
-                          </a:solidFill>
-                          <a:latin typeface="Inter"/>
-                        </a:defRPr>
-                      </a:pPr>
-                      <a:r>
-                        <a:rPr>
-                          <a:latin typeface="Inter"/>
-                        </a:rPr>
-                        <a:t>2026-10-04</a:t>
-                      </a:r>
-                    </a:p>
-                  </a:txBody>
-                  <a:tcPr marL="54864" marR="54864" marT="27432" marB="27432" anchor="ctr">
-                    <a:solidFill>
-                      <a:srgbClr val="F5F7F9"/>
-                    </a:solidFill>
-                  </a:tcPr>
-                </a:tc>
-                <a:tc>
-                  <a:txBody>
-                    <a:bodyPr/>
-                    <a:lstStyle/>
-                    <a:p>
-                      <a:pPr>
-                        <a:defRPr sz="650" b="0">
-                          <a:solidFill>
-                            <a:srgbClr val="0D1117"/>
-                          </a:solidFill>
-                          <a:latin typeface="Inter"/>
-                        </a:defRPr>
-                      </a:pPr>
-                      <a:r>
-                        <a:rPr>
-                          <a:latin typeface="Inter"/>
-                        </a:rPr>
-                        <a:t>Gradient-governed review evidence</a:t>
-                      </a:r>
-                    </a:p>
-                  </a:txBody>
-                  <a:tcPr marL="54864" marR="54864" marT="27432" marB="27432" anchor="ctr">
-                    <a:solidFill>
-                      <a:srgbClr val="F5F7F9"/>
-                    </a:solidFill>
-                  </a:tcPr>
-                </a:tc>
-                <a:tc>
-                  <a:txBody>
-                    <a:bodyPr/>
-                    <a:lstStyle/>
-                    <a:p>
-                      <a:pPr>
-                        <a:defRPr sz="650" b="0">
-                          <a:solidFill>
-                            <a:srgbClr val="0D1117"/>
-                          </a:solidFill>
-                          <a:latin typeface="Inter"/>
-                        </a:defRPr>
-                      </a:pPr>
-                      <a:r>
-                        <a:rPr>
-                          <a:latin typeface="Inter"/>
-                        </a:rPr>
-                        <a:t>{'chip': 'advisory', 'status': 'advisory'}</a:t>
-                      </a:r>
-                    </a:p>
-                  </a:txBody>
-                  <a:tcPr marL="54864" marR="54864" marT="27432" marB="27432" anchor="ctr">
-                    <a:solidFill>
-                      <a:srgbClr val="F5F7F9"/>
-                    </a:solidFill>
-                  </a:tcPr>
-                </a:tc>
-                <a:tc>
-                  <a:txBody>
-                    <a:bodyPr/>
-                    <a:lstStyle/>
-                    <a:p>
-                      <a:pPr>
-                        <a:defRPr sz="650" b="0">
+                        <a:defRPr sz="800" b="0">
                           <a:solidFill>
                             <a:srgbClr val="0D1117"/>
                           </a:solidFill>
@@ -5429,14 +5744,14 @@
                   </a:tcPr>
                 </a:tc>
               </a:tr>
-              <a:tr h="457561">
+              <a:tr h="630936">
                 <a:tc>
                   <a:txBody>
                     <a:bodyPr/>
                     <a:lstStyle/>
                     <a:p>
                       <a:pPr>
-                        <a:defRPr sz="650" b="1">
+                        <a:defRPr sz="800" b="1">
                           <a:solidFill>
                             <a:srgbClr val="0D1117"/>
                           </a:solidFill>
@@ -5463,88 +5778,7 @@
                     <a:lstStyle/>
                     <a:p>
                       <a:pPr>
-                        <a:defRPr sz="650" b="0">
-                          <a:solidFill>
-                            <a:srgbClr val="0D1117"/>
-                          </a:solidFill>
-                          <a:latin typeface="Inter"/>
-                        </a:defRPr>
-                      </a:pPr>
-                      <a:r>
-                        <a:rPr>
-                          <a:latin typeface="Inter"/>
-                        </a:rPr>
-                        <a:t>Firm and fund events — Ridgeview Advisors</a:t>
-                      </a:r>
-                    </a:p>
-                  </a:txBody>
-                  <a:tcPr marL="54864" marR="54864" marT="27432" marB="27432" anchor="ctr">
-                    <a:solidFill>
-                      <a:srgbClr val="FFFFFF"/>
-                    </a:solidFill>
-                  </a:tcPr>
-                </a:tc>
-                <a:tc>
-                  <a:txBody>
-                    <a:bodyPr/>
-                    <a:lstStyle/>
-                    <a:p>
-                      <a:pPr>
-                        <a:defRPr sz="650" b="0">
-                          <a:solidFill>
-                            <a:srgbClr val="0D1117"/>
-                          </a:solidFill>
-                          <a:latin typeface="Inter"/>
-                        </a:defRPr>
-                      </a:pPr>
-                      <a:r>
-                        <a:rPr>
-                          <a:latin typeface="Inter"/>
-                        </a:rPr>
-                        <a:t>gradient_tool</a:t>
-                      </a:r>
-                    </a:p>
-                  </a:txBody>
-                  <a:tcPr marL="54864" marR="54864" marT="27432" marB="27432" anchor="ctr">
-                    <a:solidFill>
-                      <a:srgbClr val="FFFFFF"/>
-                    </a:solidFill>
-                  </a:tcPr>
-                </a:tc>
-                <a:tc>
-                  <a:txBody>
-                    <a:bodyPr/>
-                    <a:lstStyle/>
-                    <a:p>
-                      <a:pPr>
-                        <a:defRPr sz="650" b="0">
-                          <a:solidFill>
-                            <a:srgbClr val="0D1117"/>
-                          </a:solidFill>
-                          <a:latin typeface="Inter"/>
-                        </a:defRPr>
-                      </a:pPr>
-                      <a:r>
-                        <a:rPr>
-                          <a:latin typeface="Inter"/>
-                        </a:rPr>
-                        <a:t>get_firm_fund_events</a:t>
-                      </a:r>
-                    </a:p>
-                  </a:txBody>
-                  <a:tcPr marL="54864" marR="54864" marT="27432" marB="27432" anchor="ctr">
-                    <a:solidFill>
-                      <a:srgbClr val="FFFFFF"/>
-                    </a:solidFill>
-                  </a:tcPr>
-                </a:tc>
-                <a:tc>
-                  <a:txBody>
-                    <a:bodyPr/>
-                    <a:lstStyle/>
-                    <a:p>
-                      <a:pPr>
-                        <a:defRPr sz="650" b="0">
+                        <a:defRPr sz="800" b="0">
                           <a:solidFill>
                             <a:srgbClr val="0D1117"/>
                           </a:solidFill>
@@ -5571,88 +5805,7 @@
                     <a:lstStyle/>
                     <a:p>
                       <a:pPr>
-                        <a:defRPr sz="650" b="0">
-                          <a:solidFill>
-                            <a:srgbClr val="0D1117"/>
-                          </a:solidFill>
-                          <a:latin typeface="Inter"/>
-                        </a:defRPr>
-                      </a:pPr>
-                      <a:r>
-                        <a:rPr>
-                          <a:latin typeface="Inter"/>
-                        </a:rPr>
-                        <a:t>2026-10-04</a:t>
-                      </a:r>
-                    </a:p>
-                  </a:txBody>
-                  <a:tcPr marL="54864" marR="54864" marT="27432" marB="27432" anchor="ctr">
-                    <a:solidFill>
-                      <a:srgbClr val="FFFFFF"/>
-                    </a:solidFill>
-                  </a:tcPr>
-                </a:tc>
-                <a:tc>
-                  <a:txBody>
-                    <a:bodyPr/>
-                    <a:lstStyle/>
-                    <a:p>
-                      <a:pPr>
-                        <a:defRPr sz="650" b="0">
-                          <a:solidFill>
-                            <a:srgbClr val="0D1117"/>
-                          </a:solidFill>
-                          <a:latin typeface="Inter"/>
-                        </a:defRPr>
-                      </a:pPr>
-                      <a:r>
-                        <a:rPr>
-                          <a:latin typeface="Inter"/>
-                        </a:rPr>
-                        <a:t>Gradient-governed review evidence</a:t>
-                      </a:r>
-                    </a:p>
-                  </a:txBody>
-                  <a:tcPr marL="54864" marR="54864" marT="27432" marB="27432" anchor="ctr">
-                    <a:solidFill>
-                      <a:srgbClr val="FFFFFF"/>
-                    </a:solidFill>
-                  </a:tcPr>
-                </a:tc>
-                <a:tc>
-                  <a:txBody>
-                    <a:bodyPr/>
-                    <a:lstStyle/>
-                    <a:p>
-                      <a:pPr>
-                        <a:defRPr sz="650" b="0">
-                          <a:solidFill>
-                            <a:srgbClr val="0D1117"/>
-                          </a:solidFill>
-                          <a:latin typeface="Inter"/>
-                        </a:defRPr>
-                      </a:pPr>
-                      <a:r>
-                        <a:rPr>
-                          <a:latin typeface="Inter"/>
-                        </a:rPr>
-                        <a:t>{'chip': 'passed', 'status': 'passed'}</a:t>
-                      </a:r>
-                    </a:p>
-                  </a:txBody>
-                  <a:tcPr marL="54864" marR="54864" marT="27432" marB="27432" anchor="ctr">
-                    <a:solidFill>
-                      <a:srgbClr val="FFFFFF"/>
-                    </a:solidFill>
-                  </a:tcPr>
-                </a:tc>
-                <a:tc>
-                  <a:txBody>
-                    <a:bodyPr/>
-                    <a:lstStyle/>
-                    <a:p>
-                      <a:pPr>
-                        <a:defRPr sz="650" b="0">
+                        <a:defRPr sz="800" b="0">
                           <a:solidFill>
                             <a:srgbClr val="0D1117"/>
                           </a:solidFill>
@@ -5674,14 +5827,14 @@
                   </a:tcPr>
                 </a:tc>
               </a:tr>
-              <a:tr h="457563">
+              <a:tr h="630936">
                 <a:tc>
                   <a:txBody>
                     <a:bodyPr/>
                     <a:lstStyle/>
                     <a:p>
                       <a:pPr>
-                        <a:defRPr sz="650" b="1">
+                        <a:defRPr sz="800" b="1">
                           <a:solidFill>
                             <a:srgbClr val="0D1117"/>
                           </a:solidFill>
@@ -5708,88 +5861,7 @@
                     <a:lstStyle/>
                     <a:p>
                       <a:pPr>
-                        <a:defRPr sz="650" b="0">
-                          <a:solidFill>
-                            <a:srgbClr val="0D1117"/>
-                          </a:solidFill>
-                          <a:latin typeface="Inter"/>
-                        </a:defRPr>
-                      </a:pPr>
-                      <a:r>
-                        <a:rPr>
-                          <a:latin typeface="Inter"/>
-                        </a:rPr>
-                        <a:t>Research watchlist changes</a:t>
-                      </a:r>
-                    </a:p>
-                  </a:txBody>
-                  <a:tcPr marL="54864" marR="54864" marT="27432" marB="27432" anchor="ctr">
-                    <a:solidFill>
-                      <a:srgbClr val="F5F7F9"/>
-                    </a:solidFill>
-                  </a:tcPr>
-                </a:tc>
-                <a:tc>
-                  <a:txBody>
-                    <a:bodyPr/>
-                    <a:lstStyle/>
-                    <a:p>
-                      <a:pPr>
-                        <a:defRPr sz="650" b="0">
-                          <a:solidFill>
-                            <a:srgbClr val="0D1117"/>
-                          </a:solidFill>
-                          <a:latin typeface="Inter"/>
-                        </a:defRPr>
-                      </a:pPr>
-                      <a:r>
-                        <a:rPr>
-                          <a:latin typeface="Inter"/>
-                        </a:rPr>
-                        <a:t>gradient_tool</a:t>
-                      </a:r>
-                    </a:p>
-                  </a:txBody>
-                  <a:tcPr marL="54864" marR="54864" marT="27432" marB="27432" anchor="ctr">
-                    <a:solidFill>
-                      <a:srgbClr val="F5F7F9"/>
-                    </a:solidFill>
-                  </a:tcPr>
-                </a:tc>
-                <a:tc>
-                  <a:txBody>
-                    <a:bodyPr/>
-                    <a:lstStyle/>
-                    <a:p>
-                      <a:pPr>
-                        <a:defRPr sz="650" b="0">
-                          <a:solidFill>
-                            <a:srgbClr val="0D1117"/>
-                          </a:solidFill>
-                          <a:latin typeface="Inter"/>
-                        </a:defRPr>
-                      </a:pPr>
-                      <a:r>
-                        <a:rPr>
-                          <a:latin typeface="Inter"/>
-                        </a:rPr>
-                        <a:t>get_research_watchlist_changes</a:t>
-                      </a:r>
-                    </a:p>
-                  </a:txBody>
-                  <a:tcPr marL="54864" marR="54864" marT="27432" marB="27432" anchor="ctr">
-                    <a:solidFill>
-                      <a:srgbClr val="F5F7F9"/>
-                    </a:solidFill>
-                  </a:tcPr>
-                </a:tc>
-                <a:tc>
-                  <a:txBody>
-                    <a:bodyPr/>
-                    <a:lstStyle/>
-                    <a:p>
-                      <a:pPr>
-                        <a:defRPr sz="650" b="0">
+                        <a:defRPr sz="800" b="0">
                           <a:solidFill>
                             <a:srgbClr val="0D1117"/>
                           </a:solidFill>
@@ -5816,88 +5888,7 @@
                     <a:lstStyle/>
                     <a:p>
                       <a:pPr>
-                        <a:defRPr sz="650" b="0">
-                          <a:solidFill>
-                            <a:srgbClr val="0D1117"/>
-                          </a:solidFill>
-                          <a:latin typeface="Inter"/>
-                        </a:defRPr>
-                      </a:pPr>
-                      <a:r>
-                        <a:rPr>
-                          <a:latin typeface="Inter"/>
-                        </a:rPr>
-                        <a:t>2026-10-04</a:t>
-                      </a:r>
-                    </a:p>
-                  </a:txBody>
-                  <a:tcPr marL="54864" marR="54864" marT="27432" marB="27432" anchor="ctr">
-                    <a:solidFill>
-                      <a:srgbClr val="F5F7F9"/>
-                    </a:solidFill>
-                  </a:tcPr>
-                </a:tc>
-                <a:tc>
-                  <a:txBody>
-                    <a:bodyPr/>
-                    <a:lstStyle/>
-                    <a:p>
-                      <a:pPr>
-                        <a:defRPr sz="650" b="0">
-                          <a:solidFill>
-                            <a:srgbClr val="0D1117"/>
-                          </a:solidFill>
-                          <a:latin typeface="Inter"/>
-                        </a:defRPr>
-                      </a:pPr>
-                      <a:r>
-                        <a:rPr>
-                          <a:latin typeface="Inter"/>
-                        </a:rPr>
-                        <a:t>Gradient-governed review evidence</a:t>
-                      </a:r>
-                    </a:p>
-                  </a:txBody>
-                  <a:tcPr marL="54864" marR="54864" marT="27432" marB="27432" anchor="ctr">
-                    <a:solidFill>
-                      <a:srgbClr val="F5F7F9"/>
-                    </a:solidFill>
-                  </a:tcPr>
-                </a:tc>
-                <a:tc>
-                  <a:txBody>
-                    <a:bodyPr/>
-                    <a:lstStyle/>
-                    <a:p>
-                      <a:pPr>
-                        <a:defRPr sz="650" b="0">
-                          <a:solidFill>
-                            <a:srgbClr val="0D1117"/>
-                          </a:solidFill>
-                          <a:latin typeface="Inter"/>
-                        </a:defRPr>
-                      </a:pPr>
-                      <a:r>
-                        <a:rPr>
-                          <a:latin typeface="Inter"/>
-                        </a:rPr>
-                        <a:t>{'chip': 'passed', 'status': 'passed'}</a:t>
-                      </a:r>
-                    </a:p>
-                  </a:txBody>
-                  <a:tcPr marL="54864" marR="54864" marT="27432" marB="27432" anchor="ctr">
-                    <a:solidFill>
-                      <a:srgbClr val="F5F7F9"/>
-                    </a:solidFill>
-                  </a:tcPr>
-                </a:tc>
-                <a:tc>
-                  <a:txBody>
-                    <a:bodyPr/>
-                    <a:lstStyle/>
-                    <a:p>
-                      <a:pPr>
-                        <a:defRPr sz="650" b="0">
+                        <a:defRPr sz="800" b="0">
                           <a:solidFill>
                             <a:srgbClr val="0D1117"/>
                           </a:solidFill>
@@ -5931,7 +5922,7 @@
         </p:nvSpPr>
         <p:spPr>
           <a:xfrm>
-            <a:off x="640080" y="4547097"/>
+            <a:off x="640080" y="6035040"/>
             <a:ext cx="10908792" cy="164592"/>
           </a:xfrm>
           <a:prstGeom prst="rect">
@@ -5960,94 +5951,14 @@
               <a:rPr>
                 <a:latin typeface="Inter"/>
               </a:rPr>
-              <a:t>S4 validation: advisory 'empty primary list has no explicit reason' although the response states absence_reason no_open_findings. Illustrative, Gradient Maintained — demo data, not the client's holdings or managers. All organizations, portfolios, managers and results in this public example are illustrative.</a:t>
-            </a:r>
-          </a:p>
-        </p:txBody>
-      </p:sp>
-      <p:sp>
-        <p:nvSpPr>
-          <p:cNvPr id="10" name="TextBox 9"/>
-          <p:cNvSpPr txBox="1"/>
-          <p:nvPr/>
-        </p:nvSpPr>
-        <p:spPr>
-          <a:xfrm>
-            <a:off x="640080" y="4839705"/>
-            <a:ext cx="10908792" cy="1378214"/>
-          </a:xfrm>
-          <a:prstGeom prst="rect">
-            <a:avLst/>
-          </a:prstGeom>
-          <a:noFill/>
-        </p:spPr>
-        <p:txBody>
-          <a:bodyPr wrap="none" lIns="9144" rIns="9144" tIns="9144" bIns="9144" anchor="t">
-            <a:spAutoFit/>
-          </a:bodyPr>
-          <a:lstStyle/>
-          <a:p>
-            <a:pPr algn="l">
-              <a:spcAft>
-                <a:spcPts val="500"/>
-              </a:spcAft>
-              <a:defRPr sz="1050" b="0">
-                <a:solidFill>
-                  <a:srgbClr val="0D1117"/>
-                </a:solidFill>
-                <a:latin typeface="Inter"/>
-              </a:defRPr>
-            </a:pPr>
-            <a:r>
-              <a:rPr>
-                <a:latin typeface="Inter"/>
-              </a:rPr>
-              <a:t>•  Window: 2026-09-28 to 2026-10-04. Severity: high = tier-1 alert, new red flag, overdue high finding or overdue review; medium = material change since review, tier-2 alert, open medium finding, review due within 30 days; low = everything else.</a:t>
-            </a:r>
-          </a:p>
-          <a:p>
-            <a:pPr algn="l">
-              <a:spcAft>
-                <a:spcPts val="500"/>
-              </a:spcAft>
-              <a:defRPr sz="1050" b="0">
-                <a:solidFill>
-                  <a:srgbClr val="0D1117"/>
-                </a:solidFill>
-                <a:latin typeface="Inter"/>
-              </a:defRPr>
-            </a:pPr>
-            <a:r>
-              <a:rPr>
-                <a:latin typeface="Inter"/>
-              </a:rPr>
-              <a:t>•  Organization: Gradient (org_TEST000000000000000000000). Data scope: user-authorized live.</a:t>
-            </a:r>
-          </a:p>
-          <a:p>
-            <a:pPr algn="l">
-              <a:spcAft>
-                <a:spcPts val="500"/>
-              </a:spcAft>
-              <a:defRPr sz="1050" b="0">
-                <a:solidFill>
-                  <a:srgbClr val="0D1117"/>
-                </a:solidFill>
-                <a:latin typeface="Inter"/>
-              </a:defRPr>
-            </a:pPr>
-            <a:r>
-              <a:rPr>
-                <a:latin typeface="Inter"/>
-              </a:rPr>
-              <a:t>•  Form ADV is adviser-reported and not verified by the SEC. This digest is a monitoring aid, not investment, legal or compliance advice.</a:t>
-            </a:r>
-          </a:p>
-        </p:txBody>
-      </p:sp>
-      <p:sp>
-        <p:nvSpPr>
-          <p:cNvPr id="11" name="Rectangle 10"/>
+              <a:t>Data scope for every source: Illustrative sample data. Each digest is the SHA-256 fingerprint of the exact data the report used.</a:t>
+            </a:r>
+          </a:p>
+        </p:txBody>
+      </p:sp>
+      <p:sp>
+        <p:nvSpPr>
+          <p:cNvPr id="10" name="Rectangle 9"/>
           <p:cNvSpPr/>
           <p:nvPr/>
         </p:nvSpPr>
@@ -6096,7 +6007,7 @@
       </p:sp>
       <p:sp>
         <p:nvSpPr>
-          <p:cNvPr id="12" name="TextBox 11"/>
+          <p:cNvPr id="11" name="TextBox 10"/>
           <p:cNvSpPr txBox="1"/>
           <p:nvPr/>
         </p:nvSpPr>
@@ -6138,7 +6049,7 @@
       </p:sp>
       <p:sp>
         <p:nvSpPr>
-          <p:cNvPr id="13" name="TextBox 12"/>
+          <p:cNvPr id="12" name="TextBox 11"/>
           <p:cNvSpPr txBox="1"/>
           <p:nvPr/>
         </p:nvSpPr>
@@ -6180,7 +6091,7 @@
       </p:sp>
       <p:sp>
         <p:nvSpPr>
-          <p:cNvPr id="14" name="TextBox 13"/>
+          <p:cNvPr id="13" name="TextBox 12"/>
           <p:cNvSpPr txBox="1"/>
           <p:nvPr/>
         </p:nvSpPr>
@@ -6215,7 +6126,7 @@
               <a:rPr>
                 <a:latin typeface="Inter"/>
               </a:rPr>
-              <a:t>10</a:t>
+              <a:t>11</a:t>
             </a:r>
           </a:p>
         </p:txBody>
@@ -6296,7 +6207,7 @@
         <p:spPr>
           <a:xfrm>
             <a:off x="640080" y="329184"/>
-            <a:ext cx="5303520" cy="182880"/>
+            <a:ext cx="9875520" cy="182880"/>
           </a:xfrm>
           <a:prstGeom prst="rect">
             <a:avLst/>
@@ -6337,48 +6248,6 @@
         </p:nvSpPr>
         <p:spPr>
           <a:xfrm>
-            <a:off x="5897880" y="310896"/>
-            <a:ext cx="4800600" cy="256032"/>
-          </a:xfrm>
-          <a:prstGeom prst="rect">
-            <a:avLst/>
-          </a:prstGeom>
-          <a:noFill/>
-        </p:spPr>
-        <p:txBody>
-          <a:bodyPr wrap="none" lIns="9144" rIns="9144" tIns="9144" bIns="9144" anchor="t">
-            <a:spAutoFit/>
-          </a:bodyPr>
-          <a:lstStyle/>
-          <a:p>
-            <a:pPr algn="r">
-              <a:spcAft>
-                <a:spcPts val="0"/>
-              </a:spcAft>
-              <a:defRPr sz="680" b="1">
-                <a:solidFill>
-                  <a:srgbClr val="4F6B00"/>
-                </a:solidFill>
-                <a:latin typeface="Inter"/>
-              </a:defRPr>
-            </a:pPr>
-            <a:r>
-              <a:rPr>
-                <a:latin typeface="Inter"/>
-              </a:rPr>
-              <a:t>Illustrative, Gradient Maintained — demo data, not the client's holdings or managers</a:t>
-            </a:r>
-          </a:p>
-        </p:txBody>
-      </p:sp>
-      <p:sp>
-        <p:nvSpPr>
-          <p:cNvPr id="5" name="TextBox 4"/>
-          <p:cNvSpPr txBox="1"/>
-          <p:nvPr/>
-        </p:nvSpPr>
-        <p:spPr>
-          <a:xfrm>
             <a:off x="640080" y="566928"/>
             <a:ext cx="10058400" cy="530352"/>
           </a:xfrm>
@@ -6415,7 +6284,7 @@
       </p:sp>
       <p:sp>
         <p:nvSpPr>
-          <p:cNvPr id="6" name="Rectangle 5"/>
+          <p:cNvPr id="5" name="Rectangle 4"/>
           <p:cNvSpPr/>
           <p:nvPr/>
         </p:nvSpPr>
@@ -6464,7 +6333,7 @@
       </p:sp>
       <p:sp>
         <p:nvSpPr>
-          <p:cNvPr id="7" name="Rectangle 6"/>
+          <p:cNvPr id="6" name="Rectangle 5"/>
           <p:cNvSpPr/>
           <p:nvPr/>
         </p:nvSpPr>
@@ -6513,7 +6382,7 @@
       </p:sp>
       <p:sp>
         <p:nvSpPr>
-          <p:cNvPr id="8" name="TextBox 7"/>
+          <p:cNvPr id="7" name="TextBox 6"/>
           <p:cNvSpPr txBox="1"/>
           <p:nvPr/>
         </p:nvSpPr>
@@ -6555,14 +6424,105 @@
       </p:sp>
       <p:sp>
         <p:nvSpPr>
-          <p:cNvPr id="9" name="Rectangle 8"/>
+          <p:cNvPr id="8" name="Rectangle 7"/>
           <p:cNvSpPr/>
           <p:nvPr/>
         </p:nvSpPr>
         <p:spPr>
           <a:xfrm>
-            <a:off x="640080" y="1325880"/>
-            <a:ext cx="10908792" cy="2263980"/>
+            <a:off x="640080" y="1399032"/>
+            <a:ext cx="73152" cy="1031503"/>
+          </a:xfrm>
+          <a:prstGeom prst="rect">
+            <a:avLst/>
+          </a:prstGeom>
+          <a:solidFill>
+            <a:srgbClr val="F2A93B"/>
+          </a:solidFill>
+          <a:ln>
+            <a:solidFill>
+              <a:srgbClr val="F2A93B"/>
+            </a:solidFill>
+          </a:ln>
+        </p:spPr>
+        <p:style>
+          <a:lnRef idx="1">
+            <a:schemeClr val="accent1"/>
+          </a:lnRef>
+          <a:fillRef idx="3">
+            <a:schemeClr val="accent1"/>
+          </a:fillRef>
+          <a:effectRef idx="2">
+            <a:schemeClr val="accent1"/>
+          </a:effectRef>
+          <a:fontRef idx="minor">
+            <a:schemeClr val="lt1"/>
+          </a:fontRef>
+        </p:style>
+        <p:txBody>
+          <a:bodyPr rtlCol="0" anchor="ctr"/>
+          <a:lstStyle/>
+          <a:p>
+            <a:pPr algn="ctr">
+              <a:defRPr>
+                <a:latin typeface="Inter"/>
+              </a:defRPr>
+            </a:pPr>
+          </a:p>
+        </p:txBody>
+      </p:sp>
+      <p:sp>
+        <p:nvSpPr>
+          <p:cNvPr id="9" name="TextBox 8"/>
+          <p:cNvSpPr txBox="1"/>
+          <p:nvPr/>
+        </p:nvSpPr>
+        <p:spPr>
+          <a:xfrm>
+            <a:off x="896112" y="1371600"/>
+            <a:ext cx="10588752" cy="683128"/>
+          </a:xfrm>
+          <a:prstGeom prst="rect">
+            <a:avLst/>
+          </a:prstGeom>
+          <a:noFill/>
+        </p:spPr>
+        <p:txBody>
+          <a:bodyPr wrap="none" lIns="9144" rIns="9144" tIns="9144" bIns="9144" anchor="t">
+            <a:spAutoFit/>
+          </a:bodyPr>
+          <a:lstStyle/>
+          <a:p>
+            <a:pPr algn="l">
+              <a:spcAft>
+                <a:spcPts val="0"/>
+              </a:spcAft>
+              <a:defRPr sz="1800" b="1">
+                <a:solidFill>
+                  <a:srgbClr val="0D1117"/>
+                </a:solidFill>
+                <a:latin typeface="Inter"/>
+              </a:defRPr>
+            </a:pPr>
+            <a:r>
+              <a:rPr>
+                <a:latin typeface="Inter"/>
+              </a:rPr>
+              <a:t>One manager change to review this week</a:t>
+            </a:r>
+          </a:p>
+        </p:txBody>
+      </p:sp>
+      <p:sp>
+        <p:nvSpPr>
+          <p:cNvPr id="10" name="Rectangle 9"/>
+          <p:cNvSpPr/>
+          <p:nvPr/>
+        </p:nvSpPr>
+        <p:spPr>
+          <a:xfrm>
+            <a:off x="640080" y="2613415"/>
+            <a:ext cx="10908792" cy="1654451"/>
           </a:xfrm>
           <a:prstGeom prst="rect">
             <a:avLst/>
@@ -6604,14 +6564,14 @@
       </p:sp>
       <p:sp>
         <p:nvSpPr>
-          <p:cNvPr id="10" name="Rectangle 9"/>
+          <p:cNvPr id="11" name="Rectangle 10"/>
           <p:cNvSpPr/>
           <p:nvPr/>
         </p:nvSpPr>
         <p:spPr>
           <a:xfrm>
-            <a:off x="640080" y="1325880"/>
-            <a:ext cx="54864" cy="2263980"/>
+            <a:off x="640080" y="2613415"/>
+            <a:ext cx="54864" cy="1654451"/>
           </a:xfrm>
           <a:prstGeom prst="rect">
             <a:avLst/>
@@ -6653,13 +6613,13 @@
       </p:sp>
       <p:sp>
         <p:nvSpPr>
-          <p:cNvPr id="11" name="TextBox 10"/>
+          <p:cNvPr id="12" name="TextBox 11"/>
           <p:cNvSpPr txBox="1"/>
           <p:nvPr/>
         </p:nvSpPr>
         <p:spPr>
           <a:xfrm>
-            <a:off x="804671" y="1435607"/>
+            <a:off x="804671" y="2723143"/>
             <a:ext cx="10616184" cy="228600"/>
           </a:xfrm>
           <a:prstGeom prst="rect">
@@ -6695,14 +6655,14 @@
       </p:sp>
       <p:sp>
         <p:nvSpPr>
-          <p:cNvPr id="12" name="TextBox 11"/>
+          <p:cNvPr id="13" name="TextBox 12"/>
           <p:cNvSpPr txBox="1"/>
           <p:nvPr/>
         </p:nvSpPr>
         <p:spPr>
           <a:xfrm>
-            <a:off x="804671" y="1719072"/>
-            <a:ext cx="10616184" cy="1779348"/>
+            <a:off x="804671" y="3006607"/>
+            <a:ext cx="10616184" cy="1169819"/>
           </a:xfrm>
           <a:prstGeom prst="rect">
             <a:avLst/>
@@ -6737,14 +6697,14 @@
       </p:sp>
       <p:sp>
         <p:nvSpPr>
-          <p:cNvPr id="13" name="Rectangle 12"/>
+          <p:cNvPr id="14" name="Rectangle 13"/>
           <p:cNvSpPr/>
           <p:nvPr/>
         </p:nvSpPr>
         <p:spPr>
           <a:xfrm>
-            <a:off x="640080" y="3699588"/>
-            <a:ext cx="2644902" cy="2518331"/>
+            <a:off x="640080" y="4377595"/>
+            <a:ext cx="2644902" cy="1840324"/>
           </a:xfrm>
           <a:prstGeom prst="rect">
             <a:avLst/>
@@ -6786,13 +6746,13 @@
       </p:sp>
       <p:sp>
         <p:nvSpPr>
-          <p:cNvPr id="14" name="Rectangle 13"/>
+          <p:cNvPr id="15" name="Rectangle 14"/>
           <p:cNvSpPr/>
           <p:nvPr/>
         </p:nvSpPr>
         <p:spPr>
           <a:xfrm>
-            <a:off x="640080" y="3699588"/>
+            <a:off x="640080" y="4377595"/>
             <a:ext cx="2644902" cy="45720"/>
           </a:xfrm>
           <a:prstGeom prst="rect">
@@ -6835,13 +6795,13 @@
       </p:sp>
       <p:sp>
         <p:nvSpPr>
-          <p:cNvPr id="15" name="TextBox 14"/>
+          <p:cNvPr id="16" name="TextBox 15"/>
           <p:cNvSpPr txBox="1"/>
           <p:nvPr/>
         </p:nvSpPr>
         <p:spPr>
           <a:xfrm>
-            <a:off x="749808" y="3827604"/>
+            <a:off x="749808" y="4505611"/>
             <a:ext cx="2425446" cy="201168"/>
           </a:xfrm>
           <a:prstGeom prst="rect">
@@ -6877,13 +6837,13 @@
       </p:sp>
       <p:sp>
         <p:nvSpPr>
-          <p:cNvPr id="16" name="TextBox 15"/>
+          <p:cNvPr id="17" name="TextBox 16"/>
           <p:cNvSpPr txBox="1"/>
           <p:nvPr/>
         </p:nvSpPr>
         <p:spPr>
           <a:xfrm>
-            <a:off x="749808" y="4083636"/>
+            <a:off x="749808" y="4761643"/>
             <a:ext cx="2425446" cy="475488"/>
           </a:xfrm>
           <a:prstGeom prst="rect">
@@ -6919,13 +6879,13 @@
       </p:sp>
       <p:sp>
         <p:nvSpPr>
-          <p:cNvPr id="17" name="TextBox 16"/>
+          <p:cNvPr id="18" name="TextBox 17"/>
           <p:cNvSpPr txBox="1"/>
           <p:nvPr/>
         </p:nvSpPr>
         <p:spPr>
           <a:xfrm>
-            <a:off x="749808" y="5888736"/>
+            <a:off x="749808" y="5888735"/>
             <a:ext cx="2425446" cy="228600"/>
           </a:xfrm>
           <a:prstGeom prst="rect">
@@ -6961,14 +6921,14 @@
       </p:sp>
       <p:sp>
         <p:nvSpPr>
-          <p:cNvPr id="18" name="Rectangle 17"/>
+          <p:cNvPr id="19" name="Rectangle 18"/>
           <p:cNvSpPr/>
           <p:nvPr/>
         </p:nvSpPr>
         <p:spPr>
           <a:xfrm>
-            <a:off x="3394710" y="3699588"/>
-            <a:ext cx="2644902" cy="2518331"/>
+            <a:off x="3394710" y="4377595"/>
+            <a:ext cx="2644902" cy="1840324"/>
           </a:xfrm>
           <a:prstGeom prst="rect">
             <a:avLst/>
@@ -7010,13 +6970,13 @@
       </p:sp>
       <p:sp>
         <p:nvSpPr>
-          <p:cNvPr id="19" name="Rectangle 18"/>
+          <p:cNvPr id="20" name="Rectangle 19"/>
           <p:cNvSpPr/>
           <p:nvPr/>
         </p:nvSpPr>
         <p:spPr>
           <a:xfrm>
-            <a:off x="3394710" y="3699588"/>
+            <a:off x="3394710" y="4377595"/>
             <a:ext cx="2644902" cy="45720"/>
           </a:xfrm>
           <a:prstGeom prst="rect">
@@ -7059,13 +7019,13 @@
       </p:sp>
       <p:sp>
         <p:nvSpPr>
-          <p:cNvPr id="20" name="TextBox 19"/>
+          <p:cNvPr id="21" name="TextBox 20"/>
           <p:cNvSpPr txBox="1"/>
           <p:nvPr/>
         </p:nvSpPr>
         <p:spPr>
           <a:xfrm>
-            <a:off x="3504438" y="3827604"/>
+            <a:off x="3504438" y="4505611"/>
             <a:ext cx="2425446" cy="201168"/>
           </a:xfrm>
           <a:prstGeom prst="rect">
@@ -7101,13 +7061,13 @@
       </p:sp>
       <p:sp>
         <p:nvSpPr>
-          <p:cNvPr id="21" name="TextBox 20"/>
+          <p:cNvPr id="22" name="TextBox 21"/>
           <p:cNvSpPr txBox="1"/>
           <p:nvPr/>
         </p:nvSpPr>
         <p:spPr>
           <a:xfrm>
-            <a:off x="3504438" y="4083636"/>
+            <a:off x="3504438" y="4761643"/>
             <a:ext cx="2425446" cy="475488"/>
           </a:xfrm>
           <a:prstGeom prst="rect">
@@ -7143,13 +7103,13 @@
       </p:sp>
       <p:sp>
         <p:nvSpPr>
-          <p:cNvPr id="22" name="TextBox 21"/>
+          <p:cNvPr id="23" name="TextBox 22"/>
           <p:cNvSpPr txBox="1"/>
           <p:nvPr/>
         </p:nvSpPr>
         <p:spPr>
           <a:xfrm>
-            <a:off x="3504438" y="5888736"/>
+            <a:off x="3504438" y="5888735"/>
             <a:ext cx="2425446" cy="228600"/>
           </a:xfrm>
           <a:prstGeom prst="rect">
@@ -7185,14 +7145,14 @@
       </p:sp>
       <p:sp>
         <p:nvSpPr>
-          <p:cNvPr id="23" name="Rectangle 22"/>
+          <p:cNvPr id="24" name="Rectangle 23"/>
           <p:cNvSpPr/>
           <p:nvPr/>
         </p:nvSpPr>
         <p:spPr>
           <a:xfrm>
-            <a:off x="6149340" y="3699588"/>
-            <a:ext cx="2644902" cy="2518331"/>
+            <a:off x="6149340" y="4377595"/>
+            <a:ext cx="2644902" cy="1840324"/>
           </a:xfrm>
           <a:prstGeom prst="rect">
             <a:avLst/>
@@ -7234,13 +7194,13 @@
       </p:sp>
       <p:sp>
         <p:nvSpPr>
-          <p:cNvPr id="24" name="Rectangle 23"/>
+          <p:cNvPr id="25" name="Rectangle 24"/>
           <p:cNvSpPr/>
           <p:nvPr/>
         </p:nvSpPr>
         <p:spPr>
           <a:xfrm>
-            <a:off x="6149340" y="3699588"/>
+            <a:off x="6149340" y="4377595"/>
             <a:ext cx="2644902" cy="45720"/>
           </a:xfrm>
           <a:prstGeom prst="rect">
@@ -7283,13 +7243,13 @@
       </p:sp>
       <p:sp>
         <p:nvSpPr>
-          <p:cNvPr id="25" name="TextBox 24"/>
+          <p:cNvPr id="26" name="TextBox 25"/>
           <p:cNvSpPr txBox="1"/>
           <p:nvPr/>
         </p:nvSpPr>
         <p:spPr>
           <a:xfrm>
-            <a:off x="6259068" y="3827604"/>
+            <a:off x="6259068" y="4505611"/>
             <a:ext cx="2425446" cy="201168"/>
           </a:xfrm>
           <a:prstGeom prst="rect">
@@ -7325,13 +7285,13 @@
       </p:sp>
       <p:sp>
         <p:nvSpPr>
-          <p:cNvPr id="26" name="TextBox 25"/>
+          <p:cNvPr id="27" name="TextBox 26"/>
           <p:cNvSpPr txBox="1"/>
           <p:nvPr/>
         </p:nvSpPr>
         <p:spPr>
           <a:xfrm>
-            <a:off x="6259068" y="4083636"/>
+            <a:off x="6259068" y="4761643"/>
             <a:ext cx="2425446" cy="475488"/>
           </a:xfrm>
           <a:prstGeom prst="rect">
@@ -7367,13 +7327,13 @@
       </p:sp>
       <p:sp>
         <p:nvSpPr>
-          <p:cNvPr id="27" name="TextBox 26"/>
+          <p:cNvPr id="28" name="TextBox 27"/>
           <p:cNvSpPr txBox="1"/>
           <p:nvPr/>
         </p:nvSpPr>
         <p:spPr>
           <a:xfrm>
-            <a:off x="6259068" y="5888736"/>
+            <a:off x="6259068" y="5888735"/>
             <a:ext cx="2425446" cy="228600"/>
           </a:xfrm>
           <a:prstGeom prst="rect">
@@ -7409,14 +7369,14 @@
       </p:sp>
       <p:sp>
         <p:nvSpPr>
-          <p:cNvPr id="28" name="Rectangle 27"/>
+          <p:cNvPr id="29" name="Rectangle 28"/>
           <p:cNvSpPr/>
           <p:nvPr/>
         </p:nvSpPr>
         <p:spPr>
           <a:xfrm>
-            <a:off x="8903970" y="3699588"/>
-            <a:ext cx="2644902" cy="2518331"/>
+            <a:off x="8903970" y="4377595"/>
+            <a:ext cx="2644902" cy="1840324"/>
           </a:xfrm>
           <a:prstGeom prst="rect">
             <a:avLst/>
@@ -7458,13 +7418,13 @@
       </p:sp>
       <p:sp>
         <p:nvSpPr>
-          <p:cNvPr id="29" name="Rectangle 28"/>
+          <p:cNvPr id="30" name="Rectangle 29"/>
           <p:cNvSpPr/>
           <p:nvPr/>
         </p:nvSpPr>
         <p:spPr>
           <a:xfrm>
-            <a:off x="8903970" y="3699588"/>
+            <a:off x="8903970" y="4377595"/>
             <a:ext cx="2644902" cy="45720"/>
           </a:xfrm>
           <a:prstGeom prst="rect">
@@ -7507,13 +7467,13 @@
       </p:sp>
       <p:sp>
         <p:nvSpPr>
-          <p:cNvPr id="30" name="TextBox 29"/>
+          <p:cNvPr id="31" name="TextBox 30"/>
           <p:cNvSpPr txBox="1"/>
           <p:nvPr/>
         </p:nvSpPr>
         <p:spPr>
           <a:xfrm>
-            <a:off x="9013698" y="3827604"/>
+            <a:off x="9013698" y="4505611"/>
             <a:ext cx="2425446" cy="201168"/>
           </a:xfrm>
           <a:prstGeom prst="rect">
@@ -7549,13 +7509,13 @@
       </p:sp>
       <p:sp>
         <p:nvSpPr>
-          <p:cNvPr id="31" name="TextBox 30"/>
+          <p:cNvPr id="32" name="TextBox 31"/>
           <p:cNvSpPr txBox="1"/>
           <p:nvPr/>
         </p:nvSpPr>
         <p:spPr>
           <a:xfrm>
-            <a:off x="9013698" y="4083636"/>
+            <a:off x="9013698" y="4761643"/>
             <a:ext cx="2425446" cy="475488"/>
           </a:xfrm>
           <a:prstGeom prst="rect">
@@ -7591,13 +7551,13 @@
       </p:sp>
       <p:sp>
         <p:nvSpPr>
-          <p:cNvPr id="32" name="TextBox 31"/>
+          <p:cNvPr id="33" name="TextBox 32"/>
           <p:cNvSpPr txBox="1"/>
           <p:nvPr/>
         </p:nvSpPr>
         <p:spPr>
           <a:xfrm>
-            <a:off x="9013698" y="5888736"/>
+            <a:off x="9013698" y="5888735"/>
             <a:ext cx="2425446" cy="228600"/>
           </a:xfrm>
           <a:prstGeom prst="rect">
@@ -7633,7 +7593,7 @@
       </p:sp>
       <p:sp>
         <p:nvSpPr>
-          <p:cNvPr id="33" name="Rectangle 32"/>
+          <p:cNvPr id="34" name="Rectangle 33"/>
           <p:cNvSpPr/>
           <p:nvPr/>
         </p:nvSpPr>
@@ -7682,7 +7642,7 @@
       </p:sp>
       <p:sp>
         <p:nvSpPr>
-          <p:cNvPr id="34" name="TextBox 33"/>
+          <p:cNvPr id="35" name="TextBox 34"/>
           <p:cNvSpPr txBox="1"/>
           <p:nvPr/>
         </p:nvSpPr>
@@ -7724,7 +7684,7 @@
       </p:sp>
       <p:sp>
         <p:nvSpPr>
-          <p:cNvPr id="35" name="TextBox 34"/>
+          <p:cNvPr id="36" name="TextBox 35"/>
           <p:cNvSpPr txBox="1"/>
           <p:nvPr/>
         </p:nvSpPr>
@@ -7766,7 +7726,7 @@
       </p:sp>
       <p:sp>
         <p:nvSpPr>
-          <p:cNvPr id="36" name="TextBox 35"/>
+          <p:cNvPr id="37" name="TextBox 36"/>
           <p:cNvSpPr txBox="1"/>
           <p:nvPr/>
         </p:nvSpPr>
@@ -7882,7 +7842,7 @@
         <p:spPr>
           <a:xfrm>
             <a:off x="640080" y="329184"/>
-            <a:ext cx="5303520" cy="182880"/>
+            <a:ext cx="9875520" cy="182880"/>
           </a:xfrm>
           <a:prstGeom prst="rect">
             <a:avLst/>
@@ -7923,48 +7883,6 @@
         </p:nvSpPr>
         <p:spPr>
           <a:xfrm>
-            <a:off x="5897880" y="310896"/>
-            <a:ext cx="4800600" cy="256032"/>
-          </a:xfrm>
-          <a:prstGeom prst="rect">
-            <a:avLst/>
-          </a:prstGeom>
-          <a:noFill/>
-        </p:spPr>
-        <p:txBody>
-          <a:bodyPr wrap="none" lIns="9144" rIns="9144" tIns="9144" bIns="9144" anchor="t">
-            <a:spAutoFit/>
-          </a:bodyPr>
-          <a:lstStyle/>
-          <a:p>
-            <a:pPr algn="r">
-              <a:spcAft>
-                <a:spcPts val="0"/>
-              </a:spcAft>
-              <a:defRPr sz="680" b="1">
-                <a:solidFill>
-                  <a:srgbClr val="4F6B00"/>
-                </a:solidFill>
-                <a:latin typeface="Inter"/>
-              </a:defRPr>
-            </a:pPr>
-            <a:r>
-              <a:rPr>
-                <a:latin typeface="Inter"/>
-              </a:rPr>
-              <a:t>Illustrative, Gradient Maintained — demo data, not the client's holdings or managers</a:t>
-            </a:r>
-          </a:p>
-        </p:txBody>
-      </p:sp>
-      <p:sp>
-        <p:nvSpPr>
-          <p:cNvPr id="5" name="TextBox 4"/>
-          <p:cNvSpPr txBox="1"/>
-          <p:nvPr/>
-        </p:nvSpPr>
-        <p:spPr>
-          <a:xfrm>
             <a:off x="640080" y="566928"/>
             <a:ext cx="10058400" cy="530352"/>
           </a:xfrm>
@@ -8001,7 +7919,7 @@
       </p:sp>
       <p:sp>
         <p:nvSpPr>
-          <p:cNvPr id="6" name="Rectangle 5"/>
+          <p:cNvPr id="5" name="Rectangle 4"/>
           <p:cNvSpPr/>
           <p:nvPr/>
         </p:nvSpPr>
@@ -8050,7 +7968,7 @@
       </p:sp>
       <p:sp>
         <p:nvSpPr>
-          <p:cNvPr id="7" name="Rectangle 6"/>
+          <p:cNvPr id="6" name="Rectangle 5"/>
           <p:cNvSpPr/>
           <p:nvPr/>
         </p:nvSpPr>
@@ -8099,7 +8017,7 @@
       </p:sp>
       <p:sp>
         <p:nvSpPr>
-          <p:cNvPr id="8" name="TextBox 7"/>
+          <p:cNvPr id="7" name="TextBox 6"/>
           <p:cNvSpPr txBox="1"/>
           <p:nvPr/>
         </p:nvSpPr>
@@ -8141,7 +8059,7 @@
       </p:sp>
       <p:sp>
         <p:nvSpPr>
-          <p:cNvPr id="9" name="TextBox 8"/>
+          <p:cNvPr id="8" name="TextBox 7"/>
           <p:cNvSpPr txBox="1"/>
           <p:nvPr/>
         </p:nvSpPr>
@@ -8183,7 +8101,7 @@
       </p:sp>
       <p:graphicFrame>
         <p:nvGraphicFramePr>
-          <p:cNvPr id="10" name="Chart 9"/>
+          <p:cNvPr id="9" name="Chart 8"/>
           <p:cNvGraphicFramePr>
             <a:graphicFrameLocks noGrp="1"/>
           </p:cNvGraphicFramePr>
@@ -8201,7 +8119,7 @@
       </p:graphicFrame>
       <p:sp>
         <p:nvSpPr>
-          <p:cNvPr id="11" name="Rectangle 10"/>
+          <p:cNvPr id="10" name="Rectangle 9"/>
           <p:cNvSpPr/>
           <p:nvPr/>
         </p:nvSpPr>
@@ -8250,7 +8168,7 @@
       </p:sp>
       <p:sp>
         <p:nvSpPr>
-          <p:cNvPr id="12" name="TextBox 11"/>
+          <p:cNvPr id="11" name="TextBox 10"/>
           <p:cNvSpPr txBox="1"/>
           <p:nvPr/>
         </p:nvSpPr>
@@ -8292,7 +8210,7 @@
       </p:sp>
       <p:sp>
         <p:nvSpPr>
-          <p:cNvPr id="13" name="TextBox 12"/>
+          <p:cNvPr id="12" name="TextBox 11"/>
           <p:cNvSpPr txBox="1"/>
           <p:nvPr/>
         </p:nvSpPr>
@@ -8334,7 +8252,7 @@
       </p:sp>
       <p:sp>
         <p:nvSpPr>
-          <p:cNvPr id="14" name="TextBox 13"/>
+          <p:cNvPr id="13" name="TextBox 12"/>
           <p:cNvSpPr txBox="1"/>
           <p:nvPr/>
         </p:nvSpPr>
@@ -8450,7 +8368,7 @@
         <p:spPr>
           <a:xfrm>
             <a:off x="640080" y="329184"/>
-            <a:ext cx="5303520" cy="182880"/>
+            <a:ext cx="9875520" cy="182880"/>
           </a:xfrm>
           <a:prstGeom prst="rect">
             <a:avLst/>
@@ -8491,48 +8409,6 @@
         </p:nvSpPr>
         <p:spPr>
           <a:xfrm>
-            <a:off x="5897880" y="310896"/>
-            <a:ext cx="4800600" cy="256032"/>
-          </a:xfrm>
-          <a:prstGeom prst="rect">
-            <a:avLst/>
-          </a:prstGeom>
-          <a:noFill/>
-        </p:spPr>
-        <p:txBody>
-          <a:bodyPr wrap="none" lIns="9144" rIns="9144" tIns="9144" bIns="9144" anchor="t">
-            <a:spAutoFit/>
-          </a:bodyPr>
-          <a:lstStyle/>
-          <a:p>
-            <a:pPr algn="r">
-              <a:spcAft>
-                <a:spcPts val="0"/>
-              </a:spcAft>
-              <a:defRPr sz="680" b="1">
-                <a:solidFill>
-                  <a:srgbClr val="4F6B00"/>
-                </a:solidFill>
-                <a:latin typeface="Inter"/>
-              </a:defRPr>
-            </a:pPr>
-            <a:r>
-              <a:rPr>
-                <a:latin typeface="Inter"/>
-              </a:rPr>
-              <a:t>Illustrative, Gradient Maintained — demo data, not the client's holdings or managers</a:t>
-            </a:r>
-          </a:p>
-        </p:txBody>
-      </p:sp>
-      <p:sp>
-        <p:nvSpPr>
-          <p:cNvPr id="5" name="TextBox 4"/>
-          <p:cNvSpPr txBox="1"/>
-          <p:nvPr/>
-        </p:nvSpPr>
-        <p:spPr>
-          <a:xfrm>
             <a:off x="640080" y="566928"/>
             <a:ext cx="10058400" cy="530352"/>
           </a:xfrm>
@@ -8569,7 +8445,7 @@
       </p:sp>
       <p:sp>
         <p:nvSpPr>
-          <p:cNvPr id="6" name="Rectangle 5"/>
+          <p:cNvPr id="5" name="Rectangle 4"/>
           <p:cNvSpPr/>
           <p:nvPr/>
         </p:nvSpPr>
@@ -8618,7 +8494,7 @@
       </p:sp>
       <p:sp>
         <p:nvSpPr>
-          <p:cNvPr id="7" name="Rectangle 6"/>
+          <p:cNvPr id="6" name="Rectangle 5"/>
           <p:cNvSpPr/>
           <p:nvPr/>
         </p:nvSpPr>
@@ -8667,7 +8543,7 @@
       </p:sp>
       <p:sp>
         <p:nvSpPr>
-          <p:cNvPr id="8" name="TextBox 7"/>
+          <p:cNvPr id="7" name="TextBox 6"/>
           <p:cNvSpPr txBox="1"/>
           <p:nvPr/>
         </p:nvSpPr>
@@ -8709,7 +8585,7 @@
       </p:sp>
       <p:sp>
         <p:nvSpPr>
-          <p:cNvPr id="9" name="TextBox 8"/>
+          <p:cNvPr id="8" name="TextBox 7"/>
           <p:cNvSpPr txBox="1"/>
           <p:nvPr/>
         </p:nvSpPr>
@@ -8751,7 +8627,7 @@
       </p:sp>
       <p:graphicFrame>
         <p:nvGraphicFramePr>
-          <p:cNvPr id="10" name="Table 9"/>
+          <p:cNvPr id="9" name="Table 8"/>
           <p:cNvGraphicFramePr>
             <a:graphicFrameLocks noGrp="1"/>
           </p:cNvGraphicFramePr>
@@ -8759,7 +8635,7 @@
         </p:nvGraphicFramePr>
         <p:xfrm>
           <a:off x="640080" y="1600200"/>
-          <a:ext cx="10908792" cy="957245"/>
+          <a:ext cx="10908792" cy="1020107"/>
         </p:xfrm>
         <a:graphic>
           <a:graphicData uri="http://schemas.openxmlformats.org/drawingml/2006/table">
@@ -8772,7 +8648,7 @@
                 <a:gridCol w="4448556"/>
                 <a:gridCol w="4448556"/>
               </a:tblGrid>
-              <a:tr h="478622">
+              <a:tr h="510053">
                 <a:tc>
                   <a:txBody>
                     <a:bodyPr/>
@@ -8855,7 +8731,7 @@
                   </a:tcPr>
                 </a:tc>
               </a:tr>
-              <a:tr h="478623">
+              <a:tr h="510054">
                 <a:tc>
                   <a:txBody>
                     <a:bodyPr/>
@@ -8873,7 +8749,7 @@
                         <a:rPr>
                           <a:latin typeface="Inter"/>
                         </a:rPr>
-                        <a:t>● MEDIUM</a:t>
+                        <a:t>● Medium</a:t>
                       </a:r>
                     </a:p>
                   </a:txBody>
@@ -8944,14 +8820,14 @@
       </p:graphicFrame>
       <p:sp>
         <p:nvSpPr>
-          <p:cNvPr id="11" name="Rectangle 10"/>
+          <p:cNvPr id="10" name="Rectangle 9"/>
           <p:cNvSpPr/>
           <p:nvPr/>
         </p:nvSpPr>
         <p:spPr>
           <a:xfrm>
-            <a:off x="640080" y="2667173"/>
-            <a:ext cx="10908792" cy="1258155"/>
+            <a:off x="640080" y="2730035"/>
+            <a:ext cx="10908792" cy="1089476"/>
           </a:xfrm>
           <a:prstGeom prst="rect">
             <a:avLst/>
@@ -8993,14 +8869,14 @@
       </p:sp>
       <p:sp>
         <p:nvSpPr>
-          <p:cNvPr id="12" name="Rectangle 11"/>
+          <p:cNvPr id="11" name="Rectangle 10"/>
           <p:cNvSpPr/>
           <p:nvPr/>
         </p:nvSpPr>
         <p:spPr>
           <a:xfrm>
-            <a:off x="640080" y="2667173"/>
-            <a:ext cx="54864" cy="1258155"/>
+            <a:off x="640080" y="2730035"/>
+            <a:ext cx="54864" cy="1089476"/>
           </a:xfrm>
           <a:prstGeom prst="rect">
             <a:avLst/>
@@ -9042,13 +8918,13 @@
       </p:sp>
       <p:sp>
         <p:nvSpPr>
-          <p:cNvPr id="13" name="TextBox 12"/>
+          <p:cNvPr id="12" name="TextBox 11"/>
           <p:cNvSpPr txBox="1"/>
           <p:nvPr/>
         </p:nvSpPr>
         <p:spPr>
           <a:xfrm>
-            <a:off x="804671" y="2776901"/>
+            <a:off x="804671" y="2839763"/>
             <a:ext cx="10616184" cy="228600"/>
           </a:xfrm>
           <a:prstGeom prst="rect">
@@ -9077,21 +8953,21 @@
               <a:rPr>
                 <a:latin typeface="Inter"/>
               </a:rPr>
-              <a:t>Key judgment — headline signal</a:t>
-            </a:r>
-          </a:p>
-        </p:txBody>
-      </p:sp>
-      <p:sp>
-        <p:nvSpPr>
-          <p:cNvPr id="14" name="TextBox 13"/>
+              <a:t>Key judgment — This week</a:t>
+            </a:r>
+          </a:p>
+        </p:txBody>
+      </p:sp>
+      <p:sp>
+        <p:nvSpPr>
+          <p:cNvPr id="13" name="TextBox 12"/>
           <p:cNvSpPr txBox="1"/>
           <p:nvPr/>
         </p:nvSpPr>
         <p:spPr>
           <a:xfrm>
-            <a:off x="804671" y="3060365"/>
-            <a:ext cx="10616184" cy="773523"/>
+            <a:off x="804671" y="3123227"/>
+            <a:ext cx="10616184" cy="604844"/>
           </a:xfrm>
           <a:prstGeom prst="rect">
             <a:avLst/>
@@ -9119,21 +8995,21 @@
               <a:rPr>
                 <a:latin typeface="Inter"/>
               </a:rPr>
-              <a:t>Observation: The sample report carries a 1 item to review signal [S1]. Why it matters: This signal focuses oversight on the report's most decision-relevant condition. Uncertainty: Evidence coverage may exclude newer or more detailed observations. What would change the view: A governed refresh showing a different signal or breached threshold.</a:t>
-            </a:r>
-          </a:p>
-        </p:txBody>
-      </p:sp>
-      <p:sp>
-        <p:nvSpPr>
-          <p:cNvPr id="15" name="Rectangle 14"/>
+              <a:t>Observation: One manager change needs review this week [S1]. Why it matters: It is the only item that requires analyst action. Uncertainty: Filings published after the digest date are not included. What would change the view: A new filing or alert before the next digest.</a:t>
+            </a:r>
+          </a:p>
+        </p:txBody>
+      </p:sp>
+      <p:sp>
+        <p:nvSpPr>
+          <p:cNvPr id="14" name="Rectangle 13"/>
           <p:cNvSpPr/>
           <p:nvPr/>
         </p:nvSpPr>
         <p:spPr>
           <a:xfrm>
-            <a:off x="640080" y="4035057"/>
-            <a:ext cx="10908792" cy="1036567"/>
+            <a:off x="640080" y="3929239"/>
+            <a:ext cx="10908792" cy="1089476"/>
           </a:xfrm>
           <a:prstGeom prst="rect">
             <a:avLst/>
@@ -9175,14 +9051,14 @@
       </p:sp>
       <p:sp>
         <p:nvSpPr>
-          <p:cNvPr id="16" name="Rectangle 15"/>
+          <p:cNvPr id="15" name="Rectangle 14"/>
           <p:cNvSpPr/>
           <p:nvPr/>
         </p:nvSpPr>
         <p:spPr>
           <a:xfrm>
-            <a:off x="640080" y="4035057"/>
-            <a:ext cx="54864" cy="1036567"/>
+            <a:off x="640080" y="3929239"/>
+            <a:ext cx="54864" cy="1089476"/>
           </a:xfrm>
           <a:prstGeom prst="rect">
             <a:avLst/>
@@ -9224,13 +9100,13 @@
       </p:sp>
       <p:sp>
         <p:nvSpPr>
-          <p:cNvPr id="17" name="TextBox 16"/>
+          <p:cNvPr id="16" name="TextBox 15"/>
           <p:cNvSpPr txBox="1"/>
           <p:nvPr/>
         </p:nvSpPr>
         <p:spPr>
           <a:xfrm>
-            <a:off x="804671" y="4144785"/>
+            <a:off x="804671" y="4038967"/>
             <a:ext cx="10616184" cy="228600"/>
           </a:xfrm>
           <a:prstGeom prst="rect">
@@ -9259,21 +9135,21 @@
               <a:rPr>
                 <a:latin typeface="Inter"/>
               </a:rPr>
-              <a:t>Key judgment — primary measure</a:t>
-            </a:r>
-          </a:p>
-        </p:txBody>
-      </p:sp>
-      <p:sp>
-        <p:nvSpPr>
-          <p:cNvPr id="18" name="TextBox 17"/>
+              <a:t>Key judgment — Alerts</a:t>
+            </a:r>
+          </a:p>
+        </p:txBody>
+      </p:sp>
+      <p:sp>
+        <p:nvSpPr>
+          <p:cNvPr id="17" name="TextBox 16"/>
           <p:cNvSpPr txBox="1"/>
           <p:nvPr/>
         </p:nvSpPr>
         <p:spPr>
           <a:xfrm>
-            <a:off x="804671" y="4428249"/>
-            <a:ext cx="10616184" cy="551935"/>
+            <a:off x="804671" y="4322431"/>
+            <a:ext cx="10616184" cy="604844"/>
           </a:xfrm>
           <a:prstGeom prst="rect">
             <a:avLst/>
@@ -9301,21 +9177,21 @@
               <a:rPr>
                 <a:latin typeface="Inter"/>
               </a:rPr>
-              <a:t>Observation: New alerts is 0 in the review evidence [S2]. Why it matters: This measure establishes the baseline for comparing later governed results. Uncertainty: The source basis may omit newer observations outside the reviewed evidence. What would change the view: A refreshed source report showing a change above 1%.</a:t>
-            </a:r>
-          </a:p>
-        </p:txBody>
-      </p:sp>
-      <p:sp>
-        <p:nvSpPr>
-          <p:cNvPr id="19" name="Rectangle 18"/>
+              <a:t>Observation: No new alerts were raised this week [S2]. Why it matters: Monitoring found no new risk events across the roster. Uncertainty: Alerts depend on filing publication dates. What would change the view: A late-published filing that triggers an alert.</a:t>
+            </a:r>
+          </a:p>
+        </p:txBody>
+      </p:sp>
+      <p:sp>
+        <p:nvSpPr>
+          <p:cNvPr id="18" name="Rectangle 17"/>
           <p:cNvSpPr/>
           <p:nvPr/>
         </p:nvSpPr>
         <p:spPr>
           <a:xfrm>
-            <a:off x="640080" y="5181352"/>
-            <a:ext cx="10908792" cy="1036567"/>
+            <a:off x="640080" y="5128443"/>
+            <a:ext cx="10908792" cy="1089476"/>
           </a:xfrm>
           <a:prstGeom prst="rect">
             <a:avLst/>
@@ -9357,14 +9233,14 @@
       </p:sp>
       <p:sp>
         <p:nvSpPr>
-          <p:cNvPr id="20" name="Rectangle 19"/>
+          <p:cNvPr id="19" name="Rectangle 18"/>
           <p:cNvSpPr/>
           <p:nvPr/>
         </p:nvSpPr>
         <p:spPr>
           <a:xfrm>
-            <a:off x="640080" y="5181352"/>
-            <a:ext cx="54864" cy="1036567"/>
+            <a:off x="640080" y="5128443"/>
+            <a:ext cx="54864" cy="1089476"/>
           </a:xfrm>
           <a:prstGeom prst="rect">
             <a:avLst/>
@@ -9406,13 +9282,13 @@
       </p:sp>
       <p:sp>
         <p:nvSpPr>
-          <p:cNvPr id="21" name="TextBox 20"/>
+          <p:cNvPr id="20" name="TextBox 19"/>
           <p:cNvSpPr txBox="1"/>
           <p:nvPr/>
         </p:nvSpPr>
         <p:spPr>
           <a:xfrm>
-            <a:off x="804671" y="5291080"/>
+            <a:off x="804671" y="5238171"/>
             <a:ext cx="10616184" cy="228600"/>
           </a:xfrm>
           <a:prstGeom prst="rect">
@@ -9441,21 +9317,21 @@
               <a:rPr>
                 <a:latin typeface="Inter"/>
               </a:rPr>
-              <a:t>Key judgment — monitoring priority</a:t>
-            </a:r>
-          </a:p>
-        </p:txBody>
-      </p:sp>
-      <p:sp>
-        <p:nvSpPr>
-          <p:cNvPr id="22" name="TextBox 21"/>
+              <a:t>Key judgment — Reviews due</a:t>
+            </a:r>
+          </a:p>
+        </p:txBody>
+      </p:sp>
+      <p:sp>
+        <p:nvSpPr>
+          <p:cNvPr id="21" name="TextBox 20"/>
           <p:cNvSpPr txBox="1"/>
           <p:nvPr/>
         </p:nvSpPr>
         <p:spPr>
           <a:xfrm>
-            <a:off x="804671" y="5574544"/>
-            <a:ext cx="10616184" cy="551935"/>
+            <a:off x="804671" y="5521635"/>
+            <a:ext cx="10616184" cy="604844"/>
           </a:xfrm>
           <a:prstGeom prst="rect">
             <a:avLst/>
@@ -9483,14 +9359,14 @@
               <a:rPr>
                 <a:latin typeface="Inter"/>
               </a:rPr>
-              <a:t>Observation: Reviews due ≤30d is 0 in the review evidence [S3]. Why it matters: This result determines which item receives priority in the next monitoring cycle. Uncertainty: Supporting coverage may omit later filings or corroborating detail. What would change the view: A new filing or report that resolves the item or changes it by 1%.</a:t>
-            </a:r>
-          </a:p>
-        </p:txBody>
-      </p:sp>
-      <p:sp>
-        <p:nvSpPr>
-          <p:cNvPr id="23" name="Rectangle 22"/>
+              <a:t>Observation: No reviews fall due in the next 30 days [S3]. Why it matters: There is no scheduled diligence pressure this month. Uncertainty: Review dates come from the roster schedule. What would change the view: A schedule change or an event-driven review.</a:t>
+            </a:r>
+          </a:p>
+        </p:txBody>
+      </p:sp>
+      <p:sp>
+        <p:nvSpPr>
+          <p:cNvPr id="22" name="Rectangle 21"/>
           <p:cNvSpPr/>
           <p:nvPr/>
         </p:nvSpPr>
@@ -9539,7 +9415,7 @@
       </p:sp>
       <p:sp>
         <p:nvSpPr>
-          <p:cNvPr id="24" name="TextBox 23"/>
+          <p:cNvPr id="23" name="TextBox 22"/>
           <p:cNvSpPr txBox="1"/>
           <p:nvPr/>
         </p:nvSpPr>
@@ -9581,7 +9457,7 @@
       </p:sp>
       <p:sp>
         <p:nvSpPr>
-          <p:cNvPr id="25" name="TextBox 24"/>
+          <p:cNvPr id="24" name="TextBox 23"/>
           <p:cNvSpPr txBox="1"/>
           <p:nvPr/>
         </p:nvSpPr>
@@ -9623,7 +9499,7 @@
       </p:sp>
       <p:sp>
         <p:nvSpPr>
-          <p:cNvPr id="26" name="TextBox 25"/>
+          <p:cNvPr id="25" name="TextBox 24"/>
           <p:cNvSpPr txBox="1"/>
           <p:nvPr/>
         </p:nvSpPr>
@@ -9739,7 +9615,7 @@
         <p:spPr>
           <a:xfrm>
             <a:off x="640080" y="329184"/>
-            <a:ext cx="5303520" cy="182880"/>
+            <a:ext cx="9875520" cy="182880"/>
           </a:xfrm>
           <a:prstGeom prst="rect">
             <a:avLst/>
@@ -9780,48 +9656,6 @@
         </p:nvSpPr>
         <p:spPr>
           <a:xfrm>
-            <a:off x="5897880" y="310896"/>
-            <a:ext cx="4800600" cy="256032"/>
-          </a:xfrm>
-          <a:prstGeom prst="rect">
-            <a:avLst/>
-          </a:prstGeom>
-          <a:noFill/>
-        </p:spPr>
-        <p:txBody>
-          <a:bodyPr wrap="none" lIns="9144" rIns="9144" tIns="9144" bIns="9144" anchor="t">
-            <a:spAutoFit/>
-          </a:bodyPr>
-          <a:lstStyle/>
-          <a:p>
-            <a:pPr algn="r">
-              <a:spcAft>
-                <a:spcPts val="0"/>
-              </a:spcAft>
-              <a:defRPr sz="680" b="1">
-                <a:solidFill>
-                  <a:srgbClr val="4F6B00"/>
-                </a:solidFill>
-                <a:latin typeface="Inter"/>
-              </a:defRPr>
-            </a:pPr>
-            <a:r>
-              <a:rPr>
-                <a:latin typeface="Inter"/>
-              </a:rPr>
-              <a:t>Illustrative, Gradient Maintained — demo data, not the client's holdings or managers</a:t>
-            </a:r>
-          </a:p>
-        </p:txBody>
-      </p:sp>
-      <p:sp>
-        <p:nvSpPr>
-          <p:cNvPr id="5" name="TextBox 4"/>
-          <p:cNvSpPr txBox="1"/>
-          <p:nvPr/>
-        </p:nvSpPr>
-        <p:spPr>
-          <a:xfrm>
             <a:off x="640080" y="566928"/>
             <a:ext cx="10058400" cy="530352"/>
           </a:xfrm>
@@ -9858,7 +9692,7 @@
       </p:sp>
       <p:sp>
         <p:nvSpPr>
-          <p:cNvPr id="6" name="Rectangle 5"/>
+          <p:cNvPr id="5" name="Rectangle 4"/>
           <p:cNvSpPr/>
           <p:nvPr/>
         </p:nvSpPr>
@@ -9907,7 +9741,7 @@
       </p:sp>
       <p:sp>
         <p:nvSpPr>
-          <p:cNvPr id="7" name="Rectangle 6"/>
+          <p:cNvPr id="6" name="Rectangle 5"/>
           <p:cNvSpPr/>
           <p:nvPr/>
         </p:nvSpPr>
@@ -9956,7 +9790,7 @@
       </p:sp>
       <p:sp>
         <p:nvSpPr>
-          <p:cNvPr id="8" name="TextBox 7"/>
+          <p:cNvPr id="7" name="TextBox 6"/>
           <p:cNvSpPr txBox="1"/>
           <p:nvPr/>
         </p:nvSpPr>
@@ -9998,7 +9832,7 @@
       </p:sp>
       <p:sp>
         <p:nvSpPr>
-          <p:cNvPr id="9" name="TextBox 8"/>
+          <p:cNvPr id="8" name="TextBox 7"/>
           <p:cNvSpPr txBox="1"/>
           <p:nvPr/>
         </p:nvSpPr>
@@ -10040,7 +9874,7 @@
       </p:sp>
       <p:graphicFrame>
         <p:nvGraphicFramePr>
-          <p:cNvPr id="10" name="Table 9"/>
+          <p:cNvPr id="9" name="Table 8"/>
           <p:cNvGraphicFramePr>
             <a:graphicFrameLocks noGrp="1"/>
           </p:cNvGraphicFramePr>
@@ -10162,7 +9996,7 @@
                         <a:rPr>
                           <a:latin typeface="Inter"/>
                         </a:rPr>
-                        <a:t>● MEDIUM</a:t>
+                        <a:t>● Medium</a:t>
                       </a:r>
                     </a:p>
                   </a:txBody>
@@ -10233,7 +10067,7 @@
       </p:graphicFrame>
       <p:sp>
         <p:nvSpPr>
-          <p:cNvPr id="11" name="TextBox 10"/>
+          <p:cNvPr id="10" name="TextBox 9"/>
           <p:cNvSpPr txBox="1"/>
           <p:nvPr/>
         </p:nvSpPr>
@@ -10275,7 +10109,7 @@
       </p:sp>
       <p:graphicFrame>
         <p:nvGraphicFramePr>
-          <p:cNvPr id="12" name="Table 11"/>
+          <p:cNvPr id="11" name="Table 10"/>
           <p:cNvGraphicFramePr>
             <a:graphicFrameLocks noGrp="1"/>
           </p:cNvGraphicFramePr>
@@ -10637,7 +10471,7 @@
       </p:graphicFrame>
       <p:sp>
         <p:nvSpPr>
-          <p:cNvPr id="13" name="Rectangle 12"/>
+          <p:cNvPr id="12" name="Rectangle 11"/>
           <p:cNvSpPr/>
           <p:nvPr/>
         </p:nvSpPr>
@@ -10686,7 +10520,7 @@
       </p:sp>
       <p:sp>
         <p:nvSpPr>
-          <p:cNvPr id="14" name="Rectangle 13"/>
+          <p:cNvPr id="13" name="Rectangle 12"/>
           <p:cNvSpPr/>
           <p:nvPr/>
         </p:nvSpPr>
@@ -10735,7 +10569,7 @@
       </p:sp>
       <p:sp>
         <p:nvSpPr>
-          <p:cNvPr id="15" name="Rectangle 14"/>
+          <p:cNvPr id="14" name="Rectangle 13"/>
           <p:cNvSpPr/>
           <p:nvPr/>
         </p:nvSpPr>
@@ -10784,7 +10618,7 @@
       </p:sp>
       <p:sp>
         <p:nvSpPr>
-          <p:cNvPr id="16" name="TextBox 15"/>
+          <p:cNvPr id="15" name="TextBox 14"/>
           <p:cNvSpPr txBox="1"/>
           <p:nvPr/>
         </p:nvSpPr>
@@ -10826,7 +10660,7 @@
       </p:sp>
       <p:sp>
         <p:nvSpPr>
-          <p:cNvPr id="17" name="TextBox 16"/>
+          <p:cNvPr id="16" name="TextBox 15"/>
           <p:cNvSpPr txBox="1"/>
           <p:nvPr/>
         </p:nvSpPr>
@@ -10868,7 +10702,7 @@
       </p:sp>
       <p:sp>
         <p:nvSpPr>
-          <p:cNvPr id="18" name="Rectangle 17"/>
+          <p:cNvPr id="17" name="Rectangle 16"/>
           <p:cNvSpPr/>
           <p:nvPr/>
         </p:nvSpPr>
@@ -10917,7 +10751,7 @@
       </p:sp>
       <p:sp>
         <p:nvSpPr>
-          <p:cNvPr id="19" name="TextBox 18"/>
+          <p:cNvPr id="18" name="TextBox 17"/>
           <p:cNvSpPr txBox="1"/>
           <p:nvPr/>
         </p:nvSpPr>
@@ -10959,7 +10793,7 @@
       </p:sp>
       <p:sp>
         <p:nvSpPr>
-          <p:cNvPr id="20" name="TextBox 19"/>
+          <p:cNvPr id="19" name="TextBox 18"/>
           <p:cNvSpPr txBox="1"/>
           <p:nvPr/>
         </p:nvSpPr>
@@ -11001,7 +10835,7 @@
       </p:sp>
       <p:sp>
         <p:nvSpPr>
-          <p:cNvPr id="21" name="TextBox 20"/>
+          <p:cNvPr id="20" name="TextBox 19"/>
           <p:cNvSpPr txBox="1"/>
           <p:nvPr/>
         </p:nvSpPr>
@@ -11117,7 +10951,7 @@
         <p:spPr>
           <a:xfrm>
             <a:off x="640080" y="329184"/>
-            <a:ext cx="5303520" cy="182880"/>
+            <a:ext cx="9875520" cy="182880"/>
           </a:xfrm>
           <a:prstGeom prst="rect">
             <a:avLst/>
@@ -11158,48 +10992,6 @@
         </p:nvSpPr>
         <p:spPr>
           <a:xfrm>
-            <a:off x="5897880" y="310896"/>
-            <a:ext cx="4800600" cy="256032"/>
-          </a:xfrm>
-          <a:prstGeom prst="rect">
-            <a:avLst/>
-          </a:prstGeom>
-          <a:noFill/>
-        </p:spPr>
-        <p:txBody>
-          <a:bodyPr wrap="none" lIns="9144" rIns="9144" tIns="9144" bIns="9144" anchor="t">
-            <a:spAutoFit/>
-          </a:bodyPr>
-          <a:lstStyle/>
-          <a:p>
-            <a:pPr algn="r">
-              <a:spcAft>
-                <a:spcPts val="0"/>
-              </a:spcAft>
-              <a:defRPr sz="680" b="1">
-                <a:solidFill>
-                  <a:srgbClr val="4F6B00"/>
-                </a:solidFill>
-                <a:latin typeface="Inter"/>
-              </a:defRPr>
-            </a:pPr>
-            <a:r>
-              <a:rPr>
-                <a:latin typeface="Inter"/>
-              </a:rPr>
-              <a:t>Illustrative, Gradient Maintained — demo data, not the client's holdings or managers</a:t>
-            </a:r>
-          </a:p>
-        </p:txBody>
-      </p:sp>
-      <p:sp>
-        <p:nvSpPr>
-          <p:cNvPr id="5" name="TextBox 4"/>
-          <p:cNvSpPr txBox="1"/>
-          <p:nvPr/>
-        </p:nvSpPr>
-        <p:spPr>
-          <a:xfrm>
             <a:off x="640080" y="566928"/>
             <a:ext cx="10058400" cy="530352"/>
           </a:xfrm>
@@ -11236,7 +11028,7 @@
       </p:sp>
       <p:sp>
         <p:nvSpPr>
-          <p:cNvPr id="6" name="Rectangle 5"/>
+          <p:cNvPr id="5" name="Rectangle 4"/>
           <p:cNvSpPr/>
           <p:nvPr/>
         </p:nvSpPr>
@@ -11285,7 +11077,7 @@
       </p:sp>
       <p:sp>
         <p:nvSpPr>
-          <p:cNvPr id="7" name="Rectangle 6"/>
+          <p:cNvPr id="6" name="Rectangle 5"/>
           <p:cNvSpPr/>
           <p:nvPr/>
         </p:nvSpPr>
@@ -11334,7 +11126,7 @@
       </p:sp>
       <p:sp>
         <p:nvSpPr>
-          <p:cNvPr id="8" name="TextBox 7"/>
+          <p:cNvPr id="7" name="TextBox 6"/>
           <p:cNvSpPr txBox="1"/>
           <p:nvPr/>
         </p:nvSpPr>
@@ -11376,7 +11168,7 @@
       </p:sp>
       <p:sp>
         <p:nvSpPr>
-          <p:cNvPr id="9" name="Rectangle 8"/>
+          <p:cNvPr id="8" name="Rectangle 7"/>
           <p:cNvSpPr/>
           <p:nvPr/>
         </p:nvSpPr>
@@ -11425,7 +11217,7 @@
       </p:sp>
       <p:sp>
         <p:nvSpPr>
-          <p:cNvPr id="10" name="Rectangle 9"/>
+          <p:cNvPr id="9" name="Rectangle 8"/>
           <p:cNvSpPr/>
           <p:nvPr/>
         </p:nvSpPr>
@@ -11474,7 +11266,7 @@
       </p:sp>
       <p:sp>
         <p:nvSpPr>
-          <p:cNvPr id="11" name="TextBox 10"/>
+          <p:cNvPr id="10" name="TextBox 9"/>
           <p:cNvSpPr txBox="1"/>
           <p:nvPr/>
         </p:nvSpPr>
@@ -11516,7 +11308,7 @@
       </p:sp>
       <p:sp>
         <p:nvSpPr>
-          <p:cNvPr id="12" name="TextBox 11"/>
+          <p:cNvPr id="11" name="TextBox 10"/>
           <p:cNvSpPr txBox="1"/>
           <p:nvPr/>
         </p:nvSpPr>
@@ -11558,7 +11350,7 @@
       </p:sp>
       <p:sp>
         <p:nvSpPr>
-          <p:cNvPr id="13" name="Rectangle 12"/>
+          <p:cNvPr id="12" name="Rectangle 11"/>
           <p:cNvSpPr/>
           <p:nvPr/>
         </p:nvSpPr>
@@ -11607,7 +11399,7 @@
       </p:sp>
       <p:sp>
         <p:nvSpPr>
-          <p:cNvPr id="14" name="TextBox 13"/>
+          <p:cNvPr id="13" name="TextBox 12"/>
           <p:cNvSpPr txBox="1"/>
           <p:nvPr/>
         </p:nvSpPr>
@@ -11649,7 +11441,7 @@
       </p:sp>
       <p:sp>
         <p:nvSpPr>
-          <p:cNvPr id="15" name="TextBox 14"/>
+          <p:cNvPr id="14" name="TextBox 13"/>
           <p:cNvSpPr txBox="1"/>
           <p:nvPr/>
         </p:nvSpPr>
@@ -11691,7 +11483,7 @@
       </p:sp>
       <p:sp>
         <p:nvSpPr>
-          <p:cNvPr id="16" name="TextBox 15"/>
+          <p:cNvPr id="15" name="TextBox 14"/>
           <p:cNvSpPr txBox="1"/>
           <p:nvPr/>
         </p:nvSpPr>
@@ -11807,7 +11599,7 @@
         <p:spPr>
           <a:xfrm>
             <a:off x="640080" y="329184"/>
-            <a:ext cx="5303520" cy="182880"/>
+            <a:ext cx="9875520" cy="182880"/>
           </a:xfrm>
           <a:prstGeom prst="rect">
             <a:avLst/>
@@ -11848,48 +11640,6 @@
         </p:nvSpPr>
         <p:spPr>
           <a:xfrm>
-            <a:off x="5897880" y="310896"/>
-            <a:ext cx="4800600" cy="256032"/>
-          </a:xfrm>
-          <a:prstGeom prst="rect">
-            <a:avLst/>
-          </a:prstGeom>
-          <a:noFill/>
-        </p:spPr>
-        <p:txBody>
-          <a:bodyPr wrap="none" lIns="9144" rIns="9144" tIns="9144" bIns="9144" anchor="t">
-            <a:spAutoFit/>
-          </a:bodyPr>
-          <a:lstStyle/>
-          <a:p>
-            <a:pPr algn="r">
-              <a:spcAft>
-                <a:spcPts val="0"/>
-              </a:spcAft>
-              <a:defRPr sz="680" b="1">
-                <a:solidFill>
-                  <a:srgbClr val="4F6B00"/>
-                </a:solidFill>
-                <a:latin typeface="Inter"/>
-              </a:defRPr>
-            </a:pPr>
-            <a:r>
-              <a:rPr>
-                <a:latin typeface="Inter"/>
-              </a:rPr>
-              <a:t>Illustrative, Gradient Maintained — demo data, not the client's holdings or managers</a:t>
-            </a:r>
-          </a:p>
-        </p:txBody>
-      </p:sp>
-      <p:sp>
-        <p:nvSpPr>
-          <p:cNvPr id="5" name="TextBox 4"/>
-          <p:cNvSpPr txBox="1"/>
-          <p:nvPr/>
-        </p:nvSpPr>
-        <p:spPr>
-          <a:xfrm>
             <a:off x="640080" y="566928"/>
             <a:ext cx="10058400" cy="530352"/>
           </a:xfrm>
@@ -11926,7 +11676,7 @@
       </p:sp>
       <p:sp>
         <p:nvSpPr>
-          <p:cNvPr id="6" name="Rectangle 5"/>
+          <p:cNvPr id="5" name="Rectangle 4"/>
           <p:cNvSpPr/>
           <p:nvPr/>
         </p:nvSpPr>
@@ -11975,7 +11725,7 @@
       </p:sp>
       <p:sp>
         <p:nvSpPr>
-          <p:cNvPr id="7" name="Rectangle 6"/>
+          <p:cNvPr id="6" name="Rectangle 5"/>
           <p:cNvSpPr/>
           <p:nvPr/>
         </p:nvSpPr>
@@ -12024,7 +11774,7 @@
       </p:sp>
       <p:sp>
         <p:nvSpPr>
-          <p:cNvPr id="8" name="TextBox 7"/>
+          <p:cNvPr id="7" name="TextBox 6"/>
           <p:cNvSpPr txBox="1"/>
           <p:nvPr/>
         </p:nvSpPr>
@@ -12066,7 +11816,7 @@
       </p:sp>
       <p:sp>
         <p:nvSpPr>
-          <p:cNvPr id="9" name="TextBox 8"/>
+          <p:cNvPr id="8" name="TextBox 7"/>
           <p:cNvSpPr txBox="1"/>
           <p:nvPr/>
         </p:nvSpPr>
@@ -12108,7 +11858,7 @@
       </p:sp>
       <p:sp>
         <p:nvSpPr>
-          <p:cNvPr id="10" name="Rectangle 9"/>
+          <p:cNvPr id="9" name="Rectangle 8"/>
           <p:cNvSpPr/>
           <p:nvPr/>
         </p:nvSpPr>
@@ -12157,7 +11907,7 @@
       </p:sp>
       <p:sp>
         <p:nvSpPr>
-          <p:cNvPr id="11" name="Oval 10"/>
+          <p:cNvPr id="10" name="Oval 9"/>
           <p:cNvSpPr/>
           <p:nvPr/>
         </p:nvSpPr>
@@ -12206,7 +11956,7 @@
       </p:sp>
       <p:sp>
         <p:nvSpPr>
-          <p:cNvPr id="12" name="TextBox 11"/>
+          <p:cNvPr id="11" name="TextBox 10"/>
           <p:cNvSpPr txBox="1"/>
           <p:nvPr/>
         </p:nvSpPr>
@@ -12248,7 +11998,7 @@
       </p:sp>
       <p:sp>
         <p:nvSpPr>
-          <p:cNvPr id="13" name="TextBox 12"/>
+          <p:cNvPr id="12" name="TextBox 11"/>
           <p:cNvSpPr txBox="1"/>
           <p:nvPr/>
         </p:nvSpPr>
@@ -12290,7 +12040,7 @@
       </p:sp>
       <p:sp>
         <p:nvSpPr>
-          <p:cNvPr id="14" name="TextBox 13"/>
+          <p:cNvPr id="13" name="TextBox 12"/>
           <p:cNvSpPr txBox="1"/>
           <p:nvPr/>
         </p:nvSpPr>
@@ -12332,7 +12082,7 @@
       </p:sp>
       <p:sp>
         <p:nvSpPr>
-          <p:cNvPr id="15" name="Oval 14"/>
+          <p:cNvPr id="14" name="Oval 13"/>
           <p:cNvSpPr/>
           <p:nvPr/>
         </p:nvSpPr>
@@ -12381,7 +12131,7 @@
       </p:sp>
       <p:sp>
         <p:nvSpPr>
-          <p:cNvPr id="16" name="TextBox 15"/>
+          <p:cNvPr id="15" name="TextBox 14"/>
           <p:cNvSpPr txBox="1"/>
           <p:nvPr/>
         </p:nvSpPr>
@@ -12423,7 +12173,7 @@
       </p:sp>
       <p:sp>
         <p:nvSpPr>
-          <p:cNvPr id="17" name="TextBox 16"/>
+          <p:cNvPr id="16" name="TextBox 15"/>
           <p:cNvSpPr txBox="1"/>
           <p:nvPr/>
         </p:nvSpPr>
@@ -12465,7 +12215,7 @@
       </p:sp>
       <p:sp>
         <p:nvSpPr>
-          <p:cNvPr id="18" name="TextBox 17"/>
+          <p:cNvPr id="17" name="TextBox 16"/>
           <p:cNvSpPr txBox="1"/>
           <p:nvPr/>
         </p:nvSpPr>
@@ -12507,7 +12257,7 @@
       </p:sp>
       <p:sp>
         <p:nvSpPr>
-          <p:cNvPr id="19" name="Rectangle 18"/>
+          <p:cNvPr id="18" name="Rectangle 17"/>
           <p:cNvSpPr/>
           <p:nvPr/>
         </p:nvSpPr>
@@ -12556,7 +12306,7 @@
       </p:sp>
       <p:sp>
         <p:nvSpPr>
-          <p:cNvPr id="20" name="TextBox 19"/>
+          <p:cNvPr id="19" name="TextBox 18"/>
           <p:cNvSpPr txBox="1"/>
           <p:nvPr/>
         </p:nvSpPr>
@@ -12598,7 +12348,7 @@
       </p:sp>
       <p:sp>
         <p:nvSpPr>
-          <p:cNvPr id="21" name="TextBox 20"/>
+          <p:cNvPr id="20" name="TextBox 19"/>
           <p:cNvSpPr txBox="1"/>
           <p:nvPr/>
         </p:nvSpPr>
@@ -12640,7 +12390,7 @@
       </p:sp>
       <p:sp>
         <p:nvSpPr>
-          <p:cNvPr id="22" name="TextBox 21"/>
+          <p:cNvPr id="21" name="TextBox 20"/>
           <p:cNvSpPr txBox="1"/>
           <p:nvPr/>
         </p:nvSpPr>
@@ -12756,7 +12506,7 @@
         <p:spPr>
           <a:xfrm>
             <a:off x="640080" y="329184"/>
-            <a:ext cx="5303520" cy="182880"/>
+            <a:ext cx="9875520" cy="182880"/>
           </a:xfrm>
           <a:prstGeom prst="rect">
             <a:avLst/>
@@ -12797,48 +12547,6 @@
         </p:nvSpPr>
         <p:spPr>
           <a:xfrm>
-            <a:off x="5897880" y="310896"/>
-            <a:ext cx="4800600" cy="256032"/>
-          </a:xfrm>
-          <a:prstGeom prst="rect">
-            <a:avLst/>
-          </a:prstGeom>
-          <a:noFill/>
-        </p:spPr>
-        <p:txBody>
-          <a:bodyPr wrap="none" lIns="9144" rIns="9144" tIns="9144" bIns="9144" anchor="t">
-            <a:spAutoFit/>
-          </a:bodyPr>
-          <a:lstStyle/>
-          <a:p>
-            <a:pPr algn="r">
-              <a:spcAft>
-                <a:spcPts val="0"/>
-              </a:spcAft>
-              <a:defRPr sz="680" b="1">
-                <a:solidFill>
-                  <a:srgbClr val="4F6B00"/>
-                </a:solidFill>
-                <a:latin typeface="Inter"/>
-              </a:defRPr>
-            </a:pPr>
-            <a:r>
-              <a:rPr>
-                <a:latin typeface="Inter"/>
-              </a:rPr>
-              <a:t>Illustrative, Gradient Maintained — demo data, not the client's holdings or managers</a:t>
-            </a:r>
-          </a:p>
-        </p:txBody>
-      </p:sp>
-      <p:sp>
-        <p:nvSpPr>
-          <p:cNvPr id="5" name="TextBox 4"/>
-          <p:cNvSpPr txBox="1"/>
-          <p:nvPr/>
-        </p:nvSpPr>
-        <p:spPr>
-          <a:xfrm>
             <a:off x="640080" y="566928"/>
             <a:ext cx="10058400" cy="530352"/>
           </a:xfrm>
@@ -12875,7 +12583,7 @@
       </p:sp>
       <p:sp>
         <p:nvSpPr>
-          <p:cNvPr id="6" name="Rectangle 5"/>
+          <p:cNvPr id="5" name="Rectangle 4"/>
           <p:cNvSpPr/>
           <p:nvPr/>
         </p:nvSpPr>
@@ -12924,7 +12632,7 @@
       </p:sp>
       <p:sp>
         <p:nvSpPr>
-          <p:cNvPr id="7" name="Rectangle 6"/>
+          <p:cNvPr id="6" name="Rectangle 5"/>
           <p:cNvSpPr/>
           <p:nvPr/>
         </p:nvSpPr>
@@ -12973,7 +12681,7 @@
       </p:sp>
       <p:sp>
         <p:nvSpPr>
-          <p:cNvPr id="8" name="TextBox 7"/>
+          <p:cNvPr id="7" name="TextBox 6"/>
           <p:cNvSpPr txBox="1"/>
           <p:nvPr/>
         </p:nvSpPr>
@@ -13015,7 +12723,7 @@
       </p:sp>
       <p:graphicFrame>
         <p:nvGraphicFramePr>
-          <p:cNvPr id="9" name="Table 8"/>
+          <p:cNvPr id="8" name="Table 7"/>
           <p:cNvGraphicFramePr>
             <a:graphicFrameLocks noGrp="1"/>
           </p:cNvGraphicFramePr>
@@ -13373,7 +13081,7 @@
       </p:graphicFrame>
       <p:sp>
         <p:nvSpPr>
-          <p:cNvPr id="10" name="TextBox 9"/>
+          <p:cNvPr id="9" name="TextBox 8"/>
           <p:cNvSpPr txBox="1"/>
           <p:nvPr/>
         </p:nvSpPr>
@@ -13415,7 +13123,7 @@
       </p:sp>
       <p:sp>
         <p:nvSpPr>
-          <p:cNvPr id="11" name="Rectangle 10"/>
+          <p:cNvPr id="10" name="Rectangle 9"/>
           <p:cNvSpPr/>
           <p:nvPr/>
         </p:nvSpPr>
@@ -13464,7 +13172,7 @@
       </p:sp>
       <p:sp>
         <p:nvSpPr>
-          <p:cNvPr id="12" name="Rectangle 11"/>
+          <p:cNvPr id="11" name="Rectangle 10"/>
           <p:cNvSpPr/>
           <p:nvPr/>
         </p:nvSpPr>
@@ -13513,7 +13221,7 @@
       </p:sp>
       <p:sp>
         <p:nvSpPr>
-          <p:cNvPr id="13" name="TextBox 12"/>
+          <p:cNvPr id="12" name="TextBox 11"/>
           <p:cNvSpPr txBox="1"/>
           <p:nvPr/>
         </p:nvSpPr>
@@ -13555,7 +13263,7 @@
       </p:sp>
       <p:sp>
         <p:nvSpPr>
-          <p:cNvPr id="14" name="TextBox 13"/>
+          <p:cNvPr id="13" name="TextBox 12"/>
           <p:cNvSpPr txBox="1"/>
           <p:nvPr/>
         </p:nvSpPr>
@@ -13597,7 +13305,7 @@
       </p:sp>
       <p:sp>
         <p:nvSpPr>
-          <p:cNvPr id="15" name="Rectangle 14"/>
+          <p:cNvPr id="14" name="Rectangle 13"/>
           <p:cNvSpPr/>
           <p:nvPr/>
         </p:nvSpPr>
@@ -13646,7 +13354,7 @@
       </p:sp>
       <p:sp>
         <p:nvSpPr>
-          <p:cNvPr id="16" name="TextBox 15"/>
+          <p:cNvPr id="15" name="TextBox 14"/>
           <p:cNvSpPr txBox="1"/>
           <p:nvPr/>
         </p:nvSpPr>
@@ -13688,7 +13396,7 @@
       </p:sp>
       <p:sp>
         <p:nvSpPr>
-          <p:cNvPr id="17" name="TextBox 16"/>
+          <p:cNvPr id="16" name="TextBox 15"/>
           <p:cNvSpPr txBox="1"/>
           <p:nvPr/>
         </p:nvSpPr>
@@ -13730,7 +13438,7 @@
       </p:sp>
       <p:sp>
         <p:nvSpPr>
-          <p:cNvPr id="18" name="TextBox 17"/>
+          <p:cNvPr id="17" name="TextBox 16"/>
           <p:cNvSpPr txBox="1"/>
           <p:nvPr/>
         </p:nvSpPr>
@@ -13846,7 +13554,7 @@
         <p:spPr>
           <a:xfrm>
             <a:off x="640080" y="329184"/>
-            <a:ext cx="5303520" cy="182880"/>
+            <a:ext cx="9875520" cy="182880"/>
           </a:xfrm>
           <a:prstGeom prst="rect">
             <a:avLst/>
@@ -13887,48 +13595,6 @@
         </p:nvSpPr>
         <p:spPr>
           <a:xfrm>
-            <a:off x="5897880" y="310896"/>
-            <a:ext cx="4800600" cy="256032"/>
-          </a:xfrm>
-          <a:prstGeom prst="rect">
-            <a:avLst/>
-          </a:prstGeom>
-          <a:noFill/>
-        </p:spPr>
-        <p:txBody>
-          <a:bodyPr wrap="none" lIns="9144" rIns="9144" tIns="9144" bIns="9144" anchor="t">
-            <a:spAutoFit/>
-          </a:bodyPr>
-          <a:lstStyle/>
-          <a:p>
-            <a:pPr algn="r">
-              <a:spcAft>
-                <a:spcPts val="0"/>
-              </a:spcAft>
-              <a:defRPr sz="680" b="1">
-                <a:solidFill>
-                  <a:srgbClr val="4F6B00"/>
-                </a:solidFill>
-                <a:latin typeface="Inter"/>
-              </a:defRPr>
-            </a:pPr>
-            <a:r>
-              <a:rPr>
-                <a:latin typeface="Inter"/>
-              </a:rPr>
-              <a:t>Illustrative, Gradient Maintained — demo data, not the client's holdings or managers</a:t>
-            </a:r>
-          </a:p>
-        </p:txBody>
-      </p:sp>
-      <p:sp>
-        <p:nvSpPr>
-          <p:cNvPr id="5" name="TextBox 4"/>
-          <p:cNvSpPr txBox="1"/>
-          <p:nvPr/>
-        </p:nvSpPr>
-        <p:spPr>
-          <a:xfrm>
             <a:off x="640080" y="566928"/>
             <a:ext cx="10058400" cy="530352"/>
           </a:xfrm>
@@ -13965,7 +13631,7 @@
       </p:sp>
       <p:sp>
         <p:nvSpPr>
-          <p:cNvPr id="6" name="Rectangle 5"/>
+          <p:cNvPr id="5" name="Rectangle 4"/>
           <p:cNvSpPr/>
           <p:nvPr/>
         </p:nvSpPr>
@@ -14014,7 +13680,7 @@
       </p:sp>
       <p:sp>
         <p:nvSpPr>
-          <p:cNvPr id="7" name="Rectangle 6"/>
+          <p:cNvPr id="6" name="Rectangle 5"/>
           <p:cNvSpPr/>
           <p:nvPr/>
         </p:nvSpPr>
@@ -14063,7 +13729,7 @@
       </p:sp>
       <p:sp>
         <p:nvSpPr>
-          <p:cNvPr id="8" name="TextBox 7"/>
+          <p:cNvPr id="7" name="TextBox 6"/>
           <p:cNvSpPr txBox="1"/>
           <p:nvPr/>
         </p:nvSpPr>
@@ -14105,7 +13771,7 @@
       </p:sp>
       <p:graphicFrame>
         <p:nvGraphicFramePr>
-          <p:cNvPr id="9" name="Table 8"/>
+          <p:cNvPr id="8" name="Table 7"/>
           <p:cNvGraphicFramePr>
             <a:graphicFrameLocks noGrp="1"/>
           </p:cNvGraphicFramePr>
@@ -14254,7 +13920,7 @@
                         <a:rPr>
                           <a:latin typeface="Inter"/>
                         </a:rPr>
-                        <a:t>● available</a:t>
+                        <a:t>● Available</a:t>
                       </a:r>
                     </a:p>
                   </a:txBody>
@@ -14281,7 +13947,7 @@
                         <a:rPr>
                           <a:latin typeface="Inter"/>
                         </a:rPr>
-                        <a:t>2 subjects, completeness complete; as of 2026-10-04 [S2]</a:t>
+                        <a:t>2 subjects, all evaluated; as of 2026-10-04 [S2]</a:t>
                       </a:r>
                     </a:p>
                   </a:txBody>
@@ -14337,7 +14003,7 @@
                         <a:rPr>
                           <a:latin typeface="Inter"/>
                         </a:rPr>
-                        <a:t>● available</a:t>
+                        <a:t>● Available</a:t>
                       </a:r>
                     </a:p>
                   </a:txBody>
@@ -14364,7 +14030,7 @@
                         <a:rPr>
                           <a:latin typeface="Inter"/>
                         </a:rPr>
-                        <a:t>Registered and exempt ADV runs for 2026-10-01 completed 2026-10-04; aligned [S3]</a:t>
+                        <a:t>Form ADV runs for 2026-10-01 completed on 2026-10-04 [S3]</a:t>
                       </a:r>
                     </a:p>
                   </a:txBody>
@@ -14420,7 +14086,7 @@
                         <a:rPr>
                           <a:latin typeface="Inter"/>
                         </a:rPr>
-                        <a:t>● available</a:t>
+                        <a:t>● Available</a:t>
                       </a:r>
                     </a:p>
                   </a:txBody>
@@ -14503,7 +14169,7 @@
                         <a:rPr>
                           <a:latin typeface="Inter"/>
                         </a:rPr>
-                        <a:t>● available</a:t>
+                        <a:t>● Available</a:t>
                       </a:r>
                     </a:p>
                   </a:txBody>
@@ -14586,7 +14252,7 @@
                         <a:rPr>
                           <a:latin typeface="Inter"/>
                         </a:rPr>
-                        <a:t>● unavailable</a:t>
+                        <a:t>● Not available</a:t>
                       </a:r>
                     </a:p>
                   </a:txBody>
@@ -14613,7 +14279,7 @@
                         <a:rPr>
                           <a:latin typeface="Inter"/>
                         </a:rPr>
-                        <a:t>Event publication not ready — absence is not evidence [S5]</a:t>
+                        <a:t>Event feed not yet published, so no events here does not mean none occurred [S5]</a:t>
                       </a:r>
                     </a:p>
                   </a:txBody>
@@ -14669,7 +14335,7 @@
                         <a:rPr>
                           <a:latin typeface="Inter"/>
                         </a:rPr>
-                        <a:t>● available</a:t>
+                        <a:t>● Available</a:t>
                       </a:r>
                     </a:p>
                   </a:txBody>
@@ -14713,7 +14379,7 @@
       </p:graphicFrame>
       <p:sp>
         <p:nvSpPr>
-          <p:cNvPr id="10" name="Rectangle 9"/>
+          <p:cNvPr id="9" name="Rectangle 8"/>
           <p:cNvSpPr/>
           <p:nvPr/>
         </p:nvSpPr>
@@ -14762,7 +14428,7 @@
       </p:sp>
       <p:sp>
         <p:nvSpPr>
-          <p:cNvPr id="11" name="TextBox 10"/>
+          <p:cNvPr id="10" name="TextBox 9"/>
           <p:cNvSpPr txBox="1"/>
           <p:nvPr/>
         </p:nvSpPr>
@@ -14804,7 +14470,7 @@
       </p:sp>
       <p:sp>
         <p:nvSpPr>
-          <p:cNvPr id="12" name="TextBox 11"/>
+          <p:cNvPr id="11" name="TextBox 10"/>
           <p:cNvSpPr txBox="1"/>
           <p:nvPr/>
         </p:nvSpPr>
@@ -14846,7 +14512,7 @@
       </p:sp>
       <p:sp>
         <p:nvSpPr>
-          <p:cNvPr id="13" name="TextBox 12"/>
+          <p:cNvPr id="12" name="TextBox 11"/>
           <p:cNvSpPr txBox="1"/>
           <p:nvPr/>
         </p:nvSpPr>
